--- a/docs/CodeAtlas-AI-Pitch-Deck.pptx
+++ b/docs/CodeAtlas-AI-Pitch-Deck.pptx
@@ -16,6 +16,8 @@
     <p:sldId id="264" r:id="rId16"/>
     <p:sldId id="265" r:id="rId17"/>
     <p:sldId id="266" r:id="rId18"/>
+    <p:sldId id="267" r:id="rId19"/>
+    <p:sldId id="268" r:id="rId20"/>
   </p:sldIdLst>
   <p:sldSz cx="12191695" cy="6858000" type="screen4x3"/>
   <p:notesSz cx="6858000" cy="9144000"/>
@@ -582,7 +584,7 @@
           <a:lstStyle/>
           <a:p>
             <a:r>
-              <a:t>Be upfront: diagnosis quality depends on graph quality, and we mitigate with the Knowledge Gap agent. Privacy: private notes and a no-LLM mode. Roadmap turns mocked connectors live and adds a native FDK sidebar and change-risk assessment.</a:t>
+              <a:t>All figures are working assumptions to be validated with design partners. Pricing is a Marketplace add-on per agent; the free tier drives adoption; the demo video shows a ticket that diagnoses itself.</a:t>
             </a:r>
           </a:p>
         </p:txBody>
@@ -652,6 +654,146 @@
           <a:lstStyle/>
           <a:p>
             <a:r>
+              <a:t>MTTR is the headline metric. Coverage shows the automation is really running. Correct first escalation shows the graph's ownership data is right. Conversion shows willingness to pay.</a:t>
+            </a:r>
+          </a:p>
+        </p:txBody>
+      </p:sp>
+      <p:sp>
+        <p:nvSpPr>
+          <p:cNvPr id="4" name="Slide Number Placeholder 3"/>
+          <p:cNvSpPr>
+            <a:spLocks noGrp="1"/>
+          </p:cNvSpPr>
+          <p:nvPr>
+            <p:ph type="sldNum" idx="5" sz="quarter"/>
+          </p:nvPr>
+        </p:nvSpPr>
+        <p:spPr/>
+      </p:sp>
+    </p:spTree>
+  </p:cSld>
+  <p:clrMapOvr>
+    <a:masterClrMapping/>
+  </p:clrMapOvr>
+</p:notes>
+</file>
+
+<file path=ppt/notesSlides/notesSlide12.xml><?xml version="1.0" encoding="utf-8"?>
+<p:notes xmlns:a="http://schemas.openxmlformats.org/drawingml/2006/main" xmlns:p="http://schemas.openxmlformats.org/presentationml/2006/main" xmlns:r="http://schemas.openxmlformats.org/officeDocument/2006/relationships">
+  <p:cSld>
+    <p:spTree>
+      <p:nvGrpSpPr>
+        <p:cNvPr id="1" name=""/>
+        <p:cNvGrpSpPr/>
+        <p:nvPr/>
+      </p:nvGrpSpPr>
+      <p:grpSpPr>
+        <a:xfrm>
+          <a:off x="0" y="0"/>
+          <a:ext cx="0" cy="0"/>
+          <a:chOff x="0" y="0"/>
+          <a:chExt cx="0" cy="0"/>
+        </a:xfrm>
+      </p:grpSpPr>
+      <p:sp>
+        <p:nvSpPr>
+          <p:cNvPr id="2" name="Slide Image Placeholder 1"/>
+          <p:cNvSpPr>
+            <a:spLocks noGrp="1"/>
+          </p:cNvSpPr>
+          <p:nvPr>
+            <p:ph type="sldImg" idx="2"/>
+          </p:nvPr>
+        </p:nvSpPr>
+        <p:spPr/>
+      </p:sp>
+      <p:sp>
+        <p:nvSpPr>
+          <p:cNvPr id="3" name="Notes Placeholder 2"/>
+          <p:cNvSpPr>
+            <a:spLocks noGrp="1"/>
+          </p:cNvSpPr>
+          <p:nvPr>
+            <p:ph type="body" idx="3" sz="quarter"/>
+          </p:nvPr>
+        </p:nvSpPr>
+        <p:spPr/>
+        <p:txBody>
+          <a:bodyPr/>
+          <a:lstStyle/>
+          <a:p>
+            <a:r>
+              <a:t>Be upfront: diagnosis quality depends on graph quality, and we mitigate with the Knowledge Gap agent. Privacy: private notes and a no-LLM mode. Roadmap turns mocked connectors live and adds a native FDK sidebar and change-risk assessment.</a:t>
+            </a:r>
+          </a:p>
+        </p:txBody>
+      </p:sp>
+      <p:sp>
+        <p:nvSpPr>
+          <p:cNvPr id="4" name="Slide Number Placeholder 3"/>
+          <p:cNvSpPr>
+            <a:spLocks noGrp="1"/>
+          </p:cNvSpPr>
+          <p:nvPr>
+            <p:ph type="sldNum" idx="5" sz="quarter"/>
+          </p:nvPr>
+        </p:nvSpPr>
+        <p:spPr/>
+      </p:sp>
+    </p:spTree>
+  </p:cSld>
+  <p:clrMapOvr>
+    <a:masterClrMapping/>
+  </p:clrMapOvr>
+</p:notes>
+</file>
+
+<file path=ppt/notesSlides/notesSlide13.xml><?xml version="1.0" encoding="utf-8"?>
+<p:notes xmlns:a="http://schemas.openxmlformats.org/drawingml/2006/main" xmlns:p="http://schemas.openxmlformats.org/presentationml/2006/main" xmlns:r="http://schemas.openxmlformats.org/officeDocument/2006/relationships">
+  <p:cSld>
+    <p:spTree>
+      <p:nvGrpSpPr>
+        <p:cNvPr id="1" name=""/>
+        <p:cNvGrpSpPr/>
+        <p:nvPr/>
+      </p:nvGrpSpPr>
+      <p:grpSpPr>
+        <a:xfrm>
+          <a:off x="0" y="0"/>
+          <a:ext cx="0" cy="0"/>
+          <a:chOff x="0" y="0"/>
+          <a:chExt cx="0" cy="0"/>
+        </a:xfrm>
+      </p:grpSpPr>
+      <p:sp>
+        <p:nvSpPr>
+          <p:cNvPr id="2" name="Slide Image Placeholder 1"/>
+          <p:cNvSpPr>
+            <a:spLocks noGrp="1"/>
+          </p:cNvSpPr>
+          <p:nvPr>
+            <p:ph type="sldImg" idx="2"/>
+          </p:nvPr>
+        </p:nvSpPr>
+        <p:spPr/>
+      </p:sp>
+      <p:sp>
+        <p:nvSpPr>
+          <p:cNvPr id="3" name="Notes Placeholder 2"/>
+          <p:cNvSpPr>
+            <a:spLocks noGrp="1"/>
+          </p:cNvSpPr>
+          <p:nvPr>
+            <p:ph type="body" idx="3" sz="quarter"/>
+          </p:nvPr>
+        </p:nvSpPr>
+        <p:spPr/>
+        <p:txBody>
+          <a:bodyPr/>
+          <a:lstStyle/>
+          <a:p>
+            <a:r>
               <a:t>Being upfront about what's mocked builds trust. Freshservice is fully live; the other connectors share the same adapter interface and are Phase 2.</a:t>
             </a:r>
           </a:p>
@@ -1002,7 +1144,7 @@
           <a:lstStyle/>
           <a:p>
             <a:r>
-              <a:t>Switch to http://localhost:8000. Follow the demo script in docs/TGAH-Business-Case.md. Backup: Incident Room with query 'payment gateway connection pool error'.</a:t>
+              <a:t>Frontend pages call the FastAPI backend. The orchestrator routes each request to one agent or a multi-agent pipeline. Agents reason over the Neo4j graph and vector store, GitHub changes and the Gemini LLM. Freshservice Workflow Automator calls in on ticket and change events; CodeAtlas writes back notes and group assignments through REST v2.</a:t>
             </a:r>
           </a:p>
         </p:txBody>
@@ -1072,7 +1214,7 @@
           <a:lstStyle/>
           <a:p>
             <a:r>
-              <a:t>Primary buyer: mid-size software companies running engineering incidents in Freshservice. Secondary: MSPs who constantly face unfamiliar client systems. The value in one line is on the slide.</a:t>
+              <a:t>Freshservice knows what broke, who reported it and who is on call. CodeAtlas knows how the system is wired, what changed and who wrote the code. Three flows are live on our tenant today; CMDB is designed but our trial plan does not include it.</a:t>
             </a:r>
           </a:p>
         </p:txBody>
@@ -1142,7 +1284,7 @@
           <a:lstStyle/>
           <a:p>
             <a:r>
-              <a:t>All figures are working assumptions to be validated with design partners. Pricing is a Marketplace add-on per agent; the free tier drives adoption; the demo video shows a ticket that diagnoses itself.</a:t>
+              <a:t>Create the ticket and the change fresh during the demo so judges see the before/after. Backup if the tunnel fails: the brain icon on the Freshservice Integration page runs the same diagnosis and posts the same note.</a:t>
             </a:r>
           </a:p>
         </p:txBody>
@@ -1212,7 +1354,7 @@
           <a:lstStyle/>
           <a:p>
             <a:r>
-              <a:t>MTTR is the headline metric. Coverage shows the automation is really running. Correct first escalation shows the graph's ownership data is right. Conversion shows willingness to pay.</a:t>
+              <a:t>Primary buyer: mid-size software companies running engineering incidents in Freshservice. Secondary: MSPs who constantly face unfamiliar client systems. The value in one line is on the slide.</a:t>
             </a:r>
           </a:p>
         </p:txBody>
@@ -4495,7 +4637,7 @@
                 </a:solidFill>
                 <a:latin typeface="Helvetica Neue"/>
               </a:rPr>
-              <a:t>WHAT COULD GO WRONG · WHAT'S NEXT</a:t>
+              <a:t>PRICING · GO-TO-MARKET · COST</a:t>
             </a:r>
           </a:p>
         </p:txBody>
@@ -4534,7 +4676,7 @@
                 </a:solidFill>
                 <a:latin typeface="Helvetica Neue"/>
               </a:rPr>
-              <a:t>Risks &amp; roadmap</a:t>
+              <a:t>Business model</a:t>
             </a:r>
           </a:p>
         </p:txBody>
@@ -4580,53 +4722,14 @@
       </p:sp>
       <p:sp>
         <p:nvSpPr>
-          <p:cNvPr id="5" name="TextBox 4"/>
-          <p:cNvSpPr txBox="1"/>
-          <p:nvPr/>
-        </p:nvSpPr>
-        <p:spPr>
-          <a:xfrm>
-            <a:off x="640080" y="1783080"/>
-            <a:ext cx="5486400" cy="365760"/>
-          </a:xfrm>
-          <a:prstGeom prst="rect">
-            <a:avLst/>
-          </a:prstGeom>
-          <a:noFill/>
-        </p:spPr>
-        <p:txBody>
-          <a:bodyPr wrap="square" lIns="0" rIns="0" tIns="0" bIns="0" anchor="t">
-            <a:spAutoFit/>
-          </a:bodyPr>
-          <a:lstStyle/>
-          <a:p>
-            <a:pPr algn="l">
-              <a:lnSpc>
-                <a:spcPct val="115000"/>
-              </a:lnSpc>
-            </a:pPr>
-            <a:r>
-              <a:rPr sz="1200" b="1">
-                <a:solidFill>
-                  <a:srgbClr val="FB7185"/>
-                </a:solidFill>
-                <a:latin typeface="Helvetica Neue"/>
-              </a:rPr>
-              <a:t>RISKS  →  MITIGATION</a:t>
-            </a:r>
-          </a:p>
-        </p:txBody>
-      </p:sp>
-      <p:sp>
-        <p:nvSpPr>
-          <p:cNvPr id="6" name="Rounded Rectangle 5"/>
+          <p:cNvPr id="5" name="Rounded Rectangle 4"/>
           <p:cNvSpPr/>
           <p:nvPr/>
         </p:nvSpPr>
         <p:spPr>
           <a:xfrm>
-            <a:off x="640080" y="2194560"/>
-            <a:ext cx="6035040" cy="822960"/>
+            <a:off x="640080" y="1828800"/>
+            <a:ext cx="3474720" cy="3566160"/>
           </a:xfrm>
           <a:prstGeom prst="roundRect">
             <a:avLst>
@@ -4667,14 +4770,58 @@
       </p:sp>
       <p:sp>
         <p:nvSpPr>
+          <p:cNvPr id="6" name="Rectangle 5"/>
+          <p:cNvSpPr/>
+          <p:nvPr/>
+        </p:nvSpPr>
+        <p:spPr>
+          <a:xfrm>
+            <a:off x="640080" y="2057400"/>
+            <a:ext cx="54864" cy="457200"/>
+          </a:xfrm>
+          <a:prstGeom prst="rect">
+            <a:avLst/>
+          </a:prstGeom>
+          <a:solidFill>
+            <a:srgbClr val="2DD4BF"/>
+          </a:solidFill>
+          <a:ln>
+            <a:noFill/>
+          </a:ln>
+          <a:effectLst/>
+        </p:spPr>
+        <p:style>
+          <a:lnRef idx="1">
+            <a:schemeClr val="accent1"/>
+          </a:lnRef>
+          <a:fillRef idx="3">
+            <a:schemeClr val="accent1"/>
+          </a:fillRef>
+          <a:effectRef idx="2">
+            <a:schemeClr val="accent1"/>
+          </a:effectRef>
+          <a:fontRef idx="minor">
+            <a:schemeClr val="lt1"/>
+          </a:fontRef>
+        </p:style>
+        <p:txBody>
+          <a:bodyPr rtlCol="0" anchor="ctr"/>
+          <a:lstStyle/>
+          <a:p>
+            <a:pPr algn="ctr"/>
+          </a:p>
+        </p:txBody>
+      </p:sp>
+      <p:sp>
+        <p:nvSpPr>
           <p:cNvPr id="7" name="TextBox 6"/>
           <p:cNvSpPr txBox="1"/>
           <p:nvPr/>
         </p:nvSpPr>
         <p:spPr>
           <a:xfrm>
-            <a:off x="868680" y="2313432"/>
-            <a:ext cx="5669280" cy="320040"/>
+            <a:off x="914400" y="2029968"/>
+            <a:ext cx="2971800" cy="548640"/>
           </a:xfrm>
           <a:prstGeom prst="rect">
             <a:avLst/>
@@ -4693,13 +4840,13 @@
               </a:lnSpc>
             </a:pPr>
             <a:r>
-              <a:rPr sz="1400" b="1">
+              <a:rPr sz="1700" b="1">
                 <a:solidFill>
                   <a:srgbClr val="F8FAFC"/>
                 </a:solidFill>
                 <a:latin typeface="Helvetica Neue"/>
               </a:rPr>
-              <a:t>Graph quality drives diagnosis quality</a:t>
+              <a:t>Pricing</a:t>
             </a:r>
           </a:p>
         </p:txBody>
@@ -4712,8 +4859,8 @@
         </p:nvSpPr>
         <p:spPr>
           <a:xfrm>
-            <a:off x="868680" y="2651760"/>
-            <a:ext cx="5669280" cy="320040"/>
+            <a:off x="914400" y="2560320"/>
+            <a:ext cx="2971800" cy="2697480"/>
           </a:xfrm>
           <a:prstGeom prst="rect">
             <a:avLst/>
@@ -4730,15 +4877,72 @@
               <a:lnSpc>
                 <a:spcPct val="115000"/>
               </a:lnSpc>
-            </a:pPr>
-            <a:r>
-              <a:rPr sz="1200" b="0">
+              <a:spcAft>
+                <a:spcPts val="800"/>
+              </a:spcAft>
+            </a:pPr>
+            <a:r>
+              <a:rPr sz="1400" b="0">
                 <a:solidFill>
                   <a:srgbClr val="94A3B8"/>
                 </a:solidFill>
                 <a:latin typeface="Helvetica Neue"/>
               </a:rPr>
-              <a:t>Knowledge Gap agent flags missing owners, runbooks and docs</a:t>
+              <a:t>Marketplace add-on for Freshservice Pro &amp; Enterprise</a:t>
+            </a:r>
+          </a:p>
+          <a:p>
+            <a:pPr algn="l">
+              <a:lnSpc>
+                <a:spcPct val="115000"/>
+              </a:lnSpc>
+              <a:spcAft>
+                <a:spcPts val="800"/>
+              </a:spcAft>
+            </a:pPr>
+            <a:r>
+              <a:rPr sz="1400" b="0">
+                <a:solidFill>
+                  <a:srgbClr val="94A3B8"/>
+                </a:solidFill>
+                <a:latin typeface="Helvetica Neue"/>
+              </a:rPr>
+              <a:t>$8 / agent / month</a:t>
+            </a:r>
+          </a:p>
+          <a:p>
+            <a:pPr algn="l">
+              <a:lnSpc>
+                <a:spcPct val="115000"/>
+              </a:lnSpc>
+              <a:spcAft>
+                <a:spcPts val="800"/>
+              </a:spcAft>
+            </a:pPr>
+            <a:r>
+              <a:rPr sz="1400" b="0">
+                <a:solidFill>
+                  <a:srgbClr val="94A3B8"/>
+                </a:solidFill>
+                <a:latin typeface="Helvetica Neue"/>
+              </a:rPr>
+              <a:t>Free tier: 25 diagnoses / month</a:t>
+            </a:r>
+          </a:p>
+          <a:p>
+            <a:pPr algn="l">
+              <a:lnSpc>
+                <a:spcPct val="115000"/>
+              </a:lnSpc>
+            </a:pPr>
+            <a:r>
+              <a:rPr sz="1400" b="0">
+                <a:solidFill>
+                  <a:srgbClr val="94A3B8"/>
+                </a:solidFill>
+                <a:latin typeface="Helvetica Neue"/>
+              </a:rPr>
+              <a:t>30-day trial of auto-diagnosis</a:t>
             </a:r>
           </a:p>
         </p:txBody>
@@ -4751,8 +4955,8 @@
         </p:nvSpPr>
         <p:spPr>
           <a:xfrm>
-            <a:off x="640080" y="3154680"/>
-            <a:ext cx="6035040" cy="822960"/>
+            <a:off x="4361688" y="1828800"/>
+            <a:ext cx="3474720" cy="3566160"/>
           </a:xfrm>
           <a:prstGeom prst="roundRect">
             <a:avLst>
@@ -4793,14 +4997,58 @@
       </p:sp>
       <p:sp>
         <p:nvSpPr>
-          <p:cNvPr id="10" name="TextBox 9"/>
-          <p:cNvSpPr txBox="1"/>
-          <p:nvPr/>
-        </p:nvSpPr>
-        <p:spPr>
-          <a:xfrm>
-            <a:off x="868680" y="3273552"/>
-            <a:ext cx="5669280" cy="320040"/>
+          <p:cNvPr id="10" name="Rectangle 9"/>
+          <p:cNvSpPr/>
+          <p:nvPr/>
+        </p:nvSpPr>
+        <p:spPr>
+          <a:xfrm>
+            <a:off x="4361688" y="2057400"/>
+            <a:ext cx="54864" cy="457200"/>
+          </a:xfrm>
+          <a:prstGeom prst="rect">
+            <a:avLst/>
+          </a:prstGeom>
+          <a:solidFill>
+            <a:srgbClr val="818CF8"/>
+          </a:solidFill>
+          <a:ln>
+            <a:noFill/>
+          </a:ln>
+          <a:effectLst/>
+        </p:spPr>
+        <p:style>
+          <a:lnRef idx="1">
+            <a:schemeClr val="accent1"/>
+          </a:lnRef>
+          <a:fillRef idx="3">
+            <a:schemeClr val="accent1"/>
+          </a:fillRef>
+          <a:effectRef idx="2">
+            <a:schemeClr val="accent1"/>
+          </a:effectRef>
+          <a:fontRef idx="minor">
+            <a:schemeClr val="lt1"/>
+          </a:fontRef>
+        </p:style>
+        <p:txBody>
+          <a:bodyPr rtlCol="0" anchor="ctr"/>
+          <a:lstStyle/>
+          <a:p>
+            <a:pPr algn="ctr"/>
+          </a:p>
+        </p:txBody>
+      </p:sp>
+      <p:sp>
+        <p:nvSpPr>
+          <p:cNvPr id="11" name="TextBox 10"/>
+          <p:cNvSpPr txBox="1"/>
+          <p:nvPr/>
+        </p:nvSpPr>
+        <p:spPr>
+          <a:xfrm>
+            <a:off x="4636008" y="2029968"/>
+            <a:ext cx="2971800" cy="548640"/>
           </a:xfrm>
           <a:prstGeom prst="rect">
             <a:avLst/>
@@ -4819,27 +5067,27 @@
               </a:lnSpc>
             </a:pPr>
             <a:r>
-              <a:rPr sz="1400" b="1">
+              <a:rPr sz="1700" b="1">
                 <a:solidFill>
                   <a:srgbClr val="F8FAFC"/>
                 </a:solidFill>
                 <a:latin typeface="Helvetica Neue"/>
               </a:rPr>
-              <a:t>Trust &amp; privacy of ticket data</a:t>
-            </a:r>
-          </a:p>
-        </p:txBody>
-      </p:sp>
-      <p:sp>
-        <p:nvSpPr>
-          <p:cNvPr id="11" name="TextBox 10"/>
-          <p:cNvSpPr txBox="1"/>
-          <p:nvPr/>
-        </p:nvSpPr>
-        <p:spPr>
-          <a:xfrm>
-            <a:off x="868680" y="3611880"/>
-            <a:ext cx="5669280" cy="320040"/>
+              <a:t>Go-to-market</a:t>
+            </a:r>
+          </a:p>
+        </p:txBody>
+      </p:sp>
+      <p:sp>
+        <p:nvSpPr>
+          <p:cNvPr id="12" name="TextBox 11"/>
+          <p:cNvSpPr txBox="1"/>
+          <p:nvPr/>
+        </p:nvSpPr>
+        <p:spPr>
+          <a:xfrm>
+            <a:off x="4636008" y="2560320"/>
+            <a:ext cx="2971800" cy="2697480"/>
           </a:xfrm>
           <a:prstGeom prst="rect">
             <a:avLst/>
@@ -4856,29 +5104,86 @@
               <a:lnSpc>
                 <a:spcPct val="115000"/>
               </a:lnSpc>
-            </a:pPr>
-            <a:r>
-              <a:rPr sz="1200" b="0">
+              <a:spcAft>
+                <a:spcPts val="800"/>
+              </a:spcAft>
+            </a:pPr>
+            <a:r>
+              <a:rPr sz="1400" b="0">
                 <a:solidFill>
                   <a:srgbClr val="94A3B8"/>
                 </a:solidFill>
                 <a:latin typeface="Helvetica Neue"/>
               </a:rPr>
-              <a:t>Private notes only; rule-based mode needs no LLM</a:t>
-            </a:r>
-          </a:p>
-        </p:txBody>
-      </p:sp>
-      <p:sp>
-        <p:nvSpPr>
-          <p:cNvPr id="12" name="Rounded Rectangle 11"/>
+              <a:t>Freshworks Marketplace listing + in-product banner</a:t>
+            </a:r>
+          </a:p>
+          <a:p>
+            <a:pPr algn="l">
+              <a:lnSpc>
+                <a:spcPct val="115000"/>
+              </a:lnSpc>
+              <a:spcAft>
+                <a:spcPts val="800"/>
+              </a:spcAft>
+            </a:pPr>
+            <a:r>
+              <a:rPr sz="1400" b="0">
+                <a:solidFill>
+                  <a:srgbClr val="94A3B8"/>
+                </a:solidFill>
+                <a:latin typeface="Helvetica Neue"/>
+              </a:rPr>
+              <a:t>5-minute onboarding: API key → Sync</a:t>
+            </a:r>
+          </a:p>
+          <a:p>
+            <a:pPr algn="l">
+              <a:lnSpc>
+                <a:spcPct val="115000"/>
+              </a:lnSpc>
+              <a:spcAft>
+                <a:spcPts val="800"/>
+              </a:spcAft>
+            </a:pPr>
+            <a:r>
+              <a:rPr sz="1400" b="0">
+                <a:solidFill>
+                  <a:srgbClr val="94A3B8"/>
+                </a:solidFill>
+                <a:latin typeface="Helvetica Neue"/>
+              </a:rPr>
+              <a:t>Email trial offer to Pro/Enterprise admins</a:t>
+            </a:r>
+          </a:p>
+          <a:p>
+            <a:pPr algn="l">
+              <a:lnSpc>
+                <a:spcPct val="115000"/>
+              </a:lnSpc>
+            </a:pPr>
+            <a:r>
+              <a:rPr sz="1400" b="0">
+                <a:solidFill>
+                  <a:srgbClr val="94A3B8"/>
+                </a:solidFill>
+                <a:latin typeface="Helvetica Neue"/>
+              </a:rPr>
+              <a:t>3–5 design partners for case studies</a:t>
+            </a:r>
+          </a:p>
+        </p:txBody>
+      </p:sp>
+      <p:sp>
+        <p:nvSpPr>
+          <p:cNvPr id="13" name="Rounded Rectangle 12"/>
           <p:cNvSpPr/>
           <p:nvPr/>
         </p:nvSpPr>
         <p:spPr>
           <a:xfrm>
-            <a:off x="640080" y="4114800"/>
-            <a:ext cx="6035040" cy="822960"/>
+            <a:off x="8083296" y="1828800"/>
+            <a:ext cx="3474720" cy="3566160"/>
           </a:xfrm>
           <a:prstGeom prst="roundRect">
             <a:avLst>
@@ -4919,105 +5224,23 @@
       </p:sp>
       <p:sp>
         <p:nvSpPr>
-          <p:cNvPr id="13" name="TextBox 12"/>
-          <p:cNvSpPr txBox="1"/>
-          <p:nvPr/>
-        </p:nvSpPr>
-        <p:spPr>
-          <a:xfrm>
-            <a:off x="868680" y="4233672"/>
-            <a:ext cx="5669280" cy="320040"/>
-          </a:xfrm>
-          <a:prstGeom prst="rect">
-            <a:avLst/>
-          </a:prstGeom>
-          <a:noFill/>
-        </p:spPr>
-        <p:txBody>
-          <a:bodyPr wrap="square" lIns="0" rIns="0" tIns="0" bIns="0" anchor="t">
-            <a:spAutoFit/>
-          </a:bodyPr>
-          <a:lstStyle/>
-          <a:p>
-            <a:pPr algn="l">
-              <a:lnSpc>
-                <a:spcPct val="115000"/>
-              </a:lnSpc>
-            </a:pPr>
-            <a:r>
-              <a:rPr sz="1400" b="1">
-                <a:solidFill>
-                  <a:srgbClr val="F8FAFC"/>
-                </a:solidFill>
-                <a:latin typeface="Helvetica Neue"/>
-              </a:rPr>
-              <a:t>Willingness to pay beyond built-in AI</a:t>
-            </a:r>
-          </a:p>
-        </p:txBody>
-      </p:sp>
-      <p:sp>
-        <p:nvSpPr>
-          <p:cNvPr id="14" name="TextBox 13"/>
-          <p:cNvSpPr txBox="1"/>
-          <p:nvPr/>
-        </p:nvSpPr>
-        <p:spPr>
-          <a:xfrm>
-            <a:off x="868680" y="4572000"/>
-            <a:ext cx="5669280" cy="320040"/>
-          </a:xfrm>
-          <a:prstGeom prst="rect">
-            <a:avLst/>
-          </a:prstGeom>
-          <a:noFill/>
-        </p:spPr>
-        <p:txBody>
-          <a:bodyPr wrap="square" lIns="0" rIns="0" tIns="0" bIns="0" anchor="t">
-            <a:spAutoFit/>
-          </a:bodyPr>
-          <a:lstStyle/>
-          <a:p>
-            <a:pPr algn="l">
-              <a:lnSpc>
-                <a:spcPct val="115000"/>
-              </a:lnSpc>
-            </a:pPr>
-            <a:r>
-              <a:rPr sz="1200" b="0">
-                <a:solidFill>
-                  <a:srgbClr val="94A3B8"/>
-                </a:solidFill>
-                <a:latin typeface="Helvetica Neue"/>
-              </a:rPr>
-              <a:t>Validate with design partners before pricing is final</a:t>
-            </a:r>
-          </a:p>
-        </p:txBody>
-      </p:sp>
-      <p:sp>
-        <p:nvSpPr>
-          <p:cNvPr id="15" name="Rounded Rectangle 14"/>
+          <p:cNvPr id="14" name="Rectangle 13"/>
           <p:cNvSpPr/>
           <p:nvPr/>
         </p:nvSpPr>
         <p:spPr>
           <a:xfrm>
-            <a:off x="640080" y="5074920"/>
-            <a:ext cx="6035040" cy="822960"/>
-          </a:xfrm>
-          <a:prstGeom prst="roundRect">
-            <a:avLst>
-              <a:gd name="adj" fmla="val 6000"/>
-            </a:avLst>
+            <a:off x="8083296" y="2057400"/>
+            <a:ext cx="54864" cy="457200"/>
+          </a:xfrm>
+          <a:prstGeom prst="rect">
+            <a:avLst/>
           </a:prstGeom>
           <a:solidFill>
-            <a:srgbClr val="151E32"/>
+            <a:srgbClr val="FBBF24"/>
           </a:solidFill>
-          <a:ln w="12700">
-            <a:solidFill>
-              <a:srgbClr val="2A3650"/>
-            </a:solidFill>
+          <a:ln>
+            <a:noFill/>
           </a:ln>
           <a:effectLst/>
         </p:spPr>
@@ -5045,14 +5268,53 @@
       </p:sp>
       <p:sp>
         <p:nvSpPr>
+          <p:cNvPr id="15" name="TextBox 14"/>
+          <p:cNvSpPr txBox="1"/>
+          <p:nvPr/>
+        </p:nvSpPr>
+        <p:spPr>
+          <a:xfrm>
+            <a:off x="8357616" y="2029968"/>
+            <a:ext cx="2971800" cy="548640"/>
+          </a:xfrm>
+          <a:prstGeom prst="rect">
+            <a:avLst/>
+          </a:prstGeom>
+          <a:noFill/>
+        </p:spPr>
+        <p:txBody>
+          <a:bodyPr wrap="square" lIns="0" rIns="0" tIns="0" bIns="0" anchor="t">
+            <a:spAutoFit/>
+          </a:bodyPr>
+          <a:lstStyle/>
+          <a:p>
+            <a:pPr algn="l">
+              <a:lnSpc>
+                <a:spcPct val="115000"/>
+              </a:lnSpc>
+            </a:pPr>
+            <a:r>
+              <a:rPr sz="1700" b="1">
+                <a:solidFill>
+                  <a:srgbClr val="F8FAFC"/>
+                </a:solidFill>
+                <a:latin typeface="Helvetica Neue"/>
+              </a:rPr>
+              <a:t>Cost to MVP</a:t>
+            </a:r>
+          </a:p>
+        </p:txBody>
+      </p:sp>
+      <p:sp>
+        <p:nvSpPr>
           <p:cNvPr id="16" name="TextBox 15"/>
           <p:cNvSpPr txBox="1"/>
           <p:nvPr/>
         </p:nvSpPr>
         <p:spPr>
           <a:xfrm>
-            <a:off x="868680" y="5193792"/>
-            <a:ext cx="5669280" cy="320040"/>
+            <a:off x="8357616" y="2560320"/>
+            <a:ext cx="2971800" cy="2697480"/>
           </a:xfrm>
           <a:prstGeom prst="rect">
             <a:avLst/>
@@ -5069,119 +5331,98 @@
               <a:lnSpc>
                 <a:spcPct val="115000"/>
               </a:lnSpc>
-            </a:pPr>
-            <a:r>
-              <a:rPr sz="1400" b="1">
-                <a:solidFill>
-                  <a:srgbClr val="F8FAFC"/>
-                </a:solidFill>
-                <a:latin typeface="Helvetica Neue"/>
-              </a:rPr>
-              <a:t>API rate limits &amp; plan restrictions</a:t>
-            </a:r>
-          </a:p>
-        </p:txBody>
-      </p:sp>
-      <p:sp>
-        <p:nvSpPr>
-          <p:cNvPr id="17" name="TextBox 16"/>
-          <p:cNvSpPr txBox="1"/>
-          <p:nvPr/>
-        </p:nvSpPr>
-        <p:spPr>
-          <a:xfrm>
-            <a:off x="868680" y="5532120"/>
-            <a:ext cx="5669280" cy="320040"/>
-          </a:xfrm>
-          <a:prstGeom prst="rect">
-            <a:avLst/>
-          </a:prstGeom>
-          <a:noFill/>
-        </p:spPr>
-        <p:txBody>
-          <a:bodyPr wrap="square" lIns="0" rIns="0" tIns="0" bIns="0" anchor="t">
-            <a:spAutoFit/>
-          </a:bodyPr>
-          <a:lstStyle/>
+              <a:spcAft>
+                <a:spcPts val="800"/>
+              </a:spcAft>
+            </a:pPr>
+            <a:r>
+              <a:rPr sz="1400" b="0">
+                <a:solidFill>
+                  <a:srgbClr val="94A3B8"/>
+                </a:solidFill>
+                <a:latin typeface="Helvetica Neue"/>
+              </a:rPr>
+              <a:t>3 engineers + part-time designer &amp; PM</a:t>
+            </a:r>
+          </a:p>
           <a:p>
             <a:pPr algn="l">
               <a:lnSpc>
                 <a:spcPct val="115000"/>
               </a:lnSpc>
-            </a:pPr>
-            <a:r>
-              <a:rPr sz="1200" b="0">
+              <a:spcAft>
+                <a:spcPts val="800"/>
+              </a:spcAft>
+            </a:pPr>
+            <a:r>
+              <a:rPr sz="1400" b="0">
                 <a:solidFill>
                   <a:srgbClr val="94A3B8"/>
                 </a:solidFill>
                 <a:latin typeface="Helvetica Neue"/>
               </a:rPr>
-              <a:t>Graceful degradation (e.g. CMDB needs higher plans)</a:t>
-            </a:r>
-          </a:p>
-        </p:txBody>
-      </p:sp>
-      <p:sp>
-        <p:nvSpPr>
-          <p:cNvPr id="18" name="TextBox 17"/>
-          <p:cNvSpPr txBox="1"/>
-          <p:nvPr/>
-        </p:nvSpPr>
-        <p:spPr>
-          <a:xfrm>
-            <a:off x="7040880" y="1783080"/>
-            <a:ext cx="4572000" cy="365760"/>
-          </a:xfrm>
-          <a:prstGeom prst="rect">
-            <a:avLst/>
-          </a:prstGeom>
-          <a:noFill/>
-        </p:spPr>
-        <p:txBody>
-          <a:bodyPr wrap="square" lIns="0" rIns="0" tIns="0" bIns="0" anchor="t">
-            <a:spAutoFit/>
-          </a:bodyPr>
-          <a:lstStyle/>
+              <a:t>~3 months to production MVP</a:t>
+            </a:r>
+          </a:p>
           <a:p>
             <a:pPr algn="l">
               <a:lnSpc>
                 <a:spcPct val="115000"/>
               </a:lnSpc>
-            </a:pPr>
-            <a:r>
-              <a:rPr sz="1200" b="1">
-                <a:solidFill>
-                  <a:srgbClr val="2DD4BF"/>
-                </a:solidFill>
-                <a:latin typeface="Helvetica Neue"/>
-              </a:rPr>
-              <a:t>PHASE 2 ROADMAP</a:t>
-            </a:r>
-          </a:p>
-        </p:txBody>
-      </p:sp>
-      <p:sp>
-        <p:nvSpPr>
-          <p:cNvPr id="19" name="Rounded Rectangle 18"/>
+              <a:spcAft>
+                <a:spcPts val="800"/>
+              </a:spcAft>
+            </a:pPr>
+            <a:r>
+              <a:rPr sz="1400" b="0">
+                <a:solidFill>
+                  <a:srgbClr val="94A3B8"/>
+                </a:solidFill>
+                <a:latin typeface="Helvetica Neue"/>
+              </a:rPr>
+              <a:t>~$90–110K (salaries, LLM, hosting)</a:t>
+            </a:r>
+          </a:p>
+          <a:p>
+            <a:pPr algn="l">
+              <a:lnSpc>
+                <a:spcPct val="115000"/>
+              </a:lnSpc>
+            </a:pPr>
+            <a:r>
+              <a:rPr sz="1400" b="0">
+                <a:solidFill>
+                  <a:srgbClr val="94A3B8"/>
+                </a:solidFill>
+                <a:latin typeface="Helvetica Neue"/>
+              </a:rPr>
+              <a:t>Illustrative ARR: 100 customers × 30 agents × $8 × 12 ≈ $288K</a:t>
+            </a:r>
+          </a:p>
+        </p:txBody>
+      </p:sp>
+      <p:sp>
+        <p:nvSpPr>
+          <p:cNvPr id="17" name="Rounded Rectangle 16"/>
           <p:cNvSpPr/>
           <p:nvPr/>
         </p:nvSpPr>
         <p:spPr>
           <a:xfrm>
-            <a:off x="7040880" y="2194560"/>
-            <a:ext cx="4480560" cy="3703320"/>
+            <a:off x="640080" y="5715000"/>
+            <a:ext cx="1371600" cy="274320"/>
           </a:xfrm>
           <a:prstGeom prst="roundRect">
             <a:avLst>
-              <a:gd name="adj" fmla="val 6000"/>
+              <a:gd name="adj" fmla="val 50000"/>
             </a:avLst>
           </a:prstGeom>
           <a:solidFill>
-            <a:srgbClr val="151E32"/>
+            <a:srgbClr val="0B1120"/>
           </a:solidFill>
           <a:ln w="12700">
             <a:solidFill>
-              <a:srgbClr val="2A3650"/>
+              <a:srgbClr val="FBBF24"/>
             </a:solidFill>
           </a:ln>
           <a:effectLst/>
@@ -5210,58 +5451,14 @@
       </p:sp>
       <p:sp>
         <p:nvSpPr>
-          <p:cNvPr id="20" name="Oval 19"/>
-          <p:cNvSpPr/>
-          <p:nvPr/>
-        </p:nvSpPr>
-        <p:spPr>
-          <a:xfrm>
-            <a:off x="7269480" y="2496312"/>
-            <a:ext cx="146304" cy="146304"/>
-          </a:xfrm>
-          <a:prstGeom prst="ellipse">
-            <a:avLst/>
-          </a:prstGeom>
-          <a:solidFill>
-            <a:srgbClr val="2DD4BF"/>
-          </a:solidFill>
-          <a:ln>
-            <a:noFill/>
-          </a:ln>
-          <a:effectLst/>
-        </p:spPr>
-        <p:style>
-          <a:lnRef idx="1">
-            <a:schemeClr val="accent1"/>
-          </a:lnRef>
-          <a:fillRef idx="3">
-            <a:schemeClr val="accent1"/>
-          </a:fillRef>
-          <a:effectRef idx="2">
-            <a:schemeClr val="accent1"/>
-          </a:effectRef>
-          <a:fontRef idx="minor">
-            <a:schemeClr val="lt1"/>
-          </a:fontRef>
-        </p:style>
-        <p:txBody>
-          <a:bodyPr rtlCol="0" anchor="ctr"/>
-          <a:lstStyle/>
-          <a:p>
-            <a:pPr algn="ctr"/>
-          </a:p>
-        </p:txBody>
-      </p:sp>
-      <p:sp>
-        <p:nvSpPr>
-          <p:cNvPr id="21" name="TextBox 20"/>
-          <p:cNvSpPr txBox="1"/>
-          <p:nvPr/>
-        </p:nvSpPr>
-        <p:spPr>
-          <a:xfrm>
-            <a:off x="7589520" y="2423160"/>
-            <a:ext cx="3749039" cy="640080"/>
+          <p:cNvPr id="18" name="TextBox 17"/>
+          <p:cNvSpPr txBox="1"/>
+          <p:nvPr/>
+        </p:nvSpPr>
+        <p:spPr>
+          <a:xfrm>
+            <a:off x="640080" y="5756148"/>
+            <a:ext cx="1371600" cy="228600"/>
           </a:xfrm>
           <a:prstGeom prst="rect">
             <a:avLst/>
@@ -5274,351 +5471,58 @@
           </a:bodyPr>
           <a:lstStyle/>
           <a:p>
+            <a:pPr algn="ctr">
+              <a:lnSpc>
+                <a:spcPct val="115000"/>
+              </a:lnSpc>
+            </a:pPr>
+            <a:r>
+              <a:rPr sz="1000" b="1">
+                <a:solidFill>
+                  <a:srgbClr val="FBBF24"/>
+                </a:solidFill>
+                <a:latin typeface="Helvetica Neue"/>
+              </a:rPr>
+              <a:t>ASSUMPTIONS</a:t>
+            </a:r>
+          </a:p>
+        </p:txBody>
+      </p:sp>
+      <p:sp>
+        <p:nvSpPr>
+          <p:cNvPr id="19" name="TextBox 18"/>
+          <p:cNvSpPr txBox="1"/>
+          <p:nvPr/>
+        </p:nvSpPr>
+        <p:spPr>
+          <a:xfrm>
+            <a:off x="2148840" y="5751576"/>
+            <a:ext cx="9144000" cy="320040"/>
+          </a:xfrm>
+          <a:prstGeom prst="rect">
+            <a:avLst/>
+          </a:prstGeom>
+          <a:noFill/>
+        </p:spPr>
+        <p:txBody>
+          <a:bodyPr wrap="square" lIns="0" rIns="0" tIns="0" bIns="0" anchor="t">
+            <a:spAutoFit/>
+          </a:bodyPr>
+          <a:lstStyle/>
+          <a:p>
             <a:pPr algn="l">
               <a:lnSpc>
                 <a:spcPct val="115000"/>
               </a:lnSpc>
             </a:pPr>
             <a:r>
-              <a:rPr sz="1400" b="0">
-                <a:solidFill>
-                  <a:srgbClr val="F8FAFC"/>
-                </a:solidFill>
-                <a:latin typeface="Helvetica Neue"/>
-              </a:rPr>
-              <a:t>Live GitHub · Jira · Confluence · Slack connectors</a:t>
-            </a:r>
-          </a:p>
-        </p:txBody>
-      </p:sp>
-      <p:sp>
-        <p:nvSpPr>
-          <p:cNvPr id="22" name="Oval 21"/>
-          <p:cNvSpPr/>
-          <p:nvPr/>
-        </p:nvSpPr>
-        <p:spPr>
-          <a:xfrm>
-            <a:off x="7269480" y="3182112"/>
-            <a:ext cx="146304" cy="146304"/>
-          </a:xfrm>
-          <a:prstGeom prst="ellipse">
-            <a:avLst/>
-          </a:prstGeom>
-          <a:solidFill>
-            <a:srgbClr val="2DD4BF"/>
-          </a:solidFill>
-          <a:ln>
-            <a:noFill/>
-          </a:ln>
-          <a:effectLst/>
-        </p:spPr>
-        <p:style>
-          <a:lnRef idx="1">
-            <a:schemeClr val="accent1"/>
-          </a:lnRef>
-          <a:fillRef idx="3">
-            <a:schemeClr val="accent1"/>
-          </a:fillRef>
-          <a:effectRef idx="2">
-            <a:schemeClr val="accent1"/>
-          </a:effectRef>
-          <a:fontRef idx="minor">
-            <a:schemeClr val="lt1"/>
-          </a:fontRef>
-        </p:style>
-        <p:txBody>
-          <a:bodyPr rtlCol="0" anchor="ctr"/>
-          <a:lstStyle/>
-          <a:p>
-            <a:pPr algn="ctr"/>
-          </a:p>
-        </p:txBody>
-      </p:sp>
-      <p:sp>
-        <p:nvSpPr>
-          <p:cNvPr id="23" name="TextBox 22"/>
-          <p:cNvSpPr txBox="1"/>
-          <p:nvPr/>
-        </p:nvSpPr>
-        <p:spPr>
-          <a:xfrm>
-            <a:off x="7589520" y="3108960"/>
-            <a:ext cx="3749039" cy="640080"/>
-          </a:xfrm>
-          <a:prstGeom prst="rect">
-            <a:avLst/>
-          </a:prstGeom>
-          <a:noFill/>
-        </p:spPr>
-        <p:txBody>
-          <a:bodyPr wrap="square" lIns="0" rIns="0" tIns="0" bIns="0" anchor="t">
-            <a:spAutoFit/>
-          </a:bodyPr>
-          <a:lstStyle/>
-          <a:p>
-            <a:pPr algn="l">
-              <a:lnSpc>
-                <a:spcPct val="115000"/>
-              </a:lnSpc>
-            </a:pPr>
-            <a:r>
-              <a:rPr sz="1400" b="0">
-                <a:solidFill>
-                  <a:srgbClr val="F8FAFC"/>
-                </a:solidFill>
-                <a:latin typeface="Helvetica Neue"/>
-              </a:rPr>
-              <a:t>Freshdesk: link customer tickets to engineering incidents</a:t>
-            </a:r>
-          </a:p>
-        </p:txBody>
-      </p:sp>
-      <p:sp>
-        <p:nvSpPr>
-          <p:cNvPr id="24" name="Oval 23"/>
-          <p:cNvSpPr/>
-          <p:nvPr/>
-        </p:nvSpPr>
-        <p:spPr>
-          <a:xfrm>
-            <a:off x="7269480" y="3867912"/>
-            <a:ext cx="146304" cy="146304"/>
-          </a:xfrm>
-          <a:prstGeom prst="ellipse">
-            <a:avLst/>
-          </a:prstGeom>
-          <a:solidFill>
-            <a:srgbClr val="2DD4BF"/>
-          </a:solidFill>
-          <a:ln>
-            <a:noFill/>
-          </a:ln>
-          <a:effectLst/>
-        </p:spPr>
-        <p:style>
-          <a:lnRef idx="1">
-            <a:schemeClr val="accent1"/>
-          </a:lnRef>
-          <a:fillRef idx="3">
-            <a:schemeClr val="accent1"/>
-          </a:fillRef>
-          <a:effectRef idx="2">
-            <a:schemeClr val="accent1"/>
-          </a:effectRef>
-          <a:fontRef idx="minor">
-            <a:schemeClr val="lt1"/>
-          </a:fontRef>
-        </p:style>
-        <p:txBody>
-          <a:bodyPr rtlCol="0" anchor="ctr"/>
-          <a:lstStyle/>
-          <a:p>
-            <a:pPr algn="ctr"/>
-          </a:p>
-        </p:txBody>
-      </p:sp>
-      <p:sp>
-        <p:nvSpPr>
-          <p:cNvPr id="25" name="TextBox 24"/>
-          <p:cNvSpPr txBox="1"/>
-          <p:nvPr/>
-        </p:nvSpPr>
-        <p:spPr>
-          <a:xfrm>
-            <a:off x="7589520" y="3794760"/>
-            <a:ext cx="3749039" cy="640080"/>
-          </a:xfrm>
-          <a:prstGeom prst="rect">
-            <a:avLst/>
-          </a:prstGeom>
-          <a:noFill/>
-        </p:spPr>
-        <p:txBody>
-          <a:bodyPr wrap="square" lIns="0" rIns="0" tIns="0" bIns="0" anchor="t">
-            <a:spAutoFit/>
-          </a:bodyPr>
-          <a:lstStyle/>
-          <a:p>
-            <a:pPr algn="l">
-              <a:lnSpc>
-                <a:spcPct val="115000"/>
-              </a:lnSpc>
-            </a:pPr>
-            <a:r>
-              <a:rPr sz="1400" b="0">
-                <a:solidFill>
-                  <a:srgbClr val="F8FAFC"/>
-                </a:solidFill>
-                <a:latin typeface="Helvetica Neue"/>
-              </a:rPr>
-              <a:t>Native FDK sidebar app on the Freshservice ticket</a:t>
-            </a:r>
-          </a:p>
-        </p:txBody>
-      </p:sp>
-      <p:sp>
-        <p:nvSpPr>
-          <p:cNvPr id="26" name="Oval 25"/>
-          <p:cNvSpPr/>
-          <p:nvPr/>
-        </p:nvSpPr>
-        <p:spPr>
-          <a:xfrm>
-            <a:off x="7269480" y="4553712"/>
-            <a:ext cx="146304" cy="146304"/>
-          </a:xfrm>
-          <a:prstGeom prst="ellipse">
-            <a:avLst/>
-          </a:prstGeom>
-          <a:solidFill>
-            <a:srgbClr val="2DD4BF"/>
-          </a:solidFill>
-          <a:ln>
-            <a:noFill/>
-          </a:ln>
-          <a:effectLst/>
-        </p:spPr>
-        <p:style>
-          <a:lnRef idx="1">
-            <a:schemeClr val="accent1"/>
-          </a:lnRef>
-          <a:fillRef idx="3">
-            <a:schemeClr val="accent1"/>
-          </a:fillRef>
-          <a:effectRef idx="2">
-            <a:schemeClr val="accent1"/>
-          </a:effectRef>
-          <a:fontRef idx="minor">
-            <a:schemeClr val="lt1"/>
-          </a:fontRef>
-        </p:style>
-        <p:txBody>
-          <a:bodyPr rtlCol="0" anchor="ctr"/>
-          <a:lstStyle/>
-          <a:p>
-            <a:pPr algn="ctr"/>
-          </a:p>
-        </p:txBody>
-      </p:sp>
-      <p:sp>
-        <p:nvSpPr>
-          <p:cNvPr id="27" name="TextBox 26"/>
-          <p:cNvSpPr txBox="1"/>
-          <p:nvPr/>
-        </p:nvSpPr>
-        <p:spPr>
-          <a:xfrm>
-            <a:off x="7589520" y="4480560"/>
-            <a:ext cx="3749039" cy="640080"/>
-          </a:xfrm>
-          <a:prstGeom prst="rect">
-            <a:avLst/>
-          </a:prstGeom>
-          <a:noFill/>
-        </p:spPr>
-        <p:txBody>
-          <a:bodyPr wrap="square" lIns="0" rIns="0" tIns="0" bIns="0" anchor="t">
-            <a:spAutoFit/>
-          </a:bodyPr>
-          <a:lstStyle/>
-          <a:p>
-            <a:pPr algn="l">
-              <a:lnSpc>
-                <a:spcPct val="115000"/>
-              </a:lnSpc>
-            </a:pPr>
-            <a:r>
-              <a:rPr sz="1400" b="0">
-                <a:solidFill>
-                  <a:srgbClr val="F8FAFC"/>
-                </a:solidFill>
-                <a:latin typeface="Helvetica Neue"/>
-              </a:rPr>
-              <a:t>Change risk &amp; blast radius for CAB approvals</a:t>
-            </a:r>
-          </a:p>
-        </p:txBody>
-      </p:sp>
-      <p:sp>
-        <p:nvSpPr>
-          <p:cNvPr id="28" name="Oval 27"/>
-          <p:cNvSpPr/>
-          <p:nvPr/>
-        </p:nvSpPr>
-        <p:spPr>
-          <a:xfrm>
-            <a:off x="7269480" y="5239512"/>
-            <a:ext cx="146304" cy="146304"/>
-          </a:xfrm>
-          <a:prstGeom prst="ellipse">
-            <a:avLst/>
-          </a:prstGeom>
-          <a:solidFill>
-            <a:srgbClr val="2DD4BF"/>
-          </a:solidFill>
-          <a:ln>
-            <a:noFill/>
-          </a:ln>
-          <a:effectLst/>
-        </p:spPr>
-        <p:style>
-          <a:lnRef idx="1">
-            <a:schemeClr val="accent1"/>
-          </a:lnRef>
-          <a:fillRef idx="3">
-            <a:schemeClr val="accent1"/>
-          </a:fillRef>
-          <a:effectRef idx="2">
-            <a:schemeClr val="accent1"/>
-          </a:effectRef>
-          <a:fontRef idx="minor">
-            <a:schemeClr val="lt1"/>
-          </a:fontRef>
-        </p:style>
-        <p:txBody>
-          <a:bodyPr rtlCol="0" anchor="ctr"/>
-          <a:lstStyle/>
-          <a:p>
-            <a:pPr algn="ctr"/>
-          </a:p>
-        </p:txBody>
-      </p:sp>
-      <p:sp>
-        <p:nvSpPr>
-          <p:cNvPr id="29" name="TextBox 28"/>
-          <p:cNvSpPr txBox="1"/>
-          <p:nvPr/>
-        </p:nvSpPr>
-        <p:spPr>
-          <a:xfrm>
-            <a:off x="7589520" y="5166360"/>
-            <a:ext cx="3749039" cy="640080"/>
-          </a:xfrm>
-          <a:prstGeom prst="rect">
-            <a:avLst/>
-          </a:prstGeom>
-          <a:noFill/>
-        </p:spPr>
-        <p:txBody>
-          <a:bodyPr wrap="square" lIns="0" rIns="0" tIns="0" bIns="0" anchor="t">
-            <a:spAutoFit/>
-          </a:bodyPr>
-          <a:lstStyle/>
-          <a:p>
-            <a:pPr algn="l">
-              <a:lnSpc>
-                <a:spcPct val="115000"/>
-              </a:lnSpc>
-            </a:pPr>
-            <a:r>
-              <a:rPr sz="1400" b="0">
-                <a:solidFill>
-                  <a:srgbClr val="F8FAFC"/>
-                </a:solidFill>
-                <a:latin typeface="Helvetica Neue"/>
-              </a:rPr>
-              <a:t>Graph learns from every resolved ticket</a:t>
+              <a:rPr sz="1200" b="0">
+                <a:solidFill>
+                  <a:srgbClr val="94A3B8"/>
+                </a:solidFill>
+                <a:latin typeface="Helvetica Neue"/>
+              </a:rPr>
+              <a:t>Prices, costs and ARR are working estimates, to be validated with design partners.</a:t>
             </a:r>
           </a:p>
         </p:txBody>
@@ -5683,7 +5587,7 @@
                 </a:solidFill>
                 <a:latin typeface="Helvetica Neue"/>
               </a:rPr>
-              <a:t>FOR REVIEWER Q&amp;A</a:t>
+              <a:t>SUCCESS METRICS · 6 MONTHS AFTER LAUNCH</a:t>
             </a:r>
           </a:p>
         </p:txBody>
@@ -5722,7 +5626,7 @@
                 </a:solidFill>
                 <a:latin typeface="Helvetica Neue"/>
               </a:rPr>
-              <a:t>Appendix: what's built vs. planned</a:t>
+              <a:t>How we'll know it worked</a:t>
             </a:r>
           </a:p>
         </p:txBody>
@@ -5774,8 +5678,8 @@
         </p:nvSpPr>
         <p:spPr>
           <a:xfrm>
-            <a:off x="640080" y="1828800"/>
-            <a:ext cx="10881360" cy="594360"/>
+            <a:off x="640080" y="2011680"/>
+            <a:ext cx="2560320" cy="2926080"/>
           </a:xfrm>
           <a:prstGeom prst="roundRect">
             <a:avLst>
@@ -5816,13 +5720,2100 @@
       </p:sp>
       <p:sp>
         <p:nvSpPr>
+          <p:cNvPr id="6" name="TextBox 5"/>
+          <p:cNvSpPr txBox="1"/>
+          <p:nvPr/>
+        </p:nvSpPr>
+        <p:spPr>
+          <a:xfrm>
+            <a:off x="640080" y="2560320"/>
+            <a:ext cx="2560320" cy="914400"/>
+          </a:xfrm>
+          <a:prstGeom prst="rect">
+            <a:avLst/>
+          </a:prstGeom>
+          <a:noFill/>
+        </p:spPr>
+        <p:txBody>
+          <a:bodyPr wrap="square" lIns="0" rIns="0" tIns="0" bIns="0" anchor="t">
+            <a:spAutoFit/>
+          </a:bodyPr>
+          <a:lstStyle/>
+          <a:p>
+            <a:pPr algn="ctr">
+              <a:lnSpc>
+                <a:spcPct val="115000"/>
+              </a:lnSpc>
+            </a:pPr>
+            <a:r>
+              <a:rPr sz="4800" b="1">
+                <a:solidFill>
+                  <a:srgbClr val="2DD4BF"/>
+                </a:solidFill>
+                <a:latin typeface="Helvetica Neue"/>
+              </a:rPr>
+              <a:t>−25%</a:t>
+            </a:r>
+          </a:p>
+        </p:txBody>
+      </p:sp>
+      <p:sp>
+        <p:nvSpPr>
+          <p:cNvPr id="7" name="TextBox 6"/>
+          <p:cNvSpPr txBox="1"/>
+          <p:nvPr/>
+        </p:nvSpPr>
+        <p:spPr>
+          <a:xfrm>
+            <a:off x="868680" y="3749039"/>
+            <a:ext cx="2103120" cy="914400"/>
+          </a:xfrm>
+          <a:prstGeom prst="rect">
+            <a:avLst/>
+          </a:prstGeom>
+          <a:noFill/>
+        </p:spPr>
+        <p:txBody>
+          <a:bodyPr wrap="square" lIns="0" rIns="0" tIns="0" bIns="0" anchor="t">
+            <a:spAutoFit/>
+          </a:bodyPr>
+          <a:lstStyle/>
+          <a:p>
+            <a:pPr algn="ctr">
+              <a:lnSpc>
+                <a:spcPct val="115000"/>
+              </a:lnSpc>
+            </a:pPr>
+            <a:r>
+              <a:rPr sz="1500" b="0">
+                <a:solidFill>
+                  <a:srgbClr val="F8FAFC"/>
+                </a:solidFill>
+                <a:latin typeface="Helvetica Neue"/>
+              </a:rPr>
+              <a:t>MTTR on diagnosed incidents</a:t>
+            </a:r>
+          </a:p>
+        </p:txBody>
+      </p:sp>
+      <p:sp>
+        <p:nvSpPr>
+          <p:cNvPr id="8" name="Rounded Rectangle 7"/>
+          <p:cNvSpPr/>
+          <p:nvPr/>
+        </p:nvSpPr>
+        <p:spPr>
+          <a:xfrm>
+            <a:off x="3410712" y="2011680"/>
+            <a:ext cx="2560320" cy="2926080"/>
+          </a:xfrm>
+          <a:prstGeom prst="roundRect">
+            <a:avLst>
+              <a:gd name="adj" fmla="val 6000"/>
+            </a:avLst>
+          </a:prstGeom>
+          <a:solidFill>
+            <a:srgbClr val="151E32"/>
+          </a:solidFill>
+          <a:ln w="12700">
+            <a:solidFill>
+              <a:srgbClr val="2A3650"/>
+            </a:solidFill>
+          </a:ln>
+          <a:effectLst/>
+        </p:spPr>
+        <p:style>
+          <a:lnRef idx="1">
+            <a:schemeClr val="accent1"/>
+          </a:lnRef>
+          <a:fillRef idx="3">
+            <a:schemeClr val="accent1"/>
+          </a:fillRef>
+          <a:effectRef idx="2">
+            <a:schemeClr val="accent1"/>
+          </a:effectRef>
+          <a:fontRef idx="minor">
+            <a:schemeClr val="lt1"/>
+          </a:fontRef>
+        </p:style>
+        <p:txBody>
+          <a:bodyPr rtlCol="0" anchor="ctr"/>
+          <a:lstStyle/>
+          <a:p>
+            <a:pPr algn="ctr"/>
+          </a:p>
+        </p:txBody>
+      </p:sp>
+      <p:sp>
+        <p:nvSpPr>
+          <p:cNvPr id="9" name="TextBox 8"/>
+          <p:cNvSpPr txBox="1"/>
+          <p:nvPr/>
+        </p:nvSpPr>
+        <p:spPr>
+          <a:xfrm>
+            <a:off x="3410712" y="2560320"/>
+            <a:ext cx="2560320" cy="914400"/>
+          </a:xfrm>
+          <a:prstGeom prst="rect">
+            <a:avLst/>
+          </a:prstGeom>
+          <a:noFill/>
+        </p:spPr>
+        <p:txBody>
+          <a:bodyPr wrap="square" lIns="0" rIns="0" tIns="0" bIns="0" anchor="t">
+            <a:spAutoFit/>
+          </a:bodyPr>
+          <a:lstStyle/>
+          <a:p>
+            <a:pPr algn="ctr">
+              <a:lnSpc>
+                <a:spcPct val="115000"/>
+              </a:lnSpc>
+            </a:pPr>
+            <a:r>
+              <a:rPr sz="4800" b="1">
+                <a:solidFill>
+                  <a:srgbClr val="818CF8"/>
+                </a:solidFill>
+                <a:latin typeface="Helvetica Neue"/>
+              </a:rPr>
+              <a:t>≥ 80%</a:t>
+            </a:r>
+          </a:p>
+        </p:txBody>
+      </p:sp>
+      <p:sp>
+        <p:nvSpPr>
+          <p:cNvPr id="10" name="TextBox 9"/>
+          <p:cNvSpPr txBox="1"/>
+          <p:nvPr/>
+        </p:nvSpPr>
+        <p:spPr>
+          <a:xfrm>
+            <a:off x="3639312" y="3749039"/>
+            <a:ext cx="2103120" cy="914400"/>
+          </a:xfrm>
+          <a:prstGeom prst="rect">
+            <a:avLst/>
+          </a:prstGeom>
+          <a:noFill/>
+        </p:spPr>
+        <p:txBody>
+          <a:bodyPr wrap="square" lIns="0" rIns="0" tIns="0" bIns="0" anchor="t">
+            <a:spAutoFit/>
+          </a:bodyPr>
+          <a:lstStyle/>
+          <a:p>
+            <a:pPr algn="ctr">
+              <a:lnSpc>
+                <a:spcPct val="115000"/>
+              </a:lnSpc>
+            </a:pPr>
+            <a:r>
+              <a:rPr sz="1500" b="0">
+                <a:solidFill>
+                  <a:srgbClr val="F8FAFC"/>
+                </a:solidFill>
+                <a:latin typeface="Helvetica Neue"/>
+              </a:rPr>
+              <a:t>New incidents auto-diagnosed</a:t>
+            </a:r>
+          </a:p>
+        </p:txBody>
+      </p:sp>
+      <p:sp>
+        <p:nvSpPr>
+          <p:cNvPr id="11" name="Rounded Rectangle 10"/>
+          <p:cNvSpPr/>
+          <p:nvPr/>
+        </p:nvSpPr>
+        <p:spPr>
+          <a:xfrm>
+            <a:off x="6181344" y="2011680"/>
+            <a:ext cx="2560320" cy="2926080"/>
+          </a:xfrm>
+          <a:prstGeom prst="roundRect">
+            <a:avLst>
+              <a:gd name="adj" fmla="val 6000"/>
+            </a:avLst>
+          </a:prstGeom>
+          <a:solidFill>
+            <a:srgbClr val="151E32"/>
+          </a:solidFill>
+          <a:ln w="12700">
+            <a:solidFill>
+              <a:srgbClr val="2A3650"/>
+            </a:solidFill>
+          </a:ln>
+          <a:effectLst/>
+        </p:spPr>
+        <p:style>
+          <a:lnRef idx="1">
+            <a:schemeClr val="accent1"/>
+          </a:lnRef>
+          <a:fillRef idx="3">
+            <a:schemeClr val="accent1"/>
+          </a:fillRef>
+          <a:effectRef idx="2">
+            <a:schemeClr val="accent1"/>
+          </a:effectRef>
+          <a:fontRef idx="minor">
+            <a:schemeClr val="lt1"/>
+          </a:fontRef>
+        </p:style>
+        <p:txBody>
+          <a:bodyPr rtlCol="0" anchor="ctr"/>
+          <a:lstStyle/>
+          <a:p>
+            <a:pPr algn="ctr"/>
+          </a:p>
+        </p:txBody>
+      </p:sp>
+      <p:sp>
+        <p:nvSpPr>
+          <p:cNvPr id="12" name="TextBox 11"/>
+          <p:cNvSpPr txBox="1"/>
+          <p:nvPr/>
+        </p:nvSpPr>
+        <p:spPr>
+          <a:xfrm>
+            <a:off x="6181344" y="2560320"/>
+            <a:ext cx="2560320" cy="914400"/>
+          </a:xfrm>
+          <a:prstGeom prst="rect">
+            <a:avLst/>
+          </a:prstGeom>
+          <a:noFill/>
+        </p:spPr>
+        <p:txBody>
+          <a:bodyPr wrap="square" lIns="0" rIns="0" tIns="0" bIns="0" anchor="t">
+            <a:spAutoFit/>
+          </a:bodyPr>
+          <a:lstStyle/>
+          <a:p>
+            <a:pPr algn="ctr">
+              <a:lnSpc>
+                <a:spcPct val="115000"/>
+              </a:lnSpc>
+            </a:pPr>
+            <a:r>
+              <a:rPr sz="4800" b="1">
+                <a:solidFill>
+                  <a:srgbClr val="818CF8"/>
+                </a:solidFill>
+                <a:latin typeface="Helvetica Neue"/>
+              </a:rPr>
+              <a:t>+20%</a:t>
+            </a:r>
+          </a:p>
+        </p:txBody>
+      </p:sp>
+      <p:sp>
+        <p:nvSpPr>
+          <p:cNvPr id="13" name="TextBox 12"/>
+          <p:cNvSpPr txBox="1"/>
+          <p:nvPr/>
+        </p:nvSpPr>
+        <p:spPr>
+          <a:xfrm>
+            <a:off x="6409944" y="3749039"/>
+            <a:ext cx="2103120" cy="914400"/>
+          </a:xfrm>
+          <a:prstGeom prst="rect">
+            <a:avLst/>
+          </a:prstGeom>
+          <a:noFill/>
+        </p:spPr>
+        <p:txBody>
+          <a:bodyPr wrap="square" lIns="0" rIns="0" tIns="0" bIns="0" anchor="t">
+            <a:spAutoFit/>
+          </a:bodyPr>
+          <a:lstStyle/>
+          <a:p>
+            <a:pPr algn="ctr">
+              <a:lnSpc>
+                <a:spcPct val="115000"/>
+              </a:lnSpc>
+            </a:pPr>
+            <a:r>
+              <a:rPr sz="1500" b="0">
+                <a:solidFill>
+                  <a:srgbClr val="F8FAFC"/>
+                </a:solidFill>
+                <a:latin typeface="Helvetica Neue"/>
+              </a:rPr>
+              <a:t>Resolved by first team routed</a:t>
+            </a:r>
+          </a:p>
+        </p:txBody>
+      </p:sp>
+      <p:sp>
+        <p:nvSpPr>
+          <p:cNvPr id="14" name="Rounded Rectangle 13"/>
+          <p:cNvSpPr/>
+          <p:nvPr/>
+        </p:nvSpPr>
+        <p:spPr>
+          <a:xfrm>
+            <a:off x="8951976" y="2011680"/>
+            <a:ext cx="2560320" cy="2926080"/>
+          </a:xfrm>
+          <a:prstGeom prst="roundRect">
+            <a:avLst>
+              <a:gd name="adj" fmla="val 6000"/>
+            </a:avLst>
+          </a:prstGeom>
+          <a:solidFill>
+            <a:srgbClr val="151E32"/>
+          </a:solidFill>
+          <a:ln w="12700">
+            <a:solidFill>
+              <a:srgbClr val="2A3650"/>
+            </a:solidFill>
+          </a:ln>
+          <a:effectLst/>
+        </p:spPr>
+        <p:style>
+          <a:lnRef idx="1">
+            <a:schemeClr val="accent1"/>
+          </a:lnRef>
+          <a:fillRef idx="3">
+            <a:schemeClr val="accent1"/>
+          </a:fillRef>
+          <a:effectRef idx="2">
+            <a:schemeClr val="accent1"/>
+          </a:effectRef>
+          <a:fontRef idx="minor">
+            <a:schemeClr val="lt1"/>
+          </a:fontRef>
+        </p:style>
+        <p:txBody>
+          <a:bodyPr rtlCol="0" anchor="ctr"/>
+          <a:lstStyle/>
+          <a:p>
+            <a:pPr algn="ctr"/>
+          </a:p>
+        </p:txBody>
+      </p:sp>
+      <p:sp>
+        <p:nvSpPr>
+          <p:cNvPr id="15" name="TextBox 14"/>
+          <p:cNvSpPr txBox="1"/>
+          <p:nvPr/>
+        </p:nvSpPr>
+        <p:spPr>
+          <a:xfrm>
+            <a:off x="8951976" y="2560320"/>
+            <a:ext cx="2560320" cy="914400"/>
+          </a:xfrm>
+          <a:prstGeom prst="rect">
+            <a:avLst/>
+          </a:prstGeom>
+          <a:noFill/>
+        </p:spPr>
+        <p:txBody>
+          <a:bodyPr wrap="square" lIns="0" rIns="0" tIns="0" bIns="0" anchor="t">
+            <a:spAutoFit/>
+          </a:bodyPr>
+          <a:lstStyle/>
+          <a:p>
+            <a:pPr algn="ctr">
+              <a:lnSpc>
+                <a:spcPct val="115000"/>
+              </a:lnSpc>
+            </a:pPr>
+            <a:r>
+              <a:rPr sz="4800" b="1">
+                <a:solidFill>
+                  <a:srgbClr val="2DD4BF"/>
+                </a:solidFill>
+                <a:latin typeface="Helvetica Neue"/>
+              </a:rPr>
+              <a:t>≥ 20%</a:t>
+            </a:r>
+          </a:p>
+        </p:txBody>
+      </p:sp>
+      <p:sp>
+        <p:nvSpPr>
+          <p:cNvPr id="16" name="TextBox 15"/>
+          <p:cNvSpPr txBox="1"/>
+          <p:nvPr/>
+        </p:nvSpPr>
+        <p:spPr>
+          <a:xfrm>
+            <a:off x="9180576" y="3749039"/>
+            <a:ext cx="2103120" cy="914400"/>
+          </a:xfrm>
+          <a:prstGeom prst="rect">
+            <a:avLst/>
+          </a:prstGeom>
+          <a:noFill/>
+        </p:spPr>
+        <p:txBody>
+          <a:bodyPr wrap="square" lIns="0" rIns="0" tIns="0" bIns="0" anchor="t">
+            <a:spAutoFit/>
+          </a:bodyPr>
+          <a:lstStyle/>
+          <a:p>
+            <a:pPr algn="ctr">
+              <a:lnSpc>
+                <a:spcPct val="115000"/>
+              </a:lnSpc>
+            </a:pPr>
+            <a:r>
+              <a:rPr sz="1500" b="0">
+                <a:solidFill>
+                  <a:srgbClr val="F8FAFC"/>
+                </a:solidFill>
+                <a:latin typeface="Helvetica Neue"/>
+              </a:rPr>
+              <a:t>Trial → paid conversion</a:t>
+            </a:r>
+          </a:p>
+        </p:txBody>
+      </p:sp>
+      <p:sp>
+        <p:nvSpPr>
+          <p:cNvPr id="17" name="Rounded Rectangle 16"/>
+          <p:cNvSpPr/>
+          <p:nvPr/>
+        </p:nvSpPr>
+        <p:spPr>
+          <a:xfrm>
+            <a:off x="640080" y="5394960"/>
+            <a:ext cx="1097280" cy="274320"/>
+          </a:xfrm>
+          <a:prstGeom prst="roundRect">
+            <a:avLst>
+              <a:gd name="adj" fmla="val 50000"/>
+            </a:avLst>
+          </a:prstGeom>
+          <a:solidFill>
+            <a:srgbClr val="0B1120"/>
+          </a:solidFill>
+          <a:ln w="12700">
+            <a:solidFill>
+              <a:srgbClr val="FBBF24"/>
+            </a:solidFill>
+          </a:ln>
+          <a:effectLst/>
+        </p:spPr>
+        <p:style>
+          <a:lnRef idx="1">
+            <a:schemeClr val="accent1"/>
+          </a:lnRef>
+          <a:fillRef idx="3">
+            <a:schemeClr val="accent1"/>
+          </a:fillRef>
+          <a:effectRef idx="2">
+            <a:schemeClr val="accent1"/>
+          </a:effectRef>
+          <a:fontRef idx="minor">
+            <a:schemeClr val="lt1"/>
+          </a:fontRef>
+        </p:style>
+        <p:txBody>
+          <a:bodyPr rtlCol="0" anchor="ctr"/>
+          <a:lstStyle/>
+          <a:p>
+            <a:pPr algn="ctr"/>
+          </a:p>
+        </p:txBody>
+      </p:sp>
+      <p:sp>
+        <p:nvSpPr>
+          <p:cNvPr id="18" name="TextBox 17"/>
+          <p:cNvSpPr txBox="1"/>
+          <p:nvPr/>
+        </p:nvSpPr>
+        <p:spPr>
+          <a:xfrm>
+            <a:off x="640080" y="5436108"/>
+            <a:ext cx="1097280" cy="228600"/>
+          </a:xfrm>
+          <a:prstGeom prst="rect">
+            <a:avLst/>
+          </a:prstGeom>
+          <a:noFill/>
+        </p:spPr>
+        <p:txBody>
+          <a:bodyPr wrap="square" lIns="0" rIns="0" tIns="0" bIns="0" anchor="t">
+            <a:spAutoFit/>
+          </a:bodyPr>
+          <a:lstStyle/>
+          <a:p>
+            <a:pPr algn="ctr">
+              <a:lnSpc>
+                <a:spcPct val="115000"/>
+              </a:lnSpc>
+            </a:pPr>
+            <a:r>
+              <a:rPr sz="1000" b="1">
+                <a:solidFill>
+                  <a:srgbClr val="FBBF24"/>
+                </a:solidFill>
+                <a:latin typeface="Helvetica Neue"/>
+              </a:rPr>
+              <a:t>TARGETS</a:t>
+            </a:r>
+          </a:p>
+        </p:txBody>
+      </p:sp>
+      <p:sp>
+        <p:nvSpPr>
+          <p:cNvPr id="19" name="TextBox 18"/>
+          <p:cNvSpPr txBox="1"/>
+          <p:nvPr/>
+        </p:nvSpPr>
+        <p:spPr>
+          <a:xfrm>
+            <a:off x="1874519" y="5431536"/>
+            <a:ext cx="9144000" cy="320040"/>
+          </a:xfrm>
+          <a:prstGeom prst="rect">
+            <a:avLst/>
+          </a:prstGeom>
+          <a:noFill/>
+        </p:spPr>
+        <p:txBody>
+          <a:bodyPr wrap="square" lIns="0" rIns="0" tIns="0" bIns="0" anchor="t">
+            <a:spAutoFit/>
+          </a:bodyPr>
+          <a:lstStyle/>
+          <a:p>
+            <a:pPr algn="l">
+              <a:lnSpc>
+                <a:spcPct val="115000"/>
+              </a:lnSpc>
+            </a:pPr>
+            <a:r>
+              <a:rPr sz="1200" b="0">
+                <a:solidFill>
+                  <a:srgbClr val="94A3B8"/>
+                </a:solidFill>
+                <a:latin typeface="Helvetica Neue"/>
+              </a:rPr>
+              <a:t>Targets are assumptions; baseline measured on non-diagnosed incidents.</a:t>
+            </a:r>
+          </a:p>
+        </p:txBody>
+      </p:sp>
+    </p:spTree>
+  </p:cSld>
+  <p:clrMapOvr>
+    <a:masterClrMapping/>
+  </p:clrMapOvr>
+</p:sld>
+</file>
+
+<file path=ppt/slides/slide12.xml><?xml version="1.0" encoding="utf-8"?>
+<p:sld xmlns:a="http://schemas.openxmlformats.org/drawingml/2006/main" xmlns:p="http://schemas.openxmlformats.org/presentationml/2006/main" xmlns:r="http://schemas.openxmlformats.org/officeDocument/2006/relationships">
+  <p:cSld>
+    <p:bg>
+      <p:bgPr>
+        <a:solidFill>
+          <a:srgbClr val="0B1120"/>
+        </a:solidFill>
+        <a:effectLst/>
+      </p:bgPr>
+    </p:bg>
+    <p:spTree>
+      <p:nvGrpSpPr>
+        <p:cNvPr id="1" name=""/>
+        <p:cNvGrpSpPr/>
+        <p:nvPr/>
+      </p:nvGrpSpPr>
+      <p:grpSpPr/>
+      <p:sp>
+        <p:nvSpPr>
+          <p:cNvPr id="2" name="TextBox 1"/>
+          <p:cNvSpPr txBox="1"/>
+          <p:nvPr/>
+        </p:nvSpPr>
+        <p:spPr>
+          <a:xfrm>
+            <a:off x="640080" y="457200"/>
+            <a:ext cx="9144000" cy="320040"/>
+          </a:xfrm>
+          <a:prstGeom prst="rect">
+            <a:avLst/>
+          </a:prstGeom>
+          <a:noFill/>
+        </p:spPr>
+        <p:txBody>
+          <a:bodyPr wrap="square" lIns="0" rIns="0" tIns="0" bIns="0" anchor="t">
+            <a:spAutoFit/>
+          </a:bodyPr>
+          <a:lstStyle/>
+          <a:p>
+            <a:pPr algn="l">
+              <a:lnSpc>
+                <a:spcPct val="115000"/>
+              </a:lnSpc>
+            </a:pPr>
+            <a:r>
+              <a:rPr sz="1200" b="1">
+                <a:solidFill>
+                  <a:srgbClr val="2DD4BF"/>
+                </a:solidFill>
+                <a:latin typeface="Helvetica Neue"/>
+              </a:rPr>
+              <a:t>WHAT COULD GO WRONG · WHAT'S NEXT</a:t>
+            </a:r>
+          </a:p>
+        </p:txBody>
+      </p:sp>
+      <p:sp>
+        <p:nvSpPr>
+          <p:cNvPr id="3" name="TextBox 2"/>
+          <p:cNvSpPr txBox="1"/>
+          <p:nvPr/>
+        </p:nvSpPr>
+        <p:spPr>
+          <a:xfrm>
+            <a:off x="640080" y="777240"/>
+            <a:ext cx="10972800" cy="822960"/>
+          </a:xfrm>
+          <a:prstGeom prst="rect">
+            <a:avLst/>
+          </a:prstGeom>
+          <a:noFill/>
+        </p:spPr>
+        <p:txBody>
+          <a:bodyPr wrap="square" lIns="0" rIns="0" tIns="0" bIns="0" anchor="t">
+            <a:spAutoFit/>
+          </a:bodyPr>
+          <a:lstStyle/>
+          <a:p>
+            <a:pPr algn="l">
+              <a:lnSpc>
+                <a:spcPct val="115000"/>
+              </a:lnSpc>
+            </a:pPr>
+            <a:r>
+              <a:rPr sz="3200" b="1">
+                <a:solidFill>
+                  <a:srgbClr val="F8FAFC"/>
+                </a:solidFill>
+                <a:latin typeface="Helvetica Neue"/>
+              </a:rPr>
+              <a:t>Risks &amp; roadmap</a:t>
+            </a:r>
+          </a:p>
+        </p:txBody>
+      </p:sp>
+      <p:sp>
+        <p:nvSpPr>
+          <p:cNvPr id="4" name="TextBox 3"/>
+          <p:cNvSpPr txBox="1"/>
+          <p:nvPr/>
+        </p:nvSpPr>
+        <p:spPr>
+          <a:xfrm>
+            <a:off x="10607040" y="6400800"/>
+            <a:ext cx="1005840" cy="274320"/>
+          </a:xfrm>
+          <a:prstGeom prst="rect">
+            <a:avLst/>
+          </a:prstGeom>
+          <a:noFill/>
+        </p:spPr>
+        <p:txBody>
+          <a:bodyPr wrap="square" lIns="0" rIns="0" tIns="0" bIns="0" anchor="t">
+            <a:spAutoFit/>
+          </a:bodyPr>
+          <a:lstStyle/>
+          <a:p>
+            <a:pPr algn="r">
+              <a:lnSpc>
+                <a:spcPct val="115000"/>
+              </a:lnSpc>
+            </a:pPr>
+            <a:r>
+              <a:rPr sz="1000" b="0">
+                <a:solidFill>
+                  <a:srgbClr val="94A3B8"/>
+                </a:solidFill>
+                <a:latin typeface="Helvetica Neue"/>
+              </a:rPr>
+              <a:t>CodeAtlas AI  ·  12</a:t>
+            </a:r>
+          </a:p>
+        </p:txBody>
+      </p:sp>
+      <p:sp>
+        <p:nvSpPr>
+          <p:cNvPr id="5" name="TextBox 4"/>
+          <p:cNvSpPr txBox="1"/>
+          <p:nvPr/>
+        </p:nvSpPr>
+        <p:spPr>
+          <a:xfrm>
+            <a:off x="640080" y="1783080"/>
+            <a:ext cx="5486400" cy="365760"/>
+          </a:xfrm>
+          <a:prstGeom prst="rect">
+            <a:avLst/>
+          </a:prstGeom>
+          <a:noFill/>
+        </p:spPr>
+        <p:txBody>
+          <a:bodyPr wrap="square" lIns="0" rIns="0" tIns="0" bIns="0" anchor="t">
+            <a:spAutoFit/>
+          </a:bodyPr>
+          <a:lstStyle/>
+          <a:p>
+            <a:pPr algn="l">
+              <a:lnSpc>
+                <a:spcPct val="115000"/>
+              </a:lnSpc>
+            </a:pPr>
+            <a:r>
+              <a:rPr sz="1200" b="1">
+                <a:solidFill>
+                  <a:srgbClr val="FB7185"/>
+                </a:solidFill>
+                <a:latin typeface="Helvetica Neue"/>
+              </a:rPr>
+              <a:t>RISKS  →  MITIGATION</a:t>
+            </a:r>
+          </a:p>
+        </p:txBody>
+      </p:sp>
+      <p:sp>
+        <p:nvSpPr>
           <p:cNvPr id="6" name="Rounded Rectangle 5"/>
           <p:cNvSpPr/>
           <p:nvPr/>
         </p:nvSpPr>
         <p:spPr>
           <a:xfrm>
-            <a:off x="868680" y="1984248"/>
+            <a:off x="640080" y="2194560"/>
+            <a:ext cx="6035040" cy="713232"/>
+          </a:xfrm>
+          <a:prstGeom prst="roundRect">
+            <a:avLst>
+              <a:gd name="adj" fmla="val 6000"/>
+            </a:avLst>
+          </a:prstGeom>
+          <a:solidFill>
+            <a:srgbClr val="151E32"/>
+          </a:solidFill>
+          <a:ln w="12700">
+            <a:solidFill>
+              <a:srgbClr val="2A3650"/>
+            </a:solidFill>
+          </a:ln>
+          <a:effectLst/>
+        </p:spPr>
+        <p:style>
+          <a:lnRef idx="1">
+            <a:schemeClr val="accent1"/>
+          </a:lnRef>
+          <a:fillRef idx="3">
+            <a:schemeClr val="accent1"/>
+          </a:fillRef>
+          <a:effectRef idx="2">
+            <a:schemeClr val="accent1"/>
+          </a:effectRef>
+          <a:fontRef idx="minor">
+            <a:schemeClr val="lt1"/>
+          </a:fontRef>
+        </p:style>
+        <p:txBody>
+          <a:bodyPr rtlCol="0" anchor="ctr"/>
+          <a:lstStyle/>
+          <a:p>
+            <a:pPr algn="ctr"/>
+          </a:p>
+        </p:txBody>
+      </p:sp>
+      <p:sp>
+        <p:nvSpPr>
+          <p:cNvPr id="7" name="TextBox 6"/>
+          <p:cNvSpPr txBox="1"/>
+          <p:nvPr/>
+        </p:nvSpPr>
+        <p:spPr>
+          <a:xfrm>
+            <a:off x="868680" y="2286000"/>
+            <a:ext cx="5669280" cy="320040"/>
+          </a:xfrm>
+          <a:prstGeom prst="rect">
+            <a:avLst/>
+          </a:prstGeom>
+          <a:noFill/>
+        </p:spPr>
+        <p:txBody>
+          <a:bodyPr wrap="square" lIns="0" rIns="0" tIns="0" bIns="0" anchor="t">
+            <a:spAutoFit/>
+          </a:bodyPr>
+          <a:lstStyle/>
+          <a:p>
+            <a:pPr algn="l">
+              <a:lnSpc>
+                <a:spcPct val="115000"/>
+              </a:lnSpc>
+            </a:pPr>
+            <a:r>
+              <a:rPr sz="1400" b="1">
+                <a:solidFill>
+                  <a:srgbClr val="F8FAFC"/>
+                </a:solidFill>
+                <a:latin typeface="Helvetica Neue"/>
+              </a:rPr>
+              <a:t>Graph quality drives diagnosis quality</a:t>
+            </a:r>
+          </a:p>
+        </p:txBody>
+      </p:sp>
+      <p:sp>
+        <p:nvSpPr>
+          <p:cNvPr id="8" name="TextBox 7"/>
+          <p:cNvSpPr txBox="1"/>
+          <p:nvPr/>
+        </p:nvSpPr>
+        <p:spPr>
+          <a:xfrm>
+            <a:off x="868680" y="2587752"/>
+            <a:ext cx="5669280" cy="320040"/>
+          </a:xfrm>
+          <a:prstGeom prst="rect">
+            <a:avLst/>
+          </a:prstGeom>
+          <a:noFill/>
+        </p:spPr>
+        <p:txBody>
+          <a:bodyPr wrap="square" lIns="0" rIns="0" tIns="0" bIns="0" anchor="t">
+            <a:spAutoFit/>
+          </a:bodyPr>
+          <a:lstStyle/>
+          <a:p>
+            <a:pPr algn="l">
+              <a:lnSpc>
+                <a:spcPct val="115000"/>
+              </a:lnSpc>
+            </a:pPr>
+            <a:r>
+              <a:rPr sz="1200" b="0">
+                <a:solidFill>
+                  <a:srgbClr val="94A3B8"/>
+                </a:solidFill>
+                <a:latin typeface="Helvetica Neue"/>
+              </a:rPr>
+              <a:t>Knowledge Gap agent flags missing owners, runbooks and docs</a:t>
+            </a:r>
+          </a:p>
+        </p:txBody>
+      </p:sp>
+      <p:sp>
+        <p:nvSpPr>
+          <p:cNvPr id="9" name="Rounded Rectangle 8"/>
+          <p:cNvSpPr/>
+          <p:nvPr/>
+        </p:nvSpPr>
+        <p:spPr>
+          <a:xfrm>
+            <a:off x="640080" y="2999232"/>
+            <a:ext cx="6035040" cy="713232"/>
+          </a:xfrm>
+          <a:prstGeom prst="roundRect">
+            <a:avLst>
+              <a:gd name="adj" fmla="val 6000"/>
+            </a:avLst>
+          </a:prstGeom>
+          <a:solidFill>
+            <a:srgbClr val="151E32"/>
+          </a:solidFill>
+          <a:ln w="12700">
+            <a:solidFill>
+              <a:srgbClr val="2A3650"/>
+            </a:solidFill>
+          </a:ln>
+          <a:effectLst/>
+        </p:spPr>
+        <p:style>
+          <a:lnRef idx="1">
+            <a:schemeClr val="accent1"/>
+          </a:lnRef>
+          <a:fillRef idx="3">
+            <a:schemeClr val="accent1"/>
+          </a:fillRef>
+          <a:effectRef idx="2">
+            <a:schemeClr val="accent1"/>
+          </a:effectRef>
+          <a:fontRef idx="minor">
+            <a:schemeClr val="lt1"/>
+          </a:fontRef>
+        </p:style>
+        <p:txBody>
+          <a:bodyPr rtlCol="0" anchor="ctr"/>
+          <a:lstStyle/>
+          <a:p>
+            <a:pPr algn="ctr"/>
+          </a:p>
+        </p:txBody>
+      </p:sp>
+      <p:sp>
+        <p:nvSpPr>
+          <p:cNvPr id="10" name="TextBox 9"/>
+          <p:cNvSpPr txBox="1"/>
+          <p:nvPr/>
+        </p:nvSpPr>
+        <p:spPr>
+          <a:xfrm>
+            <a:off x="868680" y="3090672"/>
+            <a:ext cx="5669280" cy="320040"/>
+          </a:xfrm>
+          <a:prstGeom prst="rect">
+            <a:avLst/>
+          </a:prstGeom>
+          <a:noFill/>
+        </p:spPr>
+        <p:txBody>
+          <a:bodyPr wrap="square" lIns="0" rIns="0" tIns="0" bIns="0" anchor="t">
+            <a:spAutoFit/>
+          </a:bodyPr>
+          <a:lstStyle/>
+          <a:p>
+            <a:pPr algn="l">
+              <a:lnSpc>
+                <a:spcPct val="115000"/>
+              </a:lnSpc>
+            </a:pPr>
+            <a:r>
+              <a:rPr sz="1400" b="1">
+                <a:solidFill>
+                  <a:srgbClr val="F8FAFC"/>
+                </a:solidFill>
+                <a:latin typeface="Helvetica Neue"/>
+              </a:rPr>
+              <a:t>Trust &amp; privacy of ticket data</a:t>
+            </a:r>
+          </a:p>
+        </p:txBody>
+      </p:sp>
+      <p:sp>
+        <p:nvSpPr>
+          <p:cNvPr id="11" name="TextBox 10"/>
+          <p:cNvSpPr txBox="1"/>
+          <p:nvPr/>
+        </p:nvSpPr>
+        <p:spPr>
+          <a:xfrm>
+            <a:off x="868680" y="3392424"/>
+            <a:ext cx="5669280" cy="320040"/>
+          </a:xfrm>
+          <a:prstGeom prst="rect">
+            <a:avLst/>
+          </a:prstGeom>
+          <a:noFill/>
+        </p:spPr>
+        <p:txBody>
+          <a:bodyPr wrap="square" lIns="0" rIns="0" tIns="0" bIns="0" anchor="t">
+            <a:spAutoFit/>
+          </a:bodyPr>
+          <a:lstStyle/>
+          <a:p>
+            <a:pPr algn="l">
+              <a:lnSpc>
+                <a:spcPct val="115000"/>
+              </a:lnSpc>
+            </a:pPr>
+            <a:r>
+              <a:rPr sz="1200" b="0">
+                <a:solidFill>
+                  <a:srgbClr val="94A3B8"/>
+                </a:solidFill>
+                <a:latin typeface="Helvetica Neue"/>
+              </a:rPr>
+              <a:t>Private notes only; rule-based mode needs no LLM</a:t>
+            </a:r>
+          </a:p>
+        </p:txBody>
+      </p:sp>
+      <p:sp>
+        <p:nvSpPr>
+          <p:cNvPr id="12" name="Rounded Rectangle 11"/>
+          <p:cNvSpPr/>
+          <p:nvPr/>
+        </p:nvSpPr>
+        <p:spPr>
+          <a:xfrm>
+            <a:off x="640080" y="3803904"/>
+            <a:ext cx="6035040" cy="713232"/>
+          </a:xfrm>
+          <a:prstGeom prst="roundRect">
+            <a:avLst>
+              <a:gd name="adj" fmla="val 6000"/>
+            </a:avLst>
+          </a:prstGeom>
+          <a:solidFill>
+            <a:srgbClr val="151E32"/>
+          </a:solidFill>
+          <a:ln w="12700">
+            <a:solidFill>
+              <a:srgbClr val="2A3650"/>
+            </a:solidFill>
+          </a:ln>
+          <a:effectLst/>
+        </p:spPr>
+        <p:style>
+          <a:lnRef idx="1">
+            <a:schemeClr val="accent1"/>
+          </a:lnRef>
+          <a:fillRef idx="3">
+            <a:schemeClr val="accent1"/>
+          </a:fillRef>
+          <a:effectRef idx="2">
+            <a:schemeClr val="accent1"/>
+          </a:effectRef>
+          <a:fontRef idx="minor">
+            <a:schemeClr val="lt1"/>
+          </a:fontRef>
+        </p:style>
+        <p:txBody>
+          <a:bodyPr rtlCol="0" anchor="ctr"/>
+          <a:lstStyle/>
+          <a:p>
+            <a:pPr algn="ctr"/>
+          </a:p>
+        </p:txBody>
+      </p:sp>
+      <p:sp>
+        <p:nvSpPr>
+          <p:cNvPr id="13" name="TextBox 12"/>
+          <p:cNvSpPr txBox="1"/>
+          <p:nvPr/>
+        </p:nvSpPr>
+        <p:spPr>
+          <a:xfrm>
+            <a:off x="868680" y="3895344"/>
+            <a:ext cx="5669280" cy="320040"/>
+          </a:xfrm>
+          <a:prstGeom prst="rect">
+            <a:avLst/>
+          </a:prstGeom>
+          <a:noFill/>
+        </p:spPr>
+        <p:txBody>
+          <a:bodyPr wrap="square" lIns="0" rIns="0" tIns="0" bIns="0" anchor="t">
+            <a:spAutoFit/>
+          </a:bodyPr>
+          <a:lstStyle/>
+          <a:p>
+            <a:pPr algn="l">
+              <a:lnSpc>
+                <a:spcPct val="115000"/>
+              </a:lnSpc>
+            </a:pPr>
+            <a:r>
+              <a:rPr sz="1400" b="1">
+                <a:solidFill>
+                  <a:srgbClr val="F8FAFC"/>
+                </a:solidFill>
+                <a:latin typeface="Helvetica Neue"/>
+              </a:rPr>
+              <a:t>Willingness to pay beyond built-in AI</a:t>
+            </a:r>
+          </a:p>
+        </p:txBody>
+      </p:sp>
+      <p:sp>
+        <p:nvSpPr>
+          <p:cNvPr id="14" name="TextBox 13"/>
+          <p:cNvSpPr txBox="1"/>
+          <p:nvPr/>
+        </p:nvSpPr>
+        <p:spPr>
+          <a:xfrm>
+            <a:off x="868680" y="4197096"/>
+            <a:ext cx="5669280" cy="320040"/>
+          </a:xfrm>
+          <a:prstGeom prst="rect">
+            <a:avLst/>
+          </a:prstGeom>
+          <a:noFill/>
+        </p:spPr>
+        <p:txBody>
+          <a:bodyPr wrap="square" lIns="0" rIns="0" tIns="0" bIns="0" anchor="t">
+            <a:spAutoFit/>
+          </a:bodyPr>
+          <a:lstStyle/>
+          <a:p>
+            <a:pPr algn="l">
+              <a:lnSpc>
+                <a:spcPct val="115000"/>
+              </a:lnSpc>
+            </a:pPr>
+            <a:r>
+              <a:rPr sz="1200" b="0">
+                <a:solidFill>
+                  <a:srgbClr val="94A3B8"/>
+                </a:solidFill>
+                <a:latin typeface="Helvetica Neue"/>
+              </a:rPr>
+              <a:t>Validate with design partners before pricing is final</a:t>
+            </a:r>
+          </a:p>
+        </p:txBody>
+      </p:sp>
+      <p:sp>
+        <p:nvSpPr>
+          <p:cNvPr id="15" name="Rounded Rectangle 14"/>
+          <p:cNvSpPr/>
+          <p:nvPr/>
+        </p:nvSpPr>
+        <p:spPr>
+          <a:xfrm>
+            <a:off x="640080" y="4608576"/>
+            <a:ext cx="6035040" cy="713232"/>
+          </a:xfrm>
+          <a:prstGeom prst="roundRect">
+            <a:avLst>
+              <a:gd name="adj" fmla="val 6000"/>
+            </a:avLst>
+          </a:prstGeom>
+          <a:solidFill>
+            <a:srgbClr val="151E32"/>
+          </a:solidFill>
+          <a:ln w="12700">
+            <a:solidFill>
+              <a:srgbClr val="2A3650"/>
+            </a:solidFill>
+          </a:ln>
+          <a:effectLst/>
+        </p:spPr>
+        <p:style>
+          <a:lnRef idx="1">
+            <a:schemeClr val="accent1"/>
+          </a:lnRef>
+          <a:fillRef idx="3">
+            <a:schemeClr val="accent1"/>
+          </a:fillRef>
+          <a:effectRef idx="2">
+            <a:schemeClr val="accent1"/>
+          </a:effectRef>
+          <a:fontRef idx="minor">
+            <a:schemeClr val="lt1"/>
+          </a:fontRef>
+        </p:style>
+        <p:txBody>
+          <a:bodyPr rtlCol="0" anchor="ctr"/>
+          <a:lstStyle/>
+          <a:p>
+            <a:pPr algn="ctr"/>
+          </a:p>
+        </p:txBody>
+      </p:sp>
+      <p:sp>
+        <p:nvSpPr>
+          <p:cNvPr id="16" name="TextBox 15"/>
+          <p:cNvSpPr txBox="1"/>
+          <p:nvPr/>
+        </p:nvSpPr>
+        <p:spPr>
+          <a:xfrm>
+            <a:off x="868680" y="4700016"/>
+            <a:ext cx="5669280" cy="320040"/>
+          </a:xfrm>
+          <a:prstGeom prst="rect">
+            <a:avLst/>
+          </a:prstGeom>
+          <a:noFill/>
+        </p:spPr>
+        <p:txBody>
+          <a:bodyPr wrap="square" lIns="0" rIns="0" tIns="0" bIns="0" anchor="t">
+            <a:spAutoFit/>
+          </a:bodyPr>
+          <a:lstStyle/>
+          <a:p>
+            <a:pPr algn="l">
+              <a:lnSpc>
+                <a:spcPct val="115000"/>
+              </a:lnSpc>
+            </a:pPr>
+            <a:r>
+              <a:rPr sz="1400" b="1">
+                <a:solidFill>
+                  <a:srgbClr val="F8FAFC"/>
+                </a:solidFill>
+                <a:latin typeface="Helvetica Neue"/>
+              </a:rPr>
+              <a:t>Auto-routing sends a ticket to the wrong queue</a:t>
+            </a:r>
+          </a:p>
+        </p:txBody>
+      </p:sp>
+      <p:sp>
+        <p:nvSpPr>
+          <p:cNvPr id="17" name="TextBox 16"/>
+          <p:cNvSpPr txBox="1"/>
+          <p:nvPr/>
+        </p:nvSpPr>
+        <p:spPr>
+          <a:xfrm>
+            <a:off x="868680" y="5001768"/>
+            <a:ext cx="5669280" cy="320040"/>
+          </a:xfrm>
+          <a:prstGeom prst="rect">
+            <a:avLst/>
+          </a:prstGeom>
+          <a:noFill/>
+        </p:spPr>
+        <p:txBody>
+          <a:bodyPr wrap="square" lIns="0" rIns="0" tIns="0" bIns="0" anchor="t">
+            <a:spAutoFit/>
+          </a:bodyPr>
+          <a:lstStyle/>
+          <a:p>
+            <a:pPr algn="l">
+              <a:lnSpc>
+                <a:spcPct val="115000"/>
+              </a:lnSpc>
+            </a:pPr>
+            <a:r>
+              <a:rPr sz="1200" b="0">
+                <a:solidFill>
+                  <a:srgbClr val="94A3B8"/>
+                </a:solidFill>
+                <a:latin typeface="Helvetica Neue"/>
+              </a:rPr>
+              <a:t>Only assigns unassigned tickets; reason is written in the note</a:t>
+            </a:r>
+          </a:p>
+        </p:txBody>
+      </p:sp>
+      <p:sp>
+        <p:nvSpPr>
+          <p:cNvPr id="18" name="Rounded Rectangle 17"/>
+          <p:cNvSpPr/>
+          <p:nvPr/>
+        </p:nvSpPr>
+        <p:spPr>
+          <a:xfrm>
+            <a:off x="640080" y="5413248"/>
+            <a:ext cx="6035040" cy="713232"/>
+          </a:xfrm>
+          <a:prstGeom prst="roundRect">
+            <a:avLst>
+              <a:gd name="adj" fmla="val 6000"/>
+            </a:avLst>
+          </a:prstGeom>
+          <a:solidFill>
+            <a:srgbClr val="151E32"/>
+          </a:solidFill>
+          <a:ln w="12700">
+            <a:solidFill>
+              <a:srgbClr val="2A3650"/>
+            </a:solidFill>
+          </a:ln>
+          <a:effectLst/>
+        </p:spPr>
+        <p:style>
+          <a:lnRef idx="1">
+            <a:schemeClr val="accent1"/>
+          </a:lnRef>
+          <a:fillRef idx="3">
+            <a:schemeClr val="accent1"/>
+          </a:fillRef>
+          <a:effectRef idx="2">
+            <a:schemeClr val="accent1"/>
+          </a:effectRef>
+          <a:fontRef idx="minor">
+            <a:schemeClr val="lt1"/>
+          </a:fontRef>
+        </p:style>
+        <p:txBody>
+          <a:bodyPr rtlCol="0" anchor="ctr"/>
+          <a:lstStyle/>
+          <a:p>
+            <a:pPr algn="ctr"/>
+          </a:p>
+        </p:txBody>
+      </p:sp>
+      <p:sp>
+        <p:nvSpPr>
+          <p:cNvPr id="19" name="TextBox 18"/>
+          <p:cNvSpPr txBox="1"/>
+          <p:nvPr/>
+        </p:nvSpPr>
+        <p:spPr>
+          <a:xfrm>
+            <a:off x="868680" y="5504688"/>
+            <a:ext cx="5669280" cy="320040"/>
+          </a:xfrm>
+          <a:prstGeom prst="rect">
+            <a:avLst/>
+          </a:prstGeom>
+          <a:noFill/>
+        </p:spPr>
+        <p:txBody>
+          <a:bodyPr wrap="square" lIns="0" rIns="0" tIns="0" bIns="0" anchor="t">
+            <a:spAutoFit/>
+          </a:bodyPr>
+          <a:lstStyle/>
+          <a:p>
+            <a:pPr algn="l">
+              <a:lnSpc>
+                <a:spcPct val="115000"/>
+              </a:lnSpc>
+            </a:pPr>
+            <a:r>
+              <a:rPr sz="1400" b="1">
+                <a:solidFill>
+                  <a:srgbClr val="F8FAFC"/>
+                </a:solidFill>
+                <a:latin typeface="Helvetica Neue"/>
+              </a:rPr>
+              <a:t>API rate limits &amp; plan restrictions</a:t>
+            </a:r>
+          </a:p>
+        </p:txBody>
+      </p:sp>
+      <p:sp>
+        <p:nvSpPr>
+          <p:cNvPr id="20" name="TextBox 19"/>
+          <p:cNvSpPr txBox="1"/>
+          <p:nvPr/>
+        </p:nvSpPr>
+        <p:spPr>
+          <a:xfrm>
+            <a:off x="868680" y="5806440"/>
+            <a:ext cx="5669280" cy="320040"/>
+          </a:xfrm>
+          <a:prstGeom prst="rect">
+            <a:avLst/>
+          </a:prstGeom>
+          <a:noFill/>
+        </p:spPr>
+        <p:txBody>
+          <a:bodyPr wrap="square" lIns="0" rIns="0" tIns="0" bIns="0" anchor="t">
+            <a:spAutoFit/>
+          </a:bodyPr>
+          <a:lstStyle/>
+          <a:p>
+            <a:pPr algn="l">
+              <a:lnSpc>
+                <a:spcPct val="115000"/>
+              </a:lnSpc>
+            </a:pPr>
+            <a:r>
+              <a:rPr sz="1200" b="0">
+                <a:solidFill>
+                  <a:srgbClr val="94A3B8"/>
+                </a:solidFill>
+                <a:latin typeface="Helvetica Neue"/>
+              </a:rPr>
+              <a:t>Graceful degradation (e.g. CMDB needs higher plans)</a:t>
+            </a:r>
+          </a:p>
+        </p:txBody>
+      </p:sp>
+      <p:sp>
+        <p:nvSpPr>
+          <p:cNvPr id="21" name="TextBox 20"/>
+          <p:cNvSpPr txBox="1"/>
+          <p:nvPr/>
+        </p:nvSpPr>
+        <p:spPr>
+          <a:xfrm>
+            <a:off x="7040880" y="1783080"/>
+            <a:ext cx="4572000" cy="365760"/>
+          </a:xfrm>
+          <a:prstGeom prst="rect">
+            <a:avLst/>
+          </a:prstGeom>
+          <a:noFill/>
+        </p:spPr>
+        <p:txBody>
+          <a:bodyPr wrap="square" lIns="0" rIns="0" tIns="0" bIns="0" anchor="t">
+            <a:spAutoFit/>
+          </a:bodyPr>
+          <a:lstStyle/>
+          <a:p>
+            <a:pPr algn="l">
+              <a:lnSpc>
+                <a:spcPct val="115000"/>
+              </a:lnSpc>
+            </a:pPr>
+            <a:r>
+              <a:rPr sz="1200" b="1">
+                <a:solidFill>
+                  <a:srgbClr val="2DD4BF"/>
+                </a:solidFill>
+                <a:latin typeface="Helvetica Neue"/>
+              </a:rPr>
+              <a:t>PHASE 2 ROADMAP</a:t>
+            </a:r>
+          </a:p>
+        </p:txBody>
+      </p:sp>
+      <p:sp>
+        <p:nvSpPr>
+          <p:cNvPr id="22" name="Rounded Rectangle 21"/>
+          <p:cNvSpPr/>
+          <p:nvPr/>
+        </p:nvSpPr>
+        <p:spPr>
+          <a:xfrm>
+            <a:off x="7040880" y="2194560"/>
+            <a:ext cx="4480560" cy="3703320"/>
+          </a:xfrm>
+          <a:prstGeom prst="roundRect">
+            <a:avLst>
+              <a:gd name="adj" fmla="val 6000"/>
+            </a:avLst>
+          </a:prstGeom>
+          <a:solidFill>
+            <a:srgbClr val="151E32"/>
+          </a:solidFill>
+          <a:ln w="12700">
+            <a:solidFill>
+              <a:srgbClr val="2A3650"/>
+            </a:solidFill>
+          </a:ln>
+          <a:effectLst/>
+        </p:spPr>
+        <p:style>
+          <a:lnRef idx="1">
+            <a:schemeClr val="accent1"/>
+          </a:lnRef>
+          <a:fillRef idx="3">
+            <a:schemeClr val="accent1"/>
+          </a:fillRef>
+          <a:effectRef idx="2">
+            <a:schemeClr val="accent1"/>
+          </a:effectRef>
+          <a:fontRef idx="minor">
+            <a:schemeClr val="lt1"/>
+          </a:fontRef>
+        </p:style>
+        <p:txBody>
+          <a:bodyPr rtlCol="0" anchor="ctr"/>
+          <a:lstStyle/>
+          <a:p>
+            <a:pPr algn="ctr"/>
+          </a:p>
+        </p:txBody>
+      </p:sp>
+      <p:sp>
+        <p:nvSpPr>
+          <p:cNvPr id="23" name="Oval 22"/>
+          <p:cNvSpPr/>
+          <p:nvPr/>
+        </p:nvSpPr>
+        <p:spPr>
+          <a:xfrm>
+            <a:off x="7269480" y="2496312"/>
+            <a:ext cx="146304" cy="146304"/>
+          </a:xfrm>
+          <a:prstGeom prst="ellipse">
+            <a:avLst/>
+          </a:prstGeom>
+          <a:solidFill>
+            <a:srgbClr val="2DD4BF"/>
+          </a:solidFill>
+          <a:ln>
+            <a:noFill/>
+          </a:ln>
+          <a:effectLst/>
+        </p:spPr>
+        <p:style>
+          <a:lnRef idx="1">
+            <a:schemeClr val="accent1"/>
+          </a:lnRef>
+          <a:fillRef idx="3">
+            <a:schemeClr val="accent1"/>
+          </a:fillRef>
+          <a:effectRef idx="2">
+            <a:schemeClr val="accent1"/>
+          </a:effectRef>
+          <a:fontRef idx="minor">
+            <a:schemeClr val="lt1"/>
+          </a:fontRef>
+        </p:style>
+        <p:txBody>
+          <a:bodyPr rtlCol="0" anchor="ctr"/>
+          <a:lstStyle/>
+          <a:p>
+            <a:pPr algn="ctr"/>
+          </a:p>
+        </p:txBody>
+      </p:sp>
+      <p:sp>
+        <p:nvSpPr>
+          <p:cNvPr id="24" name="TextBox 23"/>
+          <p:cNvSpPr txBox="1"/>
+          <p:nvPr/>
+        </p:nvSpPr>
+        <p:spPr>
+          <a:xfrm>
+            <a:off x="7589520" y="2423160"/>
+            <a:ext cx="3749039" cy="640080"/>
+          </a:xfrm>
+          <a:prstGeom prst="rect">
+            <a:avLst/>
+          </a:prstGeom>
+          <a:noFill/>
+        </p:spPr>
+        <p:txBody>
+          <a:bodyPr wrap="square" lIns="0" rIns="0" tIns="0" bIns="0" anchor="t">
+            <a:spAutoFit/>
+          </a:bodyPr>
+          <a:lstStyle/>
+          <a:p>
+            <a:pPr algn="l">
+              <a:lnSpc>
+                <a:spcPct val="115000"/>
+              </a:lnSpc>
+            </a:pPr>
+            <a:r>
+              <a:rPr sz="1400" b="0">
+                <a:solidFill>
+                  <a:srgbClr val="F8FAFC"/>
+                </a:solidFill>
+                <a:latin typeface="Helvetica Neue"/>
+              </a:rPr>
+              <a:t>Live Jira · Confluence · Slack connectors</a:t>
+            </a:r>
+          </a:p>
+        </p:txBody>
+      </p:sp>
+      <p:sp>
+        <p:nvSpPr>
+          <p:cNvPr id="25" name="Oval 24"/>
+          <p:cNvSpPr/>
+          <p:nvPr/>
+        </p:nvSpPr>
+        <p:spPr>
+          <a:xfrm>
+            <a:off x="7269480" y="3182112"/>
+            <a:ext cx="146304" cy="146304"/>
+          </a:xfrm>
+          <a:prstGeom prst="ellipse">
+            <a:avLst/>
+          </a:prstGeom>
+          <a:solidFill>
+            <a:srgbClr val="2DD4BF"/>
+          </a:solidFill>
+          <a:ln>
+            <a:noFill/>
+          </a:ln>
+          <a:effectLst/>
+        </p:spPr>
+        <p:style>
+          <a:lnRef idx="1">
+            <a:schemeClr val="accent1"/>
+          </a:lnRef>
+          <a:fillRef idx="3">
+            <a:schemeClr val="accent1"/>
+          </a:fillRef>
+          <a:effectRef idx="2">
+            <a:schemeClr val="accent1"/>
+          </a:effectRef>
+          <a:fontRef idx="minor">
+            <a:schemeClr val="lt1"/>
+          </a:fontRef>
+        </p:style>
+        <p:txBody>
+          <a:bodyPr rtlCol="0" anchor="ctr"/>
+          <a:lstStyle/>
+          <a:p>
+            <a:pPr algn="ctr"/>
+          </a:p>
+        </p:txBody>
+      </p:sp>
+      <p:sp>
+        <p:nvSpPr>
+          <p:cNvPr id="26" name="TextBox 25"/>
+          <p:cNvSpPr txBox="1"/>
+          <p:nvPr/>
+        </p:nvSpPr>
+        <p:spPr>
+          <a:xfrm>
+            <a:off x="7589520" y="3108960"/>
+            <a:ext cx="3749039" cy="640080"/>
+          </a:xfrm>
+          <a:prstGeom prst="rect">
+            <a:avLst/>
+          </a:prstGeom>
+          <a:noFill/>
+        </p:spPr>
+        <p:txBody>
+          <a:bodyPr wrap="square" lIns="0" rIns="0" tIns="0" bIns="0" anchor="t">
+            <a:spAutoFit/>
+          </a:bodyPr>
+          <a:lstStyle/>
+          <a:p>
+            <a:pPr algn="l">
+              <a:lnSpc>
+                <a:spcPct val="115000"/>
+              </a:lnSpc>
+            </a:pPr>
+            <a:r>
+              <a:rPr sz="1400" b="0">
+                <a:solidFill>
+                  <a:srgbClr val="F8FAFC"/>
+                </a:solidFill>
+                <a:latin typeface="Helvetica Neue"/>
+              </a:rPr>
+              <a:t>Freshdesk: link customer tickets to engineering incidents</a:t>
+            </a:r>
+          </a:p>
+        </p:txBody>
+      </p:sp>
+      <p:sp>
+        <p:nvSpPr>
+          <p:cNvPr id="27" name="Oval 26"/>
+          <p:cNvSpPr/>
+          <p:nvPr/>
+        </p:nvSpPr>
+        <p:spPr>
+          <a:xfrm>
+            <a:off x="7269480" y="3867912"/>
+            <a:ext cx="146304" cy="146304"/>
+          </a:xfrm>
+          <a:prstGeom prst="ellipse">
+            <a:avLst/>
+          </a:prstGeom>
+          <a:solidFill>
+            <a:srgbClr val="2DD4BF"/>
+          </a:solidFill>
+          <a:ln>
+            <a:noFill/>
+          </a:ln>
+          <a:effectLst/>
+        </p:spPr>
+        <p:style>
+          <a:lnRef idx="1">
+            <a:schemeClr val="accent1"/>
+          </a:lnRef>
+          <a:fillRef idx="3">
+            <a:schemeClr val="accent1"/>
+          </a:fillRef>
+          <a:effectRef idx="2">
+            <a:schemeClr val="accent1"/>
+          </a:effectRef>
+          <a:fontRef idx="minor">
+            <a:schemeClr val="lt1"/>
+          </a:fontRef>
+        </p:style>
+        <p:txBody>
+          <a:bodyPr rtlCol="0" anchor="ctr"/>
+          <a:lstStyle/>
+          <a:p>
+            <a:pPr algn="ctr"/>
+          </a:p>
+        </p:txBody>
+      </p:sp>
+      <p:sp>
+        <p:nvSpPr>
+          <p:cNvPr id="28" name="TextBox 27"/>
+          <p:cNvSpPr txBox="1"/>
+          <p:nvPr/>
+        </p:nvSpPr>
+        <p:spPr>
+          <a:xfrm>
+            <a:off x="7589520" y="3794760"/>
+            <a:ext cx="3749039" cy="640080"/>
+          </a:xfrm>
+          <a:prstGeom prst="rect">
+            <a:avLst/>
+          </a:prstGeom>
+          <a:noFill/>
+        </p:spPr>
+        <p:txBody>
+          <a:bodyPr wrap="square" lIns="0" rIns="0" tIns="0" bIns="0" anchor="t">
+            <a:spAutoFit/>
+          </a:bodyPr>
+          <a:lstStyle/>
+          <a:p>
+            <a:pPr algn="l">
+              <a:lnSpc>
+                <a:spcPct val="115000"/>
+              </a:lnSpc>
+            </a:pPr>
+            <a:r>
+              <a:rPr sz="1400" b="0">
+                <a:solidFill>
+                  <a:srgbClr val="F8FAFC"/>
+                </a:solidFill>
+                <a:latin typeface="Helvetica Neue"/>
+              </a:rPr>
+              <a:t>Native FDK sidebar app on tickets &amp; changes</a:t>
+            </a:r>
+          </a:p>
+        </p:txBody>
+      </p:sp>
+      <p:sp>
+        <p:nvSpPr>
+          <p:cNvPr id="29" name="Oval 28"/>
+          <p:cNvSpPr/>
+          <p:nvPr/>
+        </p:nvSpPr>
+        <p:spPr>
+          <a:xfrm>
+            <a:off x="7269480" y="4553712"/>
+            <a:ext cx="146304" cy="146304"/>
+          </a:xfrm>
+          <a:prstGeom prst="ellipse">
+            <a:avLst/>
+          </a:prstGeom>
+          <a:solidFill>
+            <a:srgbClr val="2DD4BF"/>
+          </a:solidFill>
+          <a:ln>
+            <a:noFill/>
+          </a:ln>
+          <a:effectLst/>
+        </p:spPr>
+        <p:style>
+          <a:lnRef idx="1">
+            <a:schemeClr val="accent1"/>
+          </a:lnRef>
+          <a:fillRef idx="3">
+            <a:schemeClr val="accent1"/>
+          </a:fillRef>
+          <a:effectRef idx="2">
+            <a:schemeClr val="accent1"/>
+          </a:effectRef>
+          <a:fontRef idx="minor">
+            <a:schemeClr val="lt1"/>
+          </a:fontRef>
+        </p:style>
+        <p:txBody>
+          <a:bodyPr rtlCol="0" anchor="ctr"/>
+          <a:lstStyle/>
+          <a:p>
+            <a:pPr algn="ctr"/>
+          </a:p>
+        </p:txBody>
+      </p:sp>
+      <p:sp>
+        <p:nvSpPr>
+          <p:cNvPr id="30" name="TextBox 29"/>
+          <p:cNvSpPr txBox="1"/>
+          <p:nvPr/>
+        </p:nvSpPr>
+        <p:spPr>
+          <a:xfrm>
+            <a:off x="7589520" y="4480560"/>
+            <a:ext cx="3749039" cy="640080"/>
+          </a:xfrm>
+          <a:prstGeom prst="rect">
+            <a:avLst/>
+          </a:prstGeom>
+          <a:noFill/>
+        </p:spPr>
+        <p:txBody>
+          <a:bodyPr wrap="square" lIns="0" rIns="0" tIns="0" bIns="0" anchor="t">
+            <a:spAutoFit/>
+          </a:bodyPr>
+          <a:lstStyle/>
+          <a:p>
+            <a:pPr algn="l">
+              <a:lnSpc>
+                <a:spcPct val="115000"/>
+              </a:lnSpc>
+            </a:pPr>
+            <a:r>
+              <a:rPr sz="1400" b="0">
+                <a:solidFill>
+                  <a:srgbClr val="F8FAFC"/>
+                </a:solidFill>
+                <a:latin typeface="Helvetica Neue"/>
+              </a:rPr>
+              <a:t>CMDB sync · Problems from recurring incidents · on-call aware escalation</a:t>
+            </a:r>
+          </a:p>
+        </p:txBody>
+      </p:sp>
+      <p:sp>
+        <p:nvSpPr>
+          <p:cNvPr id="31" name="Oval 30"/>
+          <p:cNvSpPr/>
+          <p:nvPr/>
+        </p:nvSpPr>
+        <p:spPr>
+          <a:xfrm>
+            <a:off x="7269480" y="5239512"/>
+            <a:ext cx="146304" cy="146304"/>
+          </a:xfrm>
+          <a:prstGeom prst="ellipse">
+            <a:avLst/>
+          </a:prstGeom>
+          <a:solidFill>
+            <a:srgbClr val="2DD4BF"/>
+          </a:solidFill>
+          <a:ln>
+            <a:noFill/>
+          </a:ln>
+          <a:effectLst/>
+        </p:spPr>
+        <p:style>
+          <a:lnRef idx="1">
+            <a:schemeClr val="accent1"/>
+          </a:lnRef>
+          <a:fillRef idx="3">
+            <a:schemeClr val="accent1"/>
+          </a:fillRef>
+          <a:effectRef idx="2">
+            <a:schemeClr val="accent1"/>
+          </a:effectRef>
+          <a:fontRef idx="minor">
+            <a:schemeClr val="lt1"/>
+          </a:fontRef>
+        </p:style>
+        <p:txBody>
+          <a:bodyPr rtlCol="0" anchor="ctr"/>
+          <a:lstStyle/>
+          <a:p>
+            <a:pPr algn="ctr"/>
+          </a:p>
+        </p:txBody>
+      </p:sp>
+      <p:sp>
+        <p:nvSpPr>
+          <p:cNvPr id="32" name="TextBox 31"/>
+          <p:cNvSpPr txBox="1"/>
+          <p:nvPr/>
+        </p:nvSpPr>
+        <p:spPr>
+          <a:xfrm>
+            <a:off x="7589520" y="5166360"/>
+            <a:ext cx="3749039" cy="640080"/>
+          </a:xfrm>
+          <a:prstGeom prst="rect">
+            <a:avLst/>
+          </a:prstGeom>
+          <a:noFill/>
+        </p:spPr>
+        <p:txBody>
+          <a:bodyPr wrap="square" lIns="0" rIns="0" tIns="0" bIns="0" anchor="t">
+            <a:spAutoFit/>
+          </a:bodyPr>
+          <a:lstStyle/>
+          <a:p>
+            <a:pPr algn="l">
+              <a:lnSpc>
+                <a:spcPct val="115000"/>
+              </a:lnSpc>
+            </a:pPr>
+            <a:r>
+              <a:rPr sz="1400" b="0">
+                <a:solidFill>
+                  <a:srgbClr val="F8FAFC"/>
+                </a:solidFill>
+                <a:latin typeface="Helvetica Neue"/>
+              </a:rPr>
+              <a:t>Graph learns from every resolved ticket</a:t>
+            </a:r>
+          </a:p>
+        </p:txBody>
+      </p:sp>
+    </p:spTree>
+  </p:cSld>
+  <p:clrMapOvr>
+    <a:masterClrMapping/>
+  </p:clrMapOvr>
+</p:sld>
+</file>
+
+<file path=ppt/slides/slide13.xml><?xml version="1.0" encoding="utf-8"?>
+<p:sld xmlns:a="http://schemas.openxmlformats.org/drawingml/2006/main" xmlns:p="http://schemas.openxmlformats.org/presentationml/2006/main" xmlns:r="http://schemas.openxmlformats.org/officeDocument/2006/relationships">
+  <p:cSld>
+    <p:bg>
+      <p:bgPr>
+        <a:solidFill>
+          <a:srgbClr val="0B1120"/>
+        </a:solidFill>
+        <a:effectLst/>
+      </p:bgPr>
+    </p:bg>
+    <p:spTree>
+      <p:nvGrpSpPr>
+        <p:cNvPr id="1" name=""/>
+        <p:cNvGrpSpPr/>
+        <p:nvPr/>
+      </p:nvGrpSpPr>
+      <p:grpSpPr/>
+      <p:sp>
+        <p:nvSpPr>
+          <p:cNvPr id="2" name="TextBox 1"/>
+          <p:cNvSpPr txBox="1"/>
+          <p:nvPr/>
+        </p:nvSpPr>
+        <p:spPr>
+          <a:xfrm>
+            <a:off x="640080" y="457200"/>
+            <a:ext cx="9144000" cy="320040"/>
+          </a:xfrm>
+          <a:prstGeom prst="rect">
+            <a:avLst/>
+          </a:prstGeom>
+          <a:noFill/>
+        </p:spPr>
+        <p:txBody>
+          <a:bodyPr wrap="square" lIns="0" rIns="0" tIns="0" bIns="0" anchor="t">
+            <a:spAutoFit/>
+          </a:bodyPr>
+          <a:lstStyle/>
+          <a:p>
+            <a:pPr algn="l">
+              <a:lnSpc>
+                <a:spcPct val="115000"/>
+              </a:lnSpc>
+            </a:pPr>
+            <a:r>
+              <a:rPr sz="1200" b="1">
+                <a:solidFill>
+                  <a:srgbClr val="2DD4BF"/>
+                </a:solidFill>
+                <a:latin typeface="Helvetica Neue"/>
+              </a:rPr>
+              <a:t>FOR REVIEWER Q&amp;A</a:t>
+            </a:r>
+          </a:p>
+        </p:txBody>
+      </p:sp>
+      <p:sp>
+        <p:nvSpPr>
+          <p:cNvPr id="3" name="TextBox 2"/>
+          <p:cNvSpPr txBox="1"/>
+          <p:nvPr/>
+        </p:nvSpPr>
+        <p:spPr>
+          <a:xfrm>
+            <a:off x="640080" y="777240"/>
+            <a:ext cx="10972800" cy="822960"/>
+          </a:xfrm>
+          <a:prstGeom prst="rect">
+            <a:avLst/>
+          </a:prstGeom>
+          <a:noFill/>
+        </p:spPr>
+        <p:txBody>
+          <a:bodyPr wrap="square" lIns="0" rIns="0" tIns="0" bIns="0" anchor="t">
+            <a:spAutoFit/>
+          </a:bodyPr>
+          <a:lstStyle/>
+          <a:p>
+            <a:pPr algn="l">
+              <a:lnSpc>
+                <a:spcPct val="115000"/>
+              </a:lnSpc>
+            </a:pPr>
+            <a:r>
+              <a:rPr sz="3200" b="1">
+                <a:solidFill>
+                  <a:srgbClr val="F8FAFC"/>
+                </a:solidFill>
+                <a:latin typeface="Helvetica Neue"/>
+              </a:rPr>
+              <a:t>Appendix: what's built vs. planned</a:t>
+            </a:r>
+          </a:p>
+        </p:txBody>
+      </p:sp>
+      <p:sp>
+        <p:nvSpPr>
+          <p:cNvPr id="4" name="TextBox 3"/>
+          <p:cNvSpPr txBox="1"/>
+          <p:nvPr/>
+        </p:nvSpPr>
+        <p:spPr>
+          <a:xfrm>
+            <a:off x="10607040" y="6400800"/>
+            <a:ext cx="1005840" cy="274320"/>
+          </a:xfrm>
+          <a:prstGeom prst="rect">
+            <a:avLst/>
+          </a:prstGeom>
+          <a:noFill/>
+        </p:spPr>
+        <p:txBody>
+          <a:bodyPr wrap="square" lIns="0" rIns="0" tIns="0" bIns="0" anchor="t">
+            <a:spAutoFit/>
+          </a:bodyPr>
+          <a:lstStyle/>
+          <a:p>
+            <a:pPr algn="r">
+              <a:lnSpc>
+                <a:spcPct val="115000"/>
+              </a:lnSpc>
+            </a:pPr>
+            <a:r>
+              <a:rPr sz="1000" b="0">
+                <a:solidFill>
+                  <a:srgbClr val="94A3B8"/>
+                </a:solidFill>
+                <a:latin typeface="Helvetica Neue"/>
+              </a:rPr>
+              <a:t>CodeAtlas AI  ·  13</a:t>
+            </a:r>
+          </a:p>
+        </p:txBody>
+      </p:sp>
+      <p:sp>
+        <p:nvSpPr>
+          <p:cNvPr id="5" name="Rounded Rectangle 4"/>
+          <p:cNvSpPr/>
+          <p:nvPr/>
+        </p:nvSpPr>
+        <p:spPr>
+          <a:xfrm>
+            <a:off x="640080" y="1783080"/>
+            <a:ext cx="10881360" cy="548640"/>
+          </a:xfrm>
+          <a:prstGeom prst="roundRect">
+            <a:avLst>
+              <a:gd name="adj" fmla="val 6000"/>
+            </a:avLst>
+          </a:prstGeom>
+          <a:solidFill>
+            <a:srgbClr val="151E32"/>
+          </a:solidFill>
+          <a:ln w="12700">
+            <a:solidFill>
+              <a:srgbClr val="2A3650"/>
+            </a:solidFill>
+          </a:ln>
+          <a:effectLst/>
+        </p:spPr>
+        <p:style>
+          <a:lnRef idx="1">
+            <a:schemeClr val="accent1"/>
+          </a:lnRef>
+          <a:fillRef idx="3">
+            <a:schemeClr val="accent1"/>
+          </a:fillRef>
+          <a:effectRef idx="2">
+            <a:schemeClr val="accent1"/>
+          </a:effectRef>
+          <a:fontRef idx="minor">
+            <a:schemeClr val="lt1"/>
+          </a:fontRef>
+        </p:style>
+        <p:txBody>
+          <a:bodyPr rtlCol="0" anchor="ctr"/>
+          <a:lstStyle/>
+          <a:p>
+            <a:pPr algn="ctr"/>
+          </a:p>
+        </p:txBody>
+      </p:sp>
+      <p:sp>
+        <p:nvSpPr>
+          <p:cNvPr id="6" name="Rounded Rectangle 5"/>
+          <p:cNvSpPr/>
+          <p:nvPr/>
+        </p:nvSpPr>
+        <p:spPr>
+          <a:xfrm>
+            <a:off x="868680" y="1920240"/>
             <a:ext cx="1051560" cy="274320"/>
           </a:xfrm>
           <a:prstGeom prst="roundRect">
@@ -5870,7 +7861,7 @@
         </p:nvSpPr>
         <p:spPr>
           <a:xfrm>
-            <a:off x="868680" y="2025396"/>
+            <a:off x="868680" y="1961388"/>
             <a:ext cx="1051560" cy="228600"/>
           </a:xfrm>
           <a:prstGeom prst="rect">
@@ -5909,7 +7900,7 @@
         </p:nvSpPr>
         <p:spPr>
           <a:xfrm>
-            <a:off x="2194560" y="1993392"/>
+            <a:off x="2194560" y="1938528"/>
             <a:ext cx="9144000" cy="365760"/>
           </a:xfrm>
           <a:prstGeom prst="rect">
@@ -5929,13 +7920,13 @@
               </a:lnSpc>
             </a:pPr>
             <a:r>
-              <a:rPr sz="1400" b="0">
+              <a:rPr sz="1300" b="0">
                 <a:solidFill>
                   <a:srgbClr val="F8FAFC"/>
                 </a:solidFill>
                 <a:latin typeface="Helvetica Neue"/>
               </a:rPr>
-              <a:t>Freshservice tickets, groups, KB search, note posting, Workflow Automator webhook (REST v2)</a:t>
+              <a:t>Freshservice tickets, groups, KB search, diagnosis notes, auto-routing, Workflow Automator (REST v2)</a:t>
             </a:r>
           </a:p>
         </p:txBody>
@@ -5948,8 +7939,8 @@
         </p:nvSpPr>
         <p:spPr>
           <a:xfrm>
-            <a:off x="640080" y="2542032"/>
-            <a:ext cx="10881360" cy="594360"/>
+            <a:off x="640080" y="2423160"/>
+            <a:ext cx="10881360" cy="548640"/>
           </a:xfrm>
           <a:prstGeom prst="roundRect">
             <a:avLst>
@@ -5996,7 +7987,355 @@
         </p:nvSpPr>
         <p:spPr>
           <a:xfrm>
-            <a:off x="868680" y="2697480"/>
+            <a:off x="868680" y="2560320"/>
+            <a:ext cx="1051560" cy="274320"/>
+          </a:xfrm>
+          <a:prstGeom prst="roundRect">
+            <a:avLst>
+              <a:gd name="adj" fmla="val 50000"/>
+            </a:avLst>
+          </a:prstGeom>
+          <a:solidFill>
+            <a:srgbClr val="0B1120"/>
+          </a:solidFill>
+          <a:ln w="12700">
+            <a:solidFill>
+              <a:srgbClr val="2DD4BF"/>
+            </a:solidFill>
+          </a:ln>
+          <a:effectLst/>
+        </p:spPr>
+        <p:style>
+          <a:lnRef idx="1">
+            <a:schemeClr val="accent1"/>
+          </a:lnRef>
+          <a:fillRef idx="3">
+            <a:schemeClr val="accent1"/>
+          </a:fillRef>
+          <a:effectRef idx="2">
+            <a:schemeClr val="accent1"/>
+          </a:effectRef>
+          <a:fontRef idx="minor">
+            <a:schemeClr val="lt1"/>
+          </a:fontRef>
+        </p:style>
+        <p:txBody>
+          <a:bodyPr rtlCol="0" anchor="ctr"/>
+          <a:lstStyle/>
+          <a:p>
+            <a:pPr algn="ctr"/>
+          </a:p>
+        </p:txBody>
+      </p:sp>
+      <p:sp>
+        <p:nvSpPr>
+          <p:cNvPr id="11" name="TextBox 10"/>
+          <p:cNvSpPr txBox="1"/>
+          <p:nvPr/>
+        </p:nvSpPr>
+        <p:spPr>
+          <a:xfrm>
+            <a:off x="868680" y="2601468"/>
+            <a:ext cx="1051560" cy="228600"/>
+          </a:xfrm>
+          <a:prstGeom prst="rect">
+            <a:avLst/>
+          </a:prstGeom>
+          <a:noFill/>
+        </p:spPr>
+        <p:txBody>
+          <a:bodyPr wrap="square" lIns="0" rIns="0" tIns="0" bIns="0" anchor="t">
+            <a:spAutoFit/>
+          </a:bodyPr>
+          <a:lstStyle/>
+          <a:p>
+            <a:pPr algn="ctr">
+              <a:lnSpc>
+                <a:spcPct val="115000"/>
+              </a:lnSpc>
+            </a:pPr>
+            <a:r>
+              <a:rPr sz="1000" b="1">
+                <a:solidFill>
+                  <a:srgbClr val="2DD4BF"/>
+                </a:solidFill>
+                <a:latin typeface="Helvetica Neue"/>
+              </a:rPr>
+              <a:t>LIVE</a:t>
+            </a:r>
+          </a:p>
+        </p:txBody>
+      </p:sp>
+      <p:sp>
+        <p:nvSpPr>
+          <p:cNvPr id="12" name="TextBox 11"/>
+          <p:cNvSpPr txBox="1"/>
+          <p:nvPr/>
+        </p:nvSpPr>
+        <p:spPr>
+          <a:xfrm>
+            <a:off x="2194560" y="2578608"/>
+            <a:ext cx="9144000" cy="365760"/>
+          </a:xfrm>
+          <a:prstGeom prst="rect">
+            <a:avLst/>
+          </a:prstGeom>
+          <a:noFill/>
+        </p:spPr>
+        <p:txBody>
+          <a:bodyPr wrap="square" lIns="0" rIns="0" tIns="0" bIns="0" anchor="t">
+            <a:spAutoFit/>
+          </a:bodyPr>
+          <a:lstStyle/>
+          <a:p>
+            <a:pPr algn="l">
+              <a:lnSpc>
+                <a:spcPct val="115000"/>
+              </a:lnSpc>
+            </a:pPr>
+            <a:r>
+              <a:rPr sz="1300" b="0">
+                <a:solidFill>
+                  <a:srgbClr val="F8FAFC"/>
+                </a:solidFill>
+                <a:latin typeface="Helvetica Neue"/>
+              </a:rPr>
+              <a:t>Freshservice Changes: 3-agent impact pipeline + graph blast radius posted as a change note</a:t>
+            </a:r>
+          </a:p>
+        </p:txBody>
+      </p:sp>
+      <p:sp>
+        <p:nvSpPr>
+          <p:cNvPr id="13" name="Rounded Rectangle 12"/>
+          <p:cNvSpPr/>
+          <p:nvPr/>
+        </p:nvSpPr>
+        <p:spPr>
+          <a:xfrm>
+            <a:off x="640080" y="3063240"/>
+            <a:ext cx="10881360" cy="548640"/>
+          </a:xfrm>
+          <a:prstGeom prst="roundRect">
+            <a:avLst>
+              <a:gd name="adj" fmla="val 6000"/>
+            </a:avLst>
+          </a:prstGeom>
+          <a:solidFill>
+            <a:srgbClr val="151E32"/>
+          </a:solidFill>
+          <a:ln w="12700">
+            <a:solidFill>
+              <a:srgbClr val="2A3650"/>
+            </a:solidFill>
+          </a:ln>
+          <a:effectLst/>
+        </p:spPr>
+        <p:style>
+          <a:lnRef idx="1">
+            <a:schemeClr val="accent1"/>
+          </a:lnRef>
+          <a:fillRef idx="3">
+            <a:schemeClr val="accent1"/>
+          </a:fillRef>
+          <a:effectRef idx="2">
+            <a:schemeClr val="accent1"/>
+          </a:effectRef>
+          <a:fontRef idx="minor">
+            <a:schemeClr val="lt1"/>
+          </a:fontRef>
+        </p:style>
+        <p:txBody>
+          <a:bodyPr rtlCol="0" anchor="ctr"/>
+          <a:lstStyle/>
+          <a:p>
+            <a:pPr algn="ctr"/>
+          </a:p>
+        </p:txBody>
+      </p:sp>
+      <p:sp>
+        <p:nvSpPr>
+          <p:cNvPr id="14" name="Rounded Rectangle 13"/>
+          <p:cNvSpPr/>
+          <p:nvPr/>
+        </p:nvSpPr>
+        <p:spPr>
+          <a:xfrm>
+            <a:off x="868680" y="3200400"/>
+            <a:ext cx="1051560" cy="274320"/>
+          </a:xfrm>
+          <a:prstGeom prst="roundRect">
+            <a:avLst>
+              <a:gd name="adj" fmla="val 50000"/>
+            </a:avLst>
+          </a:prstGeom>
+          <a:solidFill>
+            <a:srgbClr val="0B1120"/>
+          </a:solidFill>
+          <a:ln w="12700">
+            <a:solidFill>
+              <a:srgbClr val="2DD4BF"/>
+            </a:solidFill>
+          </a:ln>
+          <a:effectLst/>
+        </p:spPr>
+        <p:style>
+          <a:lnRef idx="1">
+            <a:schemeClr val="accent1"/>
+          </a:lnRef>
+          <a:fillRef idx="3">
+            <a:schemeClr val="accent1"/>
+          </a:fillRef>
+          <a:effectRef idx="2">
+            <a:schemeClr val="accent1"/>
+          </a:effectRef>
+          <a:fontRef idx="minor">
+            <a:schemeClr val="lt1"/>
+          </a:fontRef>
+        </p:style>
+        <p:txBody>
+          <a:bodyPr rtlCol="0" anchor="ctr"/>
+          <a:lstStyle/>
+          <a:p>
+            <a:pPr algn="ctr"/>
+          </a:p>
+        </p:txBody>
+      </p:sp>
+      <p:sp>
+        <p:nvSpPr>
+          <p:cNvPr id="15" name="TextBox 14"/>
+          <p:cNvSpPr txBox="1"/>
+          <p:nvPr/>
+        </p:nvSpPr>
+        <p:spPr>
+          <a:xfrm>
+            <a:off x="868680" y="3241548"/>
+            <a:ext cx="1051560" cy="228600"/>
+          </a:xfrm>
+          <a:prstGeom prst="rect">
+            <a:avLst/>
+          </a:prstGeom>
+          <a:noFill/>
+        </p:spPr>
+        <p:txBody>
+          <a:bodyPr wrap="square" lIns="0" rIns="0" tIns="0" bIns="0" anchor="t">
+            <a:spAutoFit/>
+          </a:bodyPr>
+          <a:lstStyle/>
+          <a:p>
+            <a:pPr algn="ctr">
+              <a:lnSpc>
+                <a:spcPct val="115000"/>
+              </a:lnSpc>
+            </a:pPr>
+            <a:r>
+              <a:rPr sz="1000" b="1">
+                <a:solidFill>
+                  <a:srgbClr val="2DD4BF"/>
+                </a:solidFill>
+                <a:latin typeface="Helvetica Neue"/>
+              </a:rPr>
+              <a:t>LIVE</a:t>
+            </a:r>
+          </a:p>
+        </p:txBody>
+      </p:sp>
+      <p:sp>
+        <p:nvSpPr>
+          <p:cNvPr id="16" name="TextBox 15"/>
+          <p:cNvSpPr txBox="1"/>
+          <p:nvPr/>
+        </p:nvSpPr>
+        <p:spPr>
+          <a:xfrm>
+            <a:off x="2194560" y="3218688"/>
+            <a:ext cx="9144000" cy="365760"/>
+          </a:xfrm>
+          <a:prstGeom prst="rect">
+            <a:avLst/>
+          </a:prstGeom>
+          <a:noFill/>
+        </p:spPr>
+        <p:txBody>
+          <a:bodyPr wrap="square" lIns="0" rIns="0" tIns="0" bIns="0" anchor="t">
+            <a:spAutoFit/>
+          </a:bodyPr>
+          <a:lstStyle/>
+          <a:p>
+            <a:pPr algn="l">
+              <a:lnSpc>
+                <a:spcPct val="115000"/>
+              </a:lnSpc>
+            </a:pPr>
+            <a:r>
+              <a:rPr sz="1300" b="0">
+                <a:solidFill>
+                  <a:srgbClr val="F8FAFC"/>
+                </a:solidFill>
+                <a:latin typeface="Helvetica Neue"/>
+              </a:rPr>
+              <a:t>GitHub recent releases, commits, config diffs (secrets redacted) in every diagnosis</a:t>
+            </a:r>
+          </a:p>
+        </p:txBody>
+      </p:sp>
+      <p:sp>
+        <p:nvSpPr>
+          <p:cNvPr id="17" name="Rounded Rectangle 16"/>
+          <p:cNvSpPr/>
+          <p:nvPr/>
+        </p:nvSpPr>
+        <p:spPr>
+          <a:xfrm>
+            <a:off x="640080" y="3703320"/>
+            <a:ext cx="10881360" cy="548640"/>
+          </a:xfrm>
+          <a:prstGeom prst="roundRect">
+            <a:avLst>
+              <a:gd name="adj" fmla="val 6000"/>
+            </a:avLst>
+          </a:prstGeom>
+          <a:solidFill>
+            <a:srgbClr val="151E32"/>
+          </a:solidFill>
+          <a:ln w="12700">
+            <a:solidFill>
+              <a:srgbClr val="2A3650"/>
+            </a:solidFill>
+          </a:ln>
+          <a:effectLst/>
+        </p:spPr>
+        <p:style>
+          <a:lnRef idx="1">
+            <a:schemeClr val="accent1"/>
+          </a:lnRef>
+          <a:fillRef idx="3">
+            <a:schemeClr val="accent1"/>
+          </a:fillRef>
+          <a:effectRef idx="2">
+            <a:schemeClr val="accent1"/>
+          </a:effectRef>
+          <a:fontRef idx="minor">
+            <a:schemeClr val="lt1"/>
+          </a:fontRef>
+        </p:style>
+        <p:txBody>
+          <a:bodyPr rtlCol="0" anchor="ctr"/>
+          <a:lstStyle/>
+          <a:p>
+            <a:pPr algn="ctr"/>
+          </a:p>
+        </p:txBody>
+      </p:sp>
+      <p:sp>
+        <p:nvSpPr>
+          <p:cNvPr id="18" name="Rounded Rectangle 17"/>
+          <p:cNvSpPr/>
+          <p:nvPr/>
+        </p:nvSpPr>
+        <p:spPr>
+          <a:xfrm>
+            <a:off x="868680" y="3840480"/>
             <a:ext cx="1051560" cy="274320"/>
           </a:xfrm>
           <a:prstGeom prst="roundRect">
@@ -6038,13 +8377,13 @@
       </p:sp>
       <p:sp>
         <p:nvSpPr>
-          <p:cNvPr id="11" name="TextBox 10"/>
-          <p:cNvSpPr txBox="1"/>
-          <p:nvPr/>
-        </p:nvSpPr>
-        <p:spPr>
-          <a:xfrm>
-            <a:off x="868680" y="2738628"/>
+          <p:cNvPr id="19" name="TextBox 18"/>
+          <p:cNvSpPr txBox="1"/>
+          <p:nvPr/>
+        </p:nvSpPr>
+        <p:spPr>
+          <a:xfrm>
+            <a:off x="868680" y="3881628"/>
             <a:ext cx="1051560" cy="228600"/>
           </a:xfrm>
           <a:prstGeom prst="rect">
@@ -6077,13 +8416,13 @@
       </p:sp>
       <p:sp>
         <p:nvSpPr>
-          <p:cNvPr id="12" name="TextBox 11"/>
-          <p:cNvSpPr txBox="1"/>
-          <p:nvPr/>
-        </p:nvSpPr>
-        <p:spPr>
-          <a:xfrm>
-            <a:off x="2194560" y="2706624"/>
+          <p:cNvPr id="20" name="TextBox 19"/>
+          <p:cNvSpPr txBox="1"/>
+          <p:nvPr/>
+        </p:nvSpPr>
+        <p:spPr>
+          <a:xfrm>
+            <a:off x="2194560" y="3858768"/>
             <a:ext cx="9144000" cy="365760"/>
           </a:xfrm>
           <a:prstGeom prst="rect">
@@ -6103,27 +8442,27 @@
               </a:lnSpc>
             </a:pPr>
             <a:r>
-              <a:rPr sz="1400" b="0">
+              <a:rPr sz="1300" b="0">
                 <a:solidFill>
                   <a:srgbClr val="F8FAFC"/>
                 </a:solidFill>
                 <a:latin typeface="Helvetica Neue"/>
               </a:rPr>
-              <a:t>Neo4j graph (+ in-memory fallback), vector search, 8 agents, orchestrator, explainability</a:t>
-            </a:r>
-          </a:p>
-        </p:txBody>
-      </p:sp>
-      <p:sp>
-        <p:nvSpPr>
-          <p:cNvPr id="13" name="Rounded Rectangle 12"/>
+              <a:t>Neo4j graph (+ in-memory fallback), vector search, 8 agents, orchestrator, explainability, repo/ZIP intake</a:t>
+            </a:r>
+          </a:p>
+        </p:txBody>
+      </p:sp>
+      <p:sp>
+        <p:nvSpPr>
+          <p:cNvPr id="21" name="Rounded Rectangle 20"/>
           <p:cNvSpPr/>
           <p:nvPr/>
         </p:nvSpPr>
         <p:spPr>
           <a:xfrm>
-            <a:off x="640080" y="3255264"/>
-            <a:ext cx="10881360" cy="594360"/>
+            <a:off x="640080" y="4343400"/>
+            <a:ext cx="10881360" cy="548640"/>
           </a:xfrm>
           <a:prstGeom prst="roundRect">
             <a:avLst>
@@ -6164,13 +8503,13 @@
       </p:sp>
       <p:sp>
         <p:nvSpPr>
-          <p:cNvPr id="14" name="Rounded Rectangle 13"/>
+          <p:cNvPr id="22" name="Rounded Rectangle 21"/>
           <p:cNvSpPr/>
           <p:nvPr/>
         </p:nvSpPr>
         <p:spPr>
           <a:xfrm>
-            <a:off x="868680" y="3410712"/>
+            <a:off x="868680" y="4480560"/>
             <a:ext cx="1051560" cy="274320"/>
           </a:xfrm>
           <a:prstGeom prst="roundRect">
@@ -6183,7 +8522,7 @@
           </a:solidFill>
           <a:ln w="12700">
             <a:solidFill>
-              <a:srgbClr val="818CF8"/>
+              <a:srgbClr val="FBBF24"/>
             </a:solidFill>
           </a:ln>
           <a:effectLst/>
@@ -6212,13 +8551,13 @@
       </p:sp>
       <p:sp>
         <p:nvSpPr>
-          <p:cNvPr id="15" name="TextBox 14"/>
-          <p:cNvSpPr txBox="1"/>
-          <p:nvPr/>
-        </p:nvSpPr>
-        <p:spPr>
-          <a:xfrm>
-            <a:off x="868680" y="3451860"/>
+          <p:cNvPr id="23" name="TextBox 22"/>
+          <p:cNvSpPr txBox="1"/>
+          <p:nvPr/>
+        </p:nvSpPr>
+        <p:spPr>
+          <a:xfrm>
+            <a:off x="868680" y="4521708"/>
             <a:ext cx="1051560" cy="228600"/>
           </a:xfrm>
           <a:prstGeom prst="rect">
@@ -6240,24 +8579,24 @@
             <a:r>
               <a:rPr sz="1000" b="1">
                 <a:solidFill>
-                  <a:srgbClr val="818CF8"/>
-                </a:solidFill>
-                <a:latin typeface="Helvetica Neue"/>
-              </a:rPr>
-              <a:t>BUILT</a:t>
-            </a:r>
-          </a:p>
-        </p:txBody>
-      </p:sp>
-      <p:sp>
-        <p:nvSpPr>
-          <p:cNvPr id="16" name="TextBox 15"/>
-          <p:cNvSpPr txBox="1"/>
-          <p:nvPr/>
-        </p:nvSpPr>
-        <p:spPr>
-          <a:xfrm>
-            <a:off x="2194560" y="3419856"/>
+                  <a:srgbClr val="FBBF24"/>
+                </a:solidFill>
+                <a:latin typeface="Helvetica Neue"/>
+              </a:rPr>
+              <a:t>MOCKED</a:t>
+            </a:r>
+          </a:p>
+        </p:txBody>
+      </p:sp>
+      <p:sp>
+        <p:nvSpPr>
+          <p:cNvPr id="24" name="TextBox 23"/>
+          <p:cNvSpPr txBox="1"/>
+          <p:nvPr/>
+        </p:nvSpPr>
+        <p:spPr>
+          <a:xfrm>
+            <a:off x="2194560" y="4498848"/>
             <a:ext cx="9144000" cy="365760"/>
           </a:xfrm>
           <a:prstGeom prst="rect">
@@ -6277,27 +8616,27 @@
               </a:lnSpc>
             </a:pPr>
             <a:r>
-              <a:rPr sz="1400" b="0">
+              <a:rPr sz="1300" b="0">
                 <a:solidFill>
                   <a:srgbClr val="F8FAFC"/>
                 </a:solidFill>
                 <a:latin typeface="Helvetica Neue"/>
               </a:rPr>
-              <a:t>GitHub public-repo import; ZIP / Excel / CSV intake into the graph</a:t>
-            </a:r>
-          </a:p>
-        </p:txBody>
-      </p:sp>
-      <p:sp>
-        <p:nvSpPr>
-          <p:cNvPr id="17" name="Rounded Rectangle 16"/>
+              <a:t>Jira, Confluence, Slack, Freshdesk connectors (same adapter interface)</a:t>
+            </a:r>
+          </a:p>
+        </p:txBody>
+      </p:sp>
+      <p:sp>
+        <p:nvSpPr>
+          <p:cNvPr id="25" name="Rounded Rectangle 24"/>
           <p:cNvSpPr/>
           <p:nvPr/>
         </p:nvSpPr>
         <p:spPr>
           <a:xfrm>
-            <a:off x="640080" y="3968496"/>
-            <a:ext cx="10881360" cy="594360"/>
+            <a:off x="640080" y="4983480"/>
+            <a:ext cx="10881360" cy="548640"/>
           </a:xfrm>
           <a:prstGeom prst="roundRect">
             <a:avLst>
@@ -6338,13 +8677,13 @@
       </p:sp>
       <p:sp>
         <p:nvSpPr>
-          <p:cNvPr id="18" name="Rounded Rectangle 17"/>
+          <p:cNvPr id="26" name="Rounded Rectangle 25"/>
           <p:cNvSpPr/>
           <p:nvPr/>
         </p:nvSpPr>
         <p:spPr>
           <a:xfrm>
-            <a:off x="868680" y="4123944"/>
+            <a:off x="868680" y="5120640"/>
             <a:ext cx="1051560" cy="274320"/>
           </a:xfrm>
           <a:prstGeom prst="roundRect">
@@ -6357,7 +8696,7 @@
           </a:solidFill>
           <a:ln w="12700">
             <a:solidFill>
-              <a:srgbClr val="FBBF24"/>
+              <a:srgbClr val="FB7185"/>
             </a:solidFill>
           </a:ln>
           <a:effectLst/>
@@ -6386,13 +8725,13 @@
       </p:sp>
       <p:sp>
         <p:nvSpPr>
-          <p:cNvPr id="19" name="TextBox 18"/>
-          <p:cNvSpPr txBox="1"/>
-          <p:nvPr/>
-        </p:nvSpPr>
-        <p:spPr>
-          <a:xfrm>
-            <a:off x="868680" y="4165092"/>
+          <p:cNvPr id="27" name="TextBox 26"/>
+          <p:cNvSpPr txBox="1"/>
+          <p:nvPr/>
+        </p:nvSpPr>
+        <p:spPr>
+          <a:xfrm>
+            <a:off x="868680" y="5161788"/>
             <a:ext cx="1051560" cy="228600"/>
           </a:xfrm>
           <a:prstGeom prst="rect">
@@ -6414,24 +8753,24 @@
             <a:r>
               <a:rPr sz="1000" b="1">
                 <a:solidFill>
-                  <a:srgbClr val="FBBF24"/>
-                </a:solidFill>
-                <a:latin typeface="Helvetica Neue"/>
-              </a:rPr>
-              <a:t>MOCKED</a:t>
-            </a:r>
-          </a:p>
-        </p:txBody>
-      </p:sp>
-      <p:sp>
-        <p:nvSpPr>
-          <p:cNvPr id="20" name="TextBox 19"/>
-          <p:cNvSpPr txBox="1"/>
-          <p:nvPr/>
-        </p:nvSpPr>
-        <p:spPr>
-          <a:xfrm>
-            <a:off x="2194560" y="4133088"/>
+                  <a:srgbClr val="FB7185"/>
+                </a:solidFill>
+                <a:latin typeface="Helvetica Neue"/>
+              </a:rPr>
+              <a:t>BLOCKED</a:t>
+            </a:r>
+          </a:p>
+        </p:txBody>
+      </p:sp>
+      <p:sp>
+        <p:nvSpPr>
+          <p:cNvPr id="28" name="TextBox 27"/>
+          <p:cNvSpPr txBox="1"/>
+          <p:nvPr/>
+        </p:nvSpPr>
+        <p:spPr>
+          <a:xfrm>
+            <a:off x="2194560" y="5138928"/>
             <a:ext cx="9144000" cy="365760"/>
           </a:xfrm>
           <a:prstGeom prst="rect">
@@ -6451,27 +8790,27 @@
               </a:lnSpc>
             </a:pPr>
             <a:r>
-              <a:rPr sz="1400" b="0">
+              <a:rPr sz="1300" b="0">
                 <a:solidFill>
                   <a:srgbClr val="F8FAFC"/>
                 </a:solidFill>
                 <a:latin typeface="Helvetica Neue"/>
               </a:rPr>
-              <a:t>GitHub PR, Jira, Confluence, Slack, Freshdesk connectors (same adapter interface)</a:t>
-            </a:r>
-          </a:p>
-        </p:txBody>
-      </p:sp>
-      <p:sp>
-        <p:nvSpPr>
-          <p:cNvPr id="21" name="Rounded Rectangle 20"/>
+              <a:t>Freshservice agents &amp; assets / CMDB: not available on the trial plan/role</a:t>
+            </a:r>
+          </a:p>
+        </p:txBody>
+      </p:sp>
+      <p:sp>
+        <p:nvSpPr>
+          <p:cNvPr id="29" name="Rounded Rectangle 28"/>
           <p:cNvSpPr/>
           <p:nvPr/>
         </p:nvSpPr>
         <p:spPr>
           <a:xfrm>
-            <a:off x="640080" y="4681728"/>
-            <a:ext cx="10881360" cy="594360"/>
+            <a:off x="640080" y="5623560"/>
+            <a:ext cx="10881360" cy="548640"/>
           </a:xfrm>
           <a:prstGeom prst="roundRect">
             <a:avLst>
@@ -6512,187 +8851,13 @@
       </p:sp>
       <p:sp>
         <p:nvSpPr>
-          <p:cNvPr id="22" name="Rounded Rectangle 21"/>
+          <p:cNvPr id="30" name="Rounded Rectangle 29"/>
           <p:cNvSpPr/>
           <p:nvPr/>
         </p:nvSpPr>
         <p:spPr>
           <a:xfrm>
-            <a:off x="868680" y="4837176"/>
-            <a:ext cx="1051560" cy="274320"/>
-          </a:xfrm>
-          <a:prstGeom prst="roundRect">
-            <a:avLst>
-              <a:gd name="adj" fmla="val 50000"/>
-            </a:avLst>
-          </a:prstGeom>
-          <a:solidFill>
-            <a:srgbClr val="0B1120"/>
-          </a:solidFill>
-          <a:ln w="12700">
-            <a:solidFill>
-              <a:srgbClr val="FB7185"/>
-            </a:solidFill>
-          </a:ln>
-          <a:effectLst/>
-        </p:spPr>
-        <p:style>
-          <a:lnRef idx="1">
-            <a:schemeClr val="accent1"/>
-          </a:lnRef>
-          <a:fillRef idx="3">
-            <a:schemeClr val="accent1"/>
-          </a:fillRef>
-          <a:effectRef idx="2">
-            <a:schemeClr val="accent1"/>
-          </a:effectRef>
-          <a:fontRef idx="minor">
-            <a:schemeClr val="lt1"/>
-          </a:fontRef>
-        </p:style>
-        <p:txBody>
-          <a:bodyPr rtlCol="0" anchor="ctr"/>
-          <a:lstStyle/>
-          <a:p>
-            <a:pPr algn="ctr"/>
-          </a:p>
-        </p:txBody>
-      </p:sp>
-      <p:sp>
-        <p:nvSpPr>
-          <p:cNvPr id="23" name="TextBox 22"/>
-          <p:cNvSpPr txBox="1"/>
-          <p:nvPr/>
-        </p:nvSpPr>
-        <p:spPr>
-          <a:xfrm>
-            <a:off x="868680" y="4878324"/>
-            <a:ext cx="1051560" cy="228600"/>
-          </a:xfrm>
-          <a:prstGeom prst="rect">
-            <a:avLst/>
-          </a:prstGeom>
-          <a:noFill/>
-        </p:spPr>
-        <p:txBody>
-          <a:bodyPr wrap="square" lIns="0" rIns="0" tIns="0" bIns="0" anchor="t">
-            <a:spAutoFit/>
-          </a:bodyPr>
-          <a:lstStyle/>
-          <a:p>
-            <a:pPr algn="ctr">
-              <a:lnSpc>
-                <a:spcPct val="115000"/>
-              </a:lnSpc>
-            </a:pPr>
-            <a:r>
-              <a:rPr sz="1000" b="1">
-                <a:solidFill>
-                  <a:srgbClr val="FB7185"/>
-                </a:solidFill>
-                <a:latin typeface="Helvetica Neue"/>
-              </a:rPr>
-              <a:t>BLOCKED</a:t>
-            </a:r>
-          </a:p>
-        </p:txBody>
-      </p:sp>
-      <p:sp>
-        <p:nvSpPr>
-          <p:cNvPr id="24" name="TextBox 23"/>
-          <p:cNvSpPr txBox="1"/>
-          <p:nvPr/>
-        </p:nvSpPr>
-        <p:spPr>
-          <a:xfrm>
-            <a:off x="2194560" y="4846320"/>
-            <a:ext cx="9144000" cy="365760"/>
-          </a:xfrm>
-          <a:prstGeom prst="rect">
-            <a:avLst/>
-          </a:prstGeom>
-          <a:noFill/>
-        </p:spPr>
-        <p:txBody>
-          <a:bodyPr wrap="square" lIns="0" rIns="0" tIns="0" bIns="0" anchor="t">
-            <a:spAutoFit/>
-          </a:bodyPr>
-          <a:lstStyle/>
-          <a:p>
-            <a:pPr algn="l">
-              <a:lnSpc>
-                <a:spcPct val="115000"/>
-              </a:lnSpc>
-            </a:pPr>
-            <a:r>
-              <a:rPr sz="1400" b="0">
-                <a:solidFill>
-                  <a:srgbClr val="F8FAFC"/>
-                </a:solidFill>
-                <a:latin typeface="Helvetica Neue"/>
-              </a:rPr>
-              <a:t>Freshservice agents &amp; assets / CMDB: not available on the trial plan/role</a:t>
-            </a:r>
-          </a:p>
-        </p:txBody>
-      </p:sp>
-      <p:sp>
-        <p:nvSpPr>
-          <p:cNvPr id="25" name="Rounded Rectangle 24"/>
-          <p:cNvSpPr/>
-          <p:nvPr/>
-        </p:nvSpPr>
-        <p:spPr>
-          <a:xfrm>
-            <a:off x="640080" y="5394960"/>
-            <a:ext cx="10881360" cy="594360"/>
-          </a:xfrm>
-          <a:prstGeom prst="roundRect">
-            <a:avLst>
-              <a:gd name="adj" fmla="val 6000"/>
-            </a:avLst>
-          </a:prstGeom>
-          <a:solidFill>
-            <a:srgbClr val="151E32"/>
-          </a:solidFill>
-          <a:ln w="12700">
-            <a:solidFill>
-              <a:srgbClr val="2A3650"/>
-            </a:solidFill>
-          </a:ln>
-          <a:effectLst/>
-        </p:spPr>
-        <p:style>
-          <a:lnRef idx="1">
-            <a:schemeClr val="accent1"/>
-          </a:lnRef>
-          <a:fillRef idx="3">
-            <a:schemeClr val="accent1"/>
-          </a:fillRef>
-          <a:effectRef idx="2">
-            <a:schemeClr val="accent1"/>
-          </a:effectRef>
-          <a:fontRef idx="minor">
-            <a:schemeClr val="lt1"/>
-          </a:fontRef>
-        </p:style>
-        <p:txBody>
-          <a:bodyPr rtlCol="0" anchor="ctr"/>
-          <a:lstStyle/>
-          <a:p>
-            <a:pPr algn="ctr"/>
-          </a:p>
-        </p:txBody>
-      </p:sp>
-      <p:sp>
-        <p:nvSpPr>
-          <p:cNvPr id="26" name="Rounded Rectangle 25"/>
-          <p:cNvSpPr/>
-          <p:nvPr/>
-        </p:nvSpPr>
-        <p:spPr>
-          <a:xfrm>
-            <a:off x="868680" y="5550408"/>
+            <a:off x="868680" y="5760720"/>
             <a:ext cx="1051560" cy="274320"/>
           </a:xfrm>
           <a:prstGeom prst="roundRect">
@@ -6734,13 +8899,13 @@
       </p:sp>
       <p:sp>
         <p:nvSpPr>
-          <p:cNvPr id="27" name="TextBox 26"/>
-          <p:cNvSpPr txBox="1"/>
-          <p:nvPr/>
-        </p:nvSpPr>
-        <p:spPr>
-          <a:xfrm>
-            <a:off x="868680" y="5591556"/>
+          <p:cNvPr id="31" name="TextBox 30"/>
+          <p:cNvSpPr txBox="1"/>
+          <p:nvPr/>
+        </p:nvSpPr>
+        <p:spPr>
+          <a:xfrm>
+            <a:off x="868680" y="5801868"/>
             <a:ext cx="1051560" cy="228600"/>
           </a:xfrm>
           <a:prstGeom prst="rect">
@@ -6773,13 +8938,13 @@
       </p:sp>
       <p:sp>
         <p:nvSpPr>
-          <p:cNvPr id="28" name="TextBox 27"/>
-          <p:cNvSpPr txBox="1"/>
-          <p:nvPr/>
-        </p:nvSpPr>
-        <p:spPr>
-          <a:xfrm>
-            <a:off x="2194560" y="5559552"/>
+          <p:cNvPr id="32" name="TextBox 31"/>
+          <p:cNvSpPr txBox="1"/>
+          <p:nvPr/>
+        </p:nvSpPr>
+        <p:spPr>
+          <a:xfrm>
+            <a:off x="2194560" y="5779008"/>
             <a:ext cx="9144000" cy="365760"/>
           </a:xfrm>
           <a:prstGeom prst="rect">
@@ -6799,7 +8964,7 @@
               </a:lnSpc>
             </a:pPr>
             <a:r>
-              <a:rPr sz="1400" b="0">
+              <a:rPr sz="1300" b="0">
                 <a:solidFill>
                   <a:srgbClr val="F8FAFC"/>
                 </a:solidFill>
@@ -10117,7 +12282,7 @@
                 </a:solidFill>
                 <a:latin typeface="Helvetica Neue"/>
               </a:rPr>
-              <a:t>Private diagnosis note on the ticket</a:t>
+              <a:t>Private diagnosis note + auto-routing to the right group</a:t>
             </a:r>
           </a:p>
           <a:p>
@@ -10136,7 +12301,26 @@
                 </a:solidFill>
                 <a:latin typeface="Helvetica Neue"/>
               </a:rPr>
-              <a:t>Auto-triggered by Workflow Automator webhook</a:t>
+              <a:t>Blast-radius note on every new Change</a:t>
+            </a:r>
+          </a:p>
+          <a:p>
+            <a:pPr algn="l">
+              <a:lnSpc>
+                <a:spcPct val="110000"/>
+              </a:lnSpc>
+              <a:spcAft>
+                <a:spcPts val="800"/>
+              </a:spcAft>
+            </a:pPr>
+            <a:r>
+              <a:rPr sz="1300" b="0">
+                <a:solidFill>
+                  <a:srgbClr val="F8FAFC"/>
+                </a:solidFill>
+                <a:latin typeface="Helvetica Neue"/>
+              </a:rPr>
+              <a:t>Auto-triggered by Workflow Automator</a:t>
             </a:r>
           </a:p>
           <a:p>
@@ -10313,7 +12497,7 @@
                 </a:solidFill>
                 <a:latin typeface="Helvetica Neue"/>
               </a:rPr>
-              <a:t>SEE IT WORK</a:t>
+              <a:t>HOW THE PIECES CONNECT</a:t>
             </a:r>
           </a:p>
         </p:txBody>
@@ -10352,7 +12536,7 @@
                 </a:solidFill>
                 <a:latin typeface="Helvetica Neue"/>
               </a:rPr>
-              <a:t>Live demo</a:t>
+              <a:t>Architecture</a:t>
             </a:r>
           </a:p>
         </p:txBody>
@@ -10404,21 +12588,19 @@
         </p:nvSpPr>
         <p:spPr>
           <a:xfrm>
-            <a:off x="640080" y="1828800"/>
-            <a:ext cx="5349240" cy="1188720"/>
+            <a:off x="640080" y="1691640"/>
+            <a:ext cx="10881360" cy="4572000"/>
           </a:xfrm>
           <a:prstGeom prst="roundRect">
             <a:avLst>
-              <a:gd name="adj" fmla="val 6000"/>
+              <a:gd name="adj" fmla="val 2000"/>
             </a:avLst>
           </a:prstGeom>
           <a:solidFill>
-            <a:srgbClr val="151E32"/>
+            <a:srgbClr val="F8FAFC"/>
           </a:solidFill>
-          <a:ln w="12700">
-            <a:solidFill>
-              <a:srgbClr val="2A3650"/>
-            </a:solidFill>
+          <a:ln>
+            <a:noFill/>
           </a:ln>
           <a:effectLst/>
         </p:spPr>
@@ -10444,1212 +12626,30 @@
           </a:p>
         </p:txBody>
       </p:sp>
-      <p:sp>
-        <p:nvSpPr>
-          <p:cNvPr id="6" name="Oval 5"/>
-          <p:cNvSpPr/>
-          <p:nvPr/>
-        </p:nvSpPr>
-        <p:spPr>
-          <a:xfrm>
-            <a:off x="868680" y="2148840"/>
-            <a:ext cx="548640" cy="548640"/>
-          </a:xfrm>
-          <a:prstGeom prst="ellipse">
-            <a:avLst/>
-          </a:prstGeom>
-          <a:solidFill>
-            <a:srgbClr val="818CF8"/>
-          </a:solidFill>
-          <a:ln>
-            <a:noFill/>
-          </a:ln>
-          <a:effectLst/>
-        </p:spPr>
-        <p:style>
-          <a:lnRef idx="1">
-            <a:schemeClr val="accent1"/>
-          </a:lnRef>
-          <a:fillRef idx="3">
-            <a:schemeClr val="accent1"/>
-          </a:fillRef>
-          <a:effectRef idx="2">
-            <a:schemeClr val="accent1"/>
-          </a:effectRef>
-          <a:fontRef idx="minor">
-            <a:schemeClr val="lt1"/>
-          </a:fontRef>
-        </p:style>
-        <p:txBody>
-          <a:bodyPr rtlCol="0" anchor="ctr"/>
-          <a:lstStyle/>
-          <a:p>
-            <a:pPr algn="ctr"/>
-          </a:p>
-        </p:txBody>
-      </p:sp>
-      <p:sp>
-        <p:nvSpPr>
-          <p:cNvPr id="7" name="TextBox 6"/>
-          <p:cNvSpPr txBox="1"/>
-          <p:nvPr/>
-        </p:nvSpPr>
-        <p:spPr>
-          <a:xfrm>
-            <a:off x="868680" y="2258568"/>
-            <a:ext cx="548640" cy="365760"/>
-          </a:xfrm>
-          <a:prstGeom prst="rect">
-            <a:avLst/>
-          </a:prstGeom>
-          <a:noFill/>
-        </p:spPr>
-        <p:txBody>
-          <a:bodyPr wrap="square" lIns="0" rIns="0" tIns="0" bIns="0" anchor="t">
-            <a:spAutoFit/>
-          </a:bodyPr>
-          <a:lstStyle/>
-          <a:p>
-            <a:pPr algn="ctr">
-              <a:lnSpc>
-                <a:spcPct val="115000"/>
-              </a:lnSpc>
-            </a:pPr>
-            <a:r>
-              <a:rPr sz="1700" b="1">
-                <a:solidFill>
-                  <a:srgbClr val="F8FAFC"/>
-                </a:solidFill>
-                <a:latin typeface="Helvetica Neue"/>
-              </a:rPr>
-              <a:t>1</a:t>
-            </a:r>
-          </a:p>
-        </p:txBody>
-      </p:sp>
-      <p:sp>
-        <p:nvSpPr>
-          <p:cNvPr id="8" name="TextBox 7"/>
-          <p:cNvSpPr txBox="1"/>
-          <p:nvPr/>
-        </p:nvSpPr>
-        <p:spPr>
-          <a:xfrm>
-            <a:off x="1645920" y="2029968"/>
-            <a:ext cx="4114800" cy="365760"/>
-          </a:xfrm>
-          <a:prstGeom prst="rect">
-            <a:avLst/>
-          </a:prstGeom>
-          <a:noFill/>
-        </p:spPr>
-        <p:txBody>
-          <a:bodyPr wrap="square" lIns="0" rIns="0" tIns="0" bIns="0" anchor="t">
-            <a:spAutoFit/>
-          </a:bodyPr>
-          <a:lstStyle/>
-          <a:p>
-            <a:pPr algn="l">
-              <a:lnSpc>
-                <a:spcPct val="115000"/>
-              </a:lnSpc>
-            </a:pPr>
-            <a:r>
-              <a:rPr sz="1700" b="1">
-                <a:solidFill>
-                  <a:srgbClr val="F8FAFC"/>
-                </a:solidFill>
-                <a:latin typeface="Helvetica Neue"/>
-              </a:rPr>
-              <a:t>Connect</a:t>
-            </a:r>
-          </a:p>
-        </p:txBody>
-      </p:sp>
-      <p:sp>
-        <p:nvSpPr>
-          <p:cNvPr id="9" name="TextBox 8"/>
-          <p:cNvSpPr txBox="1"/>
-          <p:nvPr/>
-        </p:nvSpPr>
-        <p:spPr>
-          <a:xfrm>
-            <a:off x="1645920" y="2395728"/>
-            <a:ext cx="4160520" cy="548640"/>
-          </a:xfrm>
-          <a:prstGeom prst="rect">
-            <a:avLst/>
-          </a:prstGeom>
-          <a:noFill/>
-        </p:spPr>
-        <p:txBody>
-          <a:bodyPr wrap="square" lIns="0" rIns="0" tIns="0" bIns="0" anchor="t">
-            <a:spAutoFit/>
-          </a:bodyPr>
-          <a:lstStyle/>
-          <a:p>
-            <a:pPr algn="l">
-              <a:lnSpc>
-                <a:spcPct val="115000"/>
-              </a:lnSpc>
-            </a:pPr>
-            <a:r>
-              <a:rPr sz="1300" b="0">
-                <a:solidFill>
-                  <a:srgbClr val="94A3B8"/>
-                </a:solidFill>
-                <a:latin typeface="Helvetica Neue"/>
-              </a:rPr>
-              <a:t>Dashboard → Test Connection to the live Freshservice tenant</a:t>
-            </a:r>
-          </a:p>
-        </p:txBody>
-      </p:sp>
-      <p:sp>
-        <p:nvSpPr>
-          <p:cNvPr id="10" name="Rounded Rectangle 9"/>
-          <p:cNvSpPr/>
-          <p:nvPr/>
-        </p:nvSpPr>
-        <p:spPr>
-          <a:xfrm>
-            <a:off x="6172200" y="1828800"/>
-            <a:ext cx="5349240" cy="1188720"/>
-          </a:xfrm>
-          <a:prstGeom prst="roundRect">
-            <a:avLst>
-              <a:gd name="adj" fmla="val 6000"/>
-            </a:avLst>
-          </a:prstGeom>
-          <a:solidFill>
-            <a:srgbClr val="151E32"/>
-          </a:solidFill>
-          <a:ln w="12700">
-            <a:solidFill>
-              <a:srgbClr val="2A3650"/>
-            </a:solidFill>
-          </a:ln>
-          <a:effectLst/>
-        </p:spPr>
-        <p:style>
-          <a:lnRef idx="1">
-            <a:schemeClr val="accent1"/>
-          </a:lnRef>
-          <a:fillRef idx="3">
-            <a:schemeClr val="accent1"/>
-          </a:fillRef>
-          <a:effectRef idx="2">
-            <a:schemeClr val="accent1"/>
-          </a:effectRef>
-          <a:fontRef idx="minor">
-            <a:schemeClr val="lt1"/>
-          </a:fontRef>
-        </p:style>
-        <p:txBody>
-          <a:bodyPr rtlCol="0" anchor="ctr"/>
-          <a:lstStyle/>
-          <a:p>
-            <a:pPr algn="ctr"/>
-          </a:p>
-        </p:txBody>
-      </p:sp>
-      <p:sp>
-        <p:nvSpPr>
-          <p:cNvPr id="11" name="Oval 10"/>
-          <p:cNvSpPr/>
-          <p:nvPr/>
-        </p:nvSpPr>
-        <p:spPr>
-          <a:xfrm>
-            <a:off x="6400800" y="2148840"/>
-            <a:ext cx="548640" cy="548640"/>
-          </a:xfrm>
-          <a:prstGeom prst="ellipse">
-            <a:avLst/>
-          </a:prstGeom>
-          <a:solidFill>
-            <a:srgbClr val="818CF8"/>
-          </a:solidFill>
-          <a:ln>
-            <a:noFill/>
-          </a:ln>
-          <a:effectLst/>
-        </p:spPr>
-        <p:style>
-          <a:lnRef idx="1">
-            <a:schemeClr val="accent1"/>
-          </a:lnRef>
-          <a:fillRef idx="3">
-            <a:schemeClr val="accent1"/>
-          </a:fillRef>
-          <a:effectRef idx="2">
-            <a:schemeClr val="accent1"/>
-          </a:effectRef>
-          <a:fontRef idx="minor">
-            <a:schemeClr val="lt1"/>
-          </a:fontRef>
-        </p:style>
-        <p:txBody>
-          <a:bodyPr rtlCol="0" anchor="ctr"/>
-          <a:lstStyle/>
-          <a:p>
-            <a:pPr algn="ctr"/>
-          </a:p>
-        </p:txBody>
-      </p:sp>
-      <p:sp>
-        <p:nvSpPr>
-          <p:cNvPr id="12" name="TextBox 11"/>
-          <p:cNvSpPr txBox="1"/>
-          <p:nvPr/>
-        </p:nvSpPr>
-        <p:spPr>
-          <a:xfrm>
-            <a:off x="6400800" y="2258568"/>
-            <a:ext cx="548640" cy="365760"/>
-          </a:xfrm>
-          <a:prstGeom prst="rect">
-            <a:avLst/>
-          </a:prstGeom>
-          <a:noFill/>
-        </p:spPr>
-        <p:txBody>
-          <a:bodyPr wrap="square" lIns="0" rIns="0" tIns="0" bIns="0" anchor="t">
-            <a:spAutoFit/>
-          </a:bodyPr>
-          <a:lstStyle/>
-          <a:p>
-            <a:pPr algn="ctr">
-              <a:lnSpc>
-                <a:spcPct val="115000"/>
-              </a:lnSpc>
-            </a:pPr>
-            <a:r>
-              <a:rPr sz="1700" b="1">
-                <a:solidFill>
-                  <a:srgbClr val="F8FAFC"/>
-                </a:solidFill>
-                <a:latin typeface="Helvetica Neue"/>
-              </a:rPr>
-              <a:t>2</a:t>
-            </a:r>
-          </a:p>
-        </p:txBody>
-      </p:sp>
-      <p:sp>
-        <p:nvSpPr>
-          <p:cNvPr id="13" name="TextBox 12"/>
-          <p:cNvSpPr txBox="1"/>
-          <p:nvPr/>
-        </p:nvSpPr>
-        <p:spPr>
-          <a:xfrm>
-            <a:off x="7178040" y="2029968"/>
-            <a:ext cx="4114800" cy="365760"/>
-          </a:xfrm>
-          <a:prstGeom prst="rect">
-            <a:avLst/>
-          </a:prstGeom>
-          <a:noFill/>
-        </p:spPr>
-        <p:txBody>
-          <a:bodyPr wrap="square" lIns="0" rIns="0" tIns="0" bIns="0" anchor="t">
-            <a:spAutoFit/>
-          </a:bodyPr>
-          <a:lstStyle/>
-          <a:p>
-            <a:pPr algn="l">
-              <a:lnSpc>
-                <a:spcPct val="115000"/>
-              </a:lnSpc>
-            </a:pPr>
-            <a:r>
-              <a:rPr sz="1700" b="1">
-                <a:solidFill>
-                  <a:srgbClr val="F8FAFC"/>
-                </a:solidFill>
-                <a:latin typeface="Helvetica Neue"/>
-              </a:rPr>
-              <a:t>Sync</a:t>
-            </a:r>
-          </a:p>
-        </p:txBody>
-      </p:sp>
-      <p:sp>
-        <p:nvSpPr>
-          <p:cNvPr id="14" name="TextBox 13"/>
-          <p:cNvSpPr txBox="1"/>
-          <p:nvPr/>
-        </p:nvSpPr>
-        <p:spPr>
-          <a:xfrm>
-            <a:off x="7178040" y="2395728"/>
-            <a:ext cx="4160520" cy="548640"/>
-          </a:xfrm>
-          <a:prstGeom prst="rect">
-            <a:avLst/>
-          </a:prstGeom>
-          <a:noFill/>
-        </p:spPr>
-        <p:txBody>
-          <a:bodyPr wrap="square" lIns="0" rIns="0" tIns="0" bIns="0" anchor="t">
-            <a:spAutoFit/>
-          </a:bodyPr>
-          <a:lstStyle/>
-          <a:p>
-            <a:pPr algn="l">
-              <a:lnSpc>
-                <a:spcPct val="115000"/>
-              </a:lnSpc>
-            </a:pPr>
-            <a:r>
-              <a:rPr sz="1300" b="0">
-                <a:solidFill>
-                  <a:srgbClr val="94A3B8"/>
-                </a:solidFill>
-                <a:latin typeface="Helvetica Neue"/>
-              </a:rPr>
-              <a:t>Tickets → Incidents, groups → Teams, linked to affected services</a:t>
-            </a:r>
-          </a:p>
-        </p:txBody>
-      </p:sp>
-      <p:sp>
-        <p:nvSpPr>
-          <p:cNvPr id="15" name="Rounded Rectangle 14"/>
-          <p:cNvSpPr/>
-          <p:nvPr/>
-        </p:nvSpPr>
-        <p:spPr>
-          <a:xfrm>
-            <a:off x="640080" y="3200400"/>
-            <a:ext cx="5349240" cy="1188720"/>
-          </a:xfrm>
-          <a:prstGeom prst="roundRect">
-            <a:avLst>
-              <a:gd name="adj" fmla="val 6000"/>
-            </a:avLst>
-          </a:prstGeom>
-          <a:solidFill>
-            <a:srgbClr val="151E32"/>
-          </a:solidFill>
-          <a:ln w="12700">
-            <a:solidFill>
-              <a:srgbClr val="2A3650"/>
-            </a:solidFill>
-          </a:ln>
-          <a:effectLst/>
-        </p:spPr>
-        <p:style>
-          <a:lnRef idx="1">
-            <a:schemeClr val="accent1"/>
-          </a:lnRef>
-          <a:fillRef idx="3">
-            <a:schemeClr val="accent1"/>
-          </a:fillRef>
-          <a:effectRef idx="2">
-            <a:schemeClr val="accent1"/>
-          </a:effectRef>
-          <a:fontRef idx="minor">
-            <a:schemeClr val="lt1"/>
-          </a:fontRef>
-        </p:style>
-        <p:txBody>
-          <a:bodyPr rtlCol="0" anchor="ctr"/>
-          <a:lstStyle/>
-          <a:p>
-            <a:pPr algn="ctr"/>
-          </a:p>
-        </p:txBody>
-      </p:sp>
-      <p:sp>
-        <p:nvSpPr>
-          <p:cNvPr id="16" name="Oval 15"/>
-          <p:cNvSpPr/>
-          <p:nvPr/>
-        </p:nvSpPr>
-        <p:spPr>
-          <a:xfrm>
-            <a:off x="868680" y="3520440"/>
-            <a:ext cx="548640" cy="548640"/>
-          </a:xfrm>
-          <a:prstGeom prst="ellipse">
-            <a:avLst/>
-          </a:prstGeom>
-          <a:solidFill>
-            <a:srgbClr val="818CF8"/>
-          </a:solidFill>
-          <a:ln>
-            <a:noFill/>
-          </a:ln>
-          <a:effectLst/>
-        </p:spPr>
-        <p:style>
-          <a:lnRef idx="1">
-            <a:schemeClr val="accent1"/>
-          </a:lnRef>
-          <a:fillRef idx="3">
-            <a:schemeClr val="accent1"/>
-          </a:fillRef>
-          <a:effectRef idx="2">
-            <a:schemeClr val="accent1"/>
-          </a:effectRef>
-          <a:fontRef idx="minor">
-            <a:schemeClr val="lt1"/>
-          </a:fontRef>
-        </p:style>
-        <p:txBody>
-          <a:bodyPr rtlCol="0" anchor="ctr"/>
-          <a:lstStyle/>
-          <a:p>
-            <a:pPr algn="ctr"/>
-          </a:p>
-        </p:txBody>
-      </p:sp>
-      <p:sp>
-        <p:nvSpPr>
-          <p:cNvPr id="17" name="TextBox 16"/>
-          <p:cNvSpPr txBox="1"/>
-          <p:nvPr/>
-        </p:nvSpPr>
-        <p:spPr>
-          <a:xfrm>
-            <a:off x="868680" y="3630168"/>
-            <a:ext cx="548640" cy="365760"/>
-          </a:xfrm>
-          <a:prstGeom prst="rect">
-            <a:avLst/>
-          </a:prstGeom>
-          <a:noFill/>
-        </p:spPr>
-        <p:txBody>
-          <a:bodyPr wrap="square" lIns="0" rIns="0" tIns="0" bIns="0" anchor="t">
-            <a:spAutoFit/>
-          </a:bodyPr>
-          <a:lstStyle/>
-          <a:p>
-            <a:pPr algn="ctr">
-              <a:lnSpc>
-                <a:spcPct val="115000"/>
-              </a:lnSpc>
-            </a:pPr>
-            <a:r>
-              <a:rPr sz="1700" b="1">
-                <a:solidFill>
-                  <a:srgbClr val="F8FAFC"/>
-                </a:solidFill>
-                <a:latin typeface="Helvetica Neue"/>
-              </a:rPr>
-              <a:t>3</a:t>
-            </a:r>
-          </a:p>
-        </p:txBody>
-      </p:sp>
-      <p:sp>
-        <p:nvSpPr>
-          <p:cNvPr id="18" name="TextBox 17"/>
-          <p:cNvSpPr txBox="1"/>
-          <p:nvPr/>
-        </p:nvSpPr>
-        <p:spPr>
-          <a:xfrm>
-            <a:off x="1645920" y="3401568"/>
-            <a:ext cx="4114800" cy="365760"/>
-          </a:xfrm>
-          <a:prstGeom prst="rect">
-            <a:avLst/>
-          </a:prstGeom>
-          <a:noFill/>
-        </p:spPr>
-        <p:txBody>
-          <a:bodyPr wrap="square" lIns="0" rIns="0" tIns="0" bIns="0" anchor="t">
-            <a:spAutoFit/>
-          </a:bodyPr>
-          <a:lstStyle/>
-          <a:p>
-            <a:pPr algn="l">
-              <a:lnSpc>
-                <a:spcPct val="115000"/>
-              </a:lnSpc>
-            </a:pPr>
-            <a:r>
-              <a:rPr sz="1700" b="1">
-                <a:solidFill>
-                  <a:srgbClr val="F8FAFC"/>
-                </a:solidFill>
-                <a:latin typeface="Helvetica Neue"/>
-              </a:rPr>
-              <a:t>Explore</a:t>
-            </a:r>
-          </a:p>
-        </p:txBody>
-      </p:sp>
-      <p:sp>
-        <p:nvSpPr>
-          <p:cNvPr id="19" name="TextBox 18"/>
-          <p:cNvSpPr txBox="1"/>
-          <p:nvPr/>
-        </p:nvSpPr>
-        <p:spPr>
-          <a:xfrm>
-            <a:off x="1645920" y="3767328"/>
-            <a:ext cx="4160520" cy="548640"/>
-          </a:xfrm>
-          <a:prstGeom prst="rect">
-            <a:avLst/>
-          </a:prstGeom>
-          <a:noFill/>
-        </p:spPr>
-        <p:txBody>
-          <a:bodyPr wrap="square" lIns="0" rIns="0" tIns="0" bIns="0" anchor="t">
-            <a:spAutoFit/>
-          </a:bodyPr>
-          <a:lstStyle/>
-          <a:p>
-            <a:pPr algn="l">
-              <a:lnSpc>
-                <a:spcPct val="115000"/>
-              </a:lnSpc>
-            </a:pPr>
-            <a:r>
-              <a:rPr sz="1300" b="0">
-                <a:solidFill>
-                  <a:srgbClr val="94A3B8"/>
-                </a:solidFill>
-                <a:latin typeface="Helvetica Neue"/>
-              </a:rPr>
-              <a:t>Knowledge Graph → Payment Gateway Service → Blast Radius</a:t>
-            </a:r>
-          </a:p>
-        </p:txBody>
-      </p:sp>
-      <p:sp>
-        <p:nvSpPr>
-          <p:cNvPr id="20" name="Rounded Rectangle 19"/>
-          <p:cNvSpPr/>
-          <p:nvPr/>
-        </p:nvSpPr>
-        <p:spPr>
-          <a:xfrm>
-            <a:off x="6172200" y="3200400"/>
-            <a:ext cx="5349240" cy="1188720"/>
-          </a:xfrm>
-          <a:prstGeom prst="roundRect">
-            <a:avLst>
-              <a:gd name="adj" fmla="val 6000"/>
-            </a:avLst>
-          </a:prstGeom>
-          <a:solidFill>
-            <a:srgbClr val="151E32"/>
-          </a:solidFill>
-          <a:ln w="12700">
-            <a:solidFill>
-              <a:srgbClr val="2A3650"/>
-            </a:solidFill>
-          </a:ln>
-          <a:effectLst/>
-        </p:spPr>
-        <p:style>
-          <a:lnRef idx="1">
-            <a:schemeClr val="accent1"/>
-          </a:lnRef>
-          <a:fillRef idx="3">
-            <a:schemeClr val="accent1"/>
-          </a:fillRef>
-          <a:effectRef idx="2">
-            <a:schemeClr val="accent1"/>
-          </a:effectRef>
-          <a:fontRef idx="minor">
-            <a:schemeClr val="lt1"/>
-          </a:fontRef>
-        </p:style>
-        <p:txBody>
-          <a:bodyPr rtlCol="0" anchor="ctr"/>
-          <a:lstStyle/>
-          <a:p>
-            <a:pPr algn="ctr"/>
-          </a:p>
-        </p:txBody>
-      </p:sp>
-      <p:sp>
-        <p:nvSpPr>
-          <p:cNvPr id="21" name="Oval 20"/>
-          <p:cNvSpPr/>
-          <p:nvPr/>
-        </p:nvSpPr>
-        <p:spPr>
-          <a:xfrm>
-            <a:off x="6400800" y="3520440"/>
-            <a:ext cx="548640" cy="548640"/>
-          </a:xfrm>
-          <a:prstGeom prst="ellipse">
-            <a:avLst/>
-          </a:prstGeom>
-          <a:solidFill>
-            <a:srgbClr val="818CF8"/>
-          </a:solidFill>
-          <a:ln>
-            <a:noFill/>
-          </a:ln>
-          <a:effectLst/>
-        </p:spPr>
-        <p:style>
-          <a:lnRef idx="1">
-            <a:schemeClr val="accent1"/>
-          </a:lnRef>
-          <a:fillRef idx="3">
-            <a:schemeClr val="accent1"/>
-          </a:fillRef>
-          <a:effectRef idx="2">
-            <a:schemeClr val="accent1"/>
-          </a:effectRef>
-          <a:fontRef idx="minor">
-            <a:schemeClr val="lt1"/>
-          </a:fontRef>
-        </p:style>
-        <p:txBody>
-          <a:bodyPr rtlCol="0" anchor="ctr"/>
-          <a:lstStyle/>
-          <a:p>
-            <a:pPr algn="ctr"/>
-          </a:p>
-        </p:txBody>
-      </p:sp>
-      <p:sp>
-        <p:nvSpPr>
-          <p:cNvPr id="22" name="TextBox 21"/>
-          <p:cNvSpPr txBox="1"/>
-          <p:nvPr/>
-        </p:nvSpPr>
-        <p:spPr>
-          <a:xfrm>
-            <a:off x="6400800" y="3630168"/>
-            <a:ext cx="548640" cy="365760"/>
-          </a:xfrm>
-          <a:prstGeom prst="rect">
-            <a:avLst/>
-          </a:prstGeom>
-          <a:noFill/>
-        </p:spPr>
-        <p:txBody>
-          <a:bodyPr wrap="square" lIns="0" rIns="0" tIns="0" bIns="0" anchor="t">
-            <a:spAutoFit/>
-          </a:bodyPr>
-          <a:lstStyle/>
-          <a:p>
-            <a:pPr algn="ctr">
-              <a:lnSpc>
-                <a:spcPct val="115000"/>
-              </a:lnSpc>
-            </a:pPr>
-            <a:r>
-              <a:rPr sz="1700" b="1">
-                <a:solidFill>
-                  <a:srgbClr val="F8FAFC"/>
-                </a:solidFill>
-                <a:latin typeface="Helvetica Neue"/>
-              </a:rPr>
-              <a:t>4</a:t>
-            </a:r>
-          </a:p>
-        </p:txBody>
-      </p:sp>
-      <p:sp>
-        <p:nvSpPr>
-          <p:cNvPr id="23" name="TextBox 22"/>
-          <p:cNvSpPr txBox="1"/>
-          <p:nvPr/>
-        </p:nvSpPr>
-        <p:spPr>
-          <a:xfrm>
-            <a:off x="7178040" y="3401568"/>
-            <a:ext cx="4114800" cy="365760"/>
-          </a:xfrm>
-          <a:prstGeom prst="rect">
-            <a:avLst/>
-          </a:prstGeom>
-          <a:noFill/>
-        </p:spPr>
-        <p:txBody>
-          <a:bodyPr wrap="square" lIns="0" rIns="0" tIns="0" bIns="0" anchor="t">
-            <a:spAutoFit/>
-          </a:bodyPr>
-          <a:lstStyle/>
-          <a:p>
-            <a:pPr algn="l">
-              <a:lnSpc>
-                <a:spcPct val="115000"/>
-              </a:lnSpc>
-            </a:pPr>
-            <a:r>
-              <a:rPr sz="1700" b="1">
-                <a:solidFill>
-                  <a:srgbClr val="F8FAFC"/>
-                </a:solidFill>
-                <a:latin typeface="Helvetica Neue"/>
-              </a:rPr>
-              <a:t>Diagnose</a:t>
-            </a:r>
-          </a:p>
-        </p:txBody>
-      </p:sp>
-      <p:sp>
-        <p:nvSpPr>
-          <p:cNvPr id="24" name="TextBox 23"/>
-          <p:cNvSpPr txBox="1"/>
-          <p:nvPr/>
-        </p:nvSpPr>
-        <p:spPr>
-          <a:xfrm>
-            <a:off x="7178040" y="3767328"/>
-            <a:ext cx="4160520" cy="548640"/>
-          </a:xfrm>
-          <a:prstGeom prst="rect">
-            <a:avLst/>
-          </a:prstGeom>
-          <a:noFill/>
-        </p:spPr>
-        <p:txBody>
-          <a:bodyPr wrap="square" lIns="0" rIns="0" tIns="0" bIns="0" anchor="t">
-            <a:spAutoFit/>
-          </a:bodyPr>
-          <a:lstStyle/>
-          <a:p>
-            <a:pPr algn="l">
-              <a:lnSpc>
-                <a:spcPct val="115000"/>
-              </a:lnSpc>
-            </a:pPr>
-            <a:r>
-              <a:rPr sz="1300" b="0">
-                <a:solidFill>
-                  <a:srgbClr val="94A3B8"/>
-                </a:solidFill>
-                <a:latin typeface="Helvetica Neue"/>
-              </a:rPr>
-              <a:t>AI Diagnose a new ticket → private note appears in Freshservice</a:t>
-            </a:r>
-          </a:p>
-        </p:txBody>
-      </p:sp>
-      <p:sp>
-        <p:nvSpPr>
-          <p:cNvPr id="25" name="Rounded Rectangle 24"/>
-          <p:cNvSpPr/>
-          <p:nvPr/>
-        </p:nvSpPr>
-        <p:spPr>
-          <a:xfrm>
-            <a:off x="640080" y="4572000"/>
-            <a:ext cx="5349240" cy="1188720"/>
-          </a:xfrm>
-          <a:prstGeom prst="roundRect">
-            <a:avLst>
-              <a:gd name="adj" fmla="val 6000"/>
-            </a:avLst>
-          </a:prstGeom>
-          <a:solidFill>
-            <a:srgbClr val="151E32"/>
-          </a:solidFill>
-          <a:ln w="12700">
-            <a:solidFill>
-              <a:srgbClr val="2A3650"/>
-            </a:solidFill>
-          </a:ln>
-          <a:effectLst/>
-        </p:spPr>
-        <p:style>
-          <a:lnRef idx="1">
-            <a:schemeClr val="accent1"/>
-          </a:lnRef>
-          <a:fillRef idx="3">
-            <a:schemeClr val="accent1"/>
-          </a:fillRef>
-          <a:effectRef idx="2">
-            <a:schemeClr val="accent1"/>
-          </a:effectRef>
-          <a:fontRef idx="minor">
-            <a:schemeClr val="lt1"/>
-          </a:fontRef>
-        </p:style>
-        <p:txBody>
-          <a:bodyPr rtlCol="0" anchor="ctr"/>
-          <a:lstStyle/>
-          <a:p>
-            <a:pPr algn="ctr"/>
-          </a:p>
-        </p:txBody>
-      </p:sp>
-      <p:sp>
-        <p:nvSpPr>
-          <p:cNvPr id="26" name="Oval 25"/>
-          <p:cNvSpPr/>
-          <p:nvPr/>
-        </p:nvSpPr>
-        <p:spPr>
-          <a:xfrm>
-            <a:off x="868680" y="4892040"/>
-            <a:ext cx="548640" cy="548640"/>
-          </a:xfrm>
-          <a:prstGeom prst="ellipse">
-            <a:avLst/>
-          </a:prstGeom>
-          <a:solidFill>
-            <a:srgbClr val="818CF8"/>
-          </a:solidFill>
-          <a:ln>
-            <a:noFill/>
-          </a:ln>
-          <a:effectLst/>
-        </p:spPr>
-        <p:style>
-          <a:lnRef idx="1">
-            <a:schemeClr val="accent1"/>
-          </a:lnRef>
-          <a:fillRef idx="3">
-            <a:schemeClr val="accent1"/>
-          </a:fillRef>
-          <a:effectRef idx="2">
-            <a:schemeClr val="accent1"/>
-          </a:effectRef>
-          <a:fontRef idx="minor">
-            <a:schemeClr val="lt1"/>
-          </a:fontRef>
-        </p:style>
-        <p:txBody>
-          <a:bodyPr rtlCol="0" anchor="ctr"/>
-          <a:lstStyle/>
-          <a:p>
-            <a:pPr algn="ctr"/>
-          </a:p>
-        </p:txBody>
-      </p:sp>
-      <p:sp>
-        <p:nvSpPr>
-          <p:cNvPr id="27" name="TextBox 26"/>
-          <p:cNvSpPr txBox="1"/>
-          <p:nvPr/>
-        </p:nvSpPr>
-        <p:spPr>
-          <a:xfrm>
-            <a:off x="868680" y="5001768"/>
-            <a:ext cx="548640" cy="365760"/>
-          </a:xfrm>
-          <a:prstGeom prst="rect">
-            <a:avLst/>
-          </a:prstGeom>
-          <a:noFill/>
-        </p:spPr>
-        <p:txBody>
-          <a:bodyPr wrap="square" lIns="0" rIns="0" tIns="0" bIns="0" anchor="t">
-            <a:spAutoFit/>
-          </a:bodyPr>
-          <a:lstStyle/>
-          <a:p>
-            <a:pPr algn="ctr">
-              <a:lnSpc>
-                <a:spcPct val="115000"/>
-              </a:lnSpc>
-            </a:pPr>
-            <a:r>
-              <a:rPr sz="1700" b="1">
-                <a:solidFill>
-                  <a:srgbClr val="F8FAFC"/>
-                </a:solidFill>
-                <a:latin typeface="Helvetica Neue"/>
-              </a:rPr>
-              <a:t>5</a:t>
-            </a:r>
-          </a:p>
-        </p:txBody>
-      </p:sp>
-      <p:sp>
-        <p:nvSpPr>
-          <p:cNvPr id="28" name="TextBox 27"/>
-          <p:cNvSpPr txBox="1"/>
-          <p:nvPr/>
-        </p:nvSpPr>
-        <p:spPr>
-          <a:xfrm>
-            <a:off x="1645920" y="4773168"/>
-            <a:ext cx="4114800" cy="365760"/>
-          </a:xfrm>
-          <a:prstGeom prst="rect">
-            <a:avLst/>
-          </a:prstGeom>
-          <a:noFill/>
-        </p:spPr>
-        <p:txBody>
-          <a:bodyPr wrap="square" lIns="0" rIns="0" tIns="0" bIns="0" anchor="t">
-            <a:spAutoFit/>
-          </a:bodyPr>
-          <a:lstStyle/>
-          <a:p>
-            <a:pPr algn="l">
-              <a:lnSpc>
-                <a:spcPct val="115000"/>
-              </a:lnSpc>
-            </a:pPr>
-            <a:r>
-              <a:rPr sz="1700" b="1">
-                <a:solidFill>
-                  <a:srgbClr val="F8FAFC"/>
-                </a:solidFill>
-                <a:latin typeface="Helvetica Neue"/>
-              </a:rPr>
-              <a:t>Automate</a:t>
-            </a:r>
-          </a:p>
-        </p:txBody>
-      </p:sp>
-      <p:sp>
-        <p:nvSpPr>
-          <p:cNvPr id="29" name="TextBox 28"/>
-          <p:cNvSpPr txBox="1"/>
-          <p:nvPr/>
-        </p:nvSpPr>
-        <p:spPr>
-          <a:xfrm>
-            <a:off x="1645920" y="5138928"/>
-            <a:ext cx="4160520" cy="548640"/>
-          </a:xfrm>
-          <a:prstGeom prst="rect">
-            <a:avLst/>
-          </a:prstGeom>
-          <a:noFill/>
-        </p:spPr>
-        <p:txBody>
-          <a:bodyPr wrap="square" lIns="0" rIns="0" tIns="0" bIns="0" anchor="t">
-            <a:spAutoFit/>
-          </a:bodyPr>
-          <a:lstStyle/>
-          <a:p>
-            <a:pPr algn="l">
-              <a:lnSpc>
-                <a:spcPct val="115000"/>
-              </a:lnSpc>
-            </a:pPr>
-            <a:r>
-              <a:rPr sz="1300" b="0">
-                <a:solidFill>
-                  <a:srgbClr val="94A3B8"/>
-                </a:solidFill>
-                <a:latin typeface="Helvetica Neue"/>
-              </a:rPr>
-              <a:t>Workflow Automator: Ticket is Raised → webhook → note, no clicks</a:t>
-            </a:r>
-          </a:p>
-        </p:txBody>
-      </p:sp>
-      <p:sp>
-        <p:nvSpPr>
-          <p:cNvPr id="30" name="Rounded Rectangle 29"/>
-          <p:cNvSpPr/>
-          <p:nvPr/>
-        </p:nvSpPr>
-        <p:spPr>
-          <a:xfrm>
-            <a:off x="6172200" y="4572000"/>
-            <a:ext cx="5349240" cy="1188720"/>
-          </a:xfrm>
-          <a:prstGeom prst="roundRect">
-            <a:avLst>
-              <a:gd name="adj" fmla="val 6000"/>
-            </a:avLst>
-          </a:prstGeom>
-          <a:solidFill>
-            <a:srgbClr val="151E32"/>
-          </a:solidFill>
-          <a:ln w="12700">
-            <a:solidFill>
-              <a:srgbClr val="2A3650"/>
-            </a:solidFill>
-          </a:ln>
-          <a:effectLst/>
-        </p:spPr>
-        <p:style>
-          <a:lnRef idx="1">
-            <a:schemeClr val="accent1"/>
-          </a:lnRef>
-          <a:fillRef idx="3">
-            <a:schemeClr val="accent1"/>
-          </a:fillRef>
-          <a:effectRef idx="2">
-            <a:schemeClr val="accent1"/>
-          </a:effectRef>
-          <a:fontRef idx="minor">
-            <a:schemeClr val="lt1"/>
-          </a:fontRef>
-        </p:style>
-        <p:txBody>
-          <a:bodyPr rtlCol="0" anchor="ctr"/>
-          <a:lstStyle/>
-          <a:p>
-            <a:pPr algn="ctr"/>
-          </a:p>
-        </p:txBody>
-      </p:sp>
-      <p:sp>
-        <p:nvSpPr>
-          <p:cNvPr id="31" name="Oval 30"/>
-          <p:cNvSpPr/>
-          <p:nvPr/>
-        </p:nvSpPr>
-        <p:spPr>
-          <a:xfrm>
-            <a:off x="6400800" y="4892040"/>
-            <a:ext cx="548640" cy="548640"/>
-          </a:xfrm>
-          <a:prstGeom prst="ellipse">
-            <a:avLst/>
-          </a:prstGeom>
-          <a:solidFill>
-            <a:srgbClr val="818CF8"/>
-          </a:solidFill>
-          <a:ln>
-            <a:noFill/>
-          </a:ln>
-          <a:effectLst/>
-        </p:spPr>
-        <p:style>
-          <a:lnRef idx="1">
-            <a:schemeClr val="accent1"/>
-          </a:lnRef>
-          <a:fillRef idx="3">
-            <a:schemeClr val="accent1"/>
-          </a:fillRef>
-          <a:effectRef idx="2">
-            <a:schemeClr val="accent1"/>
-          </a:effectRef>
-          <a:fontRef idx="minor">
-            <a:schemeClr val="lt1"/>
-          </a:fontRef>
-        </p:style>
-        <p:txBody>
-          <a:bodyPr rtlCol="0" anchor="ctr"/>
-          <a:lstStyle/>
-          <a:p>
-            <a:pPr algn="ctr"/>
-          </a:p>
-        </p:txBody>
-      </p:sp>
-      <p:sp>
-        <p:nvSpPr>
-          <p:cNvPr id="32" name="TextBox 31"/>
-          <p:cNvSpPr txBox="1"/>
-          <p:nvPr/>
-        </p:nvSpPr>
-        <p:spPr>
-          <a:xfrm>
-            <a:off x="6400800" y="5001768"/>
-            <a:ext cx="548640" cy="365760"/>
-          </a:xfrm>
-          <a:prstGeom prst="rect">
-            <a:avLst/>
-          </a:prstGeom>
-          <a:noFill/>
-        </p:spPr>
-        <p:txBody>
-          <a:bodyPr wrap="square" lIns="0" rIns="0" tIns="0" bIns="0" anchor="t">
-            <a:spAutoFit/>
-          </a:bodyPr>
-          <a:lstStyle/>
-          <a:p>
-            <a:pPr algn="ctr">
-              <a:lnSpc>
-                <a:spcPct val="115000"/>
-              </a:lnSpc>
-            </a:pPr>
-            <a:r>
-              <a:rPr sz="1700" b="1">
-                <a:solidFill>
-                  <a:srgbClr val="F8FAFC"/>
-                </a:solidFill>
-                <a:latin typeface="Helvetica Neue"/>
-              </a:rPr>
-              <a:t>6</a:t>
-            </a:r>
-          </a:p>
-        </p:txBody>
-      </p:sp>
-      <p:sp>
-        <p:nvSpPr>
-          <p:cNvPr id="33" name="TextBox 32"/>
-          <p:cNvSpPr txBox="1"/>
-          <p:nvPr/>
-        </p:nvSpPr>
-        <p:spPr>
-          <a:xfrm>
-            <a:off x="7178040" y="4773168"/>
-            <a:ext cx="4114800" cy="365760"/>
-          </a:xfrm>
-          <a:prstGeom prst="rect">
-            <a:avLst/>
-          </a:prstGeom>
-          <a:noFill/>
-        </p:spPr>
-        <p:txBody>
-          <a:bodyPr wrap="square" lIns="0" rIns="0" tIns="0" bIns="0" anchor="t">
-            <a:spAutoFit/>
-          </a:bodyPr>
-          <a:lstStyle/>
-          <a:p>
-            <a:pPr algn="l">
-              <a:lnSpc>
-                <a:spcPct val="115000"/>
-              </a:lnSpc>
-            </a:pPr>
-            <a:r>
-              <a:rPr sz="1700" b="1">
-                <a:solidFill>
-                  <a:srgbClr val="F8FAFC"/>
-                </a:solidFill>
-                <a:latin typeface="Helvetica Neue"/>
-              </a:rPr>
-              <a:t>Plan</a:t>
-            </a:r>
-          </a:p>
-        </p:txBody>
-      </p:sp>
-      <p:sp>
-        <p:nvSpPr>
-          <p:cNvPr id="34" name="TextBox 33"/>
-          <p:cNvSpPr txBox="1"/>
-          <p:nvPr/>
-        </p:nvSpPr>
-        <p:spPr>
-          <a:xfrm>
-            <a:off x="7178040" y="5138928"/>
-            <a:ext cx="4160520" cy="548640"/>
-          </a:xfrm>
-          <a:prstGeom prst="rect">
-            <a:avLst/>
-          </a:prstGeom>
-          <a:noFill/>
-        </p:spPr>
-        <p:txBody>
-          <a:bodyPr wrap="square" lIns="0" rIns="0" tIns="0" bIns="0" anchor="t">
-            <a:spAutoFit/>
-          </a:bodyPr>
-          <a:lstStyle/>
-          <a:p>
-            <a:pPr algn="l">
-              <a:lnSpc>
-                <a:spcPct val="115000"/>
-              </a:lnSpc>
-            </a:pPr>
-            <a:r>
-              <a:rPr sz="1300" b="0">
-                <a:solidFill>
-                  <a:srgbClr val="94A3B8"/>
-                </a:solidFill>
-                <a:latin typeface="Helvetica Neue"/>
-              </a:rPr>
-              <a:t>Analyzer: "Add WhatsApp notifications": agent handoffs + trace</a:t>
-            </a:r>
-          </a:p>
-        </p:txBody>
-      </p:sp>
+      <p:pic>
+        <p:nvPicPr>
+          <p:cNvPr id="6" name="Picture 5" descr="architecture-1.png"/>
+          <p:cNvPicPr>
+            <a:picLocks noChangeAspect="1"/>
+          </p:cNvPicPr>
+          <p:nvPr/>
+        </p:nvPicPr>
+        <p:blipFill>
+          <a:blip r:embed="rId3"/>
+          <a:stretch>
+            <a:fillRect/>
+          </a:stretch>
+        </p:blipFill>
+        <p:spPr>
+          <a:xfrm>
+            <a:off x="1783080" y="1783080"/>
+            <a:ext cx="8115731" cy="4389120"/>
+          </a:xfrm>
+          <a:prstGeom prst="rect">
+            <a:avLst/>
+          </a:prstGeom>
+        </p:spPr>
+      </p:pic>
     </p:spTree>
   </p:cSld>
   <p:clrMapOvr>
@@ -11710,7 +12710,7 @@
                 </a:solidFill>
                 <a:latin typeface="Helvetica Neue"/>
               </a:rPr>
-              <a:t>TARGET CUSTOMERS &amp; VALUE</a:t>
+              <a:t>INTEGRATION MAP</a:t>
             </a:r>
           </a:p>
         </p:txBody>
@@ -11749,7 +12749,7 @@
                 </a:solidFill>
                 <a:latin typeface="Helvetica Neue"/>
               </a:rPr>
-              <a:t>Who it's for, and why they'll want it</a:t>
+              <a:t>Every module plugs into Freshservice</a:t>
             </a:r>
           </a:p>
         </p:txBody>
@@ -11795,14 +12795,131 @@
       </p:sp>
       <p:sp>
         <p:nvSpPr>
-          <p:cNvPr id="5" name="Rounded Rectangle 4"/>
+          <p:cNvPr id="5" name="TextBox 4"/>
+          <p:cNvSpPr txBox="1"/>
+          <p:nvPr/>
+        </p:nvSpPr>
+        <p:spPr>
+          <a:xfrm>
+            <a:off x="868680" y="1737360"/>
+            <a:ext cx="2743200" cy="274320"/>
+          </a:xfrm>
+          <a:prstGeom prst="rect">
+            <a:avLst/>
+          </a:prstGeom>
+          <a:noFill/>
+        </p:spPr>
+        <p:txBody>
+          <a:bodyPr wrap="square" lIns="0" rIns="0" tIns="0" bIns="0" anchor="t">
+            <a:spAutoFit/>
+          </a:bodyPr>
+          <a:lstStyle/>
+          <a:p>
+            <a:pPr algn="l">
+              <a:lnSpc>
+                <a:spcPct val="115000"/>
+              </a:lnSpc>
+            </a:pPr>
+            <a:r>
+              <a:rPr sz="1100" b="1">
+                <a:solidFill>
+                  <a:srgbClr val="94A3B8"/>
+                </a:solidFill>
+                <a:latin typeface="Helvetica Neue"/>
+              </a:rPr>
+              <a:t>FRESHSERVICE EVENT</a:t>
+            </a:r>
+          </a:p>
+        </p:txBody>
+      </p:sp>
+      <p:sp>
+        <p:nvSpPr>
+          <p:cNvPr id="6" name="TextBox 5"/>
+          <p:cNvSpPr txBox="1"/>
+          <p:nvPr/>
+        </p:nvSpPr>
+        <p:spPr>
+          <a:xfrm>
+            <a:off x="3429000" y="1737360"/>
+            <a:ext cx="2926080" cy="274320"/>
+          </a:xfrm>
+          <a:prstGeom prst="rect">
+            <a:avLst/>
+          </a:prstGeom>
+          <a:noFill/>
+        </p:spPr>
+        <p:txBody>
+          <a:bodyPr wrap="square" lIns="0" rIns="0" tIns="0" bIns="0" anchor="t">
+            <a:spAutoFit/>
+          </a:bodyPr>
+          <a:lstStyle/>
+          <a:p>
+            <a:pPr algn="l">
+              <a:lnSpc>
+                <a:spcPct val="115000"/>
+              </a:lnSpc>
+            </a:pPr>
+            <a:r>
+              <a:rPr sz="1100" b="1">
+                <a:solidFill>
+                  <a:srgbClr val="94A3B8"/>
+                </a:solidFill>
+                <a:latin typeface="Helvetica Neue"/>
+              </a:rPr>
+              <a:t>CODEATLAS</a:t>
+            </a:r>
+          </a:p>
+        </p:txBody>
+      </p:sp>
+      <p:sp>
+        <p:nvSpPr>
+          <p:cNvPr id="7" name="TextBox 6"/>
+          <p:cNvSpPr txBox="1"/>
+          <p:nvPr/>
+        </p:nvSpPr>
+        <p:spPr>
+          <a:xfrm>
+            <a:off x="6446520" y="1737360"/>
+            <a:ext cx="3657600" cy="274320"/>
+          </a:xfrm>
+          <a:prstGeom prst="rect">
+            <a:avLst/>
+          </a:prstGeom>
+          <a:noFill/>
+        </p:spPr>
+        <p:txBody>
+          <a:bodyPr wrap="square" lIns="0" rIns="0" tIns="0" bIns="0" anchor="t">
+            <a:spAutoFit/>
+          </a:bodyPr>
+          <a:lstStyle/>
+          <a:p>
+            <a:pPr algn="l">
+              <a:lnSpc>
+                <a:spcPct val="115000"/>
+              </a:lnSpc>
+            </a:pPr>
+            <a:r>
+              <a:rPr sz="1100" b="1">
+                <a:solidFill>
+                  <a:srgbClr val="94A3B8"/>
+                </a:solidFill>
+                <a:latin typeface="Helvetica Neue"/>
+              </a:rPr>
+              <a:t>WRITTEN BACK</a:t>
+            </a:r>
+          </a:p>
+        </p:txBody>
+      </p:sp>
+      <p:sp>
+        <p:nvSpPr>
+          <p:cNvPr id="8" name="Rounded Rectangle 7"/>
           <p:cNvSpPr/>
           <p:nvPr/>
         </p:nvSpPr>
         <p:spPr>
           <a:xfrm>
-            <a:off x="640080" y="1828800"/>
-            <a:ext cx="5303520" cy="2103120"/>
+            <a:off x="640080" y="2057400"/>
+            <a:ext cx="10881360" cy="566928"/>
           </a:xfrm>
           <a:prstGeom prst="roundRect">
             <a:avLst>
@@ -11843,23 +12960,144 @@
       </p:sp>
       <p:sp>
         <p:nvSpPr>
-          <p:cNvPr id="6" name="Rectangle 5"/>
+          <p:cNvPr id="9" name="TextBox 8"/>
+          <p:cNvSpPr txBox="1"/>
+          <p:nvPr/>
+        </p:nvSpPr>
+        <p:spPr>
+          <a:xfrm>
+            <a:off x="868680" y="2212848"/>
+            <a:ext cx="2468880" cy="320040"/>
+          </a:xfrm>
+          <a:prstGeom prst="rect">
+            <a:avLst/>
+          </a:prstGeom>
+          <a:noFill/>
+        </p:spPr>
+        <p:txBody>
+          <a:bodyPr wrap="square" lIns="0" rIns="0" tIns="0" bIns="0" anchor="t">
+            <a:spAutoFit/>
+          </a:bodyPr>
+          <a:lstStyle/>
+          <a:p>
+            <a:pPr algn="l">
+              <a:lnSpc>
+                <a:spcPct val="115000"/>
+              </a:lnSpc>
+            </a:pPr>
+            <a:r>
+              <a:rPr sz="1400" b="1">
+                <a:solidFill>
+                  <a:srgbClr val="F8FAFC"/>
+                </a:solidFill>
+                <a:latin typeface="Helvetica Neue"/>
+              </a:rPr>
+              <a:t>Ticket is raised</a:t>
+            </a:r>
+          </a:p>
+        </p:txBody>
+      </p:sp>
+      <p:sp>
+        <p:nvSpPr>
+          <p:cNvPr id="10" name="TextBox 9"/>
+          <p:cNvSpPr txBox="1"/>
+          <p:nvPr/>
+        </p:nvSpPr>
+        <p:spPr>
+          <a:xfrm>
+            <a:off x="3429000" y="2221992"/>
+            <a:ext cx="2926080" cy="320040"/>
+          </a:xfrm>
+          <a:prstGeom prst="rect">
+            <a:avLst/>
+          </a:prstGeom>
+          <a:noFill/>
+        </p:spPr>
+        <p:txBody>
+          <a:bodyPr wrap="square" lIns="0" rIns="0" tIns="0" bIns="0" anchor="t">
+            <a:spAutoFit/>
+          </a:bodyPr>
+          <a:lstStyle/>
+          <a:p>
+            <a:pPr algn="l">
+              <a:lnSpc>
+                <a:spcPct val="115000"/>
+              </a:lnSpc>
+            </a:pPr>
+            <a:r>
+              <a:rPr sz="1300" b="0">
+                <a:solidFill>
+                  <a:srgbClr val="818CF8"/>
+                </a:solidFill>
+                <a:latin typeface="Helvetica Neue"/>
+              </a:rPr>
+              <a:t>Incident Context Agent</a:t>
+            </a:r>
+          </a:p>
+        </p:txBody>
+      </p:sp>
+      <p:sp>
+        <p:nvSpPr>
+          <p:cNvPr id="11" name="TextBox 10"/>
+          <p:cNvSpPr txBox="1"/>
+          <p:nvPr/>
+        </p:nvSpPr>
+        <p:spPr>
+          <a:xfrm>
+            <a:off x="6446520" y="2221992"/>
+            <a:ext cx="3840480" cy="320040"/>
+          </a:xfrm>
+          <a:prstGeom prst="rect">
+            <a:avLst/>
+          </a:prstGeom>
+          <a:noFill/>
+        </p:spPr>
+        <p:txBody>
+          <a:bodyPr wrap="square" lIns="0" rIns="0" tIns="0" bIns="0" anchor="t">
+            <a:spAutoFit/>
+          </a:bodyPr>
+          <a:lstStyle/>
+          <a:p>
+            <a:pPr algn="l">
+              <a:lnSpc>
+                <a:spcPct val="115000"/>
+              </a:lnSpc>
+            </a:pPr>
+            <a:r>
+              <a:rPr sz="1200" b="0">
+                <a:solidFill>
+                  <a:srgbClr val="94A3B8"/>
+                </a:solidFill>
+                <a:latin typeface="Helvetica Neue"/>
+              </a:rPr>
+              <a:t>Diagnosis note + auto-route to the right group</a:t>
+            </a:r>
+          </a:p>
+        </p:txBody>
+      </p:sp>
+      <p:sp>
+        <p:nvSpPr>
+          <p:cNvPr id="12" name="Rounded Rectangle 11"/>
           <p:cNvSpPr/>
           <p:nvPr/>
         </p:nvSpPr>
         <p:spPr>
           <a:xfrm>
-            <a:off x="640080" y="2057400"/>
-            <a:ext cx="54864" cy="457200"/>
-          </a:xfrm>
-          <a:prstGeom prst="rect">
-            <a:avLst/>
+            <a:off x="10332720" y="2203704"/>
+            <a:ext cx="1005840" cy="274320"/>
+          </a:xfrm>
+          <a:prstGeom prst="roundRect">
+            <a:avLst>
+              <a:gd name="adj" fmla="val 50000"/>
+            </a:avLst>
           </a:prstGeom>
           <a:solidFill>
-            <a:srgbClr val="2DD4BF"/>
+            <a:srgbClr val="0B1120"/>
           </a:solidFill>
-          <a:ln>
-            <a:noFill/>
+          <a:ln w="12700">
+            <a:solidFill>
+              <a:srgbClr val="2DD4BF"/>
+            </a:solidFill>
           </a:ln>
           <a:effectLst/>
         </p:spPr>
@@ -11887,14 +13125,14 @@
       </p:sp>
       <p:sp>
         <p:nvSpPr>
-          <p:cNvPr id="7" name="TextBox 6"/>
-          <p:cNvSpPr txBox="1"/>
-          <p:nvPr/>
-        </p:nvSpPr>
-        <p:spPr>
-          <a:xfrm>
-            <a:off x="914400" y="2029968"/>
-            <a:ext cx="4800600" cy="548640"/>
+          <p:cNvPr id="13" name="TextBox 12"/>
+          <p:cNvSpPr txBox="1"/>
+          <p:nvPr/>
+        </p:nvSpPr>
+        <p:spPr>
+          <a:xfrm>
+            <a:off x="10332720" y="2244852"/>
+            <a:ext cx="1005840" cy="228600"/>
           </a:xfrm>
           <a:prstGeom prst="rect">
             <a:avLst/>
@@ -11907,72 +13145,33 @@
           </a:bodyPr>
           <a:lstStyle/>
           <a:p>
-            <a:pPr algn="l">
-              <a:lnSpc>
-                <a:spcPct val="115000"/>
-              </a:lnSpc>
-            </a:pPr>
-            <a:r>
-              <a:rPr sz="1700" b="1">
-                <a:solidFill>
-                  <a:srgbClr val="F8FAFC"/>
-                </a:solidFill>
-                <a:latin typeface="Helvetica Neue"/>
-              </a:rPr>
-              <a:t>Primary</a:t>
-            </a:r>
-          </a:p>
-        </p:txBody>
-      </p:sp>
-      <p:sp>
-        <p:nvSpPr>
-          <p:cNvPr id="8" name="TextBox 7"/>
-          <p:cNvSpPr txBox="1"/>
-          <p:nvPr/>
-        </p:nvSpPr>
-        <p:spPr>
-          <a:xfrm>
-            <a:off x="914400" y="2560320"/>
-            <a:ext cx="4800600" cy="1234440"/>
-          </a:xfrm>
-          <a:prstGeom prst="rect">
-            <a:avLst/>
-          </a:prstGeom>
-          <a:noFill/>
-        </p:spPr>
-        <p:txBody>
-          <a:bodyPr wrap="square" lIns="0" rIns="0" tIns="0" bIns="0" anchor="t">
-            <a:spAutoFit/>
-          </a:bodyPr>
-          <a:lstStyle/>
-          <a:p>
-            <a:pPr algn="l">
-              <a:lnSpc>
-                <a:spcPct val="115000"/>
-              </a:lnSpc>
-            </a:pPr>
-            <a:r>
-              <a:rPr sz="1500" b="0">
-                <a:solidFill>
-                  <a:srgbClr val="94A3B8"/>
-                </a:solidFill>
-                <a:latin typeface="Helvetica Neue"/>
-              </a:rPr>
-              <a:t>Mid-size software &amp; digital companies (200–2,000 employees) running IT/engineering incidents in Freshservice, with 20+ microservices and several teams.</a:t>
-            </a:r>
-          </a:p>
-        </p:txBody>
-      </p:sp>
-      <p:sp>
-        <p:nvSpPr>
-          <p:cNvPr id="9" name="Rounded Rectangle 8"/>
+            <a:pPr algn="ctr">
+              <a:lnSpc>
+                <a:spcPct val="115000"/>
+              </a:lnSpc>
+            </a:pPr>
+            <a:r>
+              <a:rPr sz="1000" b="1">
+                <a:solidFill>
+                  <a:srgbClr val="2DD4BF"/>
+                </a:solidFill>
+                <a:latin typeface="Helvetica Neue"/>
+              </a:rPr>
+              <a:t>LIVE</a:t>
+            </a:r>
+          </a:p>
+        </p:txBody>
+      </p:sp>
+      <p:sp>
+        <p:nvSpPr>
+          <p:cNvPr id="14" name="Rounded Rectangle 13"/>
           <p:cNvSpPr/>
           <p:nvPr/>
         </p:nvSpPr>
         <p:spPr>
           <a:xfrm>
-            <a:off x="6217920" y="1828800"/>
-            <a:ext cx="5303520" cy="2103120"/>
+            <a:off x="640080" y="2743200"/>
+            <a:ext cx="10881360" cy="566928"/>
           </a:xfrm>
           <a:prstGeom prst="roundRect">
             <a:avLst>
@@ -12013,183 +13212,139 @@
       </p:sp>
       <p:sp>
         <p:nvSpPr>
-          <p:cNvPr id="10" name="Rectangle 9"/>
+          <p:cNvPr id="15" name="TextBox 14"/>
+          <p:cNvSpPr txBox="1"/>
+          <p:nvPr/>
+        </p:nvSpPr>
+        <p:spPr>
+          <a:xfrm>
+            <a:off x="868680" y="2898648"/>
+            <a:ext cx="2468880" cy="320040"/>
+          </a:xfrm>
+          <a:prstGeom prst="rect">
+            <a:avLst/>
+          </a:prstGeom>
+          <a:noFill/>
+        </p:spPr>
+        <p:txBody>
+          <a:bodyPr wrap="square" lIns="0" rIns="0" tIns="0" bIns="0" anchor="t">
+            <a:spAutoFit/>
+          </a:bodyPr>
+          <a:lstStyle/>
+          <a:p>
+            <a:pPr algn="l">
+              <a:lnSpc>
+                <a:spcPct val="115000"/>
+              </a:lnSpc>
+            </a:pPr>
+            <a:r>
+              <a:rPr sz="1400" b="1">
+                <a:solidFill>
+                  <a:srgbClr val="F8FAFC"/>
+                </a:solidFill>
+                <a:latin typeface="Helvetica Neue"/>
+              </a:rPr>
+              <a:t>Change is created</a:t>
+            </a:r>
+          </a:p>
+        </p:txBody>
+      </p:sp>
+      <p:sp>
+        <p:nvSpPr>
+          <p:cNvPr id="16" name="TextBox 15"/>
+          <p:cNvSpPr txBox="1"/>
+          <p:nvPr/>
+        </p:nvSpPr>
+        <p:spPr>
+          <a:xfrm>
+            <a:off x="3429000" y="2907792"/>
+            <a:ext cx="2926080" cy="320040"/>
+          </a:xfrm>
+          <a:prstGeom prst="rect">
+            <a:avLst/>
+          </a:prstGeom>
+          <a:noFill/>
+        </p:spPr>
+        <p:txBody>
+          <a:bodyPr wrap="square" lIns="0" rIns="0" tIns="0" bIns="0" anchor="t">
+            <a:spAutoFit/>
+          </a:bodyPr>
+          <a:lstStyle/>
+          <a:p>
+            <a:pPr algn="l">
+              <a:lnSpc>
+                <a:spcPct val="115000"/>
+              </a:lnSpc>
+            </a:pPr>
+            <a:r>
+              <a:rPr sz="1300" b="0">
+                <a:solidFill>
+                  <a:srgbClr val="818CF8"/>
+                </a:solidFill>
+                <a:latin typeface="Helvetica Neue"/>
+              </a:rPr>
+              <a:t>Impact → Ontology → Expert pipeline</a:t>
+            </a:r>
+          </a:p>
+        </p:txBody>
+      </p:sp>
+      <p:sp>
+        <p:nvSpPr>
+          <p:cNvPr id="17" name="TextBox 16"/>
+          <p:cNvSpPr txBox="1"/>
+          <p:nvPr/>
+        </p:nvSpPr>
+        <p:spPr>
+          <a:xfrm>
+            <a:off x="6446520" y="2907792"/>
+            <a:ext cx="3840480" cy="320040"/>
+          </a:xfrm>
+          <a:prstGeom prst="rect">
+            <a:avLst/>
+          </a:prstGeom>
+          <a:noFill/>
+        </p:spPr>
+        <p:txBody>
+          <a:bodyPr wrap="square" lIns="0" rIns="0" tIns="0" bIns="0" anchor="t">
+            <a:spAutoFit/>
+          </a:bodyPr>
+          <a:lstStyle/>
+          <a:p>
+            <a:pPr algn="l">
+              <a:lnSpc>
+                <a:spcPct val="115000"/>
+              </a:lnSpc>
+            </a:pPr>
+            <a:r>
+              <a:rPr sz="1200" b="0">
+                <a:solidFill>
+                  <a:srgbClr val="94A3B8"/>
+                </a:solidFill>
+                <a:latin typeface="Helvetica Neue"/>
+              </a:rPr>
+              <a:t>Blast radius, risk, CAB reviewers</a:t>
+            </a:r>
+          </a:p>
+        </p:txBody>
+      </p:sp>
+      <p:sp>
+        <p:nvSpPr>
+          <p:cNvPr id="18" name="Rounded Rectangle 17"/>
           <p:cNvSpPr/>
           <p:nvPr/>
         </p:nvSpPr>
         <p:spPr>
           <a:xfrm>
-            <a:off x="6217920" y="2057400"/>
-            <a:ext cx="54864" cy="457200"/>
-          </a:xfrm>
-          <a:prstGeom prst="rect">
-            <a:avLst/>
-          </a:prstGeom>
-          <a:solidFill>
-            <a:srgbClr val="818CF8"/>
-          </a:solidFill>
-          <a:ln>
-            <a:noFill/>
-          </a:ln>
-          <a:effectLst/>
-        </p:spPr>
-        <p:style>
-          <a:lnRef idx="1">
-            <a:schemeClr val="accent1"/>
-          </a:lnRef>
-          <a:fillRef idx="3">
-            <a:schemeClr val="accent1"/>
-          </a:fillRef>
-          <a:effectRef idx="2">
-            <a:schemeClr val="accent1"/>
-          </a:effectRef>
-          <a:fontRef idx="minor">
-            <a:schemeClr val="lt1"/>
-          </a:fontRef>
-        </p:style>
-        <p:txBody>
-          <a:bodyPr rtlCol="0" anchor="ctr"/>
-          <a:lstStyle/>
-          <a:p>
-            <a:pPr algn="ctr"/>
-          </a:p>
-        </p:txBody>
-      </p:sp>
-      <p:sp>
-        <p:nvSpPr>
-          <p:cNvPr id="11" name="TextBox 10"/>
-          <p:cNvSpPr txBox="1"/>
-          <p:nvPr/>
-        </p:nvSpPr>
-        <p:spPr>
-          <a:xfrm>
-            <a:off x="6492240" y="2029968"/>
-            <a:ext cx="4800600" cy="548640"/>
-          </a:xfrm>
-          <a:prstGeom prst="rect">
-            <a:avLst/>
-          </a:prstGeom>
-          <a:noFill/>
-        </p:spPr>
-        <p:txBody>
-          <a:bodyPr wrap="square" lIns="0" rIns="0" tIns="0" bIns="0" anchor="t">
-            <a:spAutoFit/>
-          </a:bodyPr>
-          <a:lstStyle/>
-          <a:p>
-            <a:pPr algn="l">
-              <a:lnSpc>
-                <a:spcPct val="115000"/>
-              </a:lnSpc>
-            </a:pPr>
-            <a:r>
-              <a:rPr sz="1700" b="1">
-                <a:solidFill>
-                  <a:srgbClr val="F8FAFC"/>
-                </a:solidFill>
-                <a:latin typeface="Helvetica Neue"/>
-              </a:rPr>
-              <a:t>Secondary</a:t>
-            </a:r>
-          </a:p>
-        </p:txBody>
-      </p:sp>
-      <p:sp>
-        <p:nvSpPr>
-          <p:cNvPr id="12" name="TextBox 11"/>
-          <p:cNvSpPr txBox="1"/>
-          <p:nvPr/>
-        </p:nvSpPr>
-        <p:spPr>
-          <a:xfrm>
-            <a:off x="6492240" y="2560320"/>
-            <a:ext cx="4800600" cy="1234440"/>
-          </a:xfrm>
-          <a:prstGeom prst="rect">
-            <a:avLst/>
-          </a:prstGeom>
-          <a:noFill/>
-        </p:spPr>
-        <p:txBody>
-          <a:bodyPr wrap="square" lIns="0" rIns="0" tIns="0" bIns="0" anchor="t">
-            <a:spAutoFit/>
-          </a:bodyPr>
-          <a:lstStyle/>
-          <a:p>
-            <a:pPr algn="l">
-              <a:lnSpc>
-                <a:spcPct val="115000"/>
-              </a:lnSpc>
-            </a:pPr>
-            <a:r>
-              <a:rPr sz="1500" b="0">
-                <a:solidFill>
-                  <a:srgbClr val="94A3B8"/>
-                </a:solidFill>
-                <a:latin typeface="Helvetica Neue"/>
-              </a:rPr>
-              <a:t>Freshservice MSPs supporting many client environments who need fast context on unfamiliar systems.</a:t>
-            </a:r>
-          </a:p>
-        </p:txBody>
-      </p:sp>
-      <p:sp>
-        <p:nvSpPr>
-          <p:cNvPr id="13" name="TextBox 12"/>
-          <p:cNvSpPr txBox="1"/>
-          <p:nvPr/>
-        </p:nvSpPr>
-        <p:spPr>
-          <a:xfrm>
-            <a:off x="640080" y="4160520"/>
-            <a:ext cx="10881360" cy="320040"/>
-          </a:xfrm>
-          <a:prstGeom prst="rect">
-            <a:avLst/>
-          </a:prstGeom>
-          <a:noFill/>
-        </p:spPr>
-        <p:txBody>
-          <a:bodyPr wrap="square" lIns="0" rIns="0" tIns="0" bIns="0" anchor="t">
-            <a:spAutoFit/>
-          </a:bodyPr>
-          <a:lstStyle/>
-          <a:p>
-            <a:pPr algn="l">
-              <a:lnSpc>
-                <a:spcPct val="115000"/>
-              </a:lnSpc>
-            </a:pPr>
-            <a:r>
-              <a:rPr sz="1200" b="1">
-                <a:solidFill>
-                  <a:srgbClr val="94A3B8"/>
-                </a:solidFill>
-                <a:latin typeface="Helvetica Neue"/>
-              </a:rPr>
-              <a:t>USERS:  service-desk agents  ·  on-call / SRE  ·  tech leads &amp; architects  ·  new engineers</a:t>
-            </a:r>
-          </a:p>
-        </p:txBody>
-      </p:sp>
-      <p:sp>
-        <p:nvSpPr>
-          <p:cNvPr id="14" name="Rounded Rectangle 13"/>
-          <p:cNvSpPr/>
-          <p:nvPr/>
-        </p:nvSpPr>
-        <p:spPr>
-          <a:xfrm>
-            <a:off x="640080" y="4663440"/>
-            <a:ext cx="10881360" cy="1463040"/>
+            <a:off x="10332720" y="2889504"/>
+            <a:ext cx="1005840" cy="274320"/>
           </a:xfrm>
           <a:prstGeom prst="roundRect">
             <a:avLst>
-              <a:gd name="adj" fmla="val 6000"/>
+              <a:gd name="adj" fmla="val 50000"/>
             </a:avLst>
           </a:prstGeom>
           <a:solidFill>
-            <a:srgbClr val="0F2A2E"/>
+            <a:srgbClr val="0B1120"/>
           </a:solidFill>
           <a:ln w="12700">
             <a:solidFill>
@@ -12222,22 +13377,109 @@
       </p:sp>
       <p:sp>
         <p:nvSpPr>
-          <p:cNvPr id="15" name="TextBox 14"/>
-          <p:cNvSpPr txBox="1"/>
-          <p:nvPr/>
-        </p:nvSpPr>
-        <p:spPr>
-          <a:xfrm>
-            <a:off x="914400" y="4800600"/>
-            <a:ext cx="10332720" cy="1188720"/>
-          </a:xfrm>
-          <a:prstGeom prst="rect">
-            <a:avLst/>
-          </a:prstGeom>
-          <a:noFill/>
-        </p:spPr>
-        <p:txBody>
-          <a:bodyPr wrap="square" lIns="0" rIns="0" tIns="0" bIns="0" anchor="ctr">
+          <p:cNvPr id="19" name="TextBox 18"/>
+          <p:cNvSpPr txBox="1"/>
+          <p:nvPr/>
+        </p:nvSpPr>
+        <p:spPr>
+          <a:xfrm>
+            <a:off x="10332720" y="2930652"/>
+            <a:ext cx="1005840" cy="228600"/>
+          </a:xfrm>
+          <a:prstGeom prst="rect">
+            <a:avLst/>
+          </a:prstGeom>
+          <a:noFill/>
+        </p:spPr>
+        <p:txBody>
+          <a:bodyPr wrap="square" lIns="0" rIns="0" tIns="0" bIns="0" anchor="t">
+            <a:spAutoFit/>
+          </a:bodyPr>
+          <a:lstStyle/>
+          <a:p>
+            <a:pPr algn="ctr">
+              <a:lnSpc>
+                <a:spcPct val="115000"/>
+              </a:lnSpc>
+            </a:pPr>
+            <a:r>
+              <a:rPr sz="1000" b="1">
+                <a:solidFill>
+                  <a:srgbClr val="2DD4BF"/>
+                </a:solidFill>
+                <a:latin typeface="Helvetica Neue"/>
+              </a:rPr>
+              <a:t>LIVE</a:t>
+            </a:r>
+          </a:p>
+        </p:txBody>
+      </p:sp>
+      <p:sp>
+        <p:nvSpPr>
+          <p:cNvPr id="20" name="Rounded Rectangle 19"/>
+          <p:cNvSpPr/>
+          <p:nvPr/>
+        </p:nvSpPr>
+        <p:spPr>
+          <a:xfrm>
+            <a:off x="640080" y="3429000"/>
+            <a:ext cx="10881360" cy="566928"/>
+          </a:xfrm>
+          <a:prstGeom prst="roundRect">
+            <a:avLst>
+              <a:gd name="adj" fmla="val 6000"/>
+            </a:avLst>
+          </a:prstGeom>
+          <a:solidFill>
+            <a:srgbClr val="151E32"/>
+          </a:solidFill>
+          <a:ln w="12700">
+            <a:solidFill>
+              <a:srgbClr val="2A3650"/>
+            </a:solidFill>
+          </a:ln>
+          <a:effectLst/>
+        </p:spPr>
+        <p:style>
+          <a:lnRef idx="1">
+            <a:schemeClr val="accent1"/>
+          </a:lnRef>
+          <a:fillRef idx="3">
+            <a:schemeClr val="accent1"/>
+          </a:fillRef>
+          <a:effectRef idx="2">
+            <a:schemeClr val="accent1"/>
+          </a:effectRef>
+          <a:fontRef idx="minor">
+            <a:schemeClr val="lt1"/>
+          </a:fontRef>
+        </p:style>
+        <p:txBody>
+          <a:bodyPr rtlCol="0" anchor="ctr"/>
+          <a:lstStyle/>
+          <a:p>
+            <a:pPr algn="ctr"/>
+          </a:p>
+        </p:txBody>
+      </p:sp>
+      <p:sp>
+        <p:nvSpPr>
+          <p:cNvPr id="21" name="TextBox 20"/>
+          <p:cNvSpPr txBox="1"/>
+          <p:nvPr/>
+        </p:nvSpPr>
+        <p:spPr>
+          <a:xfrm>
+            <a:off x="868680" y="3584448"/>
+            <a:ext cx="2468880" cy="320040"/>
+          </a:xfrm>
+          <a:prstGeom prst="rect">
+            <a:avLst/>
+          </a:prstGeom>
+          <a:noFill/>
+        </p:spPr>
+        <p:txBody>
+          <a:bodyPr wrap="square" lIns="0" rIns="0" tIns="0" bIns="0" anchor="t">
             <a:spAutoFit/>
           </a:bodyPr>
           <a:lstStyle/>
@@ -12248,13 +13490,934 @@
               </a:lnSpc>
             </a:pPr>
             <a:r>
-              <a:rPr sz="1800" b="0">
+              <a:rPr sz="1400" b="1">
                 <a:solidFill>
                   <a:srgbClr val="F8FAFC"/>
                 </a:solidFill>
                 <a:latin typeface="Helvetica Neue"/>
               </a:rPr>
-              <a:t>Every incident arrives already diagnosed: likely service, dependencies, past incidents, runbook and escalation path. Teams resolve faster, escalate to the right owner first time, and know what breaks before a change ships.</a:t>
+              <a:t>Sync</a:t>
+            </a:r>
+          </a:p>
+        </p:txBody>
+      </p:sp>
+      <p:sp>
+        <p:nvSpPr>
+          <p:cNvPr id="22" name="TextBox 21"/>
+          <p:cNvSpPr txBox="1"/>
+          <p:nvPr/>
+        </p:nvSpPr>
+        <p:spPr>
+          <a:xfrm>
+            <a:off x="3429000" y="3593592"/>
+            <a:ext cx="2926080" cy="320040"/>
+          </a:xfrm>
+          <a:prstGeom prst="rect">
+            <a:avLst/>
+          </a:prstGeom>
+          <a:noFill/>
+        </p:spPr>
+        <p:txBody>
+          <a:bodyPr wrap="square" lIns="0" rIns="0" tIns="0" bIns="0" anchor="t">
+            <a:spAutoFit/>
+          </a:bodyPr>
+          <a:lstStyle/>
+          <a:p>
+            <a:pPr algn="l">
+              <a:lnSpc>
+                <a:spcPct val="115000"/>
+              </a:lnSpc>
+            </a:pPr>
+            <a:r>
+              <a:rPr sz="1300" b="0">
+                <a:solidFill>
+                  <a:srgbClr val="818CF8"/>
+                </a:solidFill>
+                <a:latin typeface="Helvetica Neue"/>
+              </a:rPr>
+              <a:t>Freshservice connector</a:t>
+            </a:r>
+          </a:p>
+        </p:txBody>
+      </p:sp>
+      <p:sp>
+        <p:nvSpPr>
+          <p:cNvPr id="23" name="TextBox 22"/>
+          <p:cNvSpPr txBox="1"/>
+          <p:nvPr/>
+        </p:nvSpPr>
+        <p:spPr>
+          <a:xfrm>
+            <a:off x="6446520" y="3593592"/>
+            <a:ext cx="3840480" cy="320040"/>
+          </a:xfrm>
+          <a:prstGeom prst="rect">
+            <a:avLst/>
+          </a:prstGeom>
+          <a:noFill/>
+        </p:spPr>
+        <p:txBody>
+          <a:bodyPr wrap="square" lIns="0" rIns="0" tIns="0" bIns="0" anchor="t">
+            <a:spAutoFit/>
+          </a:bodyPr>
+          <a:lstStyle/>
+          <a:p>
+            <a:pPr algn="l">
+              <a:lnSpc>
+                <a:spcPct val="115000"/>
+              </a:lnSpc>
+            </a:pPr>
+            <a:r>
+              <a:rPr sz="1200" b="0">
+                <a:solidFill>
+                  <a:srgbClr val="94A3B8"/>
+                </a:solidFill>
+                <a:latin typeface="Helvetica Neue"/>
+              </a:rPr>
+              <a:t>Tickets → Incidents, groups → Teams</a:t>
+            </a:r>
+          </a:p>
+        </p:txBody>
+      </p:sp>
+      <p:sp>
+        <p:nvSpPr>
+          <p:cNvPr id="24" name="Rounded Rectangle 23"/>
+          <p:cNvSpPr/>
+          <p:nvPr/>
+        </p:nvSpPr>
+        <p:spPr>
+          <a:xfrm>
+            <a:off x="10332720" y="3575304"/>
+            <a:ext cx="1005840" cy="274320"/>
+          </a:xfrm>
+          <a:prstGeom prst="roundRect">
+            <a:avLst>
+              <a:gd name="adj" fmla="val 50000"/>
+            </a:avLst>
+          </a:prstGeom>
+          <a:solidFill>
+            <a:srgbClr val="0B1120"/>
+          </a:solidFill>
+          <a:ln w="12700">
+            <a:solidFill>
+              <a:srgbClr val="2DD4BF"/>
+            </a:solidFill>
+          </a:ln>
+          <a:effectLst/>
+        </p:spPr>
+        <p:style>
+          <a:lnRef idx="1">
+            <a:schemeClr val="accent1"/>
+          </a:lnRef>
+          <a:fillRef idx="3">
+            <a:schemeClr val="accent1"/>
+          </a:fillRef>
+          <a:effectRef idx="2">
+            <a:schemeClr val="accent1"/>
+          </a:effectRef>
+          <a:fontRef idx="minor">
+            <a:schemeClr val="lt1"/>
+          </a:fontRef>
+        </p:style>
+        <p:txBody>
+          <a:bodyPr rtlCol="0" anchor="ctr"/>
+          <a:lstStyle/>
+          <a:p>
+            <a:pPr algn="ctr"/>
+          </a:p>
+        </p:txBody>
+      </p:sp>
+      <p:sp>
+        <p:nvSpPr>
+          <p:cNvPr id="25" name="TextBox 24"/>
+          <p:cNvSpPr txBox="1"/>
+          <p:nvPr/>
+        </p:nvSpPr>
+        <p:spPr>
+          <a:xfrm>
+            <a:off x="10332720" y="3616452"/>
+            <a:ext cx="1005840" cy="228600"/>
+          </a:xfrm>
+          <a:prstGeom prst="rect">
+            <a:avLst/>
+          </a:prstGeom>
+          <a:noFill/>
+        </p:spPr>
+        <p:txBody>
+          <a:bodyPr wrap="square" lIns="0" rIns="0" tIns="0" bIns="0" anchor="t">
+            <a:spAutoFit/>
+          </a:bodyPr>
+          <a:lstStyle/>
+          <a:p>
+            <a:pPr algn="ctr">
+              <a:lnSpc>
+                <a:spcPct val="115000"/>
+              </a:lnSpc>
+            </a:pPr>
+            <a:r>
+              <a:rPr sz="1000" b="1">
+                <a:solidFill>
+                  <a:srgbClr val="2DD4BF"/>
+                </a:solidFill>
+                <a:latin typeface="Helvetica Neue"/>
+              </a:rPr>
+              <a:t>LIVE</a:t>
+            </a:r>
+          </a:p>
+        </p:txBody>
+      </p:sp>
+      <p:sp>
+        <p:nvSpPr>
+          <p:cNvPr id="26" name="Rounded Rectangle 25"/>
+          <p:cNvSpPr/>
+          <p:nvPr/>
+        </p:nvSpPr>
+        <p:spPr>
+          <a:xfrm>
+            <a:off x="640080" y="4114800"/>
+            <a:ext cx="10881360" cy="566928"/>
+          </a:xfrm>
+          <a:prstGeom prst="roundRect">
+            <a:avLst>
+              <a:gd name="adj" fmla="val 6000"/>
+            </a:avLst>
+          </a:prstGeom>
+          <a:solidFill>
+            <a:srgbClr val="151E32"/>
+          </a:solidFill>
+          <a:ln w="12700">
+            <a:solidFill>
+              <a:srgbClr val="2A3650"/>
+            </a:solidFill>
+          </a:ln>
+          <a:effectLst/>
+        </p:spPr>
+        <p:style>
+          <a:lnRef idx="1">
+            <a:schemeClr val="accent1"/>
+          </a:lnRef>
+          <a:fillRef idx="3">
+            <a:schemeClr val="accent1"/>
+          </a:fillRef>
+          <a:effectRef idx="2">
+            <a:schemeClr val="accent1"/>
+          </a:effectRef>
+          <a:fontRef idx="minor">
+            <a:schemeClr val="lt1"/>
+          </a:fontRef>
+        </p:style>
+        <p:txBody>
+          <a:bodyPr rtlCol="0" anchor="ctr"/>
+          <a:lstStyle/>
+          <a:p>
+            <a:pPr algn="ctr"/>
+          </a:p>
+        </p:txBody>
+      </p:sp>
+      <p:sp>
+        <p:nvSpPr>
+          <p:cNvPr id="27" name="TextBox 26"/>
+          <p:cNvSpPr txBox="1"/>
+          <p:nvPr/>
+        </p:nvSpPr>
+        <p:spPr>
+          <a:xfrm>
+            <a:off x="868680" y="4270248"/>
+            <a:ext cx="2468880" cy="320040"/>
+          </a:xfrm>
+          <a:prstGeom prst="rect">
+            <a:avLst/>
+          </a:prstGeom>
+          <a:noFill/>
+        </p:spPr>
+        <p:txBody>
+          <a:bodyPr wrap="square" lIns="0" rIns="0" tIns="0" bIns="0" anchor="t">
+            <a:spAutoFit/>
+          </a:bodyPr>
+          <a:lstStyle/>
+          <a:p>
+            <a:pPr algn="l">
+              <a:lnSpc>
+                <a:spcPct val="115000"/>
+              </a:lnSpc>
+            </a:pPr>
+            <a:r>
+              <a:rPr sz="1400" b="1">
+                <a:solidFill>
+                  <a:srgbClr val="F8FAFC"/>
+                </a:solidFill>
+                <a:latin typeface="Helvetica Neue"/>
+              </a:rPr>
+              <a:t>KB search</a:t>
+            </a:r>
+          </a:p>
+        </p:txBody>
+      </p:sp>
+      <p:sp>
+        <p:nvSpPr>
+          <p:cNvPr id="28" name="TextBox 27"/>
+          <p:cNvSpPr txBox="1"/>
+          <p:nvPr/>
+        </p:nvSpPr>
+        <p:spPr>
+          <a:xfrm>
+            <a:off x="3429000" y="4279392"/>
+            <a:ext cx="2926080" cy="320040"/>
+          </a:xfrm>
+          <a:prstGeom prst="rect">
+            <a:avLst/>
+          </a:prstGeom>
+          <a:noFill/>
+        </p:spPr>
+        <p:txBody>
+          <a:bodyPr wrap="square" lIns="0" rIns="0" tIns="0" bIns="0" anchor="t">
+            <a:spAutoFit/>
+          </a:bodyPr>
+          <a:lstStyle/>
+          <a:p>
+            <a:pPr algn="l">
+              <a:lnSpc>
+                <a:spcPct val="115000"/>
+              </a:lnSpc>
+            </a:pPr>
+            <a:r>
+              <a:rPr sz="1300" b="0">
+                <a:solidFill>
+                  <a:srgbClr val="818CF8"/>
+                </a:solidFill>
+                <a:latin typeface="Helvetica Neue"/>
+              </a:rPr>
+              <a:t>Incident Context Agent</a:t>
+            </a:r>
+          </a:p>
+        </p:txBody>
+      </p:sp>
+      <p:sp>
+        <p:nvSpPr>
+          <p:cNvPr id="29" name="TextBox 28"/>
+          <p:cNvSpPr txBox="1"/>
+          <p:nvPr/>
+        </p:nvSpPr>
+        <p:spPr>
+          <a:xfrm>
+            <a:off x="6446520" y="4279392"/>
+            <a:ext cx="3840480" cy="320040"/>
+          </a:xfrm>
+          <a:prstGeom prst="rect">
+            <a:avLst/>
+          </a:prstGeom>
+          <a:noFill/>
+        </p:spPr>
+        <p:txBody>
+          <a:bodyPr wrap="square" lIns="0" rIns="0" tIns="0" bIns="0" anchor="t">
+            <a:spAutoFit/>
+          </a:bodyPr>
+          <a:lstStyle/>
+          <a:p>
+            <a:pPr algn="l">
+              <a:lnSpc>
+                <a:spcPct val="115000"/>
+              </a:lnSpc>
+            </a:pPr>
+            <a:r>
+              <a:rPr sz="1200" b="0">
+                <a:solidFill>
+                  <a:srgbClr val="94A3B8"/>
+                </a:solidFill>
+                <a:latin typeface="Helvetica Neue"/>
+              </a:rPr>
+              <a:t>KB articles cited in each diagnosis</a:t>
+            </a:r>
+          </a:p>
+        </p:txBody>
+      </p:sp>
+      <p:sp>
+        <p:nvSpPr>
+          <p:cNvPr id="30" name="Rounded Rectangle 29"/>
+          <p:cNvSpPr/>
+          <p:nvPr/>
+        </p:nvSpPr>
+        <p:spPr>
+          <a:xfrm>
+            <a:off x="10332720" y="4261104"/>
+            <a:ext cx="1005840" cy="274320"/>
+          </a:xfrm>
+          <a:prstGeom prst="roundRect">
+            <a:avLst>
+              <a:gd name="adj" fmla="val 50000"/>
+            </a:avLst>
+          </a:prstGeom>
+          <a:solidFill>
+            <a:srgbClr val="0B1120"/>
+          </a:solidFill>
+          <a:ln w="12700">
+            <a:solidFill>
+              <a:srgbClr val="2DD4BF"/>
+            </a:solidFill>
+          </a:ln>
+          <a:effectLst/>
+        </p:spPr>
+        <p:style>
+          <a:lnRef idx="1">
+            <a:schemeClr val="accent1"/>
+          </a:lnRef>
+          <a:fillRef idx="3">
+            <a:schemeClr val="accent1"/>
+          </a:fillRef>
+          <a:effectRef idx="2">
+            <a:schemeClr val="accent1"/>
+          </a:effectRef>
+          <a:fontRef idx="minor">
+            <a:schemeClr val="lt1"/>
+          </a:fontRef>
+        </p:style>
+        <p:txBody>
+          <a:bodyPr rtlCol="0" anchor="ctr"/>
+          <a:lstStyle/>
+          <a:p>
+            <a:pPr algn="ctr"/>
+          </a:p>
+        </p:txBody>
+      </p:sp>
+      <p:sp>
+        <p:nvSpPr>
+          <p:cNvPr id="31" name="TextBox 30"/>
+          <p:cNvSpPr txBox="1"/>
+          <p:nvPr/>
+        </p:nvSpPr>
+        <p:spPr>
+          <a:xfrm>
+            <a:off x="10332720" y="4302252"/>
+            <a:ext cx="1005840" cy="228600"/>
+          </a:xfrm>
+          <a:prstGeom prst="rect">
+            <a:avLst/>
+          </a:prstGeom>
+          <a:noFill/>
+        </p:spPr>
+        <p:txBody>
+          <a:bodyPr wrap="square" lIns="0" rIns="0" tIns="0" bIns="0" anchor="t">
+            <a:spAutoFit/>
+          </a:bodyPr>
+          <a:lstStyle/>
+          <a:p>
+            <a:pPr algn="ctr">
+              <a:lnSpc>
+                <a:spcPct val="115000"/>
+              </a:lnSpc>
+            </a:pPr>
+            <a:r>
+              <a:rPr sz="1000" b="1">
+                <a:solidFill>
+                  <a:srgbClr val="2DD4BF"/>
+                </a:solidFill>
+                <a:latin typeface="Helvetica Neue"/>
+              </a:rPr>
+              <a:t>LIVE</a:t>
+            </a:r>
+          </a:p>
+        </p:txBody>
+      </p:sp>
+      <p:sp>
+        <p:nvSpPr>
+          <p:cNvPr id="32" name="Rounded Rectangle 31"/>
+          <p:cNvSpPr/>
+          <p:nvPr/>
+        </p:nvSpPr>
+        <p:spPr>
+          <a:xfrm>
+            <a:off x="640080" y="4800600"/>
+            <a:ext cx="10881360" cy="566928"/>
+          </a:xfrm>
+          <a:prstGeom prst="roundRect">
+            <a:avLst>
+              <a:gd name="adj" fmla="val 6000"/>
+            </a:avLst>
+          </a:prstGeom>
+          <a:solidFill>
+            <a:srgbClr val="151E32"/>
+          </a:solidFill>
+          <a:ln w="12700">
+            <a:solidFill>
+              <a:srgbClr val="2A3650"/>
+            </a:solidFill>
+          </a:ln>
+          <a:effectLst/>
+        </p:spPr>
+        <p:style>
+          <a:lnRef idx="1">
+            <a:schemeClr val="accent1"/>
+          </a:lnRef>
+          <a:fillRef idx="3">
+            <a:schemeClr val="accent1"/>
+          </a:fillRef>
+          <a:effectRef idx="2">
+            <a:schemeClr val="accent1"/>
+          </a:effectRef>
+          <a:fontRef idx="minor">
+            <a:schemeClr val="lt1"/>
+          </a:fontRef>
+        </p:style>
+        <p:txBody>
+          <a:bodyPr rtlCol="0" anchor="ctr"/>
+          <a:lstStyle/>
+          <a:p>
+            <a:pPr algn="ctr"/>
+          </a:p>
+        </p:txBody>
+      </p:sp>
+      <p:sp>
+        <p:nvSpPr>
+          <p:cNvPr id="33" name="TextBox 32"/>
+          <p:cNvSpPr txBox="1"/>
+          <p:nvPr/>
+        </p:nvSpPr>
+        <p:spPr>
+          <a:xfrm>
+            <a:off x="868680" y="4956048"/>
+            <a:ext cx="2468880" cy="320040"/>
+          </a:xfrm>
+          <a:prstGeom prst="rect">
+            <a:avLst/>
+          </a:prstGeom>
+          <a:noFill/>
+        </p:spPr>
+        <p:txBody>
+          <a:bodyPr wrap="square" lIns="0" rIns="0" tIns="0" bIns="0" anchor="t">
+            <a:spAutoFit/>
+          </a:bodyPr>
+          <a:lstStyle/>
+          <a:p>
+            <a:pPr algn="l">
+              <a:lnSpc>
+                <a:spcPct val="115000"/>
+              </a:lnSpc>
+            </a:pPr>
+            <a:r>
+              <a:rPr sz="1400" b="1">
+                <a:solidFill>
+                  <a:srgbClr val="F8FAFC"/>
+                </a:solidFill>
+                <a:latin typeface="Helvetica Neue"/>
+              </a:rPr>
+              <a:t>CMDB relationships</a:t>
+            </a:r>
+          </a:p>
+        </p:txBody>
+      </p:sp>
+      <p:sp>
+        <p:nvSpPr>
+          <p:cNvPr id="34" name="TextBox 33"/>
+          <p:cNvSpPr txBox="1"/>
+          <p:nvPr/>
+        </p:nvSpPr>
+        <p:spPr>
+          <a:xfrm>
+            <a:off x="3429000" y="4965192"/>
+            <a:ext cx="2926080" cy="320040"/>
+          </a:xfrm>
+          <a:prstGeom prst="rect">
+            <a:avLst/>
+          </a:prstGeom>
+          <a:noFill/>
+        </p:spPr>
+        <p:txBody>
+          <a:bodyPr wrap="square" lIns="0" rIns="0" tIns="0" bIns="0" anchor="t">
+            <a:spAutoFit/>
+          </a:bodyPr>
+          <a:lstStyle/>
+          <a:p>
+            <a:pPr algn="l">
+              <a:lnSpc>
+                <a:spcPct val="115000"/>
+              </a:lnSpc>
+            </a:pPr>
+            <a:r>
+              <a:rPr sz="1300" b="0">
+                <a:solidFill>
+                  <a:srgbClr val="818CF8"/>
+                </a:solidFill>
+                <a:latin typeface="Helvetica Neue"/>
+              </a:rPr>
+              <a:t>Knowledge Graph</a:t>
+            </a:r>
+          </a:p>
+        </p:txBody>
+      </p:sp>
+      <p:sp>
+        <p:nvSpPr>
+          <p:cNvPr id="35" name="TextBox 34"/>
+          <p:cNvSpPr txBox="1"/>
+          <p:nvPr/>
+        </p:nvSpPr>
+        <p:spPr>
+          <a:xfrm>
+            <a:off x="6446520" y="4965192"/>
+            <a:ext cx="3840480" cy="320040"/>
+          </a:xfrm>
+          <a:prstGeom prst="rect">
+            <a:avLst/>
+          </a:prstGeom>
+          <a:noFill/>
+        </p:spPr>
+        <p:txBody>
+          <a:bodyPr wrap="square" lIns="0" rIns="0" tIns="0" bIns="0" anchor="t">
+            <a:spAutoFit/>
+          </a:bodyPr>
+          <a:lstStyle/>
+          <a:p>
+            <a:pPr algn="l">
+              <a:lnSpc>
+                <a:spcPct val="115000"/>
+              </a:lnSpc>
+            </a:pPr>
+            <a:r>
+              <a:rPr sz="1200" b="0">
+                <a:solidFill>
+                  <a:srgbClr val="94A3B8"/>
+                </a:solidFill>
+                <a:latin typeface="Helvetica Neue"/>
+              </a:rPr>
+              <a:t>Code-derived dependencies as CI links</a:t>
+            </a:r>
+          </a:p>
+        </p:txBody>
+      </p:sp>
+      <p:sp>
+        <p:nvSpPr>
+          <p:cNvPr id="36" name="Rounded Rectangle 35"/>
+          <p:cNvSpPr/>
+          <p:nvPr/>
+        </p:nvSpPr>
+        <p:spPr>
+          <a:xfrm>
+            <a:off x="10332720" y="4946904"/>
+            <a:ext cx="1005840" cy="274320"/>
+          </a:xfrm>
+          <a:prstGeom prst="roundRect">
+            <a:avLst>
+              <a:gd name="adj" fmla="val 50000"/>
+            </a:avLst>
+          </a:prstGeom>
+          <a:solidFill>
+            <a:srgbClr val="0B1120"/>
+          </a:solidFill>
+          <a:ln w="12700">
+            <a:solidFill>
+              <a:srgbClr val="FBBF24"/>
+            </a:solidFill>
+          </a:ln>
+          <a:effectLst/>
+        </p:spPr>
+        <p:style>
+          <a:lnRef idx="1">
+            <a:schemeClr val="accent1"/>
+          </a:lnRef>
+          <a:fillRef idx="3">
+            <a:schemeClr val="accent1"/>
+          </a:fillRef>
+          <a:effectRef idx="2">
+            <a:schemeClr val="accent1"/>
+          </a:effectRef>
+          <a:fontRef idx="minor">
+            <a:schemeClr val="lt1"/>
+          </a:fontRef>
+        </p:style>
+        <p:txBody>
+          <a:bodyPr rtlCol="0" anchor="ctr"/>
+          <a:lstStyle/>
+          <a:p>
+            <a:pPr algn="ctr"/>
+          </a:p>
+        </p:txBody>
+      </p:sp>
+      <p:sp>
+        <p:nvSpPr>
+          <p:cNvPr id="37" name="TextBox 36"/>
+          <p:cNvSpPr txBox="1"/>
+          <p:nvPr/>
+        </p:nvSpPr>
+        <p:spPr>
+          <a:xfrm>
+            <a:off x="10332720" y="4988052"/>
+            <a:ext cx="1005840" cy="228600"/>
+          </a:xfrm>
+          <a:prstGeom prst="rect">
+            <a:avLst/>
+          </a:prstGeom>
+          <a:noFill/>
+        </p:spPr>
+        <p:txBody>
+          <a:bodyPr wrap="square" lIns="0" rIns="0" tIns="0" bIns="0" anchor="t">
+            <a:spAutoFit/>
+          </a:bodyPr>
+          <a:lstStyle/>
+          <a:p>
+            <a:pPr algn="ctr">
+              <a:lnSpc>
+                <a:spcPct val="115000"/>
+              </a:lnSpc>
+            </a:pPr>
+            <a:r>
+              <a:rPr sz="1000" b="1">
+                <a:solidFill>
+                  <a:srgbClr val="FBBF24"/>
+                </a:solidFill>
+                <a:latin typeface="Helvetica Neue"/>
+              </a:rPr>
+              <a:t>DESIGNED</a:t>
+            </a:r>
+          </a:p>
+        </p:txBody>
+      </p:sp>
+      <p:sp>
+        <p:nvSpPr>
+          <p:cNvPr id="38" name="Rounded Rectangle 37"/>
+          <p:cNvSpPr/>
+          <p:nvPr/>
+        </p:nvSpPr>
+        <p:spPr>
+          <a:xfrm>
+            <a:off x="640080" y="5486400"/>
+            <a:ext cx="10881360" cy="566928"/>
+          </a:xfrm>
+          <a:prstGeom prst="roundRect">
+            <a:avLst>
+              <a:gd name="adj" fmla="val 6000"/>
+            </a:avLst>
+          </a:prstGeom>
+          <a:solidFill>
+            <a:srgbClr val="151E32"/>
+          </a:solidFill>
+          <a:ln w="12700">
+            <a:solidFill>
+              <a:srgbClr val="2A3650"/>
+            </a:solidFill>
+          </a:ln>
+          <a:effectLst/>
+        </p:spPr>
+        <p:style>
+          <a:lnRef idx="1">
+            <a:schemeClr val="accent1"/>
+          </a:lnRef>
+          <a:fillRef idx="3">
+            <a:schemeClr val="accent1"/>
+          </a:fillRef>
+          <a:effectRef idx="2">
+            <a:schemeClr val="accent1"/>
+          </a:effectRef>
+          <a:fontRef idx="minor">
+            <a:schemeClr val="lt1"/>
+          </a:fontRef>
+        </p:style>
+        <p:txBody>
+          <a:bodyPr rtlCol="0" anchor="ctr"/>
+          <a:lstStyle/>
+          <a:p>
+            <a:pPr algn="ctr"/>
+          </a:p>
+        </p:txBody>
+      </p:sp>
+      <p:sp>
+        <p:nvSpPr>
+          <p:cNvPr id="39" name="TextBox 38"/>
+          <p:cNvSpPr txBox="1"/>
+          <p:nvPr/>
+        </p:nvSpPr>
+        <p:spPr>
+          <a:xfrm>
+            <a:off x="868680" y="5641848"/>
+            <a:ext cx="2468880" cy="320040"/>
+          </a:xfrm>
+          <a:prstGeom prst="rect">
+            <a:avLst/>
+          </a:prstGeom>
+          <a:noFill/>
+        </p:spPr>
+        <p:txBody>
+          <a:bodyPr wrap="square" lIns="0" rIns="0" tIns="0" bIns="0" anchor="t">
+            <a:spAutoFit/>
+          </a:bodyPr>
+          <a:lstStyle/>
+          <a:p>
+            <a:pPr algn="l">
+              <a:lnSpc>
+                <a:spcPct val="115000"/>
+              </a:lnSpc>
+            </a:pPr>
+            <a:r>
+              <a:rPr sz="1400" b="1">
+                <a:solidFill>
+                  <a:srgbClr val="F8FAFC"/>
+                </a:solidFill>
+                <a:latin typeface="Helvetica Neue"/>
+              </a:rPr>
+              <a:t>Problems &amp; KB drafts</a:t>
+            </a:r>
+          </a:p>
+        </p:txBody>
+      </p:sp>
+      <p:sp>
+        <p:nvSpPr>
+          <p:cNvPr id="40" name="TextBox 39"/>
+          <p:cNvSpPr txBox="1"/>
+          <p:nvPr/>
+        </p:nvSpPr>
+        <p:spPr>
+          <a:xfrm>
+            <a:off x="3429000" y="5650992"/>
+            <a:ext cx="2926080" cy="320040"/>
+          </a:xfrm>
+          <a:prstGeom prst="rect">
+            <a:avLst/>
+          </a:prstGeom>
+          <a:noFill/>
+        </p:spPr>
+        <p:txBody>
+          <a:bodyPr wrap="square" lIns="0" rIns="0" tIns="0" bIns="0" anchor="t">
+            <a:spAutoFit/>
+          </a:bodyPr>
+          <a:lstStyle/>
+          <a:p>
+            <a:pPr algn="l">
+              <a:lnSpc>
+                <a:spcPct val="115000"/>
+              </a:lnSpc>
+            </a:pPr>
+            <a:r>
+              <a:rPr sz="1300" b="0">
+                <a:solidFill>
+                  <a:srgbClr val="818CF8"/>
+                </a:solidFill>
+                <a:latin typeface="Helvetica Neue"/>
+              </a:rPr>
+              <a:t>Knowledge Gap Agent</a:t>
+            </a:r>
+          </a:p>
+        </p:txBody>
+      </p:sp>
+      <p:sp>
+        <p:nvSpPr>
+          <p:cNvPr id="41" name="TextBox 40"/>
+          <p:cNvSpPr txBox="1"/>
+          <p:nvPr/>
+        </p:nvSpPr>
+        <p:spPr>
+          <a:xfrm>
+            <a:off x="6446520" y="5650992"/>
+            <a:ext cx="3840480" cy="320040"/>
+          </a:xfrm>
+          <a:prstGeom prst="rect">
+            <a:avLst/>
+          </a:prstGeom>
+          <a:noFill/>
+        </p:spPr>
+        <p:txBody>
+          <a:bodyPr wrap="square" lIns="0" rIns="0" tIns="0" bIns="0" anchor="t">
+            <a:spAutoFit/>
+          </a:bodyPr>
+          <a:lstStyle/>
+          <a:p>
+            <a:pPr algn="l">
+              <a:lnSpc>
+                <a:spcPct val="115000"/>
+              </a:lnSpc>
+            </a:pPr>
+            <a:r>
+              <a:rPr sz="1200" b="0">
+                <a:solidFill>
+                  <a:srgbClr val="94A3B8"/>
+                </a:solidFill>
+                <a:latin typeface="Helvetica Neue"/>
+              </a:rPr>
+              <a:t>Recurring incidents → Problem, KB drafts</a:t>
+            </a:r>
+          </a:p>
+        </p:txBody>
+      </p:sp>
+      <p:sp>
+        <p:nvSpPr>
+          <p:cNvPr id="42" name="Rounded Rectangle 41"/>
+          <p:cNvSpPr/>
+          <p:nvPr/>
+        </p:nvSpPr>
+        <p:spPr>
+          <a:xfrm>
+            <a:off x="10332720" y="5632704"/>
+            <a:ext cx="1005840" cy="274320"/>
+          </a:xfrm>
+          <a:prstGeom prst="roundRect">
+            <a:avLst>
+              <a:gd name="adj" fmla="val 50000"/>
+            </a:avLst>
+          </a:prstGeom>
+          <a:solidFill>
+            <a:srgbClr val="0B1120"/>
+          </a:solidFill>
+          <a:ln w="12700">
+            <a:solidFill>
+              <a:srgbClr val="94A3B8"/>
+            </a:solidFill>
+          </a:ln>
+          <a:effectLst/>
+        </p:spPr>
+        <p:style>
+          <a:lnRef idx="1">
+            <a:schemeClr val="accent1"/>
+          </a:lnRef>
+          <a:fillRef idx="3">
+            <a:schemeClr val="accent1"/>
+          </a:fillRef>
+          <a:effectRef idx="2">
+            <a:schemeClr val="accent1"/>
+          </a:effectRef>
+          <a:fontRef idx="minor">
+            <a:schemeClr val="lt1"/>
+          </a:fontRef>
+        </p:style>
+        <p:txBody>
+          <a:bodyPr rtlCol="0" anchor="ctr"/>
+          <a:lstStyle/>
+          <a:p>
+            <a:pPr algn="ctr"/>
+          </a:p>
+        </p:txBody>
+      </p:sp>
+      <p:sp>
+        <p:nvSpPr>
+          <p:cNvPr id="43" name="TextBox 42"/>
+          <p:cNvSpPr txBox="1"/>
+          <p:nvPr/>
+        </p:nvSpPr>
+        <p:spPr>
+          <a:xfrm>
+            <a:off x="10332720" y="5673852"/>
+            <a:ext cx="1005840" cy="228600"/>
+          </a:xfrm>
+          <a:prstGeom prst="rect">
+            <a:avLst/>
+          </a:prstGeom>
+          <a:noFill/>
+        </p:spPr>
+        <p:txBody>
+          <a:bodyPr wrap="square" lIns="0" rIns="0" tIns="0" bIns="0" anchor="t">
+            <a:spAutoFit/>
+          </a:bodyPr>
+          <a:lstStyle/>
+          <a:p>
+            <a:pPr algn="ctr">
+              <a:lnSpc>
+                <a:spcPct val="115000"/>
+              </a:lnSpc>
+            </a:pPr>
+            <a:r>
+              <a:rPr sz="1000" b="1">
+                <a:solidFill>
+                  <a:srgbClr val="94A3B8"/>
+                </a:solidFill>
+                <a:latin typeface="Helvetica Neue"/>
+              </a:rPr>
+              <a:t>PHASE 2</a:t>
             </a:r>
           </a:p>
         </p:txBody>
@@ -12319,7 +14482,7 @@
                 </a:solidFill>
                 <a:latin typeface="Helvetica Neue"/>
               </a:rPr>
-              <a:t>PRICING · GO-TO-MARKET · COST</a:t>
+              <a:t>SEE IT WORK</a:t>
             </a:r>
           </a:p>
         </p:txBody>
@@ -12358,7 +14521,7 @@
                 </a:solidFill>
                 <a:latin typeface="Helvetica Neue"/>
               </a:rPr>
-              <a:t>Business model</a:t>
+              <a:t>Live demo</a:t>
             </a:r>
           </a:p>
         </p:txBody>
@@ -12411,7 +14574,7 @@
         <p:spPr>
           <a:xfrm>
             <a:off x="640080" y="1828800"/>
-            <a:ext cx="3474720" cy="3566160"/>
+            <a:ext cx="5349240" cy="1188720"/>
           </a:xfrm>
           <a:prstGeom prst="roundRect">
             <a:avLst>
@@ -12452,20 +14615,20 @@
       </p:sp>
       <p:sp>
         <p:nvSpPr>
-          <p:cNvPr id="6" name="Rectangle 5"/>
+          <p:cNvPr id="6" name="Oval 5"/>
           <p:cNvSpPr/>
           <p:nvPr/>
         </p:nvSpPr>
         <p:spPr>
           <a:xfrm>
-            <a:off x="640080" y="2057400"/>
-            <a:ext cx="54864" cy="457200"/>
-          </a:xfrm>
-          <a:prstGeom prst="rect">
+            <a:off x="868680" y="2148840"/>
+            <a:ext cx="548640" cy="548640"/>
+          </a:xfrm>
+          <a:prstGeom prst="ellipse">
             <a:avLst/>
           </a:prstGeom>
           <a:solidFill>
-            <a:srgbClr val="2DD4BF"/>
+            <a:srgbClr val="818CF8"/>
           </a:solidFill>
           <a:ln>
             <a:noFill/>
@@ -12502,8 +14665,8 @@
         </p:nvSpPr>
         <p:spPr>
           <a:xfrm>
-            <a:off x="914400" y="2029968"/>
-            <a:ext cx="2971800" cy="548640"/>
+            <a:off x="868680" y="2258568"/>
+            <a:ext cx="548640" cy="365760"/>
           </a:xfrm>
           <a:prstGeom prst="rect">
             <a:avLst/>
@@ -12516,6 +14679,45 @@
           </a:bodyPr>
           <a:lstStyle/>
           <a:p>
+            <a:pPr algn="ctr">
+              <a:lnSpc>
+                <a:spcPct val="115000"/>
+              </a:lnSpc>
+            </a:pPr>
+            <a:r>
+              <a:rPr sz="1700" b="1">
+                <a:solidFill>
+                  <a:srgbClr val="F8FAFC"/>
+                </a:solidFill>
+                <a:latin typeface="Helvetica Neue"/>
+              </a:rPr>
+              <a:t>1</a:t>
+            </a:r>
+          </a:p>
+        </p:txBody>
+      </p:sp>
+      <p:sp>
+        <p:nvSpPr>
+          <p:cNvPr id="8" name="TextBox 7"/>
+          <p:cNvSpPr txBox="1"/>
+          <p:nvPr/>
+        </p:nvSpPr>
+        <p:spPr>
+          <a:xfrm>
+            <a:off x="1645920" y="2029968"/>
+            <a:ext cx="4114800" cy="365760"/>
+          </a:xfrm>
+          <a:prstGeom prst="rect">
+            <a:avLst/>
+          </a:prstGeom>
+          <a:noFill/>
+        </p:spPr>
+        <p:txBody>
+          <a:bodyPr wrap="square" lIns="0" rIns="0" tIns="0" bIns="0" anchor="t">
+            <a:spAutoFit/>
+          </a:bodyPr>
+          <a:lstStyle/>
+          <a:p>
             <a:pPr algn="l">
               <a:lnSpc>
                 <a:spcPct val="115000"/>
@@ -12528,21 +14730,21 @@
                 </a:solidFill>
                 <a:latin typeface="Helvetica Neue"/>
               </a:rPr>
-              <a:t>Pricing</a:t>
-            </a:r>
-          </a:p>
-        </p:txBody>
-      </p:sp>
-      <p:sp>
-        <p:nvSpPr>
-          <p:cNvPr id="8" name="TextBox 7"/>
-          <p:cNvSpPr txBox="1"/>
-          <p:nvPr/>
-        </p:nvSpPr>
-        <p:spPr>
-          <a:xfrm>
-            <a:off x="914400" y="2560320"/>
-            <a:ext cx="2971800" cy="2697480"/>
+              <a:t>Raise a ticket</a:t>
+            </a:r>
+          </a:p>
+        </p:txBody>
+      </p:sp>
+      <p:sp>
+        <p:nvSpPr>
+          <p:cNvPr id="9" name="TextBox 8"/>
+          <p:cNvSpPr txBox="1"/>
+          <p:nvPr/>
+        </p:nvSpPr>
+        <p:spPr>
+          <a:xfrm>
+            <a:off x="1645920" y="2395728"/>
+            <a:ext cx="4160520" cy="548640"/>
           </a:xfrm>
           <a:prstGeom prst="rect">
             <a:avLst/>
@@ -12559,86 +14761,29 @@
               <a:lnSpc>
                 <a:spcPct val="115000"/>
               </a:lnSpc>
-              <a:spcAft>
-                <a:spcPts val="800"/>
-              </a:spcAft>
-            </a:pPr>
-            <a:r>
-              <a:rPr sz="1400" b="0">
+            </a:pPr>
+            <a:r>
+              <a:rPr sz="1300" b="0">
                 <a:solidFill>
                   <a:srgbClr val="94A3B8"/>
                 </a:solidFill>
                 <a:latin typeface="Helvetica Neue"/>
               </a:rPr>
-              <a:t>Marketplace add-on for Freshservice Pro &amp; Enterprise</a:t>
-            </a:r>
-          </a:p>
-          <a:p>
-            <a:pPr algn="l">
-              <a:lnSpc>
-                <a:spcPct val="115000"/>
-              </a:lnSpc>
-              <a:spcAft>
-                <a:spcPts val="800"/>
-              </a:spcAft>
-            </a:pPr>
-            <a:r>
-              <a:rPr sz="1400" b="0">
-                <a:solidFill>
-                  <a:srgbClr val="94A3B8"/>
-                </a:solidFill>
-                <a:latin typeface="Helvetica Neue"/>
-              </a:rPr>
-              <a:t>$8 / agent / month</a:t>
-            </a:r>
-          </a:p>
-          <a:p>
-            <a:pPr algn="l">
-              <a:lnSpc>
-                <a:spcPct val="115000"/>
-              </a:lnSpc>
-              <a:spcAft>
-                <a:spcPts val="800"/>
-              </a:spcAft>
-            </a:pPr>
-            <a:r>
-              <a:rPr sz="1400" b="0">
-                <a:solidFill>
-                  <a:srgbClr val="94A3B8"/>
-                </a:solidFill>
-                <a:latin typeface="Helvetica Neue"/>
-              </a:rPr>
-              <a:t>Free tier: 25 diagnoses / month</a:t>
-            </a:r>
-          </a:p>
-          <a:p>
-            <a:pPr algn="l">
-              <a:lnSpc>
-                <a:spcPct val="115000"/>
-              </a:lnSpc>
-            </a:pPr>
-            <a:r>
-              <a:rPr sz="1400" b="0">
-                <a:solidFill>
-                  <a:srgbClr val="94A3B8"/>
-                </a:solidFill>
-                <a:latin typeface="Helvetica Neue"/>
-              </a:rPr>
-              <a:t>30-day trial of auto-diagnosis</a:t>
-            </a:r>
-          </a:p>
-        </p:txBody>
-      </p:sp>
-      <p:sp>
-        <p:nvSpPr>
-          <p:cNvPr id="9" name="Rounded Rectangle 8"/>
+              <a:t>In Freshservice: "DB connection pool exhausted on Payment Service after deploy"</a:t>
+            </a:r>
+          </a:p>
+        </p:txBody>
+      </p:sp>
+      <p:sp>
+        <p:nvSpPr>
+          <p:cNvPr id="10" name="Rounded Rectangle 9"/>
           <p:cNvSpPr/>
           <p:nvPr/>
         </p:nvSpPr>
         <p:spPr>
           <a:xfrm>
-            <a:off x="4361688" y="1828800"/>
-            <a:ext cx="3474720" cy="3566160"/>
+            <a:off x="6172200" y="1828800"/>
+            <a:ext cx="5349240" cy="1188720"/>
           </a:xfrm>
           <a:prstGeom prst="roundRect">
             <a:avLst>
@@ -12679,16 +14824,16 @@
       </p:sp>
       <p:sp>
         <p:nvSpPr>
-          <p:cNvPr id="10" name="Rectangle 9"/>
+          <p:cNvPr id="11" name="Oval 10"/>
           <p:cNvSpPr/>
           <p:nvPr/>
         </p:nvSpPr>
         <p:spPr>
           <a:xfrm>
-            <a:off x="4361688" y="2057400"/>
-            <a:ext cx="54864" cy="457200"/>
-          </a:xfrm>
-          <a:prstGeom prst="rect">
+            <a:off x="6400800" y="2148840"/>
+            <a:ext cx="548640" cy="548640"/>
+          </a:xfrm>
+          <a:prstGeom prst="ellipse">
             <a:avLst/>
           </a:prstGeom>
           <a:solidFill>
@@ -12723,14 +14868,14 @@
       </p:sp>
       <p:sp>
         <p:nvSpPr>
-          <p:cNvPr id="11" name="TextBox 10"/>
-          <p:cNvSpPr txBox="1"/>
-          <p:nvPr/>
-        </p:nvSpPr>
-        <p:spPr>
-          <a:xfrm>
-            <a:off x="4636008" y="2029968"/>
-            <a:ext cx="2971800" cy="548640"/>
+          <p:cNvPr id="12" name="TextBox 11"/>
+          <p:cNvSpPr txBox="1"/>
+          <p:nvPr/>
+        </p:nvSpPr>
+        <p:spPr>
+          <a:xfrm>
+            <a:off x="6400800" y="2258568"/>
+            <a:ext cx="548640" cy="365760"/>
           </a:xfrm>
           <a:prstGeom prst="rect">
             <a:avLst/>
@@ -12743,6 +14888,45 @@
           </a:bodyPr>
           <a:lstStyle/>
           <a:p>
+            <a:pPr algn="ctr">
+              <a:lnSpc>
+                <a:spcPct val="115000"/>
+              </a:lnSpc>
+            </a:pPr>
+            <a:r>
+              <a:rPr sz="1700" b="1">
+                <a:solidFill>
+                  <a:srgbClr val="F8FAFC"/>
+                </a:solidFill>
+                <a:latin typeface="Helvetica Neue"/>
+              </a:rPr>
+              <a:t>2</a:t>
+            </a:r>
+          </a:p>
+        </p:txBody>
+      </p:sp>
+      <p:sp>
+        <p:nvSpPr>
+          <p:cNvPr id="13" name="TextBox 12"/>
+          <p:cNvSpPr txBox="1"/>
+          <p:nvPr/>
+        </p:nvSpPr>
+        <p:spPr>
+          <a:xfrm>
+            <a:off x="7178040" y="2029968"/>
+            <a:ext cx="4114800" cy="365760"/>
+          </a:xfrm>
+          <a:prstGeom prst="rect">
+            <a:avLst/>
+          </a:prstGeom>
+          <a:noFill/>
+        </p:spPr>
+        <p:txBody>
+          <a:bodyPr wrap="square" lIns="0" rIns="0" tIns="0" bIns="0" anchor="t">
+            <a:spAutoFit/>
+          </a:bodyPr>
+          <a:lstStyle/>
+          <a:p>
             <a:pPr algn="l">
               <a:lnSpc>
                 <a:spcPct val="115000"/>
@@ -12755,21 +14939,21 @@
                 </a:solidFill>
                 <a:latin typeface="Helvetica Neue"/>
               </a:rPr>
-              <a:t>Go-to-market</a:t>
-            </a:r>
-          </a:p>
-        </p:txBody>
-      </p:sp>
-      <p:sp>
-        <p:nvSpPr>
-          <p:cNvPr id="12" name="TextBox 11"/>
-          <p:cNvSpPr txBox="1"/>
-          <p:nvPr/>
-        </p:nvSpPr>
-        <p:spPr>
-          <a:xfrm>
-            <a:off x="4636008" y="2560320"/>
-            <a:ext cx="2971800" cy="2697480"/>
+              <a:t>Diagnose + route</a:t>
+            </a:r>
+          </a:p>
+        </p:txBody>
+      </p:sp>
+      <p:sp>
+        <p:nvSpPr>
+          <p:cNvPr id="14" name="TextBox 13"/>
+          <p:cNvSpPr txBox="1"/>
+          <p:nvPr/>
+        </p:nvSpPr>
+        <p:spPr>
+          <a:xfrm>
+            <a:off x="7178040" y="2395728"/>
+            <a:ext cx="4160520" cy="548640"/>
           </a:xfrm>
           <a:prstGeom prst="rect">
             <a:avLst/>
@@ -12786,86 +14970,29 @@
               <a:lnSpc>
                 <a:spcPct val="115000"/>
               </a:lnSpc>
-              <a:spcAft>
-                <a:spcPts val="800"/>
-              </a:spcAft>
-            </a:pPr>
-            <a:r>
-              <a:rPr sz="1400" b="0">
+            </a:pPr>
+            <a:r>
+              <a:rPr sz="1300" b="0">
                 <a:solidFill>
                   <a:srgbClr val="94A3B8"/>
                 </a:solidFill>
                 <a:latin typeface="Helvetica Neue"/>
               </a:rPr>
-              <a:t>Freshworks Marketplace listing + in-product banner</a:t>
-            </a:r>
-          </a:p>
-          <a:p>
-            <a:pPr algn="l">
-              <a:lnSpc>
-                <a:spcPct val="115000"/>
-              </a:lnSpc>
-              <a:spcAft>
-                <a:spcPts val="800"/>
-              </a:spcAft>
-            </a:pPr>
-            <a:r>
-              <a:rPr sz="1400" b="0">
-                <a:solidFill>
-                  <a:srgbClr val="94A3B8"/>
-                </a:solidFill>
-                <a:latin typeface="Helvetica Neue"/>
-              </a:rPr>
-              <a:t>5-minute onboarding: API key → Sync</a:t>
-            </a:r>
-          </a:p>
-          <a:p>
-            <a:pPr algn="l">
-              <a:lnSpc>
-                <a:spcPct val="115000"/>
-              </a:lnSpc>
-              <a:spcAft>
-                <a:spcPts val="800"/>
-              </a:spcAft>
-            </a:pPr>
-            <a:r>
-              <a:rPr sz="1400" b="0">
-                <a:solidFill>
-                  <a:srgbClr val="94A3B8"/>
-                </a:solidFill>
-                <a:latin typeface="Helvetica Neue"/>
-              </a:rPr>
-              <a:t>Email trial offer to Pro/Enterprise admins</a:t>
-            </a:r>
-          </a:p>
-          <a:p>
-            <a:pPr algn="l">
-              <a:lnSpc>
-                <a:spcPct val="115000"/>
-              </a:lnSpc>
-            </a:pPr>
-            <a:r>
-              <a:rPr sz="1400" b="0">
-                <a:solidFill>
-                  <a:srgbClr val="94A3B8"/>
-                </a:solidFill>
-                <a:latin typeface="Helvetica Neue"/>
-              </a:rPr>
-              <a:t>3–5 design partners for case studies</a:t>
-            </a:r>
-          </a:p>
-        </p:txBody>
-      </p:sp>
-      <p:sp>
-        <p:nvSpPr>
-          <p:cNvPr id="13" name="Rounded Rectangle 12"/>
+              <a:t>Workflow Automator fires → note posted, ticket lands in Database Team</a:t>
+            </a:r>
+          </a:p>
+        </p:txBody>
+      </p:sp>
+      <p:sp>
+        <p:nvSpPr>
+          <p:cNvPr id="15" name="Rounded Rectangle 14"/>
           <p:cNvSpPr/>
           <p:nvPr/>
         </p:nvSpPr>
         <p:spPr>
           <a:xfrm>
-            <a:off x="8083296" y="1828800"/>
-            <a:ext cx="3474720" cy="3566160"/>
+            <a:off x="640080" y="3200400"/>
+            <a:ext cx="5349240" cy="1188720"/>
           </a:xfrm>
           <a:prstGeom prst="roundRect">
             <a:avLst>
@@ -12906,20 +15033,20 @@
       </p:sp>
       <p:sp>
         <p:nvSpPr>
-          <p:cNvPr id="14" name="Rectangle 13"/>
+          <p:cNvPr id="16" name="Oval 15"/>
           <p:cNvSpPr/>
           <p:nvPr/>
         </p:nvSpPr>
         <p:spPr>
           <a:xfrm>
-            <a:off x="8083296" y="2057400"/>
-            <a:ext cx="54864" cy="457200"/>
-          </a:xfrm>
-          <a:prstGeom prst="rect">
+            <a:off x="868680" y="3520440"/>
+            <a:ext cx="548640" cy="548640"/>
+          </a:xfrm>
+          <a:prstGeom prst="ellipse">
             <a:avLst/>
           </a:prstGeom>
           <a:solidFill>
-            <a:srgbClr val="FBBF24"/>
+            <a:srgbClr val="818CF8"/>
           </a:solidFill>
           <a:ln>
             <a:noFill/>
@@ -12950,14 +15077,14 @@
       </p:sp>
       <p:sp>
         <p:nvSpPr>
-          <p:cNvPr id="15" name="TextBox 14"/>
-          <p:cNvSpPr txBox="1"/>
-          <p:nvPr/>
-        </p:nvSpPr>
-        <p:spPr>
-          <a:xfrm>
-            <a:off x="8357616" y="2029968"/>
-            <a:ext cx="2971800" cy="548640"/>
+          <p:cNvPr id="17" name="TextBox 16"/>
+          <p:cNvSpPr txBox="1"/>
+          <p:nvPr/>
+        </p:nvSpPr>
+        <p:spPr>
+          <a:xfrm>
+            <a:off x="868680" y="3630168"/>
+            <a:ext cx="548640" cy="365760"/>
           </a:xfrm>
           <a:prstGeom prst="rect">
             <a:avLst/>
@@ -12970,6 +15097,45 @@
           </a:bodyPr>
           <a:lstStyle/>
           <a:p>
+            <a:pPr algn="ctr">
+              <a:lnSpc>
+                <a:spcPct val="115000"/>
+              </a:lnSpc>
+            </a:pPr>
+            <a:r>
+              <a:rPr sz="1700" b="1">
+                <a:solidFill>
+                  <a:srgbClr val="F8FAFC"/>
+                </a:solidFill>
+                <a:latin typeface="Helvetica Neue"/>
+              </a:rPr>
+              <a:t>3</a:t>
+            </a:r>
+          </a:p>
+        </p:txBody>
+      </p:sp>
+      <p:sp>
+        <p:nvSpPr>
+          <p:cNvPr id="18" name="TextBox 17"/>
+          <p:cNvSpPr txBox="1"/>
+          <p:nvPr/>
+        </p:nvSpPr>
+        <p:spPr>
+          <a:xfrm>
+            <a:off x="1645920" y="3401568"/>
+            <a:ext cx="4114800" cy="365760"/>
+          </a:xfrm>
+          <a:prstGeom prst="rect">
+            <a:avLst/>
+          </a:prstGeom>
+          <a:noFill/>
+        </p:spPr>
+        <p:txBody>
+          <a:bodyPr wrap="square" lIns="0" rIns="0" tIns="0" bIns="0" anchor="t">
+            <a:spAutoFit/>
+          </a:bodyPr>
+          <a:lstStyle/>
+          <a:p>
             <a:pPr algn="l">
               <a:lnSpc>
                 <a:spcPct val="115000"/>
@@ -12982,21 +15148,21 @@
                 </a:solidFill>
                 <a:latin typeface="Helvetica Neue"/>
               </a:rPr>
-              <a:t>Cost to MVP</a:t>
-            </a:r>
-          </a:p>
-        </p:txBody>
-      </p:sp>
-      <p:sp>
-        <p:nvSpPr>
-          <p:cNvPr id="16" name="TextBox 15"/>
-          <p:cNvSpPr txBox="1"/>
-          <p:nvPr/>
-        </p:nvSpPr>
-        <p:spPr>
-          <a:xfrm>
-            <a:off x="8357616" y="2560320"/>
-            <a:ext cx="2971800" cy="2697480"/>
+              <a:t>Show the trace</a:t>
+            </a:r>
+          </a:p>
+        </p:txBody>
+      </p:sp>
+      <p:sp>
+        <p:nvSpPr>
+          <p:cNvPr id="19" name="TextBox 18"/>
+          <p:cNvSpPr txBox="1"/>
+          <p:nvPr/>
+        </p:nvSpPr>
+        <p:spPr>
+          <a:xfrm>
+            <a:off x="1645920" y="3767328"/>
+            <a:ext cx="4160520" cy="548640"/>
           </a:xfrm>
           <a:prstGeom prst="rect">
             <a:avLst/>
@@ -13013,98 +15179,41 @@
               <a:lnSpc>
                 <a:spcPct val="115000"/>
               </a:lnSpc>
-              <a:spcAft>
-                <a:spcPts val="800"/>
-              </a:spcAft>
-            </a:pPr>
-            <a:r>
-              <a:rPr sz="1400" b="0">
+            </a:pPr>
+            <a:r>
+              <a:rPr sz="1300" b="0">
                 <a:solidFill>
                   <a:srgbClr val="94A3B8"/>
                 </a:solidFill>
                 <a:latin typeface="Helvetica Neue"/>
               </a:rPr>
-              <a:t>3 engineers + part-time designer &amp; PM</a:t>
-            </a:r>
-          </a:p>
-          <a:p>
-            <a:pPr algn="l">
-              <a:lnSpc>
-                <a:spcPct val="115000"/>
-              </a:lnSpc>
-              <a:spcAft>
-                <a:spcPts val="800"/>
-              </a:spcAft>
-            </a:pPr>
-            <a:r>
-              <a:rPr sz="1400" b="0">
-                <a:solidFill>
-                  <a:srgbClr val="94A3B8"/>
-                </a:solidFill>
-                <a:latin typeface="Helvetica Neue"/>
-              </a:rPr>
-              <a:t>~3 months to production MVP</a:t>
-            </a:r>
-          </a:p>
-          <a:p>
-            <a:pPr algn="l">
-              <a:lnSpc>
-                <a:spcPct val="115000"/>
-              </a:lnSpc>
-              <a:spcAft>
-                <a:spcPts val="800"/>
-              </a:spcAft>
-            </a:pPr>
-            <a:r>
-              <a:rPr sz="1400" b="0">
-                <a:solidFill>
-                  <a:srgbClr val="94A3B8"/>
-                </a:solidFill>
-                <a:latin typeface="Helvetica Neue"/>
-              </a:rPr>
-              <a:t>~$90–110K (salaries, LLM, hosting)</a:t>
-            </a:r>
-          </a:p>
-          <a:p>
-            <a:pPr algn="l">
-              <a:lnSpc>
-                <a:spcPct val="115000"/>
-              </a:lnSpc>
-            </a:pPr>
-            <a:r>
-              <a:rPr sz="1400" b="0">
-                <a:solidFill>
-                  <a:srgbClr val="94A3B8"/>
-                </a:solidFill>
-                <a:latin typeface="Helvetica Neue"/>
-              </a:rPr>
-              <a:t>Illustrative ARR: 100 customers × 30 agents × $8 × 12 ≈ $288K</a:t>
-            </a:r>
-          </a:p>
-        </p:txBody>
-      </p:sp>
-      <p:sp>
-        <p:nvSpPr>
-          <p:cNvPr id="17" name="Rounded Rectangle 16"/>
+              <a:t>Freshservice Integration page → brain icon → live agent trace · Activity Log</a:t>
+            </a:r>
+          </a:p>
+        </p:txBody>
+      </p:sp>
+      <p:sp>
+        <p:nvSpPr>
+          <p:cNvPr id="20" name="Rounded Rectangle 19"/>
           <p:cNvSpPr/>
           <p:nvPr/>
         </p:nvSpPr>
         <p:spPr>
           <a:xfrm>
-            <a:off x="640080" y="5715000"/>
-            <a:ext cx="1371600" cy="274320"/>
+            <a:off x="6172200" y="3200400"/>
+            <a:ext cx="5349240" cy="1188720"/>
           </a:xfrm>
           <a:prstGeom prst="roundRect">
             <a:avLst>
-              <a:gd name="adj" fmla="val 50000"/>
+              <a:gd name="adj" fmla="val 6000"/>
             </a:avLst>
           </a:prstGeom>
           <a:solidFill>
-            <a:srgbClr val="0B1120"/>
+            <a:srgbClr val="151E32"/>
           </a:solidFill>
           <a:ln w="12700">
             <a:solidFill>
-              <a:srgbClr val="FBBF24"/>
+              <a:srgbClr val="2A3650"/>
             </a:solidFill>
           </a:ln>
           <a:effectLst/>
@@ -13133,14 +15242,58 @@
       </p:sp>
       <p:sp>
         <p:nvSpPr>
-          <p:cNvPr id="18" name="TextBox 17"/>
-          <p:cNvSpPr txBox="1"/>
-          <p:nvPr/>
-        </p:nvSpPr>
-        <p:spPr>
-          <a:xfrm>
-            <a:off x="640080" y="5756148"/>
-            <a:ext cx="1371600" cy="228600"/>
+          <p:cNvPr id="21" name="Oval 20"/>
+          <p:cNvSpPr/>
+          <p:nvPr/>
+        </p:nvSpPr>
+        <p:spPr>
+          <a:xfrm>
+            <a:off x="6400800" y="3520440"/>
+            <a:ext cx="548640" cy="548640"/>
+          </a:xfrm>
+          <a:prstGeom prst="ellipse">
+            <a:avLst/>
+          </a:prstGeom>
+          <a:solidFill>
+            <a:srgbClr val="818CF8"/>
+          </a:solidFill>
+          <a:ln>
+            <a:noFill/>
+          </a:ln>
+          <a:effectLst/>
+        </p:spPr>
+        <p:style>
+          <a:lnRef idx="1">
+            <a:schemeClr val="accent1"/>
+          </a:lnRef>
+          <a:fillRef idx="3">
+            <a:schemeClr val="accent1"/>
+          </a:fillRef>
+          <a:effectRef idx="2">
+            <a:schemeClr val="accent1"/>
+          </a:effectRef>
+          <a:fontRef idx="minor">
+            <a:schemeClr val="lt1"/>
+          </a:fontRef>
+        </p:style>
+        <p:txBody>
+          <a:bodyPr rtlCol="0" anchor="ctr"/>
+          <a:lstStyle/>
+          <a:p>
+            <a:pPr algn="ctr"/>
+          </a:p>
+        </p:txBody>
+      </p:sp>
+      <p:sp>
+        <p:nvSpPr>
+          <p:cNvPr id="22" name="TextBox 21"/>
+          <p:cNvSpPr txBox="1"/>
+          <p:nvPr/>
+        </p:nvSpPr>
+        <p:spPr>
+          <a:xfrm>
+            <a:off x="6400800" y="3630168"/>
+            <a:ext cx="548640" cy="365760"/>
           </a:xfrm>
           <a:prstGeom prst="rect">
             <a:avLst/>
@@ -13159,27 +15312,27 @@
               </a:lnSpc>
             </a:pPr>
             <a:r>
-              <a:rPr sz="1000" b="1">
-                <a:solidFill>
-                  <a:srgbClr val="FBBF24"/>
-                </a:solidFill>
-                <a:latin typeface="Helvetica Neue"/>
-              </a:rPr>
-              <a:t>ASSUMPTIONS</a:t>
-            </a:r>
-          </a:p>
-        </p:txBody>
-      </p:sp>
-      <p:sp>
-        <p:nvSpPr>
-          <p:cNvPr id="19" name="TextBox 18"/>
-          <p:cNvSpPr txBox="1"/>
-          <p:nvPr/>
-        </p:nvSpPr>
-        <p:spPr>
-          <a:xfrm>
-            <a:off x="2148840" y="5751576"/>
-            <a:ext cx="9144000" cy="320040"/>
+              <a:rPr sz="1700" b="1">
+                <a:solidFill>
+                  <a:srgbClr val="F8FAFC"/>
+                </a:solidFill>
+                <a:latin typeface="Helvetica Neue"/>
+              </a:rPr>
+              <a:t>4</a:t>
+            </a:r>
+          </a:p>
+        </p:txBody>
+      </p:sp>
+      <p:sp>
+        <p:nvSpPr>
+          <p:cNvPr id="23" name="TextBox 22"/>
+          <p:cNvSpPr txBox="1"/>
+          <p:nvPr/>
+        </p:nvSpPr>
+        <p:spPr>
+          <a:xfrm>
+            <a:off x="7178040" y="3401568"/>
+            <a:ext cx="4114800" cy="365760"/>
           </a:xfrm>
           <a:prstGeom prst="rect">
             <a:avLst/>
@@ -13198,13 +15351,470 @@
               </a:lnSpc>
             </a:pPr>
             <a:r>
-              <a:rPr sz="1200" b="0">
+              <a:rPr sz="1700" b="1">
+                <a:solidFill>
+                  <a:srgbClr val="F8FAFC"/>
+                </a:solidFill>
+                <a:latin typeface="Helvetica Neue"/>
+              </a:rPr>
+              <a:t>Raise a change</a:t>
+            </a:r>
+          </a:p>
+        </p:txBody>
+      </p:sp>
+      <p:sp>
+        <p:nvSpPr>
+          <p:cNvPr id="24" name="TextBox 23"/>
+          <p:cNvSpPr txBox="1"/>
+          <p:nvPr/>
+        </p:nvSpPr>
+        <p:spPr>
+          <a:xfrm>
+            <a:off x="7178040" y="3767328"/>
+            <a:ext cx="4160520" cy="548640"/>
+          </a:xfrm>
+          <a:prstGeom prst="rect">
+            <a:avLst/>
+          </a:prstGeom>
+          <a:noFill/>
+        </p:spPr>
+        <p:txBody>
+          <a:bodyPr wrap="square" lIns="0" rIns="0" tIns="0" bIns="0" anchor="t">
+            <a:spAutoFit/>
+          </a:bodyPr>
+          <a:lstStyle/>
+          <a:p>
+            <a:pPr algn="l">
+              <a:lnSpc>
+                <a:spcPct val="115000"/>
+              </a:lnSpc>
+            </a:pPr>
+            <a:r>
+              <a:rPr sz="1300" b="0">
                 <a:solidFill>
                   <a:srgbClr val="94A3B8"/>
                 </a:solidFill>
                 <a:latin typeface="Helvetica Neue"/>
               </a:rPr>
-              <a:t>Prices, costs and ARR are working estimates, to be validated with design partners.</a:t>
+              <a:t>In Freshservice: "Upgrade SMTP relay config for Notification Service"</a:t>
+            </a:r>
+          </a:p>
+        </p:txBody>
+      </p:sp>
+      <p:sp>
+        <p:nvSpPr>
+          <p:cNvPr id="25" name="Rounded Rectangle 24"/>
+          <p:cNvSpPr/>
+          <p:nvPr/>
+        </p:nvSpPr>
+        <p:spPr>
+          <a:xfrm>
+            <a:off x="640080" y="4572000"/>
+            <a:ext cx="5349240" cy="1188720"/>
+          </a:xfrm>
+          <a:prstGeom prst="roundRect">
+            <a:avLst>
+              <a:gd name="adj" fmla="val 6000"/>
+            </a:avLst>
+          </a:prstGeom>
+          <a:solidFill>
+            <a:srgbClr val="151E32"/>
+          </a:solidFill>
+          <a:ln w="12700">
+            <a:solidFill>
+              <a:srgbClr val="2A3650"/>
+            </a:solidFill>
+          </a:ln>
+          <a:effectLst/>
+        </p:spPr>
+        <p:style>
+          <a:lnRef idx="1">
+            <a:schemeClr val="accent1"/>
+          </a:lnRef>
+          <a:fillRef idx="3">
+            <a:schemeClr val="accent1"/>
+          </a:fillRef>
+          <a:effectRef idx="2">
+            <a:schemeClr val="accent1"/>
+          </a:effectRef>
+          <a:fontRef idx="minor">
+            <a:schemeClr val="lt1"/>
+          </a:fontRef>
+        </p:style>
+        <p:txBody>
+          <a:bodyPr rtlCol="0" anchor="ctr"/>
+          <a:lstStyle/>
+          <a:p>
+            <a:pPr algn="ctr"/>
+          </a:p>
+        </p:txBody>
+      </p:sp>
+      <p:sp>
+        <p:nvSpPr>
+          <p:cNvPr id="26" name="Oval 25"/>
+          <p:cNvSpPr/>
+          <p:nvPr/>
+        </p:nvSpPr>
+        <p:spPr>
+          <a:xfrm>
+            <a:off x="868680" y="4892040"/>
+            <a:ext cx="548640" cy="548640"/>
+          </a:xfrm>
+          <a:prstGeom prst="ellipse">
+            <a:avLst/>
+          </a:prstGeom>
+          <a:solidFill>
+            <a:srgbClr val="818CF8"/>
+          </a:solidFill>
+          <a:ln>
+            <a:noFill/>
+          </a:ln>
+          <a:effectLst/>
+        </p:spPr>
+        <p:style>
+          <a:lnRef idx="1">
+            <a:schemeClr val="accent1"/>
+          </a:lnRef>
+          <a:fillRef idx="3">
+            <a:schemeClr val="accent1"/>
+          </a:fillRef>
+          <a:effectRef idx="2">
+            <a:schemeClr val="accent1"/>
+          </a:effectRef>
+          <a:fontRef idx="minor">
+            <a:schemeClr val="lt1"/>
+          </a:fontRef>
+        </p:style>
+        <p:txBody>
+          <a:bodyPr rtlCol="0" anchor="ctr"/>
+          <a:lstStyle/>
+          <a:p>
+            <a:pPr algn="ctr"/>
+          </a:p>
+        </p:txBody>
+      </p:sp>
+      <p:sp>
+        <p:nvSpPr>
+          <p:cNvPr id="27" name="TextBox 26"/>
+          <p:cNvSpPr txBox="1"/>
+          <p:nvPr/>
+        </p:nvSpPr>
+        <p:spPr>
+          <a:xfrm>
+            <a:off x="868680" y="5001768"/>
+            <a:ext cx="548640" cy="365760"/>
+          </a:xfrm>
+          <a:prstGeom prst="rect">
+            <a:avLst/>
+          </a:prstGeom>
+          <a:noFill/>
+        </p:spPr>
+        <p:txBody>
+          <a:bodyPr wrap="square" lIns="0" rIns="0" tIns="0" bIns="0" anchor="t">
+            <a:spAutoFit/>
+          </a:bodyPr>
+          <a:lstStyle/>
+          <a:p>
+            <a:pPr algn="ctr">
+              <a:lnSpc>
+                <a:spcPct val="115000"/>
+              </a:lnSpc>
+            </a:pPr>
+            <a:r>
+              <a:rPr sz="1700" b="1">
+                <a:solidFill>
+                  <a:srgbClr val="F8FAFC"/>
+                </a:solidFill>
+                <a:latin typeface="Helvetica Neue"/>
+              </a:rPr>
+              <a:t>5</a:t>
+            </a:r>
+          </a:p>
+        </p:txBody>
+      </p:sp>
+      <p:sp>
+        <p:nvSpPr>
+          <p:cNvPr id="28" name="TextBox 27"/>
+          <p:cNvSpPr txBox="1"/>
+          <p:nvPr/>
+        </p:nvSpPr>
+        <p:spPr>
+          <a:xfrm>
+            <a:off x="1645920" y="4773168"/>
+            <a:ext cx="4114800" cy="365760"/>
+          </a:xfrm>
+          <a:prstGeom prst="rect">
+            <a:avLst/>
+          </a:prstGeom>
+          <a:noFill/>
+        </p:spPr>
+        <p:txBody>
+          <a:bodyPr wrap="square" lIns="0" rIns="0" tIns="0" bIns="0" anchor="t">
+            <a:spAutoFit/>
+          </a:bodyPr>
+          <a:lstStyle/>
+          <a:p>
+            <a:pPr algn="l">
+              <a:lnSpc>
+                <a:spcPct val="115000"/>
+              </a:lnSpc>
+            </a:pPr>
+            <a:r>
+              <a:rPr sz="1700" b="1">
+                <a:solidFill>
+                  <a:srgbClr val="F8FAFC"/>
+                </a:solidFill>
+                <a:latin typeface="Helvetica Neue"/>
+              </a:rPr>
+              <a:t>Blast radius</a:t>
+            </a:r>
+          </a:p>
+        </p:txBody>
+      </p:sp>
+      <p:sp>
+        <p:nvSpPr>
+          <p:cNvPr id="29" name="TextBox 28"/>
+          <p:cNvSpPr txBox="1"/>
+          <p:nvPr/>
+        </p:nvSpPr>
+        <p:spPr>
+          <a:xfrm>
+            <a:off x="1645920" y="5138928"/>
+            <a:ext cx="4160520" cy="548640"/>
+          </a:xfrm>
+          <a:prstGeom prst="rect">
+            <a:avLst/>
+          </a:prstGeom>
+          <a:noFill/>
+        </p:spPr>
+        <p:txBody>
+          <a:bodyPr wrap="square" lIns="0" rIns="0" tIns="0" bIns="0" anchor="t">
+            <a:spAutoFit/>
+          </a:bodyPr>
+          <a:lstStyle/>
+          <a:p>
+            <a:pPr algn="l">
+              <a:lnSpc>
+                <a:spcPct val="115000"/>
+              </a:lnSpc>
+            </a:pPr>
+            <a:r>
+              <a:rPr sz="1300" b="0">
+                <a:solidFill>
+                  <a:srgbClr val="94A3B8"/>
+                </a:solidFill>
+                <a:latin typeface="Helvetica Neue"/>
+              </a:rPr>
+              <a:t>3-agent pipeline → impact, downstream services, CAB reviewers on the change</a:t>
+            </a:r>
+          </a:p>
+        </p:txBody>
+      </p:sp>
+      <p:sp>
+        <p:nvSpPr>
+          <p:cNvPr id="30" name="Rounded Rectangle 29"/>
+          <p:cNvSpPr/>
+          <p:nvPr/>
+        </p:nvSpPr>
+        <p:spPr>
+          <a:xfrm>
+            <a:off x="6172200" y="4572000"/>
+            <a:ext cx="5349240" cy="1188720"/>
+          </a:xfrm>
+          <a:prstGeom prst="roundRect">
+            <a:avLst>
+              <a:gd name="adj" fmla="val 6000"/>
+            </a:avLst>
+          </a:prstGeom>
+          <a:solidFill>
+            <a:srgbClr val="151E32"/>
+          </a:solidFill>
+          <a:ln w="12700">
+            <a:solidFill>
+              <a:srgbClr val="2A3650"/>
+            </a:solidFill>
+          </a:ln>
+          <a:effectLst/>
+        </p:spPr>
+        <p:style>
+          <a:lnRef idx="1">
+            <a:schemeClr val="accent1"/>
+          </a:lnRef>
+          <a:fillRef idx="3">
+            <a:schemeClr val="accent1"/>
+          </a:fillRef>
+          <a:effectRef idx="2">
+            <a:schemeClr val="accent1"/>
+          </a:effectRef>
+          <a:fontRef idx="minor">
+            <a:schemeClr val="lt1"/>
+          </a:fontRef>
+        </p:style>
+        <p:txBody>
+          <a:bodyPr rtlCol="0" anchor="ctr"/>
+          <a:lstStyle/>
+          <a:p>
+            <a:pPr algn="ctr"/>
+          </a:p>
+        </p:txBody>
+      </p:sp>
+      <p:sp>
+        <p:nvSpPr>
+          <p:cNvPr id="31" name="Oval 30"/>
+          <p:cNvSpPr/>
+          <p:nvPr/>
+        </p:nvSpPr>
+        <p:spPr>
+          <a:xfrm>
+            <a:off x="6400800" y="4892040"/>
+            <a:ext cx="548640" cy="548640"/>
+          </a:xfrm>
+          <a:prstGeom prst="ellipse">
+            <a:avLst/>
+          </a:prstGeom>
+          <a:solidFill>
+            <a:srgbClr val="818CF8"/>
+          </a:solidFill>
+          <a:ln>
+            <a:noFill/>
+          </a:ln>
+          <a:effectLst/>
+        </p:spPr>
+        <p:style>
+          <a:lnRef idx="1">
+            <a:schemeClr val="accent1"/>
+          </a:lnRef>
+          <a:fillRef idx="3">
+            <a:schemeClr val="accent1"/>
+          </a:fillRef>
+          <a:effectRef idx="2">
+            <a:schemeClr val="accent1"/>
+          </a:effectRef>
+          <a:fontRef idx="minor">
+            <a:schemeClr val="lt1"/>
+          </a:fontRef>
+        </p:style>
+        <p:txBody>
+          <a:bodyPr rtlCol="0" anchor="ctr"/>
+          <a:lstStyle/>
+          <a:p>
+            <a:pPr algn="ctr"/>
+          </a:p>
+        </p:txBody>
+      </p:sp>
+      <p:sp>
+        <p:nvSpPr>
+          <p:cNvPr id="32" name="TextBox 31"/>
+          <p:cNvSpPr txBox="1"/>
+          <p:nvPr/>
+        </p:nvSpPr>
+        <p:spPr>
+          <a:xfrm>
+            <a:off x="6400800" y="5001768"/>
+            <a:ext cx="548640" cy="365760"/>
+          </a:xfrm>
+          <a:prstGeom prst="rect">
+            <a:avLst/>
+          </a:prstGeom>
+          <a:noFill/>
+        </p:spPr>
+        <p:txBody>
+          <a:bodyPr wrap="square" lIns="0" rIns="0" tIns="0" bIns="0" anchor="t">
+            <a:spAutoFit/>
+          </a:bodyPr>
+          <a:lstStyle/>
+          <a:p>
+            <a:pPr algn="ctr">
+              <a:lnSpc>
+                <a:spcPct val="115000"/>
+              </a:lnSpc>
+            </a:pPr>
+            <a:r>
+              <a:rPr sz="1700" b="1">
+                <a:solidFill>
+                  <a:srgbClr val="F8FAFC"/>
+                </a:solidFill>
+                <a:latin typeface="Helvetica Neue"/>
+              </a:rPr>
+              <a:t>6</a:t>
+            </a:r>
+          </a:p>
+        </p:txBody>
+      </p:sp>
+      <p:sp>
+        <p:nvSpPr>
+          <p:cNvPr id="33" name="TextBox 32"/>
+          <p:cNvSpPr txBox="1"/>
+          <p:nvPr/>
+        </p:nvSpPr>
+        <p:spPr>
+          <a:xfrm>
+            <a:off x="7178040" y="4773168"/>
+            <a:ext cx="4114800" cy="365760"/>
+          </a:xfrm>
+          <a:prstGeom prst="rect">
+            <a:avLst/>
+          </a:prstGeom>
+          <a:noFill/>
+        </p:spPr>
+        <p:txBody>
+          <a:bodyPr wrap="square" lIns="0" rIns="0" tIns="0" bIns="0" anchor="t">
+            <a:spAutoFit/>
+          </a:bodyPr>
+          <a:lstStyle/>
+          <a:p>
+            <a:pPr algn="l">
+              <a:lnSpc>
+                <a:spcPct val="115000"/>
+              </a:lnSpc>
+            </a:pPr>
+            <a:r>
+              <a:rPr sz="1700" b="1">
+                <a:solidFill>
+                  <a:srgbClr val="F8FAFC"/>
+                </a:solidFill>
+                <a:latin typeface="Helvetica Neue"/>
+              </a:rPr>
+              <a:t>Explore</a:t>
+            </a:r>
+          </a:p>
+        </p:txBody>
+      </p:sp>
+      <p:sp>
+        <p:nvSpPr>
+          <p:cNvPr id="34" name="TextBox 33"/>
+          <p:cNvSpPr txBox="1"/>
+          <p:nvPr/>
+        </p:nvSpPr>
+        <p:spPr>
+          <a:xfrm>
+            <a:off x="7178040" y="5138928"/>
+            <a:ext cx="4160520" cy="548640"/>
+          </a:xfrm>
+          <a:prstGeom prst="rect">
+            <a:avLst/>
+          </a:prstGeom>
+          <a:noFill/>
+        </p:spPr>
+        <p:txBody>
+          <a:bodyPr wrap="square" lIns="0" rIns="0" tIns="0" bIns="0" anchor="t">
+            <a:spAutoFit/>
+          </a:bodyPr>
+          <a:lstStyle/>
+          <a:p>
+            <a:pPr algn="l">
+              <a:lnSpc>
+                <a:spcPct val="115000"/>
+              </a:lnSpc>
+            </a:pPr>
+            <a:r>
+              <a:rPr sz="1300" b="0">
+                <a:solidFill>
+                  <a:srgbClr val="94A3B8"/>
+                </a:solidFill>
+                <a:latin typeface="Helvetica Neue"/>
+              </a:rPr>
+              <a:t>Knowledge Graph → Notification Service → Blast Radius highlights the same services</a:t>
             </a:r>
           </a:p>
         </p:txBody>
@@ -13269,7 +15879,7 @@
                 </a:solidFill>
                 <a:latin typeface="Helvetica Neue"/>
               </a:rPr>
-              <a:t>SUCCESS METRICS · 6 MONTHS AFTER LAUNCH</a:t>
+              <a:t>TARGET CUSTOMERS &amp; VALUE</a:t>
             </a:r>
           </a:p>
         </p:txBody>
@@ -13308,7 +15918,7 @@
                 </a:solidFill>
                 <a:latin typeface="Helvetica Neue"/>
               </a:rPr>
-              <a:t>How we'll know it worked</a:t>
+              <a:t>Who it's for, and why they'll want it</a:t>
             </a:r>
           </a:p>
         </p:txBody>
@@ -13360,8 +15970,8 @@
         </p:nvSpPr>
         <p:spPr>
           <a:xfrm>
-            <a:off x="640080" y="2011680"/>
-            <a:ext cx="2560320" cy="2926080"/>
+            <a:off x="640080" y="1828800"/>
+            <a:ext cx="5303520" cy="2103120"/>
           </a:xfrm>
           <a:prstGeom prst="roundRect">
             <a:avLst>
@@ -13402,14 +16012,58 @@
       </p:sp>
       <p:sp>
         <p:nvSpPr>
-          <p:cNvPr id="6" name="TextBox 5"/>
-          <p:cNvSpPr txBox="1"/>
-          <p:nvPr/>
-        </p:nvSpPr>
-        <p:spPr>
-          <a:xfrm>
-            <a:off x="640080" y="2560320"/>
-            <a:ext cx="2560320" cy="914400"/>
+          <p:cNvPr id="6" name="Rectangle 5"/>
+          <p:cNvSpPr/>
+          <p:nvPr/>
+        </p:nvSpPr>
+        <p:spPr>
+          <a:xfrm>
+            <a:off x="640080" y="2057400"/>
+            <a:ext cx="54864" cy="457200"/>
+          </a:xfrm>
+          <a:prstGeom prst="rect">
+            <a:avLst/>
+          </a:prstGeom>
+          <a:solidFill>
+            <a:srgbClr val="2DD4BF"/>
+          </a:solidFill>
+          <a:ln>
+            <a:noFill/>
+          </a:ln>
+          <a:effectLst/>
+        </p:spPr>
+        <p:style>
+          <a:lnRef idx="1">
+            <a:schemeClr val="accent1"/>
+          </a:lnRef>
+          <a:fillRef idx="3">
+            <a:schemeClr val="accent1"/>
+          </a:fillRef>
+          <a:effectRef idx="2">
+            <a:schemeClr val="accent1"/>
+          </a:effectRef>
+          <a:fontRef idx="minor">
+            <a:schemeClr val="lt1"/>
+          </a:fontRef>
+        </p:style>
+        <p:txBody>
+          <a:bodyPr rtlCol="0" anchor="ctr"/>
+          <a:lstStyle/>
+          <a:p>
+            <a:pPr algn="ctr"/>
+          </a:p>
+        </p:txBody>
+      </p:sp>
+      <p:sp>
+        <p:nvSpPr>
+          <p:cNvPr id="7" name="TextBox 6"/>
+          <p:cNvSpPr txBox="1"/>
+          <p:nvPr/>
+        </p:nvSpPr>
+        <p:spPr>
+          <a:xfrm>
+            <a:off x="914400" y="2029968"/>
+            <a:ext cx="4800600" cy="548640"/>
           </a:xfrm>
           <a:prstGeom prst="rect">
             <a:avLst/>
@@ -13422,33 +16076,33 @@
           </a:bodyPr>
           <a:lstStyle/>
           <a:p>
-            <a:pPr algn="ctr">
-              <a:lnSpc>
-                <a:spcPct val="115000"/>
-              </a:lnSpc>
-            </a:pPr>
-            <a:r>
-              <a:rPr sz="4800" b="1">
-                <a:solidFill>
-                  <a:srgbClr val="2DD4BF"/>
-                </a:solidFill>
-                <a:latin typeface="Helvetica Neue"/>
-              </a:rPr>
-              <a:t>−25%</a:t>
-            </a:r>
-          </a:p>
-        </p:txBody>
-      </p:sp>
-      <p:sp>
-        <p:nvSpPr>
-          <p:cNvPr id="7" name="TextBox 6"/>
-          <p:cNvSpPr txBox="1"/>
-          <p:nvPr/>
-        </p:nvSpPr>
-        <p:spPr>
-          <a:xfrm>
-            <a:off x="868680" y="3749039"/>
-            <a:ext cx="2103120" cy="914400"/>
+            <a:pPr algn="l">
+              <a:lnSpc>
+                <a:spcPct val="115000"/>
+              </a:lnSpc>
+            </a:pPr>
+            <a:r>
+              <a:rPr sz="1700" b="1">
+                <a:solidFill>
+                  <a:srgbClr val="F8FAFC"/>
+                </a:solidFill>
+                <a:latin typeface="Helvetica Neue"/>
+              </a:rPr>
+              <a:t>Primary</a:t>
+            </a:r>
+          </a:p>
+        </p:txBody>
+      </p:sp>
+      <p:sp>
+        <p:nvSpPr>
+          <p:cNvPr id="8" name="TextBox 7"/>
+          <p:cNvSpPr txBox="1"/>
+          <p:nvPr/>
+        </p:nvSpPr>
+        <p:spPr>
+          <a:xfrm>
+            <a:off x="914400" y="2560320"/>
+            <a:ext cx="4800600" cy="1234440"/>
           </a:xfrm>
           <a:prstGeom prst="rect">
             <a:avLst/>
@@ -13461,7 +16115,7 @@
           </a:bodyPr>
           <a:lstStyle/>
           <a:p>
-            <a:pPr algn="ctr">
+            <a:pPr algn="l">
               <a:lnSpc>
                 <a:spcPct val="115000"/>
               </a:lnSpc>
@@ -13469,25 +16123,25 @@
             <a:r>
               <a:rPr sz="1500" b="0">
                 <a:solidFill>
-                  <a:srgbClr val="F8FAFC"/>
-                </a:solidFill>
-                <a:latin typeface="Helvetica Neue"/>
-              </a:rPr>
-              <a:t>MTTR on diagnosed incidents</a:t>
-            </a:r>
-          </a:p>
-        </p:txBody>
-      </p:sp>
-      <p:sp>
-        <p:nvSpPr>
-          <p:cNvPr id="8" name="Rounded Rectangle 7"/>
+                  <a:srgbClr val="94A3B8"/>
+                </a:solidFill>
+                <a:latin typeface="Helvetica Neue"/>
+              </a:rPr>
+              <a:t>Mid-size software &amp; digital companies (200–2,000 employees) running IT/engineering incidents in Freshservice, with 20+ microservices and several teams.</a:t>
+            </a:r>
+          </a:p>
+        </p:txBody>
+      </p:sp>
+      <p:sp>
+        <p:nvSpPr>
+          <p:cNvPr id="9" name="Rounded Rectangle 8"/>
           <p:cNvSpPr/>
           <p:nvPr/>
         </p:nvSpPr>
         <p:spPr>
           <a:xfrm>
-            <a:off x="3410712" y="2011680"/>
-            <a:ext cx="2560320" cy="2926080"/>
+            <a:off x="6217920" y="1828800"/>
+            <a:ext cx="5303520" cy="2103120"/>
           </a:xfrm>
           <a:prstGeom prst="roundRect">
             <a:avLst>
@@ -13528,105 +16182,23 @@
       </p:sp>
       <p:sp>
         <p:nvSpPr>
-          <p:cNvPr id="9" name="TextBox 8"/>
-          <p:cNvSpPr txBox="1"/>
-          <p:nvPr/>
-        </p:nvSpPr>
-        <p:spPr>
-          <a:xfrm>
-            <a:off x="3410712" y="2560320"/>
-            <a:ext cx="2560320" cy="914400"/>
-          </a:xfrm>
-          <a:prstGeom prst="rect">
-            <a:avLst/>
-          </a:prstGeom>
-          <a:noFill/>
-        </p:spPr>
-        <p:txBody>
-          <a:bodyPr wrap="square" lIns="0" rIns="0" tIns="0" bIns="0" anchor="t">
-            <a:spAutoFit/>
-          </a:bodyPr>
-          <a:lstStyle/>
-          <a:p>
-            <a:pPr algn="ctr">
-              <a:lnSpc>
-                <a:spcPct val="115000"/>
-              </a:lnSpc>
-            </a:pPr>
-            <a:r>
-              <a:rPr sz="4800" b="1">
-                <a:solidFill>
-                  <a:srgbClr val="818CF8"/>
-                </a:solidFill>
-                <a:latin typeface="Helvetica Neue"/>
-              </a:rPr>
-              <a:t>≥ 80%</a:t>
-            </a:r>
-          </a:p>
-        </p:txBody>
-      </p:sp>
-      <p:sp>
-        <p:nvSpPr>
-          <p:cNvPr id="10" name="TextBox 9"/>
-          <p:cNvSpPr txBox="1"/>
-          <p:nvPr/>
-        </p:nvSpPr>
-        <p:spPr>
-          <a:xfrm>
-            <a:off x="3639312" y="3749039"/>
-            <a:ext cx="2103120" cy="914400"/>
-          </a:xfrm>
-          <a:prstGeom prst="rect">
-            <a:avLst/>
-          </a:prstGeom>
-          <a:noFill/>
-        </p:spPr>
-        <p:txBody>
-          <a:bodyPr wrap="square" lIns="0" rIns="0" tIns="0" bIns="0" anchor="t">
-            <a:spAutoFit/>
-          </a:bodyPr>
-          <a:lstStyle/>
-          <a:p>
-            <a:pPr algn="ctr">
-              <a:lnSpc>
-                <a:spcPct val="115000"/>
-              </a:lnSpc>
-            </a:pPr>
-            <a:r>
-              <a:rPr sz="1500" b="0">
-                <a:solidFill>
-                  <a:srgbClr val="F8FAFC"/>
-                </a:solidFill>
-                <a:latin typeface="Helvetica Neue"/>
-              </a:rPr>
-              <a:t>New incidents auto-diagnosed</a:t>
-            </a:r>
-          </a:p>
-        </p:txBody>
-      </p:sp>
-      <p:sp>
-        <p:nvSpPr>
-          <p:cNvPr id="11" name="Rounded Rectangle 10"/>
+          <p:cNvPr id="10" name="Rectangle 9"/>
           <p:cNvSpPr/>
           <p:nvPr/>
         </p:nvSpPr>
         <p:spPr>
           <a:xfrm>
-            <a:off x="6181344" y="2011680"/>
-            <a:ext cx="2560320" cy="2926080"/>
-          </a:xfrm>
-          <a:prstGeom prst="roundRect">
-            <a:avLst>
-              <a:gd name="adj" fmla="val 6000"/>
-            </a:avLst>
+            <a:off x="6217920" y="2057400"/>
+            <a:ext cx="54864" cy="457200"/>
+          </a:xfrm>
+          <a:prstGeom prst="rect">
+            <a:avLst/>
           </a:prstGeom>
           <a:solidFill>
-            <a:srgbClr val="151E32"/>
+            <a:srgbClr val="818CF8"/>
           </a:solidFill>
-          <a:ln w="12700">
-            <a:solidFill>
-              <a:srgbClr val="2A3650"/>
-            </a:solidFill>
+          <a:ln>
+            <a:noFill/>
           </a:ln>
           <a:effectLst/>
         </p:spPr>
@@ -13654,14 +16226,53 @@
       </p:sp>
       <p:sp>
         <p:nvSpPr>
+          <p:cNvPr id="11" name="TextBox 10"/>
+          <p:cNvSpPr txBox="1"/>
+          <p:nvPr/>
+        </p:nvSpPr>
+        <p:spPr>
+          <a:xfrm>
+            <a:off x="6492240" y="2029968"/>
+            <a:ext cx="4800600" cy="548640"/>
+          </a:xfrm>
+          <a:prstGeom prst="rect">
+            <a:avLst/>
+          </a:prstGeom>
+          <a:noFill/>
+        </p:spPr>
+        <p:txBody>
+          <a:bodyPr wrap="square" lIns="0" rIns="0" tIns="0" bIns="0" anchor="t">
+            <a:spAutoFit/>
+          </a:bodyPr>
+          <a:lstStyle/>
+          <a:p>
+            <a:pPr algn="l">
+              <a:lnSpc>
+                <a:spcPct val="115000"/>
+              </a:lnSpc>
+            </a:pPr>
+            <a:r>
+              <a:rPr sz="1700" b="1">
+                <a:solidFill>
+                  <a:srgbClr val="F8FAFC"/>
+                </a:solidFill>
+                <a:latin typeface="Helvetica Neue"/>
+              </a:rPr>
+              <a:t>Secondary</a:t>
+            </a:r>
+          </a:p>
+        </p:txBody>
+      </p:sp>
+      <p:sp>
+        <p:nvSpPr>
           <p:cNvPr id="12" name="TextBox 11"/>
           <p:cNvSpPr txBox="1"/>
           <p:nvPr/>
         </p:nvSpPr>
         <p:spPr>
           <a:xfrm>
-            <a:off x="6181344" y="2560320"/>
-            <a:ext cx="2560320" cy="914400"/>
+            <a:off x="6492240" y="2560320"/>
+            <a:ext cx="4800600" cy="1234440"/>
           </a:xfrm>
           <a:prstGeom prst="rect">
             <a:avLst/>
@@ -13674,19 +16285,19 @@
           </a:bodyPr>
           <a:lstStyle/>
           <a:p>
-            <a:pPr algn="ctr">
-              <a:lnSpc>
-                <a:spcPct val="115000"/>
-              </a:lnSpc>
-            </a:pPr>
-            <a:r>
-              <a:rPr sz="4800" b="1">
-                <a:solidFill>
-                  <a:srgbClr val="818CF8"/>
-                </a:solidFill>
-                <a:latin typeface="Helvetica Neue"/>
-              </a:rPr>
-              <a:t>+20%</a:t>
+            <a:pPr algn="l">
+              <a:lnSpc>
+                <a:spcPct val="115000"/>
+              </a:lnSpc>
+            </a:pPr>
+            <a:r>
+              <a:rPr sz="1500" b="0">
+                <a:solidFill>
+                  <a:srgbClr val="94A3B8"/>
+                </a:solidFill>
+                <a:latin typeface="Helvetica Neue"/>
+              </a:rPr>
+              <a:t>Freshservice MSPs supporting many client environments who need fast context on unfamiliar systems.</a:t>
             </a:r>
           </a:p>
         </p:txBody>
@@ -13699,8 +16310,8 @@
         </p:nvSpPr>
         <p:spPr>
           <a:xfrm>
-            <a:off x="6409944" y="3749039"/>
-            <a:ext cx="2103120" cy="914400"/>
+            <a:off x="640080" y="4160520"/>
+            <a:ext cx="10881360" cy="320040"/>
           </a:xfrm>
           <a:prstGeom prst="rect">
             <a:avLst/>
@@ -13713,19 +16324,19 @@
           </a:bodyPr>
           <a:lstStyle/>
           <a:p>
-            <a:pPr algn="ctr">
-              <a:lnSpc>
-                <a:spcPct val="115000"/>
-              </a:lnSpc>
-            </a:pPr>
-            <a:r>
-              <a:rPr sz="1500" b="0">
-                <a:solidFill>
-                  <a:srgbClr val="F8FAFC"/>
-                </a:solidFill>
-                <a:latin typeface="Helvetica Neue"/>
-              </a:rPr>
-              <a:t>Resolved by first team routed</a:t>
+            <a:pPr algn="l">
+              <a:lnSpc>
+                <a:spcPct val="115000"/>
+              </a:lnSpc>
+            </a:pPr>
+            <a:r>
+              <a:rPr sz="1200" b="1">
+                <a:solidFill>
+                  <a:srgbClr val="94A3B8"/>
+                </a:solidFill>
+                <a:latin typeface="Helvetica Neue"/>
+              </a:rPr>
+              <a:t>USERS:  service-desk agents  ·  on-call / SRE  ·  tech leads &amp; architects  ·  new engineers</a:t>
             </a:r>
           </a:p>
         </p:txBody>
@@ -13738,8 +16349,8 @@
         </p:nvSpPr>
         <p:spPr>
           <a:xfrm>
-            <a:off x="8951976" y="2011680"/>
-            <a:ext cx="2560320" cy="2926080"/>
+            <a:off x="640080" y="4663440"/>
+            <a:ext cx="10881360" cy="1463040"/>
           </a:xfrm>
           <a:prstGeom prst="roundRect">
             <a:avLst>
@@ -13747,11 +16358,11 @@
             </a:avLst>
           </a:prstGeom>
           <a:solidFill>
-            <a:srgbClr val="151E32"/>
+            <a:srgbClr val="0F2A2E"/>
           </a:solidFill>
           <a:ln w="12700">
             <a:solidFill>
-              <a:srgbClr val="2A3650"/>
+              <a:srgbClr val="2DD4BF"/>
             </a:solidFill>
           </a:ln>
           <a:effectLst/>
@@ -13786,198 +16397,33 @@
         </p:nvSpPr>
         <p:spPr>
           <a:xfrm>
-            <a:off x="8951976" y="2560320"/>
-            <a:ext cx="2560320" cy="914400"/>
-          </a:xfrm>
-          <a:prstGeom prst="rect">
-            <a:avLst/>
-          </a:prstGeom>
-          <a:noFill/>
-        </p:spPr>
-        <p:txBody>
-          <a:bodyPr wrap="square" lIns="0" rIns="0" tIns="0" bIns="0" anchor="t">
-            <a:spAutoFit/>
-          </a:bodyPr>
-          <a:lstStyle/>
-          <a:p>
-            <a:pPr algn="ctr">
-              <a:lnSpc>
-                <a:spcPct val="115000"/>
-              </a:lnSpc>
-            </a:pPr>
-            <a:r>
-              <a:rPr sz="4800" b="1">
-                <a:solidFill>
-                  <a:srgbClr val="2DD4BF"/>
-                </a:solidFill>
-                <a:latin typeface="Helvetica Neue"/>
-              </a:rPr>
-              <a:t>≥ 20%</a:t>
-            </a:r>
-          </a:p>
-        </p:txBody>
-      </p:sp>
-      <p:sp>
-        <p:nvSpPr>
-          <p:cNvPr id="16" name="TextBox 15"/>
-          <p:cNvSpPr txBox="1"/>
-          <p:nvPr/>
-        </p:nvSpPr>
-        <p:spPr>
-          <a:xfrm>
-            <a:off x="9180576" y="3749039"/>
-            <a:ext cx="2103120" cy="914400"/>
-          </a:xfrm>
-          <a:prstGeom prst="rect">
-            <a:avLst/>
-          </a:prstGeom>
-          <a:noFill/>
-        </p:spPr>
-        <p:txBody>
-          <a:bodyPr wrap="square" lIns="0" rIns="0" tIns="0" bIns="0" anchor="t">
-            <a:spAutoFit/>
-          </a:bodyPr>
-          <a:lstStyle/>
-          <a:p>
-            <a:pPr algn="ctr">
-              <a:lnSpc>
-                <a:spcPct val="115000"/>
-              </a:lnSpc>
-            </a:pPr>
-            <a:r>
-              <a:rPr sz="1500" b="0">
+            <a:off x="914400" y="4800600"/>
+            <a:ext cx="10332720" cy="1188720"/>
+          </a:xfrm>
+          <a:prstGeom prst="rect">
+            <a:avLst/>
+          </a:prstGeom>
+          <a:noFill/>
+        </p:spPr>
+        <p:txBody>
+          <a:bodyPr wrap="square" lIns="0" rIns="0" tIns="0" bIns="0" anchor="ctr">
+            <a:spAutoFit/>
+          </a:bodyPr>
+          <a:lstStyle/>
+          <a:p>
+            <a:pPr algn="l">
+              <a:lnSpc>
+                <a:spcPct val="115000"/>
+              </a:lnSpc>
+            </a:pPr>
+            <a:r>
+              <a:rPr sz="1800" b="0">
                 <a:solidFill>
                   <a:srgbClr val="F8FAFC"/>
                 </a:solidFill>
                 <a:latin typeface="Helvetica Neue"/>
               </a:rPr>
-              <a:t>Trial → paid conversion</a:t>
-            </a:r>
-          </a:p>
-        </p:txBody>
-      </p:sp>
-      <p:sp>
-        <p:nvSpPr>
-          <p:cNvPr id="17" name="Rounded Rectangle 16"/>
-          <p:cNvSpPr/>
-          <p:nvPr/>
-        </p:nvSpPr>
-        <p:spPr>
-          <a:xfrm>
-            <a:off x="640080" y="5394960"/>
-            <a:ext cx="1097280" cy="274320"/>
-          </a:xfrm>
-          <a:prstGeom prst="roundRect">
-            <a:avLst>
-              <a:gd name="adj" fmla="val 50000"/>
-            </a:avLst>
-          </a:prstGeom>
-          <a:solidFill>
-            <a:srgbClr val="0B1120"/>
-          </a:solidFill>
-          <a:ln w="12700">
-            <a:solidFill>
-              <a:srgbClr val="FBBF24"/>
-            </a:solidFill>
-          </a:ln>
-          <a:effectLst/>
-        </p:spPr>
-        <p:style>
-          <a:lnRef idx="1">
-            <a:schemeClr val="accent1"/>
-          </a:lnRef>
-          <a:fillRef idx="3">
-            <a:schemeClr val="accent1"/>
-          </a:fillRef>
-          <a:effectRef idx="2">
-            <a:schemeClr val="accent1"/>
-          </a:effectRef>
-          <a:fontRef idx="minor">
-            <a:schemeClr val="lt1"/>
-          </a:fontRef>
-        </p:style>
-        <p:txBody>
-          <a:bodyPr rtlCol="0" anchor="ctr"/>
-          <a:lstStyle/>
-          <a:p>
-            <a:pPr algn="ctr"/>
-          </a:p>
-        </p:txBody>
-      </p:sp>
-      <p:sp>
-        <p:nvSpPr>
-          <p:cNvPr id="18" name="TextBox 17"/>
-          <p:cNvSpPr txBox="1"/>
-          <p:nvPr/>
-        </p:nvSpPr>
-        <p:spPr>
-          <a:xfrm>
-            <a:off x="640080" y="5436108"/>
-            <a:ext cx="1097280" cy="228600"/>
-          </a:xfrm>
-          <a:prstGeom prst="rect">
-            <a:avLst/>
-          </a:prstGeom>
-          <a:noFill/>
-        </p:spPr>
-        <p:txBody>
-          <a:bodyPr wrap="square" lIns="0" rIns="0" tIns="0" bIns="0" anchor="t">
-            <a:spAutoFit/>
-          </a:bodyPr>
-          <a:lstStyle/>
-          <a:p>
-            <a:pPr algn="ctr">
-              <a:lnSpc>
-                <a:spcPct val="115000"/>
-              </a:lnSpc>
-            </a:pPr>
-            <a:r>
-              <a:rPr sz="1000" b="1">
-                <a:solidFill>
-                  <a:srgbClr val="FBBF24"/>
-                </a:solidFill>
-                <a:latin typeface="Helvetica Neue"/>
-              </a:rPr>
-              <a:t>TARGETS</a:t>
-            </a:r>
-          </a:p>
-        </p:txBody>
-      </p:sp>
-      <p:sp>
-        <p:nvSpPr>
-          <p:cNvPr id="19" name="TextBox 18"/>
-          <p:cNvSpPr txBox="1"/>
-          <p:nvPr/>
-        </p:nvSpPr>
-        <p:spPr>
-          <a:xfrm>
-            <a:off x="1874519" y="5431536"/>
-            <a:ext cx="9144000" cy="320040"/>
-          </a:xfrm>
-          <a:prstGeom prst="rect">
-            <a:avLst/>
-          </a:prstGeom>
-          <a:noFill/>
-        </p:spPr>
-        <p:txBody>
-          <a:bodyPr wrap="square" lIns="0" rIns="0" tIns="0" bIns="0" anchor="t">
-            <a:spAutoFit/>
-          </a:bodyPr>
-          <a:lstStyle/>
-          <a:p>
-            <a:pPr algn="l">
-              <a:lnSpc>
-                <a:spcPct val="115000"/>
-              </a:lnSpc>
-            </a:pPr>
-            <a:r>
-              <a:rPr sz="1200" b="0">
-                <a:solidFill>
-                  <a:srgbClr val="94A3B8"/>
-                </a:solidFill>
-                <a:latin typeface="Helvetica Neue"/>
-              </a:rPr>
-              <a:t>Targets are assumptions; baseline measured on non-diagnosed incidents.</a:t>
+              <a:t>Every incident arrives already diagnosed: likely service, dependencies, past incidents, runbook and escalation path. Teams resolve faster, escalate to the right owner first time, and know what breaks before a change ships.</a:t>
             </a:r>
           </a:p>
         </p:txBody>

--- a/docs/CodeAtlas-AI-Pitch-Deck.pptx
+++ b/docs/CodeAtlas-AI-Pitch-Deck.pptx
@@ -514,7 +514,7 @@
           <a:lstStyle/>
           <a:p>
             <a:r>
-              <a:t>Introduce yourself and the one-line pitch: CodeAtlas gives every Freshservice incident the engineering context it's missing, and posts it back automatically.</a:t>
+              <a:t>Introduce yourself and the one-line pitch: CodeAtlas diagnoses and routes every Freshservice incident and change before anyone opens it, with engineering context from the knowledge graph.</a:t>
             </a:r>
           </a:p>
         </p:txBody>
@@ -4524,7 +4524,7 @@
                 </a:solidFill>
                 <a:latin typeface="Helvetica Neue"/>
               </a:rPr>
-              <a:t>Every Freshservice incident, diagnosed before anyone opens it.</a:t>
+              <a:t>Every Freshservice incident and change, diagnosed and routed automatically.</a:t>
             </a:r>
           </a:p>
         </p:txBody>

--- a/docs/CodeAtlas-AI-Pitch-Deck.pptx
+++ b/docs/CodeAtlas-AI-Pitch-Deck.pptx
@@ -934,7 +934,7 @@
           <a:lstStyle/>
           <a:p>
             <a:r>
-              <a:t>Three reasons. Freshworks now ships official MCP servers and REST v2 plus workflow webhooks, so agents can act on live tickets. LLMs are cheap and accurate when grounded in a graph. And systems keep fragmenting.</a:t>
+              <a:t>Three shifts. Freshworks now exposes live tickets and changes to outside agents: REST v2, Workflow Automator events, official MCP servers and FDK apps. Agents have matured from answering to acting: specialised agents hand off work, and a knowledge graph keeps the LLM factual. Meanwhile engineering context keeps fragmenting. Together they make an agent that works inside Freshservice possible today; the strip at the bottom is exactly what we built.</a:t>
             </a:r>
           </a:p>
         </p:txBody>
@@ -4689,8 +4689,8 @@
         </p:nvSpPr>
         <p:spPr>
           <a:xfrm>
-            <a:off x="10607040" y="6400800"/>
-            <a:ext cx="1005840" cy="274320"/>
+            <a:off x="9235440" y="6400800"/>
+            <a:ext cx="2377440" cy="274320"/>
           </a:xfrm>
           <a:prstGeom prst="rect">
             <a:avLst/>
@@ -5639,8 +5639,8 @@
         </p:nvSpPr>
         <p:spPr>
           <a:xfrm>
-            <a:off x="10607040" y="6400800"/>
-            <a:ext cx="1005840" cy="274320"/>
+            <a:off x="9235440" y="6400800"/>
+            <a:ext cx="2377440" cy="274320"/>
           </a:xfrm>
           <a:prstGeom prst="rect">
             <a:avLst/>
@@ -6412,8 +6412,8 @@
         </p:nvSpPr>
         <p:spPr>
           <a:xfrm>
-            <a:off x="10607040" y="6400800"/>
-            <a:ext cx="1005840" cy="274320"/>
+            <a:off x="9235440" y="6400800"/>
+            <a:ext cx="2377440" cy="274320"/>
           </a:xfrm>
           <a:prstGeom prst="rect">
             <a:avLst/>
@@ -7726,8 +7726,8 @@
         </p:nvSpPr>
         <p:spPr>
           <a:xfrm>
-            <a:off x="10607040" y="6400800"/>
-            <a:ext cx="1005840" cy="274320"/>
+            <a:off x="9235440" y="6400800"/>
+            <a:ext cx="2377440" cy="274320"/>
           </a:xfrm>
           <a:prstGeom prst="rect">
             <a:avLst/>
@@ -9087,8 +9087,8 @@
         </p:nvSpPr>
         <p:spPr>
           <a:xfrm>
-            <a:off x="10607040" y="6400800"/>
-            <a:ext cx="1005840" cy="274320"/>
+            <a:off x="9235440" y="6400800"/>
+            <a:ext cx="2377440" cy="274320"/>
           </a:xfrm>
           <a:prstGeom prst="rect">
             <a:avLst/>
@@ -10247,8 +10247,8 @@
         </p:nvSpPr>
         <p:spPr>
           <a:xfrm>
-            <a:off x="10607040" y="6400800"/>
-            <a:ext cx="1005840" cy="274320"/>
+            <a:off x="9235440" y="6400800"/>
+            <a:ext cx="2377440" cy="274320"/>
           </a:xfrm>
           <a:prstGeom prst="rect">
             <a:avLst/>
@@ -10280,14 +10280,53 @@
       </p:sp>
       <p:sp>
         <p:nvSpPr>
-          <p:cNvPr id="5" name="Rounded Rectangle 4"/>
+          <p:cNvPr id="5" name="TextBox 4"/>
+          <p:cNvSpPr txBox="1"/>
+          <p:nvPr/>
+        </p:nvSpPr>
+        <p:spPr>
+          <a:xfrm>
+            <a:off x="640080" y="1508760"/>
+            <a:ext cx="10881360" cy="365760"/>
+          </a:xfrm>
+          <a:prstGeom prst="rect">
+            <a:avLst/>
+          </a:prstGeom>
+          <a:noFill/>
+        </p:spPr>
+        <p:txBody>
+          <a:bodyPr wrap="square" lIns="0" rIns="0" tIns="0" bIns="0" anchor="t">
+            <a:spAutoFit/>
+          </a:bodyPr>
+          <a:lstStyle/>
+          <a:p>
+            <a:pPr algn="l">
+              <a:lnSpc>
+                <a:spcPct val="115000"/>
+              </a:lnSpc>
+            </a:pPr>
+            <a:r>
+              <a:rPr sz="1600" b="0">
+                <a:solidFill>
+                  <a:srgbClr val="94A3B8"/>
+                </a:solidFill>
+                <a:latin typeface="Helvetica Neue"/>
+              </a:rPr>
+              <a:t>Three shifts make an AI agent that works inside Freshservice possible today.</a:t>
+            </a:r>
+          </a:p>
+        </p:txBody>
+      </p:sp>
+      <p:sp>
+        <p:nvSpPr>
+          <p:cNvPr id="6" name="Rounded Rectangle 5"/>
           <p:cNvSpPr/>
           <p:nvPr/>
         </p:nvSpPr>
         <p:spPr>
           <a:xfrm>
-            <a:off x="640080" y="2011680"/>
-            <a:ext cx="3474720" cy="3566160"/>
+            <a:off x="640080" y="2057400"/>
+            <a:ext cx="3474720" cy="2560320"/>
           </a:xfrm>
           <a:prstGeom prst="roundRect">
             <a:avLst>
@@ -10328,14 +10367,14 @@
       </p:sp>
       <p:sp>
         <p:nvSpPr>
-          <p:cNvPr id="6" name="Rectangle 5"/>
+          <p:cNvPr id="7" name="Rectangle 6"/>
           <p:cNvSpPr/>
           <p:nvPr/>
         </p:nvSpPr>
         <p:spPr>
           <a:xfrm>
-            <a:off x="640080" y="2240280"/>
-            <a:ext cx="54864" cy="457200"/>
+            <a:off x="640080" y="2313432"/>
+            <a:ext cx="54864" cy="365760"/>
           </a:xfrm>
           <a:prstGeom prst="rect">
             <a:avLst/>
@@ -10372,14 +10411,14 @@
       </p:sp>
       <p:sp>
         <p:nvSpPr>
-          <p:cNvPr id="7" name="TextBox 6"/>
-          <p:cNvSpPr txBox="1"/>
-          <p:nvPr/>
-        </p:nvSpPr>
-        <p:spPr>
-          <a:xfrm>
-            <a:off x="914400" y="2212848"/>
-            <a:ext cx="2971800" cy="548640"/>
+          <p:cNvPr id="8" name="TextBox 7"/>
+          <p:cNvSpPr txBox="1"/>
+          <p:nvPr/>
+        </p:nvSpPr>
+        <p:spPr>
+          <a:xfrm>
+            <a:off x="914400" y="2295144"/>
+            <a:ext cx="3017520" cy="411480"/>
           </a:xfrm>
           <a:prstGeom prst="rect">
             <a:avLst/>
@@ -10404,21 +10443,21 @@
                 </a:solidFill>
                 <a:latin typeface="Helvetica Neue"/>
               </a:rPr>
-              <a:t>Freshworks opened the door</a:t>
-            </a:r>
-          </a:p>
-        </p:txBody>
-      </p:sp>
-      <p:sp>
-        <p:nvSpPr>
-          <p:cNvPr id="8" name="TextBox 7"/>
-          <p:cNvSpPr txBox="1"/>
-          <p:nvPr/>
-        </p:nvSpPr>
-        <p:spPr>
-          <a:xfrm>
-            <a:off x="914400" y="2743200"/>
-            <a:ext cx="2971800" cy="2697480"/>
+              <a:t>Freshworks is open</a:t>
+            </a:r>
+          </a:p>
+        </p:txBody>
+      </p:sp>
+      <p:sp>
+        <p:nvSpPr>
+          <p:cNvPr id="9" name="TextBox 8"/>
+          <p:cNvSpPr txBox="1"/>
+          <p:nvPr/>
+        </p:nvSpPr>
+        <p:spPr>
+          <a:xfrm>
+            <a:off x="914400" y="2834640"/>
+            <a:ext cx="3017520" cy="1645920"/>
           </a:xfrm>
           <a:prstGeom prst="rect">
             <a:avLst/>
@@ -10433,31 +10472,96 @@
           <a:p>
             <a:pPr algn="l">
               <a:lnSpc>
-                <a:spcPct val="115000"/>
-              </a:lnSpc>
-            </a:pPr>
-            <a:r>
-              <a:rPr sz="1500" b="0">
+                <a:spcPct val="110000"/>
+              </a:lnSpc>
+              <a:spcAft>
+                <a:spcPts val="800"/>
+              </a:spcAft>
+            </a:pPr>
+            <a:r>
+              <a:rPr sz="1300" b="1">
+                <a:solidFill>
+                  <a:srgbClr val="2DD4BF"/>
+                </a:solidFill>
+                <a:latin typeface="Helvetica Neue"/>
+              </a:rPr>
+              <a:t>•  </a:t>
+            </a:r>
+            <a:r>
+              <a:rPr sz="1300" b="0">
                 <a:solidFill>
                   <a:srgbClr val="94A3B8"/>
                 </a:solidFill>
                 <a:latin typeface="Helvetica Neue"/>
               </a:rPr>
-              <a:t>Official Freshservice &amp; Freshdesk MCP servers (Freshdesk MCP generally available Sep 2026), REST v2 and Workflow Automator webhooks let agents read and act on live tickets.</a:t>
-            </a:r>
-          </a:p>
-        </p:txBody>
-      </p:sp>
-      <p:sp>
-        <p:nvSpPr>
-          <p:cNvPr id="9" name="Rounded Rectangle 8"/>
+              <a:t>REST v2 + Workflow Automator push every ticket and change to agents</a:t>
+            </a:r>
+          </a:p>
+          <a:p>
+            <a:pPr algn="l">
+              <a:lnSpc>
+                <a:spcPct val="110000"/>
+              </a:lnSpc>
+              <a:spcAft>
+                <a:spcPts val="800"/>
+              </a:spcAft>
+            </a:pPr>
+            <a:r>
+              <a:rPr sz="1300" b="1">
+                <a:solidFill>
+                  <a:srgbClr val="2DD4BF"/>
+                </a:solidFill>
+                <a:latin typeface="Helvetica Neue"/>
+              </a:rPr>
+              <a:t>•  </a:t>
+            </a:r>
+            <a:r>
+              <a:rPr sz="1300" b="0">
+                <a:solidFill>
+                  <a:srgbClr val="94A3B8"/>
+                </a:solidFill>
+                <a:latin typeface="Helvetica Neue"/>
+              </a:rPr>
+              <a:t>Official Freshservice &amp; Freshdesk MCP servers (Freshdesk GA Sep 2026)</a:t>
+            </a:r>
+          </a:p>
+          <a:p>
+            <a:pPr algn="l">
+              <a:lnSpc>
+                <a:spcPct val="110000"/>
+              </a:lnSpc>
+            </a:pPr>
+            <a:r>
+              <a:rPr sz="1300" b="1">
+                <a:solidFill>
+                  <a:srgbClr val="2DD4BF"/>
+                </a:solidFill>
+                <a:latin typeface="Helvetica Neue"/>
+              </a:rPr>
+              <a:t>•  </a:t>
+            </a:r>
+            <a:r>
+              <a:rPr sz="1300" b="0">
+                <a:solidFill>
+                  <a:srgbClr val="94A3B8"/>
+                </a:solidFill>
+                <a:latin typeface="Helvetica Neue"/>
+              </a:rPr>
+              <a:t>FDK apps can run agents inside the product UI</a:t>
+            </a:r>
+          </a:p>
+        </p:txBody>
+      </p:sp>
+      <p:sp>
+        <p:nvSpPr>
+          <p:cNvPr id="10" name="Rounded Rectangle 9"/>
           <p:cNvSpPr/>
           <p:nvPr/>
         </p:nvSpPr>
         <p:spPr>
           <a:xfrm>
-            <a:off x="4361688" y="2011680"/>
-            <a:ext cx="3474720" cy="3566160"/>
+            <a:off x="4343400" y="2057400"/>
+            <a:ext cx="3474720" cy="2560320"/>
           </a:xfrm>
           <a:prstGeom prst="roundRect">
             <a:avLst>
@@ -10498,14 +10602,14 @@
       </p:sp>
       <p:sp>
         <p:nvSpPr>
-          <p:cNvPr id="10" name="Rectangle 9"/>
+          <p:cNvPr id="11" name="Rectangle 10"/>
           <p:cNvSpPr/>
           <p:nvPr/>
         </p:nvSpPr>
         <p:spPr>
           <a:xfrm>
-            <a:off x="4361688" y="2240280"/>
-            <a:ext cx="54864" cy="457200"/>
+            <a:off x="4343400" y="2313432"/>
+            <a:ext cx="54864" cy="365760"/>
           </a:xfrm>
           <a:prstGeom prst="rect">
             <a:avLst/>
@@ -10542,14 +10646,14 @@
       </p:sp>
       <p:sp>
         <p:nvSpPr>
-          <p:cNvPr id="11" name="TextBox 10"/>
-          <p:cNvSpPr txBox="1"/>
-          <p:nvPr/>
-        </p:nvSpPr>
-        <p:spPr>
-          <a:xfrm>
-            <a:off x="4636008" y="2212848"/>
-            <a:ext cx="2971800" cy="548640"/>
+          <p:cNvPr id="12" name="TextBox 11"/>
+          <p:cNvSpPr txBox="1"/>
+          <p:nvPr/>
+        </p:nvSpPr>
+        <p:spPr>
+          <a:xfrm>
+            <a:off x="4617720" y="2295144"/>
+            <a:ext cx="3017520" cy="411480"/>
           </a:xfrm>
           <a:prstGeom prst="rect">
             <a:avLst/>
@@ -10574,21 +10678,21 @@
                 </a:solidFill>
                 <a:latin typeface="Helvetica Neue"/>
               </a:rPr>
-              <a:t>LLMs are ready, if grounded</a:t>
-            </a:r>
-          </a:p>
-        </p:txBody>
-      </p:sp>
-      <p:sp>
-        <p:nvSpPr>
-          <p:cNvPr id="12" name="TextBox 11"/>
-          <p:cNvSpPr txBox="1"/>
-          <p:nvPr/>
-        </p:nvSpPr>
-        <p:spPr>
-          <a:xfrm>
-            <a:off x="4636008" y="2743200"/>
-            <a:ext cx="2971800" cy="2697480"/>
+              <a:t>Agents now act</a:t>
+            </a:r>
+          </a:p>
+        </p:txBody>
+      </p:sp>
+      <p:sp>
+        <p:nvSpPr>
+          <p:cNvPr id="13" name="TextBox 12"/>
+          <p:cNvSpPr txBox="1"/>
+          <p:nvPr/>
+        </p:nvSpPr>
+        <p:spPr>
+          <a:xfrm>
+            <a:off x="4617720" y="2834640"/>
+            <a:ext cx="3017520" cy="1645920"/>
           </a:xfrm>
           <a:prstGeom prst="rect">
             <a:avLst/>
@@ -10603,31 +10707,96 @@
           <a:p>
             <a:pPr algn="l">
               <a:lnSpc>
-                <a:spcPct val="115000"/>
-              </a:lnSpc>
-            </a:pPr>
-            <a:r>
-              <a:rPr sz="1500" b="0">
+                <a:spcPct val="110000"/>
+              </a:lnSpc>
+              <a:spcAft>
+                <a:spcPts val="800"/>
+              </a:spcAft>
+            </a:pPr>
+            <a:r>
+              <a:rPr sz="1300" b="1">
+                <a:solidFill>
+                  <a:srgbClr val="818CF8"/>
+                </a:solidFill>
+                <a:latin typeface="Helvetica Neue"/>
+              </a:rPr>
+              <a:t>•  </a:t>
+            </a:r>
+            <a:r>
+              <a:rPr sz="1300" b="0">
                 <a:solidFill>
                   <a:srgbClr val="94A3B8"/>
                 </a:solidFill>
                 <a:latin typeface="Helvetica Neue"/>
               </a:rPr>
-              <a:t>LLM reasoning is cheap and fluent. A knowledge graph keeps it factual: answers cite real services, owners and incidents.</a:t>
-            </a:r>
-          </a:p>
-        </p:txBody>
-      </p:sp>
-      <p:sp>
-        <p:nvSpPr>
-          <p:cNvPr id="13" name="Rounded Rectangle 12"/>
+              <a:t>Specialised agents hand off work: impact → ontology → experts</a:t>
+            </a:r>
+          </a:p>
+          <a:p>
+            <a:pPr algn="l">
+              <a:lnSpc>
+                <a:spcPct val="110000"/>
+              </a:lnSpc>
+              <a:spcAft>
+                <a:spcPts val="800"/>
+              </a:spcAft>
+            </a:pPr>
+            <a:r>
+              <a:rPr sz="1300" b="1">
+                <a:solidFill>
+                  <a:srgbClr val="818CF8"/>
+                </a:solidFill>
+                <a:latin typeface="Helvetica Neue"/>
+              </a:rPr>
+              <a:t>•  </a:t>
+            </a:r>
+            <a:r>
+              <a:rPr sz="1300" b="0">
+                <a:solidFill>
+                  <a:srgbClr val="94A3B8"/>
+                </a:solidFill>
+                <a:latin typeface="Helvetica Neue"/>
+              </a:rPr>
+              <a:t>LLM reasoning is cheap; a knowledge graph keeps it factual and cited</a:t>
+            </a:r>
+          </a:p>
+          <a:p>
+            <a:pPr algn="l">
+              <a:lnSpc>
+                <a:spcPct val="110000"/>
+              </a:lnSpc>
+            </a:pPr>
+            <a:r>
+              <a:rPr sz="1300" b="1">
+                <a:solidFill>
+                  <a:srgbClr val="818CF8"/>
+                </a:solidFill>
+                <a:latin typeface="Helvetica Neue"/>
+              </a:rPr>
+              <a:t>•  </a:t>
+            </a:r>
+            <a:r>
+              <a:rPr sz="1300" b="0">
+                <a:solidFill>
+                  <a:srgbClr val="94A3B8"/>
+                </a:solidFill>
+                <a:latin typeface="Helvetica Neue"/>
+              </a:rPr>
+              <a:t>Agents write back: notes, routing, change risk</a:t>
+            </a:r>
+          </a:p>
+        </p:txBody>
+      </p:sp>
+      <p:sp>
+        <p:nvSpPr>
+          <p:cNvPr id="14" name="Rounded Rectangle 13"/>
           <p:cNvSpPr/>
           <p:nvPr/>
         </p:nvSpPr>
         <p:spPr>
           <a:xfrm>
-            <a:off x="8083296" y="2011680"/>
-            <a:ext cx="3474720" cy="3566160"/>
+            <a:off x="8046720" y="2057400"/>
+            <a:ext cx="3474720" cy="2560320"/>
           </a:xfrm>
           <a:prstGeom prst="roundRect">
             <a:avLst>
@@ -10668,14 +10837,14 @@
       </p:sp>
       <p:sp>
         <p:nvSpPr>
-          <p:cNvPr id="14" name="Rectangle 13"/>
+          <p:cNvPr id="15" name="Rectangle 14"/>
           <p:cNvSpPr/>
           <p:nvPr/>
         </p:nvSpPr>
         <p:spPr>
           <a:xfrm>
-            <a:off x="8083296" y="2240280"/>
-            <a:ext cx="54864" cy="457200"/>
+            <a:off x="8046720" y="2313432"/>
+            <a:ext cx="54864" cy="365760"/>
           </a:xfrm>
           <a:prstGeom prst="rect">
             <a:avLst/>
@@ -10712,14 +10881,14 @@
       </p:sp>
       <p:sp>
         <p:nvSpPr>
-          <p:cNvPr id="15" name="TextBox 14"/>
-          <p:cNvSpPr txBox="1"/>
-          <p:nvPr/>
-        </p:nvSpPr>
-        <p:spPr>
-          <a:xfrm>
-            <a:off x="8357616" y="2212848"/>
-            <a:ext cx="2971800" cy="548640"/>
+          <p:cNvPr id="16" name="TextBox 15"/>
+          <p:cNvSpPr txBox="1"/>
+          <p:nvPr/>
+        </p:nvSpPr>
+        <p:spPr>
+          <a:xfrm>
+            <a:off x="8321040" y="2295144"/>
+            <a:ext cx="3017520" cy="411480"/>
           </a:xfrm>
           <a:prstGeom prst="rect">
             <a:avLst/>
@@ -10744,21 +10913,21 @@
                 </a:solidFill>
                 <a:latin typeface="Helvetica Neue"/>
               </a:rPr>
-              <a:t>Systems keep fragmenting</a:t>
-            </a:r>
-          </a:p>
-        </p:txBody>
-      </p:sp>
-      <p:sp>
-        <p:nvSpPr>
-          <p:cNvPr id="16" name="TextBox 15"/>
-          <p:cNvSpPr txBox="1"/>
-          <p:nvPr/>
-        </p:nvSpPr>
-        <p:spPr>
-          <a:xfrm>
-            <a:off x="8357616" y="2743200"/>
-            <a:ext cx="2971800" cy="2697480"/>
+              <a:t>Context is scattered</a:t>
+            </a:r>
+          </a:p>
+        </p:txBody>
+      </p:sp>
+      <p:sp>
+        <p:nvSpPr>
+          <p:cNvPr id="17" name="TextBox 16"/>
+          <p:cNvSpPr txBox="1"/>
+          <p:nvPr/>
+        </p:nvSpPr>
+        <p:spPr>
+          <a:xfrm>
+            <a:off x="8321040" y="2834640"/>
+            <a:ext cx="3017520" cy="1645920"/>
           </a:xfrm>
           <a:prstGeom prst="rect">
             <a:avLst/>
@@ -10773,17 +10942,754 @@
           <a:p>
             <a:pPr algn="l">
               <a:lnSpc>
-                <a:spcPct val="115000"/>
-              </a:lnSpc>
-            </a:pPr>
-            <a:r>
-              <a:rPr sz="1500" b="0">
+                <a:spcPct val="110000"/>
+              </a:lnSpc>
+              <a:spcAft>
+                <a:spcPts val="800"/>
+              </a:spcAft>
+            </a:pPr>
+            <a:r>
+              <a:rPr sz="1300" b="1">
+                <a:solidFill>
+                  <a:srgbClr val="FB7185"/>
+                </a:solidFill>
+                <a:latin typeface="Helvetica Neue"/>
+              </a:rPr>
+              <a:t>•  </a:t>
+            </a:r>
+            <a:r>
+              <a:rPr sz="1300" b="0">
                 <a:solidFill>
                   <a:srgbClr val="94A3B8"/>
                 </a:solidFill>
                 <a:latin typeface="Helvetica Neue"/>
               </a:rPr>
-              <a:t>More microservices, more tools, more handoffs. Spreadsheet catalogues and tribal knowledge don't scale, and slow incidents cost revenue.</a:t>
+              <a:t>Ownership and dependencies live in GitHub, runbooks and people's heads</a:t>
+            </a:r>
+          </a:p>
+          <a:p>
+            <a:pPr algn="l">
+              <a:lnSpc>
+                <a:spcPct val="110000"/>
+              </a:lnSpc>
+              <a:spcAft>
+                <a:spcPts val="800"/>
+              </a:spcAft>
+            </a:pPr>
+            <a:r>
+              <a:rPr sz="1300" b="1">
+                <a:solidFill>
+                  <a:srgbClr val="FB7185"/>
+                </a:solidFill>
+                <a:latin typeface="Helvetica Neue"/>
+              </a:rPr>
+              <a:t>•  </a:t>
+            </a:r>
+            <a:r>
+              <a:rPr sz="1300" b="0">
+                <a:solidFill>
+                  <a:srgbClr val="94A3B8"/>
+                </a:solidFill>
+                <a:latin typeface="Helvetica Neue"/>
+              </a:rPr>
+              <a:t>Service desks see ticket text, not the system behind it</a:t>
+            </a:r>
+          </a:p>
+          <a:p>
+            <a:pPr algn="l">
+              <a:lnSpc>
+                <a:spcPct val="110000"/>
+              </a:lnSpc>
+            </a:pPr>
+            <a:r>
+              <a:rPr sz="1300" b="1">
+                <a:solidFill>
+                  <a:srgbClr val="FB7185"/>
+                </a:solidFill>
+                <a:latin typeface="Helvetica Neue"/>
+              </a:rPr>
+              <a:t>•  </a:t>
+            </a:r>
+            <a:r>
+              <a:rPr sz="1300" b="0">
+                <a:solidFill>
+                  <a:srgbClr val="94A3B8"/>
+                </a:solidFill>
+                <a:latin typeface="Helvetica Neue"/>
+              </a:rPr>
+              <a:t>Every wrong escalation adds to MTTR and lost revenue</a:t>
+            </a:r>
+          </a:p>
+        </p:txBody>
+      </p:sp>
+      <p:sp>
+        <p:nvSpPr>
+          <p:cNvPr id="18" name="TextBox 17"/>
+          <p:cNvSpPr txBox="1"/>
+          <p:nvPr/>
+        </p:nvSpPr>
+        <p:spPr>
+          <a:xfrm>
+            <a:off x="640080" y="4846320"/>
+            <a:ext cx="10881360" cy="274320"/>
+          </a:xfrm>
+          <a:prstGeom prst="rect">
+            <a:avLst/>
+          </a:prstGeom>
+          <a:noFill/>
+        </p:spPr>
+        <p:txBody>
+          <a:bodyPr wrap="square" lIns="0" rIns="0" tIns="0" bIns="0" anchor="t">
+            <a:spAutoFit/>
+          </a:bodyPr>
+          <a:lstStyle/>
+          <a:p>
+            <a:pPr algn="l">
+              <a:lnSpc>
+                <a:spcPct val="115000"/>
+              </a:lnSpc>
+            </a:pPr>
+            <a:r>
+              <a:rPr sz="1100" b="1">
+                <a:solidFill>
+                  <a:srgbClr val="2DD4BF"/>
+                </a:solidFill>
+                <a:latin typeface="Helvetica Neue"/>
+              </a:rPr>
+              <a:t>WHAT THIS MAKES POSSIBLE: CODEATLAS INSIDE FRESHSERVICE</a:t>
+            </a:r>
+          </a:p>
+        </p:txBody>
+      </p:sp>
+      <p:sp>
+        <p:nvSpPr>
+          <p:cNvPr id="19" name="Rounded Rectangle 18"/>
+          <p:cNvSpPr/>
+          <p:nvPr/>
+        </p:nvSpPr>
+        <p:spPr>
+          <a:xfrm>
+            <a:off x="640080" y="5166360"/>
+            <a:ext cx="2468880" cy="914400"/>
+          </a:xfrm>
+          <a:prstGeom prst="roundRect">
+            <a:avLst>
+              <a:gd name="adj" fmla="val 6000"/>
+            </a:avLst>
+          </a:prstGeom>
+          <a:solidFill>
+            <a:srgbClr val="151E32"/>
+          </a:solidFill>
+          <a:ln w="12700">
+            <a:solidFill>
+              <a:srgbClr val="2A3650"/>
+            </a:solidFill>
+          </a:ln>
+          <a:effectLst/>
+        </p:spPr>
+        <p:style>
+          <a:lnRef idx="1">
+            <a:schemeClr val="accent1"/>
+          </a:lnRef>
+          <a:fillRef idx="3">
+            <a:schemeClr val="accent1"/>
+          </a:fillRef>
+          <a:effectRef idx="2">
+            <a:schemeClr val="accent1"/>
+          </a:effectRef>
+          <a:fontRef idx="minor">
+            <a:schemeClr val="lt1"/>
+          </a:fontRef>
+        </p:style>
+        <p:txBody>
+          <a:bodyPr rtlCol="0" anchor="ctr"/>
+          <a:lstStyle/>
+          <a:p>
+            <a:pPr algn="ctr"/>
+          </a:p>
+        </p:txBody>
+      </p:sp>
+      <p:sp>
+        <p:nvSpPr>
+          <p:cNvPr id="20" name="TextBox 19"/>
+          <p:cNvSpPr txBox="1"/>
+          <p:nvPr/>
+        </p:nvSpPr>
+        <p:spPr>
+          <a:xfrm>
+            <a:off x="822960" y="5330952"/>
+            <a:ext cx="2103120" cy="320040"/>
+          </a:xfrm>
+          <a:prstGeom prst="rect">
+            <a:avLst/>
+          </a:prstGeom>
+          <a:noFill/>
+        </p:spPr>
+        <p:txBody>
+          <a:bodyPr wrap="square" lIns="0" rIns="0" tIns="0" bIns="0" anchor="t">
+            <a:spAutoFit/>
+          </a:bodyPr>
+          <a:lstStyle/>
+          <a:p>
+            <a:pPr algn="l">
+              <a:lnSpc>
+                <a:spcPct val="115000"/>
+              </a:lnSpc>
+            </a:pPr>
+            <a:r>
+              <a:rPr sz="1400" b="1">
+                <a:solidFill>
+                  <a:srgbClr val="F8FAFC"/>
+                </a:solidFill>
+                <a:latin typeface="Helvetica Neue"/>
+              </a:rPr>
+              <a:t>Ticket or change</a:t>
+            </a:r>
+          </a:p>
+        </p:txBody>
+      </p:sp>
+      <p:sp>
+        <p:nvSpPr>
+          <p:cNvPr id="21" name="TextBox 20"/>
+          <p:cNvSpPr txBox="1"/>
+          <p:nvPr/>
+        </p:nvSpPr>
+        <p:spPr>
+          <a:xfrm>
+            <a:off x="822960" y="5669280"/>
+            <a:ext cx="2103120" cy="320040"/>
+          </a:xfrm>
+          <a:prstGeom prst="rect">
+            <a:avLst/>
+          </a:prstGeom>
+          <a:noFill/>
+        </p:spPr>
+        <p:txBody>
+          <a:bodyPr wrap="square" lIns="0" rIns="0" tIns="0" bIns="0" anchor="t">
+            <a:spAutoFit/>
+          </a:bodyPr>
+          <a:lstStyle/>
+          <a:p>
+            <a:pPr algn="l">
+              <a:lnSpc>
+                <a:spcPct val="115000"/>
+              </a:lnSpc>
+            </a:pPr>
+            <a:r>
+              <a:rPr sz="1100" b="0">
+                <a:solidFill>
+                  <a:srgbClr val="94A3B8"/>
+                </a:solidFill>
+                <a:latin typeface="Helvetica Neue"/>
+              </a:rPr>
+              <a:t>raised in Freshservice</a:t>
+            </a:r>
+          </a:p>
+        </p:txBody>
+      </p:sp>
+      <p:sp>
+        <p:nvSpPr>
+          <p:cNvPr id="22" name="Right Arrow 21"/>
+          <p:cNvSpPr/>
+          <p:nvPr/>
+        </p:nvSpPr>
+        <p:spPr>
+          <a:xfrm>
+            <a:off x="3172968" y="5513832"/>
+            <a:ext cx="210312" cy="219456"/>
+          </a:xfrm>
+          <a:prstGeom prst="rightArrow">
+            <a:avLst/>
+          </a:prstGeom>
+          <a:solidFill>
+            <a:srgbClr val="94A3B8"/>
+          </a:solidFill>
+          <a:ln>
+            <a:noFill/>
+          </a:ln>
+        </p:spPr>
+        <p:style>
+          <a:lnRef idx="1">
+            <a:schemeClr val="accent1"/>
+          </a:lnRef>
+          <a:fillRef idx="3">
+            <a:schemeClr val="accent1"/>
+          </a:fillRef>
+          <a:effectRef idx="2">
+            <a:schemeClr val="accent1"/>
+          </a:effectRef>
+          <a:fontRef idx="minor">
+            <a:schemeClr val="lt1"/>
+          </a:fontRef>
+        </p:style>
+        <p:txBody>
+          <a:bodyPr rtlCol="0" anchor="ctr"/>
+          <a:lstStyle/>
+          <a:p>
+            <a:pPr algn="ctr"/>
+          </a:p>
+        </p:txBody>
+      </p:sp>
+      <p:sp>
+        <p:nvSpPr>
+          <p:cNvPr id="23" name="Rounded Rectangle 22"/>
+          <p:cNvSpPr/>
+          <p:nvPr/>
+        </p:nvSpPr>
+        <p:spPr>
+          <a:xfrm>
+            <a:off x="3447288" y="5166360"/>
+            <a:ext cx="2468880" cy="914400"/>
+          </a:xfrm>
+          <a:prstGeom prst="roundRect">
+            <a:avLst>
+              <a:gd name="adj" fmla="val 6000"/>
+            </a:avLst>
+          </a:prstGeom>
+          <a:solidFill>
+            <a:srgbClr val="151E32"/>
+          </a:solidFill>
+          <a:ln w="12700">
+            <a:solidFill>
+              <a:srgbClr val="2A3650"/>
+            </a:solidFill>
+          </a:ln>
+          <a:effectLst/>
+        </p:spPr>
+        <p:style>
+          <a:lnRef idx="1">
+            <a:schemeClr val="accent1"/>
+          </a:lnRef>
+          <a:fillRef idx="3">
+            <a:schemeClr val="accent1"/>
+          </a:fillRef>
+          <a:effectRef idx="2">
+            <a:schemeClr val="accent1"/>
+          </a:effectRef>
+          <a:fontRef idx="minor">
+            <a:schemeClr val="lt1"/>
+          </a:fontRef>
+        </p:style>
+        <p:txBody>
+          <a:bodyPr rtlCol="0" anchor="ctr"/>
+          <a:lstStyle/>
+          <a:p>
+            <a:pPr algn="ctr"/>
+          </a:p>
+        </p:txBody>
+      </p:sp>
+      <p:sp>
+        <p:nvSpPr>
+          <p:cNvPr id="24" name="TextBox 23"/>
+          <p:cNvSpPr txBox="1"/>
+          <p:nvPr/>
+        </p:nvSpPr>
+        <p:spPr>
+          <a:xfrm>
+            <a:off x="3630168" y="5330952"/>
+            <a:ext cx="2103120" cy="320040"/>
+          </a:xfrm>
+          <a:prstGeom prst="rect">
+            <a:avLst/>
+          </a:prstGeom>
+          <a:noFill/>
+        </p:spPr>
+        <p:txBody>
+          <a:bodyPr wrap="square" lIns="0" rIns="0" tIns="0" bIns="0" anchor="t">
+            <a:spAutoFit/>
+          </a:bodyPr>
+          <a:lstStyle/>
+          <a:p>
+            <a:pPr algn="l">
+              <a:lnSpc>
+                <a:spcPct val="115000"/>
+              </a:lnSpc>
+            </a:pPr>
+            <a:r>
+              <a:rPr sz="1400" b="1">
+                <a:solidFill>
+                  <a:srgbClr val="F8FAFC"/>
+                </a:solidFill>
+                <a:latin typeface="Helvetica Neue"/>
+              </a:rPr>
+              <a:t>Workflow Automator</a:t>
+            </a:r>
+          </a:p>
+        </p:txBody>
+      </p:sp>
+      <p:sp>
+        <p:nvSpPr>
+          <p:cNvPr id="25" name="TextBox 24"/>
+          <p:cNvSpPr txBox="1"/>
+          <p:nvPr/>
+        </p:nvSpPr>
+        <p:spPr>
+          <a:xfrm>
+            <a:off x="3630168" y="5669280"/>
+            <a:ext cx="2103120" cy="320040"/>
+          </a:xfrm>
+          <a:prstGeom prst="rect">
+            <a:avLst/>
+          </a:prstGeom>
+          <a:noFill/>
+        </p:spPr>
+        <p:txBody>
+          <a:bodyPr wrap="square" lIns="0" rIns="0" tIns="0" bIns="0" anchor="t">
+            <a:spAutoFit/>
+          </a:bodyPr>
+          <a:lstStyle/>
+          <a:p>
+            <a:pPr algn="l">
+              <a:lnSpc>
+                <a:spcPct val="115000"/>
+              </a:lnSpc>
+            </a:pPr>
+            <a:r>
+              <a:rPr sz="1100" b="0">
+                <a:solidFill>
+                  <a:srgbClr val="94A3B8"/>
+                </a:solidFill>
+                <a:latin typeface="Helvetica Neue"/>
+              </a:rPr>
+              <a:t>calls CodeAtlas instantly</a:t>
+            </a:r>
+          </a:p>
+        </p:txBody>
+      </p:sp>
+      <p:sp>
+        <p:nvSpPr>
+          <p:cNvPr id="26" name="Right Arrow 25"/>
+          <p:cNvSpPr/>
+          <p:nvPr/>
+        </p:nvSpPr>
+        <p:spPr>
+          <a:xfrm>
+            <a:off x="5980176" y="5513832"/>
+            <a:ext cx="210312" cy="219456"/>
+          </a:xfrm>
+          <a:prstGeom prst="rightArrow">
+            <a:avLst/>
+          </a:prstGeom>
+          <a:solidFill>
+            <a:srgbClr val="94A3B8"/>
+          </a:solidFill>
+          <a:ln>
+            <a:noFill/>
+          </a:ln>
+        </p:spPr>
+        <p:style>
+          <a:lnRef idx="1">
+            <a:schemeClr val="accent1"/>
+          </a:lnRef>
+          <a:fillRef idx="3">
+            <a:schemeClr val="accent1"/>
+          </a:fillRef>
+          <a:effectRef idx="2">
+            <a:schemeClr val="accent1"/>
+          </a:effectRef>
+          <a:fontRef idx="minor">
+            <a:schemeClr val="lt1"/>
+          </a:fontRef>
+        </p:style>
+        <p:txBody>
+          <a:bodyPr rtlCol="0" anchor="ctr"/>
+          <a:lstStyle/>
+          <a:p>
+            <a:pPr algn="ctr"/>
+          </a:p>
+        </p:txBody>
+      </p:sp>
+      <p:sp>
+        <p:nvSpPr>
+          <p:cNvPr id="27" name="Rounded Rectangle 26"/>
+          <p:cNvSpPr/>
+          <p:nvPr/>
+        </p:nvSpPr>
+        <p:spPr>
+          <a:xfrm>
+            <a:off x="6254496" y="5166360"/>
+            <a:ext cx="2468880" cy="914400"/>
+          </a:xfrm>
+          <a:prstGeom prst="roundRect">
+            <a:avLst>
+              <a:gd name="adj" fmla="val 6000"/>
+            </a:avLst>
+          </a:prstGeom>
+          <a:solidFill>
+            <a:srgbClr val="151E32"/>
+          </a:solidFill>
+          <a:ln w="12700">
+            <a:solidFill>
+              <a:srgbClr val="818CF8"/>
+            </a:solidFill>
+          </a:ln>
+          <a:effectLst/>
+        </p:spPr>
+        <p:style>
+          <a:lnRef idx="1">
+            <a:schemeClr val="accent1"/>
+          </a:lnRef>
+          <a:fillRef idx="3">
+            <a:schemeClr val="accent1"/>
+          </a:fillRef>
+          <a:effectRef idx="2">
+            <a:schemeClr val="accent1"/>
+          </a:effectRef>
+          <a:fontRef idx="minor">
+            <a:schemeClr val="lt1"/>
+          </a:fontRef>
+        </p:style>
+        <p:txBody>
+          <a:bodyPr rtlCol="0" anchor="ctr"/>
+          <a:lstStyle/>
+          <a:p>
+            <a:pPr algn="ctr"/>
+          </a:p>
+        </p:txBody>
+      </p:sp>
+      <p:sp>
+        <p:nvSpPr>
+          <p:cNvPr id="28" name="TextBox 27"/>
+          <p:cNvSpPr txBox="1"/>
+          <p:nvPr/>
+        </p:nvSpPr>
+        <p:spPr>
+          <a:xfrm>
+            <a:off x="6437376" y="5330952"/>
+            <a:ext cx="2103120" cy="320040"/>
+          </a:xfrm>
+          <a:prstGeom prst="rect">
+            <a:avLst/>
+          </a:prstGeom>
+          <a:noFill/>
+        </p:spPr>
+        <p:txBody>
+          <a:bodyPr wrap="square" lIns="0" rIns="0" tIns="0" bIns="0" anchor="t">
+            <a:spAutoFit/>
+          </a:bodyPr>
+          <a:lstStyle/>
+          <a:p>
+            <a:pPr algn="l">
+              <a:lnSpc>
+                <a:spcPct val="115000"/>
+              </a:lnSpc>
+            </a:pPr>
+            <a:r>
+              <a:rPr sz="1400" b="1">
+                <a:solidFill>
+                  <a:srgbClr val="818CF8"/>
+                </a:solidFill>
+                <a:latin typeface="Helvetica Neue"/>
+              </a:rPr>
+              <a:t>8 AI agents + graph</a:t>
+            </a:r>
+          </a:p>
+        </p:txBody>
+      </p:sp>
+      <p:sp>
+        <p:nvSpPr>
+          <p:cNvPr id="29" name="TextBox 28"/>
+          <p:cNvSpPr txBox="1"/>
+          <p:nvPr/>
+        </p:nvSpPr>
+        <p:spPr>
+          <a:xfrm>
+            <a:off x="6437376" y="5669280"/>
+            <a:ext cx="2103120" cy="320040"/>
+          </a:xfrm>
+          <a:prstGeom prst="rect">
+            <a:avLst/>
+          </a:prstGeom>
+          <a:noFill/>
+        </p:spPr>
+        <p:txBody>
+          <a:bodyPr wrap="square" lIns="0" rIns="0" tIns="0" bIns="0" anchor="t">
+            <a:spAutoFit/>
+          </a:bodyPr>
+          <a:lstStyle/>
+          <a:p>
+            <a:pPr algn="l">
+              <a:lnSpc>
+                <a:spcPct val="115000"/>
+              </a:lnSpc>
+            </a:pPr>
+            <a:r>
+              <a:rPr sz="1100" b="0">
+                <a:solidFill>
+                  <a:srgbClr val="94A3B8"/>
+                </a:solidFill>
+                <a:latin typeface="Helvetica Neue"/>
+              </a:rPr>
+              <a:t>GitHub · KB · LLM reasoning</a:t>
+            </a:r>
+          </a:p>
+        </p:txBody>
+      </p:sp>
+      <p:sp>
+        <p:nvSpPr>
+          <p:cNvPr id="30" name="Right Arrow 29"/>
+          <p:cNvSpPr/>
+          <p:nvPr/>
+        </p:nvSpPr>
+        <p:spPr>
+          <a:xfrm>
+            <a:off x="8787384" y="5513832"/>
+            <a:ext cx="210312" cy="219456"/>
+          </a:xfrm>
+          <a:prstGeom prst="rightArrow">
+            <a:avLst/>
+          </a:prstGeom>
+          <a:solidFill>
+            <a:srgbClr val="94A3B8"/>
+          </a:solidFill>
+          <a:ln>
+            <a:noFill/>
+          </a:ln>
+        </p:spPr>
+        <p:style>
+          <a:lnRef idx="1">
+            <a:schemeClr val="accent1"/>
+          </a:lnRef>
+          <a:fillRef idx="3">
+            <a:schemeClr val="accent1"/>
+          </a:fillRef>
+          <a:effectRef idx="2">
+            <a:schemeClr val="accent1"/>
+          </a:effectRef>
+          <a:fontRef idx="minor">
+            <a:schemeClr val="lt1"/>
+          </a:fontRef>
+        </p:style>
+        <p:txBody>
+          <a:bodyPr rtlCol="0" anchor="ctr"/>
+          <a:lstStyle/>
+          <a:p>
+            <a:pPr algn="ctr"/>
+          </a:p>
+        </p:txBody>
+      </p:sp>
+      <p:sp>
+        <p:nvSpPr>
+          <p:cNvPr id="31" name="Rounded Rectangle 30"/>
+          <p:cNvSpPr/>
+          <p:nvPr/>
+        </p:nvSpPr>
+        <p:spPr>
+          <a:xfrm>
+            <a:off x="9061704" y="5166360"/>
+            <a:ext cx="2468880" cy="914400"/>
+          </a:xfrm>
+          <a:prstGeom prst="roundRect">
+            <a:avLst>
+              <a:gd name="adj" fmla="val 6000"/>
+            </a:avLst>
+          </a:prstGeom>
+          <a:solidFill>
+            <a:srgbClr val="151E32"/>
+          </a:solidFill>
+          <a:ln w="12700">
+            <a:solidFill>
+              <a:srgbClr val="2DD4BF"/>
+            </a:solidFill>
+          </a:ln>
+          <a:effectLst/>
+        </p:spPr>
+        <p:style>
+          <a:lnRef idx="1">
+            <a:schemeClr val="accent1"/>
+          </a:lnRef>
+          <a:fillRef idx="3">
+            <a:schemeClr val="accent1"/>
+          </a:fillRef>
+          <a:effectRef idx="2">
+            <a:schemeClr val="accent1"/>
+          </a:effectRef>
+          <a:fontRef idx="minor">
+            <a:schemeClr val="lt1"/>
+          </a:fontRef>
+        </p:style>
+        <p:txBody>
+          <a:bodyPr rtlCol="0" anchor="ctr"/>
+          <a:lstStyle/>
+          <a:p>
+            <a:pPr algn="ctr"/>
+          </a:p>
+        </p:txBody>
+      </p:sp>
+      <p:sp>
+        <p:nvSpPr>
+          <p:cNvPr id="32" name="TextBox 31"/>
+          <p:cNvSpPr txBox="1"/>
+          <p:nvPr/>
+        </p:nvSpPr>
+        <p:spPr>
+          <a:xfrm>
+            <a:off x="9244584" y="5330952"/>
+            <a:ext cx="2103120" cy="320040"/>
+          </a:xfrm>
+          <a:prstGeom prst="rect">
+            <a:avLst/>
+          </a:prstGeom>
+          <a:noFill/>
+        </p:spPr>
+        <p:txBody>
+          <a:bodyPr wrap="square" lIns="0" rIns="0" tIns="0" bIns="0" anchor="t">
+            <a:spAutoFit/>
+          </a:bodyPr>
+          <a:lstStyle/>
+          <a:p>
+            <a:pPr algn="l">
+              <a:lnSpc>
+                <a:spcPct val="115000"/>
+              </a:lnSpc>
+            </a:pPr>
+            <a:r>
+              <a:rPr sz="1400" b="1">
+                <a:solidFill>
+                  <a:srgbClr val="2DD4BF"/>
+                </a:solidFill>
+                <a:latin typeface="Helvetica Neue"/>
+              </a:rPr>
+              <a:t>Written back</a:t>
+            </a:r>
+          </a:p>
+        </p:txBody>
+      </p:sp>
+      <p:sp>
+        <p:nvSpPr>
+          <p:cNvPr id="33" name="TextBox 32"/>
+          <p:cNvSpPr txBox="1"/>
+          <p:nvPr/>
+        </p:nvSpPr>
+        <p:spPr>
+          <a:xfrm>
+            <a:off x="9244584" y="5669280"/>
+            <a:ext cx="2103120" cy="320040"/>
+          </a:xfrm>
+          <a:prstGeom prst="rect">
+            <a:avLst/>
+          </a:prstGeom>
+          <a:noFill/>
+        </p:spPr>
+        <p:txBody>
+          <a:bodyPr wrap="square" lIns="0" rIns="0" tIns="0" bIns="0" anchor="t">
+            <a:spAutoFit/>
+          </a:bodyPr>
+          <a:lstStyle/>
+          <a:p>
+            <a:pPr algn="l">
+              <a:lnSpc>
+                <a:spcPct val="115000"/>
+              </a:lnSpc>
+            </a:pPr>
+            <a:r>
+              <a:rPr sz="1100" b="0">
+                <a:solidFill>
+                  <a:srgbClr val="94A3B8"/>
+                </a:solidFill>
+                <a:latin typeface="Helvetica Neue"/>
+              </a:rPr>
+              <a:t>diagnosis, routing, blast radius</a:t>
             </a:r>
           </a:p>
         </p:txBody>
@@ -10900,8 +11806,8 @@
         </p:nvSpPr>
         <p:spPr>
           <a:xfrm>
-            <a:off x="10607040" y="6400800"/>
-            <a:ext cx="1005840" cy="274320"/>
+            <a:off x="9235440" y="6400800"/>
+            <a:ext cx="2377440" cy="274320"/>
           </a:xfrm>
           <a:prstGeom prst="rect">
             <a:avLst/>
@@ -11506,8 +12412,8 @@
         </p:nvSpPr>
         <p:spPr>
           <a:xfrm>
-            <a:off x="10607040" y="6400800"/>
-            <a:ext cx="1005840" cy="274320"/>
+            <a:off x="9235440" y="6400800"/>
+            <a:ext cx="2377440" cy="274320"/>
           </a:xfrm>
           <a:prstGeom prst="rect">
             <a:avLst/>
@@ -12549,8 +13455,8 @@
         </p:nvSpPr>
         <p:spPr>
           <a:xfrm>
-            <a:off x="10607040" y="6400800"/>
-            <a:ext cx="1005840" cy="274320"/>
+            <a:off x="9235440" y="6400800"/>
+            <a:ext cx="2377440" cy="274320"/>
           </a:xfrm>
           <a:prstGeom prst="rect">
             <a:avLst/>
@@ -12762,8 +13668,8 @@
         </p:nvSpPr>
         <p:spPr>
           <a:xfrm>
-            <a:off x="10607040" y="6400800"/>
-            <a:ext cx="1005840" cy="274320"/>
+            <a:off x="9235440" y="6400800"/>
+            <a:ext cx="2377440" cy="274320"/>
           </a:xfrm>
           <a:prstGeom prst="rect">
             <a:avLst/>
@@ -14534,8 +15440,8 @@
         </p:nvSpPr>
         <p:spPr>
           <a:xfrm>
-            <a:off x="10607040" y="6400800"/>
-            <a:ext cx="1005840" cy="274320"/>
+            <a:off x="9235440" y="6400800"/>
+            <a:ext cx="2377440" cy="274320"/>
           </a:xfrm>
           <a:prstGeom prst="rect">
             <a:avLst/>
@@ -15931,8 +16837,8 @@
         </p:nvSpPr>
         <p:spPr>
           <a:xfrm>
-            <a:off x="10607040" y="6400800"/>
-            <a:ext cx="1005840" cy="274320"/>
+            <a:off x="9235440" y="6400800"/>
+            <a:ext cx="2377440" cy="274320"/>
           </a:xfrm>
           <a:prstGeom prst="rect">
             <a:avLst/>

--- a/docs/CodeAtlas-AI-Pitch-Deck.pptx
+++ b/docs/CodeAtlas-AI-Pitch-Deck.pptx
@@ -18,6 +18,7 @@
     <p:sldId id="266" r:id="rId18"/>
     <p:sldId id="267" r:id="rId19"/>
     <p:sldId id="268" r:id="rId20"/>
+    <p:sldId id="269" r:id="rId21"/>
   </p:sldIdLst>
   <p:sldSz cx="12191695" cy="6858000" type="screen4x3"/>
   <p:notesSz cx="6858000" cy="9144000"/>
@@ -584,7 +585,7 @@
           <a:lstStyle/>
           <a:p>
             <a:r>
-              <a:t>All figures are working assumptions to be validated with design partners. Pricing is a Marketplace add-on per agent; the free tier drives adoption; the demo video shows a ticket that diagnoses itself.</a:t>
+              <a:t>Read the statement as written; it is the answer to 'why would I buy this'. Then contrast: doing nothing means people hunt for context; the alternatives are either heavy (ServiceNow CMDB), disconnected from tickets (developer portals), or blind to the system (built-in copilots). Close on the proof strip: everything on it is shown live in the demo.</a:t>
             </a:r>
           </a:p>
         </p:txBody>
@@ -654,7 +655,7 @@
           <a:lstStyle/>
           <a:p>
             <a:r>
-              <a:t>MTTR is the headline metric. Coverage shows the automation is really running. Correct first escalation shows the graph's ownership data is right. Conversion shows willingness to pay.</a:t>
+              <a:t>All figures are working assumptions to be validated with design partners. Pricing: a free tier gets the graph into Freshservice; Pro is where it runs itself on every ticket; Enterprise adds change risk and more connectors. Go-to-market lives inside the Freshworks ecosystem: Marketplace, a 5-minute connect, and a demo of a ticket diagnosing itself. Economics: roughly $100K to reach a production MVP against an illustrative $288K ARR, with LLM cost in cents per diagnosis.</a:t>
             </a:r>
           </a:p>
         </p:txBody>
@@ -724,7 +725,7 @@
           <a:lstStyle/>
           <a:p>
             <a:r>
-              <a:t>Be upfront: diagnosis quality depends on graph quality, and we mitigate with the Knowledge Gap agent. Privacy: private notes and a no-LLM mode. Roadmap turns mocked connectors live and adds a native FDK sidebar and change-risk assessment.</a:t>
+              <a:t>MTTR is the headline metric. Coverage shows the automation is really running. Correct first escalation shows the graph's ownership data is right. Conversion shows willingness to pay.</a:t>
             </a:r>
           </a:p>
         </p:txBody>
@@ -794,6 +795,76 @@
           <a:lstStyle/>
           <a:p>
             <a:r>
+              <a:t>Be upfront: diagnosis quality depends on graph quality, and we mitigate with the Knowledge Gap agent. Privacy: private notes and a no-LLM mode. Roadmap turns mocked connectors live and adds a native FDK sidebar and change-risk assessment.</a:t>
+            </a:r>
+          </a:p>
+        </p:txBody>
+      </p:sp>
+      <p:sp>
+        <p:nvSpPr>
+          <p:cNvPr id="4" name="Slide Number Placeholder 3"/>
+          <p:cNvSpPr>
+            <a:spLocks noGrp="1"/>
+          </p:cNvSpPr>
+          <p:nvPr>
+            <p:ph type="sldNum" idx="5" sz="quarter"/>
+          </p:nvPr>
+        </p:nvSpPr>
+        <p:spPr/>
+      </p:sp>
+    </p:spTree>
+  </p:cSld>
+  <p:clrMapOvr>
+    <a:masterClrMapping/>
+  </p:clrMapOvr>
+</p:notes>
+</file>
+
+<file path=ppt/notesSlides/notesSlide14.xml><?xml version="1.0" encoding="utf-8"?>
+<p:notes xmlns:a="http://schemas.openxmlformats.org/drawingml/2006/main" xmlns:p="http://schemas.openxmlformats.org/presentationml/2006/main" xmlns:r="http://schemas.openxmlformats.org/officeDocument/2006/relationships">
+  <p:cSld>
+    <p:spTree>
+      <p:nvGrpSpPr>
+        <p:cNvPr id="1" name=""/>
+        <p:cNvGrpSpPr/>
+        <p:nvPr/>
+      </p:nvGrpSpPr>
+      <p:grpSpPr>
+        <a:xfrm>
+          <a:off x="0" y="0"/>
+          <a:ext cx="0" cy="0"/>
+          <a:chOff x="0" y="0"/>
+          <a:chExt cx="0" cy="0"/>
+        </a:xfrm>
+      </p:grpSpPr>
+      <p:sp>
+        <p:nvSpPr>
+          <p:cNvPr id="2" name="Slide Image Placeholder 1"/>
+          <p:cNvSpPr>
+            <a:spLocks noGrp="1"/>
+          </p:cNvSpPr>
+          <p:nvPr>
+            <p:ph type="sldImg" idx="2"/>
+          </p:nvPr>
+        </p:nvSpPr>
+        <p:spPr/>
+      </p:sp>
+      <p:sp>
+        <p:nvSpPr>
+          <p:cNvPr id="3" name="Notes Placeholder 2"/>
+          <p:cNvSpPr>
+            <a:spLocks noGrp="1"/>
+          </p:cNvSpPr>
+          <p:nvPr>
+            <p:ph type="body" idx="3" sz="quarter"/>
+          </p:nvPr>
+        </p:nvSpPr>
+        <p:spPr/>
+        <p:txBody>
+          <a:bodyPr/>
+          <a:lstStyle/>
+          <a:p>
+            <a:r>
               <a:t>Being upfront about what's mocked builds trust. Freshservice is fully live; the other connectors share the same adapter interface and are Phase 2.</a:t>
             </a:r>
           </a:p>
@@ -1354,7 +1425,7 @@
           <a:lstStyle/>
           <a:p>
             <a:r>
-              <a:t>Primary buyer: mid-size software companies running engineering incidents in Freshservice. Secondary: MSPs who constantly face unfamiliar client systems. The value in one line is on the slide.</a:t>
+              <a:t>Primary buyer: mid-size software companies running engineering incidents in Freshservice. Secondary: MSPs who constantly face unfamiliar client systems. Then walk the four users left to right: each gets something different from the same knowledge graph, and three of the four get it without leaving Freshservice.</a:t>
             </a:r>
           </a:p>
         </p:txBody>
@@ -4637,7 +4708,7 @@
                 </a:solidFill>
                 <a:latin typeface="Helvetica Neue"/>
               </a:rPr>
-              <a:t>PRICING · GO-TO-MARKET · COST</a:t>
+              <a:t>VALUE PROPOSITION</a:t>
             </a:r>
           </a:p>
         </p:txBody>
@@ -4676,7 +4747,7 @@
                 </a:solidFill>
                 <a:latin typeface="Helvetica Neue"/>
               </a:rPr>
-              <a:t>Business model</a:t>
+              <a:t>Why customers will want it</a:t>
             </a:r>
           </a:p>
         </p:txBody>
@@ -4728,8 +4799,104 @@
         </p:nvSpPr>
         <p:spPr>
           <a:xfrm>
-            <a:off x="640080" y="1828800"/>
-            <a:ext cx="3474720" cy="3566160"/>
+            <a:off x="640080" y="1691640"/>
+            <a:ext cx="10881360" cy="1325880"/>
+          </a:xfrm>
+          <a:prstGeom prst="roundRect">
+            <a:avLst>
+              <a:gd name="adj" fmla="val 6000"/>
+            </a:avLst>
+          </a:prstGeom>
+          <a:solidFill>
+            <a:srgbClr val="0F2A2E"/>
+          </a:solidFill>
+          <a:ln w="12700">
+            <a:solidFill>
+              <a:srgbClr val="2DD4BF"/>
+            </a:solidFill>
+          </a:ln>
+          <a:effectLst/>
+        </p:spPr>
+        <p:style>
+          <a:lnRef idx="1">
+            <a:schemeClr val="accent1"/>
+          </a:lnRef>
+          <a:fillRef idx="3">
+            <a:schemeClr val="accent1"/>
+          </a:fillRef>
+          <a:effectRef idx="2">
+            <a:schemeClr val="accent1"/>
+          </a:effectRef>
+          <a:fontRef idx="minor">
+            <a:schemeClr val="lt1"/>
+          </a:fontRef>
+        </p:style>
+        <p:txBody>
+          <a:bodyPr rtlCol="0" anchor="ctr"/>
+          <a:lstStyle/>
+          <a:p>
+            <a:pPr algn="ctr"/>
+          </a:p>
+        </p:txBody>
+      </p:sp>
+      <p:sp>
+        <p:nvSpPr>
+          <p:cNvPr id="6" name="TextBox 5"/>
+          <p:cNvSpPr txBox="1"/>
+          <p:nvPr/>
+        </p:nvSpPr>
+        <p:spPr>
+          <a:xfrm>
+            <a:off x="914400" y="1783080"/>
+            <a:ext cx="10332720" cy="1143000"/>
+          </a:xfrm>
+          <a:prstGeom prst="rect">
+            <a:avLst/>
+          </a:prstGeom>
+          <a:noFill/>
+        </p:spPr>
+        <p:txBody>
+          <a:bodyPr wrap="square" lIns="0" rIns="0" tIns="0" bIns="0" anchor="ctr">
+            <a:spAutoFit/>
+          </a:bodyPr>
+          <a:lstStyle/>
+          <a:p>
+            <a:pPr algn="l">
+              <a:lnSpc>
+                <a:spcPct val="115000"/>
+              </a:lnSpc>
+            </a:pPr>
+            <a:r>
+              <a:rPr sz="1800" b="1">
+                <a:solidFill>
+                  <a:srgbClr val="F8FAFC"/>
+                </a:solidFill>
+                <a:latin typeface="Helvetica Neue"/>
+              </a:rPr>
+              <a:t>Every Freshservice ticket and change arrives already diagnosed, routed to the right team and risk-assessed, </a:t>
+            </a:r>
+            <a:r>
+              <a:rPr sz="1800" b="0">
+                <a:solidFill>
+                  <a:srgbClr val="F8FAFC"/>
+                </a:solidFill>
+                <a:latin typeface="Helvetica Neue"/>
+              </a:rPr>
+              <a:t>without anyone leaving Freshservice. Teams stop hunting for context across GitHub, runbooks and chat, resolve faster, and know what breaks before a change ships.</a:t>
+            </a:r>
+          </a:p>
+        </p:txBody>
+      </p:sp>
+      <p:sp>
+        <p:nvSpPr>
+          <p:cNvPr id="7" name="Rounded Rectangle 6"/>
+          <p:cNvSpPr/>
+          <p:nvPr/>
+        </p:nvSpPr>
+        <p:spPr>
+          <a:xfrm>
+            <a:off x="640080" y="3246120"/>
+            <a:ext cx="5303520" cy="2011680"/>
           </a:xfrm>
           <a:prstGeom prst="roundRect">
             <a:avLst>
@@ -4770,20 +4937,20 @@
       </p:sp>
       <p:sp>
         <p:nvSpPr>
-          <p:cNvPr id="6" name="Rectangle 5"/>
+          <p:cNvPr id="8" name="Rectangle 7"/>
           <p:cNvSpPr/>
           <p:nvPr/>
         </p:nvSpPr>
         <p:spPr>
           <a:xfrm>
-            <a:off x="640080" y="2057400"/>
-            <a:ext cx="54864" cy="457200"/>
+            <a:off x="640080" y="3502152"/>
+            <a:ext cx="54864" cy="365760"/>
           </a:xfrm>
           <a:prstGeom prst="rect">
             <a:avLst/>
           </a:prstGeom>
           <a:solidFill>
-            <a:srgbClr val="2DD4BF"/>
+            <a:srgbClr val="FB7185"/>
           </a:solidFill>
           <a:ln>
             <a:noFill/>
@@ -4814,14 +4981,14 @@
       </p:sp>
       <p:sp>
         <p:nvSpPr>
-          <p:cNvPr id="7" name="TextBox 6"/>
-          <p:cNvSpPr txBox="1"/>
-          <p:nvPr/>
-        </p:nvSpPr>
-        <p:spPr>
-          <a:xfrm>
-            <a:off x="914400" y="2029968"/>
-            <a:ext cx="2971800" cy="548640"/>
+          <p:cNvPr id="9" name="TextBox 8"/>
+          <p:cNvSpPr txBox="1"/>
+          <p:nvPr/>
+        </p:nvSpPr>
+        <p:spPr>
+          <a:xfrm>
+            <a:off x="914400" y="3474720"/>
+            <a:ext cx="4754880" cy="365760"/>
           </a:xfrm>
           <a:prstGeom prst="rect">
             <a:avLst/>
@@ -4846,21 +5013,21 @@
                 </a:solidFill>
                 <a:latin typeface="Helvetica Neue"/>
               </a:rPr>
-              <a:t>Pricing</a:t>
-            </a:r>
-          </a:p>
-        </p:txBody>
-      </p:sp>
-      <p:sp>
-        <p:nvSpPr>
-          <p:cNvPr id="8" name="TextBox 7"/>
-          <p:cNvSpPr txBox="1"/>
-          <p:nvPr/>
-        </p:nvSpPr>
-        <p:spPr>
-          <a:xfrm>
-            <a:off x="914400" y="2560320"/>
-            <a:ext cx="2971800" cy="2697480"/>
+              <a:t>Instead of doing nothing</a:t>
+            </a:r>
+          </a:p>
+        </p:txBody>
+      </p:sp>
+      <p:sp>
+        <p:nvSpPr>
+          <p:cNvPr id="10" name="TextBox 9"/>
+          <p:cNvSpPr txBox="1"/>
+          <p:nvPr/>
+        </p:nvSpPr>
+        <p:spPr>
+          <a:xfrm>
+            <a:off x="914400" y="3977639"/>
+            <a:ext cx="4754880" cy="1188720"/>
           </a:xfrm>
           <a:prstGeom prst="rect">
             <a:avLst/>
@@ -4875,88 +5042,96 @@
           <a:p>
             <a:pPr algn="l">
               <a:lnSpc>
-                <a:spcPct val="115000"/>
+                <a:spcPct val="110000"/>
               </a:lnSpc>
               <a:spcAft>
                 <a:spcPts val="800"/>
               </a:spcAft>
             </a:pPr>
             <a:r>
-              <a:rPr sz="1400" b="0">
+              <a:rPr sz="1300" b="1">
+                <a:solidFill>
+                  <a:srgbClr val="FB7185"/>
+                </a:solidFill>
+                <a:latin typeface="Helvetica Neue"/>
+              </a:rPr>
+              <a:t>✕  </a:t>
+            </a:r>
+            <a:r>
+              <a:rPr sz="1300" b="0">
                 <a:solidFill>
                   <a:srgbClr val="94A3B8"/>
                 </a:solidFill>
                 <a:latin typeface="Helvetica Neue"/>
               </a:rPr>
-              <a:t>Marketplace add-on for Freshservice Pro &amp; Enterprise</a:t>
+              <a:t>L1 guesses the team; tickets bounce between queues</a:t>
             </a:r>
           </a:p>
           <a:p>
             <a:pPr algn="l">
               <a:lnSpc>
-                <a:spcPct val="115000"/>
+                <a:spcPct val="110000"/>
               </a:lnSpc>
               <a:spcAft>
                 <a:spcPts val="800"/>
               </a:spcAft>
             </a:pPr>
             <a:r>
-              <a:rPr sz="1400" b="0">
+              <a:rPr sz="1300" b="1">
+                <a:solidFill>
+                  <a:srgbClr val="FB7185"/>
+                </a:solidFill>
+                <a:latin typeface="Helvetica Neue"/>
+              </a:rPr>
+              <a:t>✕  </a:t>
+            </a:r>
+            <a:r>
+              <a:rPr sz="1300" b="0">
                 <a:solidFill>
                   <a:srgbClr val="94A3B8"/>
                 </a:solidFill>
                 <a:latin typeface="Helvetica Neue"/>
               </a:rPr>
-              <a:t>$8 / agent / month</a:t>
+              <a:t>On-call spends the first part of every incident hunting for context</a:t>
             </a:r>
           </a:p>
           <a:p>
             <a:pPr algn="l">
               <a:lnSpc>
-                <a:spcPct val="115000"/>
-              </a:lnSpc>
-              <a:spcAft>
-                <a:spcPts val="800"/>
-              </a:spcAft>
-            </a:pPr>
-            <a:r>
-              <a:rPr sz="1400" b="0">
+                <a:spcPct val="110000"/>
+              </a:lnSpc>
+            </a:pPr>
+            <a:r>
+              <a:rPr sz="1300" b="1">
+                <a:solidFill>
+                  <a:srgbClr val="FB7185"/>
+                </a:solidFill>
+                <a:latin typeface="Helvetica Neue"/>
+              </a:rPr>
+              <a:t>✕  </a:t>
+            </a:r>
+            <a:r>
+              <a:rPr sz="1300" b="0">
                 <a:solidFill>
                   <a:srgbClr val="94A3B8"/>
                 </a:solidFill>
                 <a:latin typeface="Helvetica Neue"/>
               </a:rPr>
-              <a:t>Free tier: 25 diagnoses / month</a:t>
-            </a:r>
-          </a:p>
-          <a:p>
-            <a:pPr algn="l">
-              <a:lnSpc>
-                <a:spcPct val="115000"/>
-              </a:lnSpc>
-            </a:pPr>
-            <a:r>
-              <a:rPr sz="1400" b="0">
-                <a:solidFill>
-                  <a:srgbClr val="94A3B8"/>
-                </a:solidFill>
-                <a:latin typeface="Helvetica Neue"/>
-              </a:rPr>
-              <a:t>30-day trial of auto-diagnosis</a:t>
-            </a:r>
-          </a:p>
-        </p:txBody>
-      </p:sp>
-      <p:sp>
-        <p:nvSpPr>
-          <p:cNvPr id="9" name="Rounded Rectangle 8"/>
+              <a:t>Changes are approved without knowing what depends on them</a:t>
+            </a:r>
+          </a:p>
+        </p:txBody>
+      </p:sp>
+      <p:sp>
+        <p:nvSpPr>
+          <p:cNvPr id="11" name="Rounded Rectangle 10"/>
           <p:cNvSpPr/>
           <p:nvPr/>
         </p:nvSpPr>
         <p:spPr>
           <a:xfrm>
-            <a:off x="4361688" y="1828800"/>
-            <a:ext cx="3474720" cy="3566160"/>
+            <a:off x="6217920" y="3246120"/>
+            <a:ext cx="5303520" cy="2011680"/>
           </a:xfrm>
           <a:prstGeom prst="roundRect">
             <a:avLst>
@@ -4997,14 +5172,14 @@
       </p:sp>
       <p:sp>
         <p:nvSpPr>
-          <p:cNvPr id="10" name="Rectangle 9"/>
+          <p:cNvPr id="12" name="Rectangle 11"/>
           <p:cNvSpPr/>
           <p:nvPr/>
         </p:nvSpPr>
         <p:spPr>
           <a:xfrm>
-            <a:off x="4361688" y="2057400"/>
-            <a:ext cx="54864" cy="457200"/>
+            <a:off x="6217920" y="3502152"/>
+            <a:ext cx="54864" cy="365760"/>
           </a:xfrm>
           <a:prstGeom prst="rect">
             <a:avLst/>
@@ -5041,14 +5216,14 @@
       </p:sp>
       <p:sp>
         <p:nvSpPr>
-          <p:cNvPr id="11" name="TextBox 10"/>
-          <p:cNvSpPr txBox="1"/>
-          <p:nvPr/>
-        </p:nvSpPr>
-        <p:spPr>
-          <a:xfrm>
-            <a:off x="4636008" y="2029968"/>
-            <a:ext cx="2971800" cy="548640"/>
+          <p:cNvPr id="13" name="TextBox 12"/>
+          <p:cNvSpPr txBox="1"/>
+          <p:nvPr/>
+        </p:nvSpPr>
+        <p:spPr>
+          <a:xfrm>
+            <a:off x="6492240" y="3474720"/>
+            <a:ext cx="4754880" cy="365760"/>
           </a:xfrm>
           <a:prstGeom prst="rect">
             <a:avLst/>
@@ -5073,21 +5248,21 @@
                 </a:solidFill>
                 <a:latin typeface="Helvetica Neue"/>
               </a:rPr>
-              <a:t>Go-to-market</a:t>
-            </a:r>
-          </a:p>
-        </p:txBody>
-      </p:sp>
-      <p:sp>
-        <p:nvSpPr>
-          <p:cNvPr id="12" name="TextBox 11"/>
-          <p:cNvSpPr txBox="1"/>
-          <p:nvPr/>
-        </p:nvSpPr>
-        <p:spPr>
-          <a:xfrm>
-            <a:off x="4636008" y="2560320"/>
-            <a:ext cx="2971800" cy="2697480"/>
+              <a:t>Instead of an alternative</a:t>
+            </a:r>
+          </a:p>
+        </p:txBody>
+      </p:sp>
+      <p:sp>
+        <p:nvSpPr>
+          <p:cNvPr id="14" name="TextBox 13"/>
+          <p:cNvSpPr txBox="1"/>
+          <p:nvPr/>
+        </p:nvSpPr>
+        <p:spPr>
+          <a:xfrm>
+            <a:off x="6492240" y="3977639"/>
+            <a:ext cx="4754880" cy="1188720"/>
           </a:xfrm>
           <a:prstGeom prst="rect">
             <a:avLst/>
@@ -5102,88 +5277,135 @@
           <a:p>
             <a:pPr algn="l">
               <a:lnSpc>
-                <a:spcPct val="115000"/>
+                <a:spcPct val="110000"/>
               </a:lnSpc>
               <a:spcAft>
                 <a:spcPts val="800"/>
               </a:spcAft>
             </a:pPr>
             <a:r>
-              <a:rPr sz="1400" b="0">
+              <a:rPr sz="1300" b="1">
+                <a:solidFill>
+                  <a:srgbClr val="818CF8"/>
+                </a:solidFill>
+                <a:latin typeface="Helvetica Neue"/>
+              </a:rPr>
+              <a:t>ServiceNow CMDB: </a:t>
+            </a:r>
+            <a:r>
+              <a:rPr sz="1300" b="0">
                 <a:solidFill>
                   <a:srgbClr val="94A3B8"/>
                 </a:solidFill>
                 <a:latin typeface="Helvetica Neue"/>
               </a:rPr>
-              <a:t>Freshworks Marketplace listing + in-product banner</a:t>
+              <a:t>heavy rollout, relationships kept up by hand</a:t>
             </a:r>
           </a:p>
           <a:p>
             <a:pPr algn="l">
               <a:lnSpc>
-                <a:spcPct val="115000"/>
+                <a:spcPct val="110000"/>
               </a:lnSpc>
               <a:spcAft>
                 <a:spcPts val="800"/>
               </a:spcAft>
             </a:pPr>
             <a:r>
-              <a:rPr sz="1400" b="0">
+              <a:rPr sz="1300" b="1">
+                <a:solidFill>
+                  <a:srgbClr val="818CF8"/>
+                </a:solidFill>
+                <a:latin typeface="Helvetica Neue"/>
+              </a:rPr>
+              <a:t>Developer portals: </a:t>
+            </a:r>
+            <a:r>
+              <a:rPr sz="1300" b="0">
                 <a:solidFill>
                   <a:srgbClr val="94A3B8"/>
                 </a:solidFill>
                 <a:latin typeface="Helvetica Neue"/>
               </a:rPr>
-              <a:t>5-minute onboarding: API key → Sync</a:t>
+              <a:t>know owners, but never see a ticket</a:t>
             </a:r>
           </a:p>
           <a:p>
             <a:pPr algn="l">
               <a:lnSpc>
+                <a:spcPct val="110000"/>
+              </a:lnSpc>
+            </a:pPr>
+            <a:r>
+              <a:rPr sz="1300" b="1">
+                <a:solidFill>
+                  <a:srgbClr val="818CF8"/>
+                </a:solidFill>
+                <a:latin typeface="Helvetica Neue"/>
+              </a:rPr>
+              <a:t>Built-in AI copilots: </a:t>
+            </a:r>
+            <a:r>
+              <a:rPr sz="1300" b="0">
+                <a:solidFill>
+                  <a:srgbClr val="94A3B8"/>
+                </a:solidFill>
+                <a:latin typeface="Helvetica Neue"/>
+              </a:rPr>
+              <a:t>read ticket text, not the system behind it</a:t>
+            </a:r>
+          </a:p>
+        </p:txBody>
+      </p:sp>
+      <p:sp>
+        <p:nvSpPr>
+          <p:cNvPr id="15" name="TextBox 14"/>
+          <p:cNvSpPr txBox="1"/>
+          <p:nvPr/>
+        </p:nvSpPr>
+        <p:spPr>
+          <a:xfrm>
+            <a:off x="640080" y="5440680"/>
+            <a:ext cx="10881360" cy="274320"/>
+          </a:xfrm>
+          <a:prstGeom prst="rect">
+            <a:avLst/>
+          </a:prstGeom>
+          <a:noFill/>
+        </p:spPr>
+        <p:txBody>
+          <a:bodyPr wrap="square" lIns="0" rIns="0" tIns="0" bIns="0" anchor="t">
+            <a:spAutoFit/>
+          </a:bodyPr>
+          <a:lstStyle/>
+          <a:p>
+            <a:pPr algn="l">
+              <a:lnSpc>
                 <a:spcPct val="115000"/>
               </a:lnSpc>
-              <a:spcAft>
-                <a:spcPts val="800"/>
-              </a:spcAft>
-            </a:pPr>
-            <a:r>
-              <a:rPr sz="1400" b="0">
-                <a:solidFill>
-                  <a:srgbClr val="94A3B8"/>
-                </a:solidFill>
-                <a:latin typeface="Helvetica Neue"/>
-              </a:rPr>
-              <a:t>Email trial offer to Pro/Enterprise admins</a:t>
-            </a:r>
-          </a:p>
-          <a:p>
-            <a:pPr algn="l">
-              <a:lnSpc>
-                <a:spcPct val="115000"/>
-              </a:lnSpc>
-            </a:pPr>
-            <a:r>
-              <a:rPr sz="1400" b="0">
-                <a:solidFill>
-                  <a:srgbClr val="94A3B8"/>
-                </a:solidFill>
-                <a:latin typeface="Helvetica Neue"/>
-              </a:rPr>
-              <a:t>3–5 design partners for case studies</a:t>
-            </a:r>
-          </a:p>
-        </p:txBody>
-      </p:sp>
-      <p:sp>
-        <p:nvSpPr>
-          <p:cNvPr id="13" name="Rounded Rectangle 12"/>
+            </a:pPr>
+            <a:r>
+              <a:rPr sz="1100" b="1">
+                <a:solidFill>
+                  <a:srgbClr val="2DD4BF"/>
+                </a:solidFill>
+                <a:latin typeface="Helvetica Neue"/>
+              </a:rPr>
+              <a:t>CODEATLAS INSTEAD  ·  SHOWN LIVE IN THE DEMO</a:t>
+            </a:r>
+          </a:p>
+        </p:txBody>
+      </p:sp>
+      <p:sp>
+        <p:nvSpPr>
+          <p:cNvPr id="16" name="Rounded Rectangle 15"/>
           <p:cNvSpPr/>
           <p:nvPr/>
         </p:nvSpPr>
         <p:spPr>
           <a:xfrm>
-            <a:off x="8083296" y="1828800"/>
-            <a:ext cx="3474720" cy="3566160"/>
+            <a:off x="640080" y="5715000"/>
+            <a:ext cx="3474720" cy="502920"/>
           </a:xfrm>
           <a:prstGeom prst="roundRect">
             <a:avLst>
@@ -5195,7 +5417,7 @@
           </a:solidFill>
           <a:ln w="12700">
             <a:solidFill>
-              <a:srgbClr val="2A3650"/>
+              <a:srgbClr val="2DD4BF"/>
             </a:solidFill>
           </a:ln>
           <a:effectLst/>
@@ -5224,23 +5446,66 @@
       </p:sp>
       <p:sp>
         <p:nvSpPr>
-          <p:cNvPr id="14" name="Rectangle 13"/>
+          <p:cNvPr id="17" name="TextBox 16"/>
+          <p:cNvSpPr txBox="1"/>
+          <p:nvPr/>
+        </p:nvSpPr>
+        <p:spPr>
+          <a:xfrm>
+            <a:off x="822960" y="5852160"/>
+            <a:ext cx="3108960" cy="274320"/>
+          </a:xfrm>
+          <a:prstGeom prst="rect">
+            <a:avLst/>
+          </a:prstGeom>
+          <a:noFill/>
+        </p:spPr>
+        <p:txBody>
+          <a:bodyPr wrap="square" lIns="0" rIns="0" tIns="0" bIns="0" anchor="t">
+            <a:spAutoFit/>
+          </a:bodyPr>
+          <a:lstStyle/>
+          <a:p>
+            <a:pPr algn="l">
+              <a:lnSpc>
+                <a:spcPct val="115000"/>
+              </a:lnSpc>
+            </a:pPr>
+            <a:r>
+              <a:rPr sz="1200" b="1">
+                <a:solidFill>
+                  <a:srgbClr val="F8FAFC"/>
+                </a:solidFill>
+                <a:latin typeface="Helvetica Neue"/>
+              </a:rPr>
+              <a:t>✓  Ticket auto-routed, zero clicks</a:t>
+            </a:r>
+          </a:p>
+        </p:txBody>
+      </p:sp>
+      <p:sp>
+        <p:nvSpPr>
+          <p:cNvPr id="18" name="Rounded Rectangle 17"/>
           <p:cNvSpPr/>
           <p:nvPr/>
         </p:nvSpPr>
         <p:spPr>
           <a:xfrm>
-            <a:off x="8083296" y="2057400"/>
-            <a:ext cx="54864" cy="457200"/>
-          </a:xfrm>
-          <a:prstGeom prst="rect">
-            <a:avLst/>
+            <a:off x="4297680" y="5715000"/>
+            <a:ext cx="3474720" cy="502920"/>
+          </a:xfrm>
+          <a:prstGeom prst="roundRect">
+            <a:avLst>
+              <a:gd name="adj" fmla="val 6000"/>
+            </a:avLst>
           </a:prstGeom>
           <a:solidFill>
-            <a:srgbClr val="FBBF24"/>
+            <a:srgbClr val="151E32"/>
           </a:solidFill>
-          <a:ln>
-            <a:noFill/>
+          <a:ln w="12700">
+            <a:solidFill>
+              <a:srgbClr val="2DD4BF"/>
+            </a:solidFill>
           </a:ln>
           <a:effectLst/>
         </p:spPr>
@@ -5268,14 +5533,14 @@
       </p:sp>
       <p:sp>
         <p:nvSpPr>
-          <p:cNvPr id="15" name="TextBox 14"/>
-          <p:cNvSpPr txBox="1"/>
-          <p:nvPr/>
-        </p:nvSpPr>
-        <p:spPr>
-          <a:xfrm>
-            <a:off x="8357616" y="2029968"/>
-            <a:ext cx="2971800" cy="548640"/>
+          <p:cNvPr id="19" name="TextBox 18"/>
+          <p:cNvSpPr txBox="1"/>
+          <p:nvPr/>
+        </p:nvSpPr>
+        <p:spPr>
+          <a:xfrm>
+            <a:off x="4480560" y="5852160"/>
+            <a:ext cx="3108960" cy="274320"/>
           </a:xfrm>
           <a:prstGeom prst="rect">
             <a:avLst/>
@@ -5294,135 +5559,39 @@
               </a:lnSpc>
             </a:pPr>
             <a:r>
-              <a:rPr sz="1700" b="1">
+              <a:rPr sz="1200" b="1">
                 <a:solidFill>
                   <a:srgbClr val="F8FAFC"/>
                 </a:solidFill>
                 <a:latin typeface="Helvetica Neue"/>
               </a:rPr>
-              <a:t>Cost to MVP</a:t>
-            </a:r>
-          </a:p>
-        </p:txBody>
-      </p:sp>
-      <p:sp>
-        <p:nvSpPr>
-          <p:cNvPr id="16" name="TextBox 15"/>
-          <p:cNvSpPr txBox="1"/>
-          <p:nvPr/>
-        </p:nvSpPr>
-        <p:spPr>
-          <a:xfrm>
-            <a:off x="8357616" y="2560320"/>
-            <a:ext cx="2971800" cy="2697480"/>
-          </a:xfrm>
-          <a:prstGeom prst="rect">
-            <a:avLst/>
-          </a:prstGeom>
-          <a:noFill/>
-        </p:spPr>
-        <p:txBody>
-          <a:bodyPr wrap="square" lIns="0" rIns="0" tIns="0" bIns="0" anchor="t">
-            <a:spAutoFit/>
-          </a:bodyPr>
-          <a:lstStyle/>
-          <a:p>
-            <a:pPr algn="l">
-              <a:lnSpc>
-                <a:spcPct val="115000"/>
-              </a:lnSpc>
-              <a:spcAft>
-                <a:spcPts val="800"/>
-              </a:spcAft>
-            </a:pPr>
-            <a:r>
-              <a:rPr sz="1400" b="0">
-                <a:solidFill>
-                  <a:srgbClr val="94A3B8"/>
-                </a:solidFill>
-                <a:latin typeface="Helvetica Neue"/>
-              </a:rPr>
-              <a:t>3 engineers + part-time designer &amp; PM</a:t>
-            </a:r>
-          </a:p>
-          <a:p>
-            <a:pPr algn="l">
-              <a:lnSpc>
-                <a:spcPct val="115000"/>
-              </a:lnSpc>
-              <a:spcAft>
-                <a:spcPts val="800"/>
-              </a:spcAft>
-            </a:pPr>
-            <a:r>
-              <a:rPr sz="1400" b="0">
-                <a:solidFill>
-                  <a:srgbClr val="94A3B8"/>
-                </a:solidFill>
-                <a:latin typeface="Helvetica Neue"/>
-              </a:rPr>
-              <a:t>~3 months to production MVP</a:t>
-            </a:r>
-          </a:p>
-          <a:p>
-            <a:pPr algn="l">
-              <a:lnSpc>
-                <a:spcPct val="115000"/>
-              </a:lnSpc>
-              <a:spcAft>
-                <a:spcPts val="800"/>
-              </a:spcAft>
-            </a:pPr>
-            <a:r>
-              <a:rPr sz="1400" b="0">
-                <a:solidFill>
-                  <a:srgbClr val="94A3B8"/>
-                </a:solidFill>
-                <a:latin typeface="Helvetica Neue"/>
-              </a:rPr>
-              <a:t>~$90–110K (salaries, LLM, hosting)</a:t>
-            </a:r>
-          </a:p>
-          <a:p>
-            <a:pPr algn="l">
-              <a:lnSpc>
-                <a:spcPct val="115000"/>
-              </a:lnSpc>
-            </a:pPr>
-            <a:r>
-              <a:rPr sz="1400" b="0">
-                <a:solidFill>
-                  <a:srgbClr val="94A3B8"/>
-                </a:solidFill>
-                <a:latin typeface="Helvetica Neue"/>
-              </a:rPr>
-              <a:t>Illustrative ARR: 100 customers × 30 agents × $8 × 12 ≈ $288K</a:t>
-            </a:r>
-          </a:p>
-        </p:txBody>
-      </p:sp>
-      <p:sp>
-        <p:nvSpPr>
-          <p:cNvPr id="17" name="Rounded Rectangle 16"/>
+              <a:t>✓  Change note shows blast radius</a:t>
+            </a:r>
+          </a:p>
+        </p:txBody>
+      </p:sp>
+      <p:sp>
+        <p:nvSpPr>
+          <p:cNvPr id="20" name="Rounded Rectangle 19"/>
           <p:cNvSpPr/>
           <p:nvPr/>
         </p:nvSpPr>
         <p:spPr>
           <a:xfrm>
-            <a:off x="640080" y="5715000"/>
-            <a:ext cx="1371600" cy="274320"/>
+            <a:off x="7955280" y="5715000"/>
+            <a:ext cx="3474720" cy="502920"/>
           </a:xfrm>
           <a:prstGeom prst="roundRect">
             <a:avLst>
-              <a:gd name="adj" fmla="val 50000"/>
+              <a:gd name="adj" fmla="val 6000"/>
             </a:avLst>
           </a:prstGeom>
           <a:solidFill>
-            <a:srgbClr val="0B1120"/>
+            <a:srgbClr val="151E32"/>
           </a:solidFill>
           <a:ln w="12700">
             <a:solidFill>
-              <a:srgbClr val="FBBF24"/>
+              <a:srgbClr val="2DD4BF"/>
             </a:solidFill>
           </a:ln>
           <a:effectLst/>
@@ -5451,78 +5620,39 @@
       </p:sp>
       <p:sp>
         <p:nvSpPr>
-          <p:cNvPr id="18" name="TextBox 17"/>
-          <p:cNvSpPr txBox="1"/>
-          <p:nvPr/>
-        </p:nvSpPr>
-        <p:spPr>
-          <a:xfrm>
-            <a:off x="640080" y="5756148"/>
-            <a:ext cx="1371600" cy="228600"/>
-          </a:xfrm>
-          <a:prstGeom prst="rect">
-            <a:avLst/>
-          </a:prstGeom>
-          <a:noFill/>
-        </p:spPr>
-        <p:txBody>
-          <a:bodyPr wrap="square" lIns="0" rIns="0" tIns="0" bIns="0" anchor="t">
-            <a:spAutoFit/>
-          </a:bodyPr>
-          <a:lstStyle/>
-          <a:p>
-            <a:pPr algn="ctr">
+          <p:cNvPr id="21" name="TextBox 20"/>
+          <p:cNvSpPr txBox="1"/>
+          <p:nvPr/>
+        </p:nvSpPr>
+        <p:spPr>
+          <a:xfrm>
+            <a:off x="8138160" y="5852160"/>
+            <a:ext cx="3108960" cy="274320"/>
+          </a:xfrm>
+          <a:prstGeom prst="rect">
+            <a:avLst/>
+          </a:prstGeom>
+          <a:noFill/>
+        </p:spPr>
+        <p:txBody>
+          <a:bodyPr wrap="square" lIns="0" rIns="0" tIns="0" bIns="0" anchor="t">
+            <a:spAutoFit/>
+          </a:bodyPr>
+          <a:lstStyle/>
+          <a:p>
+            <a:pPr algn="l">
               <a:lnSpc>
                 <a:spcPct val="115000"/>
               </a:lnSpc>
             </a:pPr>
             <a:r>
-              <a:rPr sz="1000" b="1">
-                <a:solidFill>
-                  <a:srgbClr val="FBBF24"/>
-                </a:solidFill>
-                <a:latin typeface="Helvetica Neue"/>
-              </a:rPr>
-              <a:t>ASSUMPTIONS</a:t>
-            </a:r>
-          </a:p>
-        </p:txBody>
-      </p:sp>
-      <p:sp>
-        <p:nvSpPr>
-          <p:cNvPr id="19" name="TextBox 18"/>
-          <p:cNvSpPr txBox="1"/>
-          <p:nvPr/>
-        </p:nvSpPr>
-        <p:spPr>
-          <a:xfrm>
-            <a:off x="2148840" y="5751576"/>
-            <a:ext cx="9144000" cy="320040"/>
-          </a:xfrm>
-          <a:prstGeom prst="rect">
-            <a:avLst/>
-          </a:prstGeom>
-          <a:noFill/>
-        </p:spPr>
-        <p:txBody>
-          <a:bodyPr wrap="square" lIns="0" rIns="0" tIns="0" bIns="0" anchor="t">
-            <a:spAutoFit/>
-          </a:bodyPr>
-          <a:lstStyle/>
-          <a:p>
-            <a:pPr algn="l">
-              <a:lnSpc>
-                <a:spcPct val="115000"/>
-              </a:lnSpc>
-            </a:pPr>
-            <a:r>
-              <a:rPr sz="1200" b="0">
-                <a:solidFill>
-                  <a:srgbClr val="94A3B8"/>
-                </a:solidFill>
-                <a:latin typeface="Helvetica Neue"/>
-              </a:rPr>
-              <a:t>Prices, costs and ARR are working estimates, to be validated with design partners.</a:t>
+              <a:rPr sz="1200" b="1">
+                <a:solidFill>
+                  <a:srgbClr val="F8FAFC"/>
+                </a:solidFill>
+                <a:latin typeface="Helvetica Neue"/>
+              </a:rPr>
+              <a:t>✓  Every claim cites its evidence</a:t>
             </a:r>
           </a:p>
         </p:txBody>
@@ -5587,7 +5717,7 @@
                 </a:solidFill>
                 <a:latin typeface="Helvetica Neue"/>
               </a:rPr>
-              <a:t>SUCCESS METRICS · 6 MONTHS AFTER LAUNCH</a:t>
+              <a:t>PRICING · GO-TO-MARKET · COST</a:t>
             </a:r>
           </a:p>
         </p:txBody>
@@ -5626,7 +5756,7 @@
                 </a:solidFill>
                 <a:latin typeface="Helvetica Neue"/>
               </a:rPr>
-              <a:t>How we'll know it worked</a:t>
+              <a:t>Business model</a:t>
             </a:r>
           </a:p>
         </p:txBody>
@@ -5672,14 +5802,53 @@
       </p:sp>
       <p:sp>
         <p:nvSpPr>
-          <p:cNvPr id="5" name="Rounded Rectangle 4"/>
+          <p:cNvPr id="5" name="TextBox 4"/>
+          <p:cNvSpPr txBox="1"/>
+          <p:nvPr/>
+        </p:nvSpPr>
+        <p:spPr>
+          <a:xfrm>
+            <a:off x="640080" y="1600200"/>
+            <a:ext cx="10881360" cy="274320"/>
+          </a:xfrm>
+          <a:prstGeom prst="rect">
+            <a:avLst/>
+          </a:prstGeom>
+          <a:noFill/>
+        </p:spPr>
+        <p:txBody>
+          <a:bodyPr wrap="square" lIns="0" rIns="0" tIns="0" bIns="0" anchor="t">
+            <a:spAutoFit/>
+          </a:bodyPr>
+          <a:lstStyle/>
+          <a:p>
+            <a:pPr algn="l">
+              <a:lnSpc>
+                <a:spcPct val="115000"/>
+              </a:lnSpc>
+            </a:pPr>
+            <a:r>
+              <a:rPr sz="1100" b="1">
+                <a:solidFill>
+                  <a:srgbClr val="2DD4BF"/>
+                </a:solidFill>
+                <a:latin typeface="Helvetica Neue"/>
+              </a:rPr>
+              <a:t>PRICING  ·  FRESHWORKS MARKETPLACE ADD-ON FOR FRESHSERVICE PRO &amp; ENTERPRISE</a:t>
+            </a:r>
+          </a:p>
+        </p:txBody>
+      </p:sp>
+      <p:sp>
+        <p:nvSpPr>
+          <p:cNvPr id="6" name="Rounded Rectangle 5"/>
           <p:cNvSpPr/>
           <p:nvPr/>
         </p:nvSpPr>
         <p:spPr>
           <a:xfrm>
-            <a:off x="640080" y="2011680"/>
-            <a:ext cx="2560320" cy="2926080"/>
+            <a:off x="640080" y="1874519"/>
+            <a:ext cx="3474720" cy="1737360"/>
           </a:xfrm>
           <a:prstGeom prst="roundRect">
             <a:avLst>
@@ -5720,92 +5889,656 @@
       </p:sp>
       <p:sp>
         <p:nvSpPr>
-          <p:cNvPr id="6" name="TextBox 5"/>
-          <p:cNvSpPr txBox="1"/>
-          <p:nvPr/>
-        </p:nvSpPr>
-        <p:spPr>
-          <a:xfrm>
-            <a:off x="640080" y="2560320"/>
-            <a:ext cx="2560320" cy="914400"/>
-          </a:xfrm>
-          <a:prstGeom prst="rect">
-            <a:avLst/>
-          </a:prstGeom>
-          <a:noFill/>
-        </p:spPr>
-        <p:txBody>
-          <a:bodyPr wrap="square" lIns="0" rIns="0" tIns="0" bIns="0" anchor="t">
-            <a:spAutoFit/>
-          </a:bodyPr>
-          <a:lstStyle/>
-          <a:p>
-            <a:pPr algn="ctr">
+          <p:cNvPr id="7" name="TextBox 6"/>
+          <p:cNvSpPr txBox="1"/>
+          <p:nvPr/>
+        </p:nvSpPr>
+        <p:spPr>
+          <a:xfrm>
+            <a:off x="868680" y="2039111"/>
+            <a:ext cx="3017520" cy="228600"/>
+          </a:xfrm>
+          <a:prstGeom prst="rect">
+            <a:avLst/>
+          </a:prstGeom>
+          <a:noFill/>
+        </p:spPr>
+        <p:txBody>
+          <a:bodyPr wrap="square" lIns="0" rIns="0" tIns="0" bIns="0" anchor="t">
+            <a:spAutoFit/>
+          </a:bodyPr>
+          <a:lstStyle/>
+          <a:p>
+            <a:pPr algn="l">
               <a:lnSpc>
                 <a:spcPct val="115000"/>
               </a:lnSpc>
             </a:pPr>
             <a:r>
-              <a:rPr sz="4800" b="1">
+              <a:rPr sz="1100" b="1">
+                <a:solidFill>
+                  <a:srgbClr val="94A3B8"/>
+                </a:solidFill>
+                <a:latin typeface="Helvetica Neue"/>
+              </a:rPr>
+              <a:t>FREE</a:t>
+            </a:r>
+          </a:p>
+        </p:txBody>
+      </p:sp>
+      <p:sp>
+        <p:nvSpPr>
+          <p:cNvPr id="8" name="TextBox 7"/>
+          <p:cNvSpPr txBox="1"/>
+          <p:nvPr/>
+        </p:nvSpPr>
+        <p:spPr>
+          <a:xfrm>
+            <a:off x="868680" y="2258567"/>
+            <a:ext cx="3017520" cy="411480"/>
+          </a:xfrm>
+          <a:prstGeom prst="rect">
+            <a:avLst/>
+          </a:prstGeom>
+          <a:noFill/>
+        </p:spPr>
+        <p:txBody>
+          <a:bodyPr wrap="square" lIns="0" rIns="0" tIns="0" bIns="0" anchor="t">
+            <a:spAutoFit/>
+          </a:bodyPr>
+          <a:lstStyle/>
+          <a:p>
+            <a:pPr algn="l">
+              <a:lnSpc>
+                <a:spcPct val="115000"/>
+              </a:lnSpc>
+            </a:pPr>
+            <a:r>
+              <a:rPr sz="2200" b="1">
+                <a:solidFill>
+                  <a:srgbClr val="F8FAFC"/>
+                </a:solidFill>
+                <a:latin typeface="Helvetica Neue"/>
+              </a:rPr>
+              <a:t>Free</a:t>
+            </a:r>
+          </a:p>
+        </p:txBody>
+      </p:sp>
+      <p:sp>
+        <p:nvSpPr>
+          <p:cNvPr id="9" name="TextBox 8"/>
+          <p:cNvSpPr txBox="1"/>
+          <p:nvPr/>
+        </p:nvSpPr>
+        <p:spPr>
+          <a:xfrm>
+            <a:off x="868680" y="2788919"/>
+            <a:ext cx="3017520" cy="777240"/>
+          </a:xfrm>
+          <a:prstGeom prst="rect">
+            <a:avLst/>
+          </a:prstGeom>
+          <a:noFill/>
+        </p:spPr>
+        <p:txBody>
+          <a:bodyPr wrap="square" lIns="0" rIns="0" tIns="0" bIns="0" anchor="t">
+            <a:spAutoFit/>
+          </a:bodyPr>
+          <a:lstStyle/>
+          <a:p>
+            <a:pPr algn="l">
+              <a:lnSpc>
+                <a:spcPct val="105000"/>
+              </a:lnSpc>
+              <a:spcAft>
+                <a:spcPts val="800"/>
+              </a:spcAft>
+            </a:pPr>
+            <a:r>
+              <a:rPr sz="1200" b="1">
+                <a:solidFill>
+                  <a:srgbClr val="94A3B8"/>
+                </a:solidFill>
+                <a:latin typeface="Helvetica Neue"/>
+              </a:rPr>
+              <a:t>•  </a:t>
+            </a:r>
+            <a:r>
+              <a:rPr sz="1200" b="0">
+                <a:solidFill>
+                  <a:srgbClr val="94A3B8"/>
+                </a:solidFill>
+                <a:latin typeface="Helvetica Neue"/>
+              </a:rPr>
+              <a:t>Knowledge graph explorer</a:t>
+            </a:r>
+          </a:p>
+          <a:p>
+            <a:pPr algn="l">
+              <a:lnSpc>
+                <a:spcPct val="105000"/>
+              </a:lnSpc>
+              <a:spcAft>
+                <a:spcPts val="800"/>
+              </a:spcAft>
+            </a:pPr>
+            <a:r>
+              <a:rPr sz="1200" b="1">
+                <a:solidFill>
+                  <a:srgbClr val="94A3B8"/>
+                </a:solidFill>
+                <a:latin typeface="Helvetica Neue"/>
+              </a:rPr>
+              <a:t>•  </a:t>
+            </a:r>
+            <a:r>
+              <a:rPr sz="1200" b="0">
+                <a:solidFill>
+                  <a:srgbClr val="94A3B8"/>
+                </a:solidFill>
+                <a:latin typeface="Helvetica Neue"/>
+              </a:rPr>
+              <a:t>Manual AI Diagnose, 25 tickets / month</a:t>
+            </a:r>
+          </a:p>
+          <a:p>
+            <a:pPr algn="l">
+              <a:lnSpc>
+                <a:spcPct val="105000"/>
+              </a:lnSpc>
+            </a:pPr>
+            <a:r>
+              <a:rPr sz="1200" b="1">
+                <a:solidFill>
+                  <a:srgbClr val="94A3B8"/>
+                </a:solidFill>
+                <a:latin typeface="Helvetica Neue"/>
+              </a:rPr>
+              <a:t>•  </a:t>
+            </a:r>
+            <a:r>
+              <a:rPr sz="1200" b="0">
+                <a:solidFill>
+                  <a:srgbClr val="94A3B8"/>
+                </a:solidFill>
+                <a:latin typeface="Helvetica Neue"/>
+              </a:rPr>
+              <a:t>Gets the graph into Freshservice</a:t>
+            </a:r>
+          </a:p>
+        </p:txBody>
+      </p:sp>
+      <p:sp>
+        <p:nvSpPr>
+          <p:cNvPr id="10" name="Rounded Rectangle 9"/>
+          <p:cNvSpPr/>
+          <p:nvPr/>
+        </p:nvSpPr>
+        <p:spPr>
+          <a:xfrm>
+            <a:off x="4343400" y="1874519"/>
+            <a:ext cx="3474720" cy="1737360"/>
+          </a:xfrm>
+          <a:prstGeom prst="roundRect">
+            <a:avLst>
+              <a:gd name="adj" fmla="val 6000"/>
+            </a:avLst>
+          </a:prstGeom>
+          <a:solidFill>
+            <a:srgbClr val="151E32"/>
+          </a:solidFill>
+          <a:ln w="12700">
+            <a:solidFill>
+              <a:srgbClr val="2DD4BF"/>
+            </a:solidFill>
+          </a:ln>
+          <a:effectLst/>
+        </p:spPr>
+        <p:style>
+          <a:lnRef idx="1">
+            <a:schemeClr val="accent1"/>
+          </a:lnRef>
+          <a:fillRef idx="3">
+            <a:schemeClr val="accent1"/>
+          </a:fillRef>
+          <a:effectRef idx="2">
+            <a:schemeClr val="accent1"/>
+          </a:effectRef>
+          <a:fontRef idx="minor">
+            <a:schemeClr val="lt1"/>
+          </a:fontRef>
+        </p:style>
+        <p:txBody>
+          <a:bodyPr rtlCol="0" anchor="ctr"/>
+          <a:lstStyle/>
+          <a:p>
+            <a:pPr algn="ctr"/>
+          </a:p>
+        </p:txBody>
+      </p:sp>
+      <p:sp>
+        <p:nvSpPr>
+          <p:cNvPr id="11" name="TextBox 10"/>
+          <p:cNvSpPr txBox="1"/>
+          <p:nvPr/>
+        </p:nvSpPr>
+        <p:spPr>
+          <a:xfrm>
+            <a:off x="4572000" y="2039111"/>
+            <a:ext cx="3017520" cy="228600"/>
+          </a:xfrm>
+          <a:prstGeom prst="rect">
+            <a:avLst/>
+          </a:prstGeom>
+          <a:noFill/>
+        </p:spPr>
+        <p:txBody>
+          <a:bodyPr wrap="square" lIns="0" rIns="0" tIns="0" bIns="0" anchor="t">
+            <a:spAutoFit/>
+          </a:bodyPr>
+          <a:lstStyle/>
+          <a:p>
+            <a:pPr algn="l">
+              <a:lnSpc>
+                <a:spcPct val="115000"/>
+              </a:lnSpc>
+            </a:pPr>
+            <a:r>
+              <a:rPr sz="1100" b="1">
                 <a:solidFill>
                   <a:srgbClr val="2DD4BF"/>
                 </a:solidFill>
                 <a:latin typeface="Helvetica Neue"/>
               </a:rPr>
-              <a:t>−25%</a:t>
-            </a:r>
-          </a:p>
-        </p:txBody>
-      </p:sp>
-      <p:sp>
-        <p:nvSpPr>
-          <p:cNvPr id="7" name="TextBox 6"/>
-          <p:cNvSpPr txBox="1"/>
-          <p:nvPr/>
-        </p:nvSpPr>
-        <p:spPr>
-          <a:xfrm>
-            <a:off x="868680" y="3749039"/>
-            <a:ext cx="2103120" cy="914400"/>
-          </a:xfrm>
-          <a:prstGeom prst="rect">
-            <a:avLst/>
-          </a:prstGeom>
-          <a:noFill/>
-        </p:spPr>
-        <p:txBody>
-          <a:bodyPr wrap="square" lIns="0" rIns="0" tIns="0" bIns="0" anchor="t">
-            <a:spAutoFit/>
-          </a:bodyPr>
-          <a:lstStyle/>
-          <a:p>
-            <a:pPr algn="ctr">
+              <a:t>PRO</a:t>
+            </a:r>
+          </a:p>
+        </p:txBody>
+      </p:sp>
+      <p:sp>
+        <p:nvSpPr>
+          <p:cNvPr id="12" name="TextBox 11"/>
+          <p:cNvSpPr txBox="1"/>
+          <p:nvPr/>
+        </p:nvSpPr>
+        <p:spPr>
+          <a:xfrm>
+            <a:off x="4572000" y="2258567"/>
+            <a:ext cx="3017520" cy="411480"/>
+          </a:xfrm>
+          <a:prstGeom prst="rect">
+            <a:avLst/>
+          </a:prstGeom>
+          <a:noFill/>
+        </p:spPr>
+        <p:txBody>
+          <a:bodyPr wrap="square" lIns="0" rIns="0" tIns="0" bIns="0" anchor="t">
+            <a:spAutoFit/>
+          </a:bodyPr>
+          <a:lstStyle/>
+          <a:p>
+            <a:pPr algn="l">
               <a:lnSpc>
                 <a:spcPct val="115000"/>
               </a:lnSpc>
             </a:pPr>
             <a:r>
-              <a:rPr sz="1500" b="0">
+              <a:rPr sz="2200" b="1">
                 <a:solidFill>
                   <a:srgbClr val="F8FAFC"/>
                 </a:solidFill>
                 <a:latin typeface="Helvetica Neue"/>
               </a:rPr>
-              <a:t>MTTR on diagnosed incidents</a:t>
-            </a:r>
-          </a:p>
-        </p:txBody>
-      </p:sp>
-      <p:sp>
-        <p:nvSpPr>
-          <p:cNvPr id="8" name="Rounded Rectangle 7"/>
+              <a:t>$8 / agent / month</a:t>
+            </a:r>
+          </a:p>
+        </p:txBody>
+      </p:sp>
+      <p:sp>
+        <p:nvSpPr>
+          <p:cNvPr id="13" name="TextBox 12"/>
+          <p:cNvSpPr txBox="1"/>
+          <p:nvPr/>
+        </p:nvSpPr>
+        <p:spPr>
+          <a:xfrm>
+            <a:off x="4572000" y="2788919"/>
+            <a:ext cx="3017520" cy="777240"/>
+          </a:xfrm>
+          <a:prstGeom prst="rect">
+            <a:avLst/>
+          </a:prstGeom>
+          <a:noFill/>
+        </p:spPr>
+        <p:txBody>
+          <a:bodyPr wrap="square" lIns="0" rIns="0" tIns="0" bIns="0" anchor="t">
+            <a:spAutoFit/>
+          </a:bodyPr>
+          <a:lstStyle/>
+          <a:p>
+            <a:pPr algn="l">
+              <a:lnSpc>
+                <a:spcPct val="105000"/>
+              </a:lnSpc>
+              <a:spcAft>
+                <a:spcPts val="800"/>
+              </a:spcAft>
+            </a:pPr>
+            <a:r>
+              <a:rPr sz="1200" b="1">
+                <a:solidFill>
+                  <a:srgbClr val="2DD4BF"/>
+                </a:solidFill>
+                <a:latin typeface="Helvetica Neue"/>
+              </a:rPr>
+              <a:t>•  </a:t>
+            </a:r>
+            <a:r>
+              <a:rPr sz="1200" b="0">
+                <a:solidFill>
+                  <a:srgbClr val="94A3B8"/>
+                </a:solidFill>
+                <a:latin typeface="Helvetica Neue"/>
+              </a:rPr>
+              <a:t>Auto-diagnosis on every new ticket</a:t>
+            </a:r>
+          </a:p>
+          <a:p>
+            <a:pPr algn="l">
+              <a:lnSpc>
+                <a:spcPct val="105000"/>
+              </a:lnSpc>
+              <a:spcAft>
+                <a:spcPts val="800"/>
+              </a:spcAft>
+            </a:pPr>
+            <a:r>
+              <a:rPr sz="1200" b="1">
+                <a:solidFill>
+                  <a:srgbClr val="2DD4BF"/>
+                </a:solidFill>
+                <a:latin typeface="Helvetica Neue"/>
+              </a:rPr>
+              <a:t>•  </a:t>
+            </a:r>
+            <a:r>
+              <a:rPr sz="1200" b="0">
+                <a:solidFill>
+                  <a:srgbClr val="94A3B8"/>
+                </a:solidFill>
+                <a:latin typeface="Helvetica Neue"/>
+              </a:rPr>
+              <a:t>Auto-routing to the right group</a:t>
+            </a:r>
+          </a:p>
+          <a:p>
+            <a:pPr algn="l">
+              <a:lnSpc>
+                <a:spcPct val="105000"/>
+              </a:lnSpc>
+            </a:pPr>
+            <a:r>
+              <a:rPr sz="1200" b="1">
+                <a:solidFill>
+                  <a:srgbClr val="2DD4BF"/>
+                </a:solidFill>
+                <a:latin typeface="Helvetica Neue"/>
+              </a:rPr>
+              <a:t>•  </a:t>
+            </a:r>
+            <a:r>
+              <a:rPr sz="1200" b="0">
+                <a:solidFill>
+                  <a:srgbClr val="94A3B8"/>
+                </a:solidFill>
+                <a:latin typeface="Helvetica Neue"/>
+              </a:rPr>
+              <a:t>30-day free trial</a:t>
+            </a:r>
+          </a:p>
+        </p:txBody>
+      </p:sp>
+      <p:sp>
+        <p:nvSpPr>
+          <p:cNvPr id="14" name="Rounded Rectangle 13"/>
           <p:cNvSpPr/>
           <p:nvPr/>
         </p:nvSpPr>
         <p:spPr>
           <a:xfrm>
-            <a:off x="3410712" y="2011680"/>
-            <a:ext cx="2560320" cy="2926080"/>
+            <a:off x="8046720" y="1874519"/>
+            <a:ext cx="3474720" cy="1737360"/>
+          </a:xfrm>
+          <a:prstGeom prst="roundRect">
+            <a:avLst>
+              <a:gd name="adj" fmla="val 6000"/>
+            </a:avLst>
+          </a:prstGeom>
+          <a:solidFill>
+            <a:srgbClr val="151E32"/>
+          </a:solidFill>
+          <a:ln w="12700">
+            <a:solidFill>
+              <a:srgbClr val="FBBF24"/>
+            </a:solidFill>
+          </a:ln>
+          <a:effectLst/>
+        </p:spPr>
+        <p:style>
+          <a:lnRef idx="1">
+            <a:schemeClr val="accent1"/>
+          </a:lnRef>
+          <a:fillRef idx="3">
+            <a:schemeClr val="accent1"/>
+          </a:fillRef>
+          <a:effectRef idx="2">
+            <a:schemeClr val="accent1"/>
+          </a:effectRef>
+          <a:fontRef idx="minor">
+            <a:schemeClr val="lt1"/>
+          </a:fontRef>
+        </p:style>
+        <p:txBody>
+          <a:bodyPr rtlCol="0" anchor="ctr"/>
+          <a:lstStyle/>
+          <a:p>
+            <a:pPr algn="ctr"/>
+          </a:p>
+        </p:txBody>
+      </p:sp>
+      <p:sp>
+        <p:nvSpPr>
+          <p:cNvPr id="15" name="TextBox 14"/>
+          <p:cNvSpPr txBox="1"/>
+          <p:nvPr/>
+        </p:nvSpPr>
+        <p:spPr>
+          <a:xfrm>
+            <a:off x="8275320" y="2039111"/>
+            <a:ext cx="3017520" cy="228600"/>
+          </a:xfrm>
+          <a:prstGeom prst="rect">
+            <a:avLst/>
+          </a:prstGeom>
+          <a:noFill/>
+        </p:spPr>
+        <p:txBody>
+          <a:bodyPr wrap="square" lIns="0" rIns="0" tIns="0" bIns="0" anchor="t">
+            <a:spAutoFit/>
+          </a:bodyPr>
+          <a:lstStyle/>
+          <a:p>
+            <a:pPr algn="l">
+              <a:lnSpc>
+                <a:spcPct val="115000"/>
+              </a:lnSpc>
+            </a:pPr>
+            <a:r>
+              <a:rPr sz="1100" b="1">
+                <a:solidFill>
+                  <a:srgbClr val="FBBF24"/>
+                </a:solidFill>
+                <a:latin typeface="Helvetica Neue"/>
+              </a:rPr>
+              <a:t>ENTERPRISE  ·  LATER</a:t>
+            </a:r>
+          </a:p>
+        </p:txBody>
+      </p:sp>
+      <p:sp>
+        <p:nvSpPr>
+          <p:cNvPr id="16" name="TextBox 15"/>
+          <p:cNvSpPr txBox="1"/>
+          <p:nvPr/>
+        </p:nvSpPr>
+        <p:spPr>
+          <a:xfrm>
+            <a:off x="8275320" y="2258567"/>
+            <a:ext cx="3017520" cy="411480"/>
+          </a:xfrm>
+          <a:prstGeom prst="rect">
+            <a:avLst/>
+          </a:prstGeom>
+          <a:noFill/>
+        </p:spPr>
+        <p:txBody>
+          <a:bodyPr wrap="square" lIns="0" rIns="0" tIns="0" bIns="0" anchor="t">
+            <a:spAutoFit/>
+          </a:bodyPr>
+          <a:lstStyle/>
+          <a:p>
+            <a:pPr algn="l">
+              <a:lnSpc>
+                <a:spcPct val="115000"/>
+              </a:lnSpc>
+            </a:pPr>
+            <a:r>
+              <a:rPr sz="2200" b="1">
+                <a:solidFill>
+                  <a:srgbClr val="F8FAFC"/>
+                </a:solidFill>
+                <a:latin typeface="Helvetica Neue"/>
+              </a:rPr>
+              <a:t>Custom</a:t>
+            </a:r>
+          </a:p>
+        </p:txBody>
+      </p:sp>
+      <p:sp>
+        <p:nvSpPr>
+          <p:cNvPr id="17" name="TextBox 16"/>
+          <p:cNvSpPr txBox="1"/>
+          <p:nvPr/>
+        </p:nvSpPr>
+        <p:spPr>
+          <a:xfrm>
+            <a:off x="8275320" y="2788919"/>
+            <a:ext cx="3017520" cy="777240"/>
+          </a:xfrm>
+          <a:prstGeom prst="rect">
+            <a:avLst/>
+          </a:prstGeom>
+          <a:noFill/>
+        </p:spPr>
+        <p:txBody>
+          <a:bodyPr wrap="square" lIns="0" rIns="0" tIns="0" bIns="0" anchor="t">
+            <a:spAutoFit/>
+          </a:bodyPr>
+          <a:lstStyle/>
+          <a:p>
+            <a:pPr algn="l">
+              <a:lnSpc>
+                <a:spcPct val="105000"/>
+              </a:lnSpc>
+              <a:spcAft>
+                <a:spcPts val="800"/>
+              </a:spcAft>
+            </a:pPr>
+            <a:r>
+              <a:rPr sz="1200" b="1">
+                <a:solidFill>
+                  <a:srgbClr val="FBBF24"/>
+                </a:solidFill>
+                <a:latin typeface="Helvetica Neue"/>
+              </a:rPr>
+              <a:t>•  </a:t>
+            </a:r>
+            <a:r>
+              <a:rPr sz="1200" b="0">
+                <a:solidFill>
+                  <a:srgbClr val="94A3B8"/>
+                </a:solidFill>
+                <a:latin typeface="Helvetica Neue"/>
+              </a:rPr>
+              <a:t>Change blast radius &amp; CAB reviewers</a:t>
+            </a:r>
+          </a:p>
+          <a:p>
+            <a:pPr algn="l">
+              <a:lnSpc>
+                <a:spcPct val="105000"/>
+              </a:lnSpc>
+              <a:spcAft>
+                <a:spcPts val="800"/>
+              </a:spcAft>
+            </a:pPr>
+            <a:r>
+              <a:rPr sz="1200" b="1">
+                <a:solidFill>
+                  <a:srgbClr val="FBBF24"/>
+                </a:solidFill>
+                <a:latin typeface="Helvetica Neue"/>
+              </a:rPr>
+              <a:t>•  </a:t>
+            </a:r>
+            <a:r>
+              <a:rPr sz="1200" b="0">
+                <a:solidFill>
+                  <a:srgbClr val="94A3B8"/>
+                </a:solidFill>
+                <a:latin typeface="Helvetica Neue"/>
+              </a:rPr>
+              <a:t>Jira · Confluence · Slack connectors</a:t>
+            </a:r>
+          </a:p>
+          <a:p>
+            <a:pPr algn="l">
+              <a:lnSpc>
+                <a:spcPct val="105000"/>
+              </a:lnSpc>
+            </a:pPr>
+            <a:r>
+              <a:rPr sz="1200" b="1">
+                <a:solidFill>
+                  <a:srgbClr val="FBBF24"/>
+                </a:solidFill>
+                <a:latin typeface="Helvetica Neue"/>
+              </a:rPr>
+              <a:t>•  </a:t>
+            </a:r>
+            <a:r>
+              <a:rPr sz="1200" b="0">
+                <a:solidFill>
+                  <a:srgbClr val="94A3B8"/>
+                </a:solidFill>
+                <a:latin typeface="Helvetica Neue"/>
+              </a:rPr>
+              <a:t>CMDB sync on eligible plans</a:t>
+            </a:r>
+          </a:p>
+        </p:txBody>
+      </p:sp>
+      <p:sp>
+        <p:nvSpPr>
+          <p:cNvPr id="18" name="Rounded Rectangle 17"/>
+          <p:cNvSpPr/>
+          <p:nvPr/>
+        </p:nvSpPr>
+        <p:spPr>
+          <a:xfrm>
+            <a:off x="640080" y="3840480"/>
+            <a:ext cx="6446520" cy="2103120"/>
           </a:xfrm>
           <a:prstGeom prst="roundRect">
             <a:avLst>
@@ -5846,92 +6579,229 @@
       </p:sp>
       <p:sp>
         <p:nvSpPr>
-          <p:cNvPr id="9" name="TextBox 8"/>
-          <p:cNvSpPr txBox="1"/>
-          <p:nvPr/>
-        </p:nvSpPr>
-        <p:spPr>
-          <a:xfrm>
-            <a:off x="3410712" y="2560320"/>
-            <a:ext cx="2560320" cy="914400"/>
-          </a:xfrm>
-          <a:prstGeom prst="rect">
-            <a:avLst/>
-          </a:prstGeom>
-          <a:noFill/>
-        </p:spPr>
-        <p:txBody>
-          <a:bodyPr wrap="square" lIns="0" rIns="0" tIns="0" bIns="0" anchor="t">
-            <a:spAutoFit/>
-          </a:bodyPr>
-          <a:lstStyle/>
-          <a:p>
-            <a:pPr algn="ctr">
+          <p:cNvPr id="19" name="Rectangle 18"/>
+          <p:cNvSpPr/>
+          <p:nvPr/>
+        </p:nvSpPr>
+        <p:spPr>
+          <a:xfrm>
+            <a:off x="640080" y="4069080"/>
+            <a:ext cx="54864" cy="365760"/>
+          </a:xfrm>
+          <a:prstGeom prst="rect">
+            <a:avLst/>
+          </a:prstGeom>
+          <a:solidFill>
+            <a:srgbClr val="818CF8"/>
+          </a:solidFill>
+          <a:ln>
+            <a:noFill/>
+          </a:ln>
+          <a:effectLst/>
+        </p:spPr>
+        <p:style>
+          <a:lnRef idx="1">
+            <a:schemeClr val="accent1"/>
+          </a:lnRef>
+          <a:fillRef idx="3">
+            <a:schemeClr val="accent1"/>
+          </a:fillRef>
+          <a:effectRef idx="2">
+            <a:schemeClr val="accent1"/>
+          </a:effectRef>
+          <a:fontRef idx="minor">
+            <a:schemeClr val="lt1"/>
+          </a:fontRef>
+        </p:style>
+        <p:txBody>
+          <a:bodyPr rtlCol="0" anchor="ctr"/>
+          <a:lstStyle/>
+          <a:p>
+            <a:pPr algn="ctr"/>
+          </a:p>
+        </p:txBody>
+      </p:sp>
+      <p:sp>
+        <p:nvSpPr>
+          <p:cNvPr id="20" name="TextBox 19"/>
+          <p:cNvSpPr txBox="1"/>
+          <p:nvPr/>
+        </p:nvSpPr>
+        <p:spPr>
+          <a:xfrm>
+            <a:off x="914400" y="4041648"/>
+            <a:ext cx="5943600" cy="365760"/>
+          </a:xfrm>
+          <a:prstGeom prst="rect">
+            <a:avLst/>
+          </a:prstGeom>
+          <a:noFill/>
+        </p:spPr>
+        <p:txBody>
+          <a:bodyPr wrap="square" lIns="0" rIns="0" tIns="0" bIns="0" anchor="t">
+            <a:spAutoFit/>
+          </a:bodyPr>
+          <a:lstStyle/>
+          <a:p>
+            <a:pPr algn="l">
               <a:lnSpc>
                 <a:spcPct val="115000"/>
               </a:lnSpc>
             </a:pPr>
             <a:r>
-              <a:rPr sz="4800" b="1">
+              <a:rPr sz="1600" b="1">
+                <a:solidFill>
+                  <a:srgbClr val="F8FAFC"/>
+                </a:solidFill>
+                <a:latin typeface="Helvetica Neue"/>
+              </a:rPr>
+              <a:t>Go-to-market: inside the Freshworks ecosystem</a:t>
+            </a:r>
+          </a:p>
+        </p:txBody>
+      </p:sp>
+      <p:sp>
+        <p:nvSpPr>
+          <p:cNvPr id="21" name="TextBox 20"/>
+          <p:cNvSpPr txBox="1"/>
+          <p:nvPr/>
+        </p:nvSpPr>
+        <p:spPr>
+          <a:xfrm>
+            <a:off x="914400" y="4526280"/>
+            <a:ext cx="5943600" cy="1371600"/>
+          </a:xfrm>
+          <a:prstGeom prst="rect">
+            <a:avLst/>
+          </a:prstGeom>
+          <a:noFill/>
+        </p:spPr>
+        <p:txBody>
+          <a:bodyPr wrap="square" lIns="0" rIns="0" tIns="0" bIns="0" anchor="t">
+            <a:spAutoFit/>
+          </a:bodyPr>
+          <a:lstStyle/>
+          <a:p>
+            <a:pPr algn="l">
+              <a:lnSpc>
+                <a:spcPct val="105000"/>
+              </a:lnSpc>
+              <a:spcAft>
+                <a:spcPts val="800"/>
+              </a:spcAft>
+            </a:pPr>
+            <a:r>
+              <a:rPr sz="1200" b="1">
                 <a:solidFill>
                   <a:srgbClr val="818CF8"/>
                 </a:solidFill>
                 <a:latin typeface="Helvetica Neue"/>
               </a:rPr>
-              <a:t>≥ 80%</a:t>
-            </a:r>
-          </a:p>
-        </p:txBody>
-      </p:sp>
-      <p:sp>
-        <p:nvSpPr>
-          <p:cNvPr id="10" name="TextBox 9"/>
-          <p:cNvSpPr txBox="1"/>
-          <p:nvPr/>
-        </p:nvSpPr>
-        <p:spPr>
-          <a:xfrm>
-            <a:off x="3639312" y="3749039"/>
-            <a:ext cx="2103120" cy="914400"/>
-          </a:xfrm>
-          <a:prstGeom prst="rect">
-            <a:avLst/>
-          </a:prstGeom>
-          <a:noFill/>
-        </p:spPr>
-        <p:txBody>
-          <a:bodyPr wrap="square" lIns="0" rIns="0" tIns="0" bIns="0" anchor="t">
-            <a:spAutoFit/>
-          </a:bodyPr>
-          <a:lstStyle/>
-          <a:p>
-            <a:pPr algn="ctr">
-              <a:lnSpc>
-                <a:spcPct val="115000"/>
-              </a:lnSpc>
-            </a:pPr>
-            <a:r>
-              <a:rPr sz="1500" b="0">
-                <a:solidFill>
-                  <a:srgbClr val="F8FAFC"/>
-                </a:solidFill>
-                <a:latin typeface="Helvetica Neue"/>
-              </a:rPr>
-              <a:t>New incidents auto-diagnosed</a:t>
-            </a:r>
-          </a:p>
-        </p:txBody>
-      </p:sp>
-      <p:sp>
-        <p:nvSpPr>
-          <p:cNvPr id="11" name="Rounded Rectangle 10"/>
+              <a:t>1. Discover   </a:t>
+            </a:r>
+            <a:r>
+              <a:rPr sz="1200" b="0">
+                <a:solidFill>
+                  <a:srgbClr val="94A3B8"/>
+                </a:solidFill>
+                <a:latin typeface="Helvetica Neue"/>
+              </a:rPr>
+              <a:t>Marketplace listing + in-product banner for eligible admins</a:t>
+            </a:r>
+          </a:p>
+          <a:p>
+            <a:pPr algn="l">
+              <a:lnSpc>
+                <a:spcPct val="105000"/>
+              </a:lnSpc>
+              <a:spcAft>
+                <a:spcPts val="800"/>
+              </a:spcAft>
+            </a:pPr>
+            <a:r>
+              <a:rPr sz="1200" b="1">
+                <a:solidFill>
+                  <a:srgbClr val="818CF8"/>
+                </a:solidFill>
+                <a:latin typeface="Helvetica Neue"/>
+              </a:rPr>
+              <a:t>2. Try   </a:t>
+            </a:r>
+            <a:r>
+              <a:rPr sz="1200" b="0">
+                <a:solidFill>
+                  <a:srgbClr val="94A3B8"/>
+                </a:solidFill>
+                <a:latin typeface="Helvetica Neue"/>
+              </a:rPr>
+              <a:t>Connect in 5 minutes: paste API key → Sync → see your graph</a:t>
+            </a:r>
+          </a:p>
+          <a:p>
+            <a:pPr algn="l">
+              <a:lnSpc>
+                <a:spcPct val="105000"/>
+              </a:lnSpc>
+              <a:spcAft>
+                <a:spcPts val="800"/>
+              </a:spcAft>
+            </a:pPr>
+            <a:r>
+              <a:rPr sz="1200" b="1">
+                <a:solidFill>
+                  <a:srgbClr val="818CF8"/>
+                </a:solidFill>
+                <a:latin typeface="Helvetica Neue"/>
+              </a:rPr>
+              <a:t>3. Convert   </a:t>
+            </a:r>
+            <a:r>
+              <a:rPr sz="1200" b="0">
+                <a:solidFill>
+                  <a:srgbClr val="94A3B8"/>
+                </a:solidFill>
+                <a:latin typeface="Helvetica Neue"/>
+              </a:rPr>
+              <a:t>Trial email to Pro/Enterprise admins + "a ticket diagnoses itself" video</a:t>
+            </a:r>
+          </a:p>
+          <a:p>
+            <a:pPr algn="l">
+              <a:lnSpc>
+                <a:spcPct val="105000"/>
+              </a:lnSpc>
+            </a:pPr>
+            <a:r>
+              <a:rPr sz="1200" b="1">
+                <a:solidFill>
+                  <a:srgbClr val="818CF8"/>
+                </a:solidFill>
+                <a:latin typeface="Helvetica Neue"/>
+              </a:rPr>
+              <a:t>4. Prove   </a:t>
+            </a:r>
+            <a:r>
+              <a:rPr sz="1200" b="0">
+                <a:solidFill>
+                  <a:srgbClr val="94A3B8"/>
+                </a:solidFill>
+                <a:latin typeface="Helvetica Neue"/>
+              </a:rPr>
+              <a:t>3–5 design partners, case studies with measured MTTR drop</a:t>
+            </a:r>
+          </a:p>
+        </p:txBody>
+      </p:sp>
+      <p:sp>
+        <p:nvSpPr>
+          <p:cNvPr id="22" name="Rounded Rectangle 21"/>
           <p:cNvSpPr/>
           <p:nvPr/>
         </p:nvSpPr>
         <p:spPr>
           <a:xfrm>
-            <a:off x="6181344" y="2011680"/>
-            <a:ext cx="2560320" cy="2926080"/>
+            <a:off x="7315200" y="3840480"/>
+            <a:ext cx="4206240" cy="2103120"/>
           </a:xfrm>
           <a:prstGeom prst="roundRect">
             <a:avLst>
@@ -5972,105 +6842,23 @@
       </p:sp>
       <p:sp>
         <p:nvSpPr>
-          <p:cNvPr id="12" name="TextBox 11"/>
-          <p:cNvSpPr txBox="1"/>
-          <p:nvPr/>
-        </p:nvSpPr>
-        <p:spPr>
-          <a:xfrm>
-            <a:off x="6181344" y="2560320"/>
-            <a:ext cx="2560320" cy="914400"/>
-          </a:xfrm>
-          <a:prstGeom prst="rect">
-            <a:avLst/>
-          </a:prstGeom>
-          <a:noFill/>
-        </p:spPr>
-        <p:txBody>
-          <a:bodyPr wrap="square" lIns="0" rIns="0" tIns="0" bIns="0" anchor="t">
-            <a:spAutoFit/>
-          </a:bodyPr>
-          <a:lstStyle/>
-          <a:p>
-            <a:pPr algn="ctr">
-              <a:lnSpc>
-                <a:spcPct val="115000"/>
-              </a:lnSpc>
-            </a:pPr>
-            <a:r>
-              <a:rPr sz="4800" b="1">
-                <a:solidFill>
-                  <a:srgbClr val="818CF8"/>
-                </a:solidFill>
-                <a:latin typeface="Helvetica Neue"/>
-              </a:rPr>
-              <a:t>+20%</a:t>
-            </a:r>
-          </a:p>
-        </p:txBody>
-      </p:sp>
-      <p:sp>
-        <p:nvSpPr>
-          <p:cNvPr id="13" name="TextBox 12"/>
-          <p:cNvSpPr txBox="1"/>
-          <p:nvPr/>
-        </p:nvSpPr>
-        <p:spPr>
-          <a:xfrm>
-            <a:off x="6409944" y="3749039"/>
-            <a:ext cx="2103120" cy="914400"/>
-          </a:xfrm>
-          <a:prstGeom prst="rect">
-            <a:avLst/>
-          </a:prstGeom>
-          <a:noFill/>
-        </p:spPr>
-        <p:txBody>
-          <a:bodyPr wrap="square" lIns="0" rIns="0" tIns="0" bIns="0" anchor="t">
-            <a:spAutoFit/>
-          </a:bodyPr>
-          <a:lstStyle/>
-          <a:p>
-            <a:pPr algn="ctr">
-              <a:lnSpc>
-                <a:spcPct val="115000"/>
-              </a:lnSpc>
-            </a:pPr>
-            <a:r>
-              <a:rPr sz="1500" b="0">
-                <a:solidFill>
-                  <a:srgbClr val="F8FAFC"/>
-                </a:solidFill>
-                <a:latin typeface="Helvetica Neue"/>
-              </a:rPr>
-              <a:t>Resolved by first team routed</a:t>
-            </a:r>
-          </a:p>
-        </p:txBody>
-      </p:sp>
-      <p:sp>
-        <p:nvSpPr>
-          <p:cNvPr id="14" name="Rounded Rectangle 13"/>
+          <p:cNvPr id="23" name="Rectangle 22"/>
           <p:cNvSpPr/>
           <p:nvPr/>
         </p:nvSpPr>
         <p:spPr>
           <a:xfrm>
-            <a:off x="8951976" y="2011680"/>
-            <a:ext cx="2560320" cy="2926080"/>
-          </a:xfrm>
-          <a:prstGeom prst="roundRect">
-            <a:avLst>
-              <a:gd name="adj" fmla="val 6000"/>
-            </a:avLst>
+            <a:off x="7315200" y="4069080"/>
+            <a:ext cx="54864" cy="365760"/>
+          </a:xfrm>
+          <a:prstGeom prst="rect">
+            <a:avLst/>
           </a:prstGeom>
           <a:solidFill>
-            <a:srgbClr val="151E32"/>
+            <a:srgbClr val="FBBF24"/>
           </a:solidFill>
-          <a:ln w="12700">
-            <a:solidFill>
-              <a:srgbClr val="2A3650"/>
-            </a:solidFill>
+          <a:ln>
+            <a:noFill/>
           </a:ln>
           <a:effectLst/>
         </p:spPr>
@@ -6098,92 +6886,213 @@
       </p:sp>
       <p:sp>
         <p:nvSpPr>
-          <p:cNvPr id="15" name="TextBox 14"/>
-          <p:cNvSpPr txBox="1"/>
-          <p:nvPr/>
-        </p:nvSpPr>
-        <p:spPr>
-          <a:xfrm>
-            <a:off x="8951976" y="2560320"/>
-            <a:ext cx="2560320" cy="914400"/>
-          </a:xfrm>
-          <a:prstGeom prst="rect">
-            <a:avLst/>
-          </a:prstGeom>
-          <a:noFill/>
-        </p:spPr>
-        <p:txBody>
-          <a:bodyPr wrap="square" lIns="0" rIns="0" tIns="0" bIns="0" anchor="t">
-            <a:spAutoFit/>
-          </a:bodyPr>
-          <a:lstStyle/>
-          <a:p>
-            <a:pPr algn="ctr">
+          <p:cNvPr id="24" name="TextBox 23"/>
+          <p:cNvSpPr txBox="1"/>
+          <p:nvPr/>
+        </p:nvSpPr>
+        <p:spPr>
+          <a:xfrm>
+            <a:off x="7589520" y="4041648"/>
+            <a:ext cx="3749039" cy="365760"/>
+          </a:xfrm>
+          <a:prstGeom prst="rect">
+            <a:avLst/>
+          </a:prstGeom>
+          <a:noFill/>
+        </p:spPr>
+        <p:txBody>
+          <a:bodyPr wrap="square" lIns="0" rIns="0" tIns="0" bIns="0" anchor="t">
+            <a:spAutoFit/>
+          </a:bodyPr>
+          <a:lstStyle/>
+          <a:p>
+            <a:pPr algn="l">
               <a:lnSpc>
                 <a:spcPct val="115000"/>
               </a:lnSpc>
             </a:pPr>
             <a:r>
-              <a:rPr sz="4800" b="1">
-                <a:solidFill>
-                  <a:srgbClr val="2DD4BF"/>
-                </a:solidFill>
-                <a:latin typeface="Helvetica Neue"/>
-              </a:rPr>
-              <a:t>≥ 20%</a:t>
-            </a:r>
-          </a:p>
-        </p:txBody>
-      </p:sp>
-      <p:sp>
-        <p:nvSpPr>
-          <p:cNvPr id="16" name="TextBox 15"/>
-          <p:cNvSpPr txBox="1"/>
-          <p:nvPr/>
-        </p:nvSpPr>
-        <p:spPr>
-          <a:xfrm>
-            <a:off x="9180576" y="3749039"/>
-            <a:ext cx="2103120" cy="914400"/>
-          </a:xfrm>
-          <a:prstGeom prst="rect">
-            <a:avLst/>
-          </a:prstGeom>
-          <a:noFill/>
-        </p:spPr>
-        <p:txBody>
-          <a:bodyPr wrap="square" lIns="0" rIns="0" tIns="0" bIns="0" anchor="t">
-            <a:spAutoFit/>
-          </a:bodyPr>
-          <a:lstStyle/>
-          <a:p>
-            <a:pPr algn="ctr">
-              <a:lnSpc>
-                <a:spcPct val="115000"/>
-              </a:lnSpc>
-            </a:pPr>
-            <a:r>
-              <a:rPr sz="1500" b="0">
+              <a:rPr sz="1600" b="1">
                 <a:solidFill>
                   <a:srgbClr val="F8FAFC"/>
                 </a:solidFill>
                 <a:latin typeface="Helvetica Neue"/>
               </a:rPr>
-              <a:t>Trial → paid conversion</a:t>
-            </a:r>
-          </a:p>
-        </p:txBody>
-      </p:sp>
-      <p:sp>
-        <p:nvSpPr>
-          <p:cNvPr id="17" name="Rounded Rectangle 16"/>
+              <a:t>Cost &amp; economics</a:t>
+            </a:r>
+          </a:p>
+        </p:txBody>
+      </p:sp>
+      <p:sp>
+        <p:nvSpPr>
+          <p:cNvPr id="25" name="TextBox 24"/>
+          <p:cNvSpPr txBox="1"/>
+          <p:nvPr/>
+        </p:nvSpPr>
+        <p:spPr>
+          <a:xfrm>
+            <a:off x="7589520" y="4526280"/>
+            <a:ext cx="3749039" cy="1371600"/>
+          </a:xfrm>
+          <a:prstGeom prst="rect">
+            <a:avLst/>
+          </a:prstGeom>
+          <a:noFill/>
+        </p:spPr>
+        <p:txBody>
+          <a:bodyPr wrap="square" lIns="0" rIns="0" tIns="0" bIns="0" anchor="t">
+            <a:spAutoFit/>
+          </a:bodyPr>
+          <a:lstStyle/>
+          <a:p>
+            <a:pPr algn="l">
+              <a:lnSpc>
+                <a:spcPct val="105000"/>
+              </a:lnSpc>
+              <a:spcAft>
+                <a:spcPts val="800"/>
+              </a:spcAft>
+            </a:pPr>
+            <a:r>
+              <a:rPr sz="1200" b="1">
+                <a:solidFill>
+                  <a:srgbClr val="FBBF24"/>
+                </a:solidFill>
+                <a:latin typeface="Helvetica Neue"/>
+              </a:rPr>
+              <a:t>MVP  </a:t>
+            </a:r>
+            <a:r>
+              <a:rPr sz="1200" b="0">
+                <a:solidFill>
+                  <a:srgbClr val="94A3B8"/>
+                </a:solidFill>
+                <a:latin typeface="Helvetica Neue"/>
+              </a:rPr>
+              <a:t>~$90–110K in ~3 months</a:t>
+            </a:r>
+          </a:p>
+          <a:p>
+            <a:pPr algn="l">
+              <a:lnSpc>
+                <a:spcPct val="105000"/>
+              </a:lnSpc>
+              <a:spcAft>
+                <a:spcPts val="800"/>
+              </a:spcAft>
+            </a:pPr>
+            <a:r>
+              <a:rPr sz="1200" b="1">
+                <a:solidFill>
+                  <a:srgbClr val="FBBF24"/>
+                </a:solidFill>
+                <a:latin typeface="Helvetica Neue"/>
+              </a:rPr>
+              <a:t>Team  </a:t>
+            </a:r>
+            <a:r>
+              <a:rPr sz="1200" b="0">
+                <a:solidFill>
+                  <a:srgbClr val="94A3B8"/>
+                </a:solidFill>
+                <a:latin typeface="Helvetica Neue"/>
+              </a:rPr>
+              <a:t>3 engineers + part-time design &amp; PM</a:t>
+            </a:r>
+          </a:p>
+          <a:p>
+            <a:pPr algn="l">
+              <a:lnSpc>
+                <a:spcPct val="105000"/>
+              </a:lnSpc>
+              <a:spcAft>
+                <a:spcPts val="800"/>
+              </a:spcAft>
+            </a:pPr>
+            <a:r>
+              <a:rPr sz="1200" b="1">
+                <a:solidFill>
+                  <a:srgbClr val="FBBF24"/>
+                </a:solidFill>
+                <a:latin typeface="Helvetica Neue"/>
+              </a:rPr>
+              <a:t>Scope  </a:t>
+            </a:r>
+            <a:r>
+              <a:rPr sz="1200" b="0">
+                <a:solidFill>
+                  <a:srgbClr val="94A3B8"/>
+                </a:solidFill>
+                <a:latin typeface="Helvetica Neue"/>
+              </a:rPr>
+              <a:t>auth, multi-tenant, Marketplace review</a:t>
+            </a:r>
+          </a:p>
+          <a:p>
+            <a:pPr algn="l">
+              <a:lnSpc>
+                <a:spcPct val="105000"/>
+              </a:lnSpc>
+              <a:spcAft>
+                <a:spcPts val="800"/>
+              </a:spcAft>
+            </a:pPr>
+            <a:r>
+              <a:rPr sz="1200" b="1">
+                <a:solidFill>
+                  <a:srgbClr val="FBBF24"/>
+                </a:solidFill>
+                <a:latin typeface="Helvetica Neue"/>
+              </a:rPr>
+              <a:t>Run  </a:t>
+            </a:r>
+            <a:r>
+              <a:rPr sz="1200" b="0">
+                <a:solidFill>
+                  <a:srgbClr val="94A3B8"/>
+                </a:solidFill>
+                <a:latin typeface="Helvetica Neue"/>
+              </a:rPr>
+              <a:t>LLM cost in cents per diagnosis</a:t>
+            </a:r>
+          </a:p>
+          <a:p>
+            <a:pPr algn="l">
+              <a:lnSpc>
+                <a:spcPct val="105000"/>
+              </a:lnSpc>
+            </a:pPr>
+            <a:r>
+              <a:rPr sz="1200" b="1">
+                <a:solidFill>
+                  <a:srgbClr val="FBBF24"/>
+                </a:solidFill>
+                <a:latin typeface="Helvetica Neue"/>
+              </a:rPr>
+              <a:t>ARR  </a:t>
+            </a:r>
+            <a:r>
+              <a:rPr sz="1200" b="0">
+                <a:solidFill>
+                  <a:srgbClr val="94A3B8"/>
+                </a:solidFill>
+                <a:latin typeface="Helvetica Neue"/>
+              </a:rPr>
+              <a:t>≈ $288K illustrative (100 × 30 × $8 × 12)</a:t>
+            </a:r>
+          </a:p>
+        </p:txBody>
+      </p:sp>
+      <p:sp>
+        <p:nvSpPr>
+          <p:cNvPr id="26" name="Rounded Rectangle 25"/>
           <p:cNvSpPr/>
           <p:nvPr/>
         </p:nvSpPr>
         <p:spPr>
           <a:xfrm>
-            <a:off x="640080" y="5394960"/>
-            <a:ext cx="1097280" cy="274320"/>
+            <a:off x="640080" y="6053328"/>
+            <a:ext cx="1371600" cy="274320"/>
           </a:xfrm>
           <a:prstGeom prst="roundRect">
             <a:avLst>
@@ -6224,14 +7133,14 @@
       </p:sp>
       <p:sp>
         <p:nvSpPr>
-          <p:cNvPr id="18" name="TextBox 17"/>
-          <p:cNvSpPr txBox="1"/>
-          <p:nvPr/>
-        </p:nvSpPr>
-        <p:spPr>
-          <a:xfrm>
-            <a:off x="640080" y="5436108"/>
-            <a:ext cx="1097280" cy="228600"/>
+          <p:cNvPr id="27" name="TextBox 26"/>
+          <p:cNvSpPr txBox="1"/>
+          <p:nvPr/>
+        </p:nvSpPr>
+        <p:spPr>
+          <a:xfrm>
+            <a:off x="640080" y="6094476"/>
+            <a:ext cx="1371600" cy="228600"/>
           </a:xfrm>
           <a:prstGeom prst="rect">
             <a:avLst/>
@@ -6256,21 +7165,21 @@
                 </a:solidFill>
                 <a:latin typeface="Helvetica Neue"/>
               </a:rPr>
-              <a:t>TARGETS</a:t>
-            </a:r>
-          </a:p>
-        </p:txBody>
-      </p:sp>
-      <p:sp>
-        <p:nvSpPr>
-          <p:cNvPr id="19" name="TextBox 18"/>
-          <p:cNvSpPr txBox="1"/>
-          <p:nvPr/>
-        </p:nvSpPr>
-        <p:spPr>
-          <a:xfrm>
-            <a:off x="1874519" y="5431536"/>
-            <a:ext cx="9144000" cy="320040"/>
+              <a:t>ASSUMPTIONS</a:t>
+            </a:r>
+          </a:p>
+        </p:txBody>
+      </p:sp>
+      <p:sp>
+        <p:nvSpPr>
+          <p:cNvPr id="28" name="TextBox 27"/>
+          <p:cNvSpPr txBox="1"/>
+          <p:nvPr/>
+        </p:nvSpPr>
+        <p:spPr>
+          <a:xfrm>
+            <a:off x="2148840" y="6089904"/>
+            <a:ext cx="6858000" cy="274320"/>
           </a:xfrm>
           <a:prstGeom prst="rect">
             <a:avLst/>
@@ -6289,13 +7198,13 @@
               </a:lnSpc>
             </a:pPr>
             <a:r>
-              <a:rPr sz="1200" b="0">
+              <a:rPr sz="1100" b="0">
                 <a:solidFill>
                   <a:srgbClr val="94A3B8"/>
                 </a:solidFill>
                 <a:latin typeface="Helvetica Neue"/>
               </a:rPr>
-              <a:t>Targets are assumptions; baseline measured on non-diagnosed incidents.</a:t>
+              <a:t>Prices, costs and ARR are working estimates, to be validated with design partners.</a:t>
             </a:r>
           </a:p>
         </p:txBody>
@@ -6360,7 +7269,7 @@
                 </a:solidFill>
                 <a:latin typeface="Helvetica Neue"/>
               </a:rPr>
-              <a:t>WHAT COULD GO WRONG · WHAT'S NEXT</a:t>
+              <a:t>SUCCESS METRICS · 6 MONTHS AFTER LAUNCH</a:t>
             </a:r>
           </a:p>
         </p:txBody>
@@ -6399,7 +7308,7 @@
                 </a:solidFill>
                 <a:latin typeface="Helvetica Neue"/>
               </a:rPr>
-              <a:t>Risks &amp; roadmap</a:t>
+              <a:t>How we'll know it worked</a:t>
             </a:r>
           </a:p>
         </p:txBody>
@@ -6445,53 +7354,14 @@
       </p:sp>
       <p:sp>
         <p:nvSpPr>
-          <p:cNvPr id="5" name="TextBox 4"/>
-          <p:cNvSpPr txBox="1"/>
-          <p:nvPr/>
-        </p:nvSpPr>
-        <p:spPr>
-          <a:xfrm>
-            <a:off x="640080" y="1783080"/>
-            <a:ext cx="5486400" cy="365760"/>
-          </a:xfrm>
-          <a:prstGeom prst="rect">
-            <a:avLst/>
-          </a:prstGeom>
-          <a:noFill/>
-        </p:spPr>
-        <p:txBody>
-          <a:bodyPr wrap="square" lIns="0" rIns="0" tIns="0" bIns="0" anchor="t">
-            <a:spAutoFit/>
-          </a:bodyPr>
-          <a:lstStyle/>
-          <a:p>
-            <a:pPr algn="l">
-              <a:lnSpc>
-                <a:spcPct val="115000"/>
-              </a:lnSpc>
-            </a:pPr>
-            <a:r>
-              <a:rPr sz="1200" b="1">
-                <a:solidFill>
-                  <a:srgbClr val="FB7185"/>
-                </a:solidFill>
-                <a:latin typeface="Helvetica Neue"/>
-              </a:rPr>
-              <a:t>RISKS  →  MITIGATION</a:t>
-            </a:r>
-          </a:p>
-        </p:txBody>
-      </p:sp>
-      <p:sp>
-        <p:nvSpPr>
-          <p:cNvPr id="6" name="Rounded Rectangle 5"/>
+          <p:cNvPr id="5" name="Rounded Rectangle 4"/>
           <p:cNvSpPr/>
           <p:nvPr/>
         </p:nvSpPr>
         <p:spPr>
           <a:xfrm>
-            <a:off x="640080" y="2194560"/>
-            <a:ext cx="6035040" cy="713232"/>
+            <a:off x="640080" y="2011680"/>
+            <a:ext cx="2560320" cy="2926080"/>
           </a:xfrm>
           <a:prstGeom prst="roundRect">
             <a:avLst>
@@ -6532,92 +7402,92 @@
       </p:sp>
       <p:sp>
         <p:nvSpPr>
+          <p:cNvPr id="6" name="TextBox 5"/>
+          <p:cNvSpPr txBox="1"/>
+          <p:nvPr/>
+        </p:nvSpPr>
+        <p:spPr>
+          <a:xfrm>
+            <a:off x="640080" y="2560320"/>
+            <a:ext cx="2560320" cy="914400"/>
+          </a:xfrm>
+          <a:prstGeom prst="rect">
+            <a:avLst/>
+          </a:prstGeom>
+          <a:noFill/>
+        </p:spPr>
+        <p:txBody>
+          <a:bodyPr wrap="square" lIns="0" rIns="0" tIns="0" bIns="0" anchor="t">
+            <a:spAutoFit/>
+          </a:bodyPr>
+          <a:lstStyle/>
+          <a:p>
+            <a:pPr algn="ctr">
+              <a:lnSpc>
+                <a:spcPct val="115000"/>
+              </a:lnSpc>
+            </a:pPr>
+            <a:r>
+              <a:rPr sz="4800" b="1">
+                <a:solidFill>
+                  <a:srgbClr val="2DD4BF"/>
+                </a:solidFill>
+                <a:latin typeface="Helvetica Neue"/>
+              </a:rPr>
+              <a:t>−25%</a:t>
+            </a:r>
+          </a:p>
+        </p:txBody>
+      </p:sp>
+      <p:sp>
+        <p:nvSpPr>
           <p:cNvPr id="7" name="TextBox 6"/>
           <p:cNvSpPr txBox="1"/>
           <p:nvPr/>
         </p:nvSpPr>
         <p:spPr>
           <a:xfrm>
-            <a:off x="868680" y="2286000"/>
-            <a:ext cx="5669280" cy="320040"/>
-          </a:xfrm>
-          <a:prstGeom prst="rect">
-            <a:avLst/>
-          </a:prstGeom>
-          <a:noFill/>
-        </p:spPr>
-        <p:txBody>
-          <a:bodyPr wrap="square" lIns="0" rIns="0" tIns="0" bIns="0" anchor="t">
-            <a:spAutoFit/>
-          </a:bodyPr>
-          <a:lstStyle/>
-          <a:p>
-            <a:pPr algn="l">
+            <a:off x="868680" y="3749039"/>
+            <a:ext cx="2103120" cy="914400"/>
+          </a:xfrm>
+          <a:prstGeom prst="rect">
+            <a:avLst/>
+          </a:prstGeom>
+          <a:noFill/>
+        </p:spPr>
+        <p:txBody>
+          <a:bodyPr wrap="square" lIns="0" rIns="0" tIns="0" bIns="0" anchor="t">
+            <a:spAutoFit/>
+          </a:bodyPr>
+          <a:lstStyle/>
+          <a:p>
+            <a:pPr algn="ctr">
               <a:lnSpc>
                 <a:spcPct val="115000"/>
               </a:lnSpc>
             </a:pPr>
             <a:r>
-              <a:rPr sz="1400" b="1">
+              <a:rPr sz="1500" b="0">
                 <a:solidFill>
                   <a:srgbClr val="F8FAFC"/>
                 </a:solidFill>
                 <a:latin typeface="Helvetica Neue"/>
               </a:rPr>
-              <a:t>Graph quality drives diagnosis quality</a:t>
-            </a:r>
-          </a:p>
-        </p:txBody>
-      </p:sp>
-      <p:sp>
-        <p:nvSpPr>
-          <p:cNvPr id="8" name="TextBox 7"/>
-          <p:cNvSpPr txBox="1"/>
-          <p:nvPr/>
-        </p:nvSpPr>
-        <p:spPr>
-          <a:xfrm>
-            <a:off x="868680" y="2587752"/>
-            <a:ext cx="5669280" cy="320040"/>
-          </a:xfrm>
-          <a:prstGeom prst="rect">
-            <a:avLst/>
-          </a:prstGeom>
-          <a:noFill/>
-        </p:spPr>
-        <p:txBody>
-          <a:bodyPr wrap="square" lIns="0" rIns="0" tIns="0" bIns="0" anchor="t">
-            <a:spAutoFit/>
-          </a:bodyPr>
-          <a:lstStyle/>
-          <a:p>
-            <a:pPr algn="l">
-              <a:lnSpc>
-                <a:spcPct val="115000"/>
-              </a:lnSpc>
-            </a:pPr>
-            <a:r>
-              <a:rPr sz="1200" b="0">
-                <a:solidFill>
-                  <a:srgbClr val="94A3B8"/>
-                </a:solidFill>
-                <a:latin typeface="Helvetica Neue"/>
-              </a:rPr>
-              <a:t>Knowledge Gap agent flags missing owners, runbooks and docs</a:t>
-            </a:r>
-          </a:p>
-        </p:txBody>
-      </p:sp>
-      <p:sp>
-        <p:nvSpPr>
-          <p:cNvPr id="9" name="Rounded Rectangle 8"/>
+              <a:t>MTTR on diagnosed incidents</a:t>
+            </a:r>
+          </a:p>
+        </p:txBody>
+      </p:sp>
+      <p:sp>
+        <p:nvSpPr>
+          <p:cNvPr id="8" name="Rounded Rectangle 7"/>
           <p:cNvSpPr/>
           <p:nvPr/>
         </p:nvSpPr>
         <p:spPr>
           <a:xfrm>
-            <a:off x="640080" y="2999232"/>
-            <a:ext cx="6035040" cy="713232"/>
+            <a:off x="3410712" y="2011680"/>
+            <a:ext cx="2560320" cy="2926080"/>
           </a:xfrm>
           <a:prstGeom prst="roundRect">
             <a:avLst>
@@ -6658,92 +7528,92 @@
       </p:sp>
       <p:sp>
         <p:nvSpPr>
+          <p:cNvPr id="9" name="TextBox 8"/>
+          <p:cNvSpPr txBox="1"/>
+          <p:nvPr/>
+        </p:nvSpPr>
+        <p:spPr>
+          <a:xfrm>
+            <a:off x="3410712" y="2560320"/>
+            <a:ext cx="2560320" cy="914400"/>
+          </a:xfrm>
+          <a:prstGeom prst="rect">
+            <a:avLst/>
+          </a:prstGeom>
+          <a:noFill/>
+        </p:spPr>
+        <p:txBody>
+          <a:bodyPr wrap="square" lIns="0" rIns="0" tIns="0" bIns="0" anchor="t">
+            <a:spAutoFit/>
+          </a:bodyPr>
+          <a:lstStyle/>
+          <a:p>
+            <a:pPr algn="ctr">
+              <a:lnSpc>
+                <a:spcPct val="115000"/>
+              </a:lnSpc>
+            </a:pPr>
+            <a:r>
+              <a:rPr sz="4800" b="1">
+                <a:solidFill>
+                  <a:srgbClr val="818CF8"/>
+                </a:solidFill>
+                <a:latin typeface="Helvetica Neue"/>
+              </a:rPr>
+              <a:t>≥ 80%</a:t>
+            </a:r>
+          </a:p>
+        </p:txBody>
+      </p:sp>
+      <p:sp>
+        <p:nvSpPr>
           <p:cNvPr id="10" name="TextBox 9"/>
           <p:cNvSpPr txBox="1"/>
           <p:nvPr/>
         </p:nvSpPr>
         <p:spPr>
           <a:xfrm>
-            <a:off x="868680" y="3090672"/>
-            <a:ext cx="5669280" cy="320040"/>
-          </a:xfrm>
-          <a:prstGeom prst="rect">
-            <a:avLst/>
-          </a:prstGeom>
-          <a:noFill/>
-        </p:spPr>
-        <p:txBody>
-          <a:bodyPr wrap="square" lIns="0" rIns="0" tIns="0" bIns="0" anchor="t">
-            <a:spAutoFit/>
-          </a:bodyPr>
-          <a:lstStyle/>
-          <a:p>
-            <a:pPr algn="l">
+            <a:off x="3639312" y="3749039"/>
+            <a:ext cx="2103120" cy="914400"/>
+          </a:xfrm>
+          <a:prstGeom prst="rect">
+            <a:avLst/>
+          </a:prstGeom>
+          <a:noFill/>
+        </p:spPr>
+        <p:txBody>
+          <a:bodyPr wrap="square" lIns="0" rIns="0" tIns="0" bIns="0" anchor="t">
+            <a:spAutoFit/>
+          </a:bodyPr>
+          <a:lstStyle/>
+          <a:p>
+            <a:pPr algn="ctr">
               <a:lnSpc>
                 <a:spcPct val="115000"/>
               </a:lnSpc>
             </a:pPr>
             <a:r>
-              <a:rPr sz="1400" b="1">
+              <a:rPr sz="1500" b="0">
                 <a:solidFill>
                   <a:srgbClr val="F8FAFC"/>
                 </a:solidFill>
                 <a:latin typeface="Helvetica Neue"/>
               </a:rPr>
-              <a:t>Trust &amp; privacy of ticket data</a:t>
-            </a:r>
-          </a:p>
-        </p:txBody>
-      </p:sp>
-      <p:sp>
-        <p:nvSpPr>
-          <p:cNvPr id="11" name="TextBox 10"/>
-          <p:cNvSpPr txBox="1"/>
-          <p:nvPr/>
-        </p:nvSpPr>
-        <p:spPr>
-          <a:xfrm>
-            <a:off x="868680" y="3392424"/>
-            <a:ext cx="5669280" cy="320040"/>
-          </a:xfrm>
-          <a:prstGeom prst="rect">
-            <a:avLst/>
-          </a:prstGeom>
-          <a:noFill/>
-        </p:spPr>
-        <p:txBody>
-          <a:bodyPr wrap="square" lIns="0" rIns="0" tIns="0" bIns="0" anchor="t">
-            <a:spAutoFit/>
-          </a:bodyPr>
-          <a:lstStyle/>
-          <a:p>
-            <a:pPr algn="l">
-              <a:lnSpc>
-                <a:spcPct val="115000"/>
-              </a:lnSpc>
-            </a:pPr>
-            <a:r>
-              <a:rPr sz="1200" b="0">
-                <a:solidFill>
-                  <a:srgbClr val="94A3B8"/>
-                </a:solidFill>
-                <a:latin typeface="Helvetica Neue"/>
-              </a:rPr>
-              <a:t>Private notes only; rule-based mode needs no LLM</a:t>
-            </a:r>
-          </a:p>
-        </p:txBody>
-      </p:sp>
-      <p:sp>
-        <p:nvSpPr>
-          <p:cNvPr id="12" name="Rounded Rectangle 11"/>
+              <a:t>New incidents auto-diagnosed</a:t>
+            </a:r>
+          </a:p>
+        </p:txBody>
+      </p:sp>
+      <p:sp>
+        <p:nvSpPr>
+          <p:cNvPr id="11" name="Rounded Rectangle 10"/>
           <p:cNvSpPr/>
           <p:nvPr/>
         </p:nvSpPr>
         <p:spPr>
           <a:xfrm>
-            <a:off x="640080" y="3803904"/>
-            <a:ext cx="6035040" cy="713232"/>
+            <a:off x="6181344" y="2011680"/>
+            <a:ext cx="2560320" cy="2926080"/>
           </a:xfrm>
           <a:prstGeom prst="roundRect">
             <a:avLst>
@@ -6784,92 +7654,92 @@
       </p:sp>
       <p:sp>
         <p:nvSpPr>
+          <p:cNvPr id="12" name="TextBox 11"/>
+          <p:cNvSpPr txBox="1"/>
+          <p:nvPr/>
+        </p:nvSpPr>
+        <p:spPr>
+          <a:xfrm>
+            <a:off x="6181344" y="2560320"/>
+            <a:ext cx="2560320" cy="914400"/>
+          </a:xfrm>
+          <a:prstGeom prst="rect">
+            <a:avLst/>
+          </a:prstGeom>
+          <a:noFill/>
+        </p:spPr>
+        <p:txBody>
+          <a:bodyPr wrap="square" lIns="0" rIns="0" tIns="0" bIns="0" anchor="t">
+            <a:spAutoFit/>
+          </a:bodyPr>
+          <a:lstStyle/>
+          <a:p>
+            <a:pPr algn="ctr">
+              <a:lnSpc>
+                <a:spcPct val="115000"/>
+              </a:lnSpc>
+            </a:pPr>
+            <a:r>
+              <a:rPr sz="4800" b="1">
+                <a:solidFill>
+                  <a:srgbClr val="818CF8"/>
+                </a:solidFill>
+                <a:latin typeface="Helvetica Neue"/>
+              </a:rPr>
+              <a:t>+20%</a:t>
+            </a:r>
+          </a:p>
+        </p:txBody>
+      </p:sp>
+      <p:sp>
+        <p:nvSpPr>
           <p:cNvPr id="13" name="TextBox 12"/>
           <p:cNvSpPr txBox="1"/>
           <p:nvPr/>
         </p:nvSpPr>
         <p:spPr>
           <a:xfrm>
-            <a:off x="868680" y="3895344"/>
-            <a:ext cx="5669280" cy="320040"/>
-          </a:xfrm>
-          <a:prstGeom prst="rect">
-            <a:avLst/>
-          </a:prstGeom>
-          <a:noFill/>
-        </p:spPr>
-        <p:txBody>
-          <a:bodyPr wrap="square" lIns="0" rIns="0" tIns="0" bIns="0" anchor="t">
-            <a:spAutoFit/>
-          </a:bodyPr>
-          <a:lstStyle/>
-          <a:p>
-            <a:pPr algn="l">
+            <a:off x="6409944" y="3749039"/>
+            <a:ext cx="2103120" cy="914400"/>
+          </a:xfrm>
+          <a:prstGeom prst="rect">
+            <a:avLst/>
+          </a:prstGeom>
+          <a:noFill/>
+        </p:spPr>
+        <p:txBody>
+          <a:bodyPr wrap="square" lIns="0" rIns="0" tIns="0" bIns="0" anchor="t">
+            <a:spAutoFit/>
+          </a:bodyPr>
+          <a:lstStyle/>
+          <a:p>
+            <a:pPr algn="ctr">
               <a:lnSpc>
                 <a:spcPct val="115000"/>
               </a:lnSpc>
             </a:pPr>
             <a:r>
-              <a:rPr sz="1400" b="1">
+              <a:rPr sz="1500" b="0">
                 <a:solidFill>
                   <a:srgbClr val="F8FAFC"/>
                 </a:solidFill>
                 <a:latin typeface="Helvetica Neue"/>
               </a:rPr>
-              <a:t>Willingness to pay beyond built-in AI</a:t>
-            </a:r>
-          </a:p>
-        </p:txBody>
-      </p:sp>
-      <p:sp>
-        <p:nvSpPr>
-          <p:cNvPr id="14" name="TextBox 13"/>
-          <p:cNvSpPr txBox="1"/>
-          <p:nvPr/>
-        </p:nvSpPr>
-        <p:spPr>
-          <a:xfrm>
-            <a:off x="868680" y="4197096"/>
-            <a:ext cx="5669280" cy="320040"/>
-          </a:xfrm>
-          <a:prstGeom prst="rect">
-            <a:avLst/>
-          </a:prstGeom>
-          <a:noFill/>
-        </p:spPr>
-        <p:txBody>
-          <a:bodyPr wrap="square" lIns="0" rIns="0" tIns="0" bIns="0" anchor="t">
-            <a:spAutoFit/>
-          </a:bodyPr>
-          <a:lstStyle/>
-          <a:p>
-            <a:pPr algn="l">
-              <a:lnSpc>
-                <a:spcPct val="115000"/>
-              </a:lnSpc>
-            </a:pPr>
-            <a:r>
-              <a:rPr sz="1200" b="0">
-                <a:solidFill>
-                  <a:srgbClr val="94A3B8"/>
-                </a:solidFill>
-                <a:latin typeface="Helvetica Neue"/>
-              </a:rPr>
-              <a:t>Validate with design partners before pricing is final</a:t>
-            </a:r>
-          </a:p>
-        </p:txBody>
-      </p:sp>
-      <p:sp>
-        <p:nvSpPr>
-          <p:cNvPr id="15" name="Rounded Rectangle 14"/>
+              <a:t>Resolved by first team routed</a:t>
+            </a:r>
+          </a:p>
+        </p:txBody>
+      </p:sp>
+      <p:sp>
+        <p:nvSpPr>
+          <p:cNvPr id="14" name="Rounded Rectangle 13"/>
           <p:cNvSpPr/>
           <p:nvPr/>
         </p:nvSpPr>
         <p:spPr>
           <a:xfrm>
-            <a:off x="640080" y="4608576"/>
-            <a:ext cx="6035040" cy="713232"/>
+            <a:off x="8951976" y="2011680"/>
+            <a:ext cx="2560320" cy="2926080"/>
           </a:xfrm>
           <a:prstGeom prst="roundRect">
             <a:avLst>
@@ -6910,104 +7780,104 @@
       </p:sp>
       <p:sp>
         <p:nvSpPr>
+          <p:cNvPr id="15" name="TextBox 14"/>
+          <p:cNvSpPr txBox="1"/>
+          <p:nvPr/>
+        </p:nvSpPr>
+        <p:spPr>
+          <a:xfrm>
+            <a:off x="8951976" y="2560320"/>
+            <a:ext cx="2560320" cy="914400"/>
+          </a:xfrm>
+          <a:prstGeom prst="rect">
+            <a:avLst/>
+          </a:prstGeom>
+          <a:noFill/>
+        </p:spPr>
+        <p:txBody>
+          <a:bodyPr wrap="square" lIns="0" rIns="0" tIns="0" bIns="0" anchor="t">
+            <a:spAutoFit/>
+          </a:bodyPr>
+          <a:lstStyle/>
+          <a:p>
+            <a:pPr algn="ctr">
+              <a:lnSpc>
+                <a:spcPct val="115000"/>
+              </a:lnSpc>
+            </a:pPr>
+            <a:r>
+              <a:rPr sz="4800" b="1">
+                <a:solidFill>
+                  <a:srgbClr val="2DD4BF"/>
+                </a:solidFill>
+                <a:latin typeface="Helvetica Neue"/>
+              </a:rPr>
+              <a:t>≥ 20%</a:t>
+            </a:r>
+          </a:p>
+        </p:txBody>
+      </p:sp>
+      <p:sp>
+        <p:nvSpPr>
           <p:cNvPr id="16" name="TextBox 15"/>
           <p:cNvSpPr txBox="1"/>
           <p:nvPr/>
         </p:nvSpPr>
         <p:spPr>
           <a:xfrm>
-            <a:off x="868680" y="4700016"/>
-            <a:ext cx="5669280" cy="320040"/>
-          </a:xfrm>
-          <a:prstGeom prst="rect">
-            <a:avLst/>
-          </a:prstGeom>
-          <a:noFill/>
-        </p:spPr>
-        <p:txBody>
-          <a:bodyPr wrap="square" lIns="0" rIns="0" tIns="0" bIns="0" anchor="t">
-            <a:spAutoFit/>
-          </a:bodyPr>
-          <a:lstStyle/>
-          <a:p>
-            <a:pPr algn="l">
+            <a:off x="9180576" y="3749039"/>
+            <a:ext cx="2103120" cy="914400"/>
+          </a:xfrm>
+          <a:prstGeom prst="rect">
+            <a:avLst/>
+          </a:prstGeom>
+          <a:noFill/>
+        </p:spPr>
+        <p:txBody>
+          <a:bodyPr wrap="square" lIns="0" rIns="0" tIns="0" bIns="0" anchor="t">
+            <a:spAutoFit/>
+          </a:bodyPr>
+          <a:lstStyle/>
+          <a:p>
+            <a:pPr algn="ctr">
               <a:lnSpc>
                 <a:spcPct val="115000"/>
               </a:lnSpc>
             </a:pPr>
             <a:r>
-              <a:rPr sz="1400" b="1">
+              <a:rPr sz="1500" b="0">
                 <a:solidFill>
                   <a:srgbClr val="F8FAFC"/>
                 </a:solidFill>
                 <a:latin typeface="Helvetica Neue"/>
               </a:rPr>
-              <a:t>Auto-routing sends a ticket to the wrong queue</a:t>
-            </a:r>
-          </a:p>
-        </p:txBody>
-      </p:sp>
-      <p:sp>
-        <p:nvSpPr>
-          <p:cNvPr id="17" name="TextBox 16"/>
-          <p:cNvSpPr txBox="1"/>
-          <p:nvPr/>
-        </p:nvSpPr>
-        <p:spPr>
-          <a:xfrm>
-            <a:off x="868680" y="5001768"/>
-            <a:ext cx="5669280" cy="320040"/>
-          </a:xfrm>
-          <a:prstGeom prst="rect">
-            <a:avLst/>
-          </a:prstGeom>
-          <a:noFill/>
-        </p:spPr>
-        <p:txBody>
-          <a:bodyPr wrap="square" lIns="0" rIns="0" tIns="0" bIns="0" anchor="t">
-            <a:spAutoFit/>
-          </a:bodyPr>
-          <a:lstStyle/>
-          <a:p>
-            <a:pPr algn="l">
-              <a:lnSpc>
-                <a:spcPct val="115000"/>
-              </a:lnSpc>
-            </a:pPr>
-            <a:r>
-              <a:rPr sz="1200" b="0">
-                <a:solidFill>
-                  <a:srgbClr val="94A3B8"/>
-                </a:solidFill>
-                <a:latin typeface="Helvetica Neue"/>
-              </a:rPr>
-              <a:t>Only assigns unassigned tickets; reason is written in the note</a:t>
-            </a:r>
-          </a:p>
-        </p:txBody>
-      </p:sp>
-      <p:sp>
-        <p:nvSpPr>
-          <p:cNvPr id="18" name="Rounded Rectangle 17"/>
+              <a:t>Trial → paid conversion</a:t>
+            </a:r>
+          </a:p>
+        </p:txBody>
+      </p:sp>
+      <p:sp>
+        <p:nvSpPr>
+          <p:cNvPr id="17" name="Rounded Rectangle 16"/>
           <p:cNvSpPr/>
           <p:nvPr/>
         </p:nvSpPr>
         <p:spPr>
           <a:xfrm>
-            <a:off x="640080" y="5413248"/>
-            <a:ext cx="6035040" cy="713232"/>
+            <a:off x="640080" y="5394960"/>
+            <a:ext cx="1097280" cy="274320"/>
           </a:xfrm>
           <a:prstGeom prst="roundRect">
             <a:avLst>
-              <a:gd name="adj" fmla="val 6000"/>
+              <a:gd name="adj" fmla="val 50000"/>
             </a:avLst>
           </a:prstGeom>
           <a:solidFill>
-            <a:srgbClr val="151E32"/>
+            <a:srgbClr val="0B1120"/>
           </a:solidFill>
           <a:ln w="12700">
             <a:solidFill>
-              <a:srgbClr val="2A3650"/>
+              <a:srgbClr val="FBBF24"/>
             </a:solidFill>
           </a:ln>
           <a:effectLst/>
@@ -7036,14 +7906,53 @@
       </p:sp>
       <p:sp>
         <p:nvSpPr>
+          <p:cNvPr id="18" name="TextBox 17"/>
+          <p:cNvSpPr txBox="1"/>
+          <p:nvPr/>
+        </p:nvSpPr>
+        <p:spPr>
+          <a:xfrm>
+            <a:off x="640080" y="5436108"/>
+            <a:ext cx="1097280" cy="228600"/>
+          </a:xfrm>
+          <a:prstGeom prst="rect">
+            <a:avLst/>
+          </a:prstGeom>
+          <a:noFill/>
+        </p:spPr>
+        <p:txBody>
+          <a:bodyPr wrap="square" lIns="0" rIns="0" tIns="0" bIns="0" anchor="t">
+            <a:spAutoFit/>
+          </a:bodyPr>
+          <a:lstStyle/>
+          <a:p>
+            <a:pPr algn="ctr">
+              <a:lnSpc>
+                <a:spcPct val="115000"/>
+              </a:lnSpc>
+            </a:pPr>
+            <a:r>
+              <a:rPr sz="1000" b="1">
+                <a:solidFill>
+                  <a:srgbClr val="FBBF24"/>
+                </a:solidFill>
+                <a:latin typeface="Helvetica Neue"/>
+              </a:rPr>
+              <a:t>TARGETS</a:t>
+            </a:r>
+          </a:p>
+        </p:txBody>
+      </p:sp>
+      <p:sp>
+        <p:nvSpPr>
           <p:cNvPr id="19" name="TextBox 18"/>
           <p:cNvSpPr txBox="1"/>
           <p:nvPr/>
         </p:nvSpPr>
         <p:spPr>
           <a:xfrm>
-            <a:off x="868680" y="5504688"/>
-            <a:ext cx="5669280" cy="320040"/>
+            <a:off x="1874519" y="5431536"/>
+            <a:ext cx="9144000" cy="320040"/>
           </a:xfrm>
           <a:prstGeom prst="rect">
             <a:avLst/>
@@ -7062,554 +7971,13 @@
               </a:lnSpc>
             </a:pPr>
             <a:r>
-              <a:rPr sz="1400" b="1">
-                <a:solidFill>
-                  <a:srgbClr val="F8FAFC"/>
-                </a:solidFill>
-                <a:latin typeface="Helvetica Neue"/>
-              </a:rPr>
-              <a:t>API rate limits &amp; plan restrictions</a:t>
-            </a:r>
-          </a:p>
-        </p:txBody>
-      </p:sp>
-      <p:sp>
-        <p:nvSpPr>
-          <p:cNvPr id="20" name="TextBox 19"/>
-          <p:cNvSpPr txBox="1"/>
-          <p:nvPr/>
-        </p:nvSpPr>
-        <p:spPr>
-          <a:xfrm>
-            <a:off x="868680" y="5806440"/>
-            <a:ext cx="5669280" cy="320040"/>
-          </a:xfrm>
-          <a:prstGeom prst="rect">
-            <a:avLst/>
-          </a:prstGeom>
-          <a:noFill/>
-        </p:spPr>
-        <p:txBody>
-          <a:bodyPr wrap="square" lIns="0" rIns="0" tIns="0" bIns="0" anchor="t">
-            <a:spAutoFit/>
-          </a:bodyPr>
-          <a:lstStyle/>
-          <a:p>
-            <a:pPr algn="l">
-              <a:lnSpc>
-                <a:spcPct val="115000"/>
-              </a:lnSpc>
-            </a:pPr>
-            <a:r>
               <a:rPr sz="1200" b="0">
                 <a:solidFill>
                   <a:srgbClr val="94A3B8"/>
                 </a:solidFill>
                 <a:latin typeface="Helvetica Neue"/>
               </a:rPr>
-              <a:t>Graceful degradation (e.g. CMDB needs higher plans)</a:t>
-            </a:r>
-          </a:p>
-        </p:txBody>
-      </p:sp>
-      <p:sp>
-        <p:nvSpPr>
-          <p:cNvPr id="21" name="TextBox 20"/>
-          <p:cNvSpPr txBox="1"/>
-          <p:nvPr/>
-        </p:nvSpPr>
-        <p:spPr>
-          <a:xfrm>
-            <a:off x="7040880" y="1783080"/>
-            <a:ext cx="4572000" cy="365760"/>
-          </a:xfrm>
-          <a:prstGeom prst="rect">
-            <a:avLst/>
-          </a:prstGeom>
-          <a:noFill/>
-        </p:spPr>
-        <p:txBody>
-          <a:bodyPr wrap="square" lIns="0" rIns="0" tIns="0" bIns="0" anchor="t">
-            <a:spAutoFit/>
-          </a:bodyPr>
-          <a:lstStyle/>
-          <a:p>
-            <a:pPr algn="l">
-              <a:lnSpc>
-                <a:spcPct val="115000"/>
-              </a:lnSpc>
-            </a:pPr>
-            <a:r>
-              <a:rPr sz="1200" b="1">
-                <a:solidFill>
-                  <a:srgbClr val="2DD4BF"/>
-                </a:solidFill>
-                <a:latin typeface="Helvetica Neue"/>
-              </a:rPr>
-              <a:t>PHASE 2 ROADMAP</a:t>
-            </a:r>
-          </a:p>
-        </p:txBody>
-      </p:sp>
-      <p:sp>
-        <p:nvSpPr>
-          <p:cNvPr id="22" name="Rounded Rectangle 21"/>
-          <p:cNvSpPr/>
-          <p:nvPr/>
-        </p:nvSpPr>
-        <p:spPr>
-          <a:xfrm>
-            <a:off x="7040880" y="2194560"/>
-            <a:ext cx="4480560" cy="3703320"/>
-          </a:xfrm>
-          <a:prstGeom prst="roundRect">
-            <a:avLst>
-              <a:gd name="adj" fmla="val 6000"/>
-            </a:avLst>
-          </a:prstGeom>
-          <a:solidFill>
-            <a:srgbClr val="151E32"/>
-          </a:solidFill>
-          <a:ln w="12700">
-            <a:solidFill>
-              <a:srgbClr val="2A3650"/>
-            </a:solidFill>
-          </a:ln>
-          <a:effectLst/>
-        </p:spPr>
-        <p:style>
-          <a:lnRef idx="1">
-            <a:schemeClr val="accent1"/>
-          </a:lnRef>
-          <a:fillRef idx="3">
-            <a:schemeClr val="accent1"/>
-          </a:fillRef>
-          <a:effectRef idx="2">
-            <a:schemeClr val="accent1"/>
-          </a:effectRef>
-          <a:fontRef idx="minor">
-            <a:schemeClr val="lt1"/>
-          </a:fontRef>
-        </p:style>
-        <p:txBody>
-          <a:bodyPr rtlCol="0" anchor="ctr"/>
-          <a:lstStyle/>
-          <a:p>
-            <a:pPr algn="ctr"/>
-          </a:p>
-        </p:txBody>
-      </p:sp>
-      <p:sp>
-        <p:nvSpPr>
-          <p:cNvPr id="23" name="Oval 22"/>
-          <p:cNvSpPr/>
-          <p:nvPr/>
-        </p:nvSpPr>
-        <p:spPr>
-          <a:xfrm>
-            <a:off x="7269480" y="2496312"/>
-            <a:ext cx="146304" cy="146304"/>
-          </a:xfrm>
-          <a:prstGeom prst="ellipse">
-            <a:avLst/>
-          </a:prstGeom>
-          <a:solidFill>
-            <a:srgbClr val="2DD4BF"/>
-          </a:solidFill>
-          <a:ln>
-            <a:noFill/>
-          </a:ln>
-          <a:effectLst/>
-        </p:spPr>
-        <p:style>
-          <a:lnRef idx="1">
-            <a:schemeClr val="accent1"/>
-          </a:lnRef>
-          <a:fillRef idx="3">
-            <a:schemeClr val="accent1"/>
-          </a:fillRef>
-          <a:effectRef idx="2">
-            <a:schemeClr val="accent1"/>
-          </a:effectRef>
-          <a:fontRef idx="minor">
-            <a:schemeClr val="lt1"/>
-          </a:fontRef>
-        </p:style>
-        <p:txBody>
-          <a:bodyPr rtlCol="0" anchor="ctr"/>
-          <a:lstStyle/>
-          <a:p>
-            <a:pPr algn="ctr"/>
-          </a:p>
-        </p:txBody>
-      </p:sp>
-      <p:sp>
-        <p:nvSpPr>
-          <p:cNvPr id="24" name="TextBox 23"/>
-          <p:cNvSpPr txBox="1"/>
-          <p:nvPr/>
-        </p:nvSpPr>
-        <p:spPr>
-          <a:xfrm>
-            <a:off x="7589520" y="2423160"/>
-            <a:ext cx="3749039" cy="640080"/>
-          </a:xfrm>
-          <a:prstGeom prst="rect">
-            <a:avLst/>
-          </a:prstGeom>
-          <a:noFill/>
-        </p:spPr>
-        <p:txBody>
-          <a:bodyPr wrap="square" lIns="0" rIns="0" tIns="0" bIns="0" anchor="t">
-            <a:spAutoFit/>
-          </a:bodyPr>
-          <a:lstStyle/>
-          <a:p>
-            <a:pPr algn="l">
-              <a:lnSpc>
-                <a:spcPct val="115000"/>
-              </a:lnSpc>
-            </a:pPr>
-            <a:r>
-              <a:rPr sz="1400" b="0">
-                <a:solidFill>
-                  <a:srgbClr val="F8FAFC"/>
-                </a:solidFill>
-                <a:latin typeface="Helvetica Neue"/>
-              </a:rPr>
-              <a:t>Live Jira · Confluence · Slack connectors</a:t>
-            </a:r>
-          </a:p>
-        </p:txBody>
-      </p:sp>
-      <p:sp>
-        <p:nvSpPr>
-          <p:cNvPr id="25" name="Oval 24"/>
-          <p:cNvSpPr/>
-          <p:nvPr/>
-        </p:nvSpPr>
-        <p:spPr>
-          <a:xfrm>
-            <a:off x="7269480" y="3182112"/>
-            <a:ext cx="146304" cy="146304"/>
-          </a:xfrm>
-          <a:prstGeom prst="ellipse">
-            <a:avLst/>
-          </a:prstGeom>
-          <a:solidFill>
-            <a:srgbClr val="2DD4BF"/>
-          </a:solidFill>
-          <a:ln>
-            <a:noFill/>
-          </a:ln>
-          <a:effectLst/>
-        </p:spPr>
-        <p:style>
-          <a:lnRef idx="1">
-            <a:schemeClr val="accent1"/>
-          </a:lnRef>
-          <a:fillRef idx="3">
-            <a:schemeClr val="accent1"/>
-          </a:fillRef>
-          <a:effectRef idx="2">
-            <a:schemeClr val="accent1"/>
-          </a:effectRef>
-          <a:fontRef idx="minor">
-            <a:schemeClr val="lt1"/>
-          </a:fontRef>
-        </p:style>
-        <p:txBody>
-          <a:bodyPr rtlCol="0" anchor="ctr"/>
-          <a:lstStyle/>
-          <a:p>
-            <a:pPr algn="ctr"/>
-          </a:p>
-        </p:txBody>
-      </p:sp>
-      <p:sp>
-        <p:nvSpPr>
-          <p:cNvPr id="26" name="TextBox 25"/>
-          <p:cNvSpPr txBox="1"/>
-          <p:nvPr/>
-        </p:nvSpPr>
-        <p:spPr>
-          <a:xfrm>
-            <a:off x="7589520" y="3108960"/>
-            <a:ext cx="3749039" cy="640080"/>
-          </a:xfrm>
-          <a:prstGeom prst="rect">
-            <a:avLst/>
-          </a:prstGeom>
-          <a:noFill/>
-        </p:spPr>
-        <p:txBody>
-          <a:bodyPr wrap="square" lIns="0" rIns="0" tIns="0" bIns="0" anchor="t">
-            <a:spAutoFit/>
-          </a:bodyPr>
-          <a:lstStyle/>
-          <a:p>
-            <a:pPr algn="l">
-              <a:lnSpc>
-                <a:spcPct val="115000"/>
-              </a:lnSpc>
-            </a:pPr>
-            <a:r>
-              <a:rPr sz="1400" b="0">
-                <a:solidFill>
-                  <a:srgbClr val="F8FAFC"/>
-                </a:solidFill>
-                <a:latin typeface="Helvetica Neue"/>
-              </a:rPr>
-              <a:t>Freshdesk: link customer tickets to engineering incidents</a:t>
-            </a:r>
-          </a:p>
-        </p:txBody>
-      </p:sp>
-      <p:sp>
-        <p:nvSpPr>
-          <p:cNvPr id="27" name="Oval 26"/>
-          <p:cNvSpPr/>
-          <p:nvPr/>
-        </p:nvSpPr>
-        <p:spPr>
-          <a:xfrm>
-            <a:off x="7269480" y="3867912"/>
-            <a:ext cx="146304" cy="146304"/>
-          </a:xfrm>
-          <a:prstGeom prst="ellipse">
-            <a:avLst/>
-          </a:prstGeom>
-          <a:solidFill>
-            <a:srgbClr val="2DD4BF"/>
-          </a:solidFill>
-          <a:ln>
-            <a:noFill/>
-          </a:ln>
-          <a:effectLst/>
-        </p:spPr>
-        <p:style>
-          <a:lnRef idx="1">
-            <a:schemeClr val="accent1"/>
-          </a:lnRef>
-          <a:fillRef idx="3">
-            <a:schemeClr val="accent1"/>
-          </a:fillRef>
-          <a:effectRef idx="2">
-            <a:schemeClr val="accent1"/>
-          </a:effectRef>
-          <a:fontRef idx="minor">
-            <a:schemeClr val="lt1"/>
-          </a:fontRef>
-        </p:style>
-        <p:txBody>
-          <a:bodyPr rtlCol="0" anchor="ctr"/>
-          <a:lstStyle/>
-          <a:p>
-            <a:pPr algn="ctr"/>
-          </a:p>
-        </p:txBody>
-      </p:sp>
-      <p:sp>
-        <p:nvSpPr>
-          <p:cNvPr id="28" name="TextBox 27"/>
-          <p:cNvSpPr txBox="1"/>
-          <p:nvPr/>
-        </p:nvSpPr>
-        <p:spPr>
-          <a:xfrm>
-            <a:off x="7589520" y="3794760"/>
-            <a:ext cx="3749039" cy="640080"/>
-          </a:xfrm>
-          <a:prstGeom prst="rect">
-            <a:avLst/>
-          </a:prstGeom>
-          <a:noFill/>
-        </p:spPr>
-        <p:txBody>
-          <a:bodyPr wrap="square" lIns="0" rIns="0" tIns="0" bIns="0" anchor="t">
-            <a:spAutoFit/>
-          </a:bodyPr>
-          <a:lstStyle/>
-          <a:p>
-            <a:pPr algn="l">
-              <a:lnSpc>
-                <a:spcPct val="115000"/>
-              </a:lnSpc>
-            </a:pPr>
-            <a:r>
-              <a:rPr sz="1400" b="0">
-                <a:solidFill>
-                  <a:srgbClr val="F8FAFC"/>
-                </a:solidFill>
-                <a:latin typeface="Helvetica Neue"/>
-              </a:rPr>
-              <a:t>Native FDK sidebar app on tickets &amp; changes</a:t>
-            </a:r>
-          </a:p>
-        </p:txBody>
-      </p:sp>
-      <p:sp>
-        <p:nvSpPr>
-          <p:cNvPr id="29" name="Oval 28"/>
-          <p:cNvSpPr/>
-          <p:nvPr/>
-        </p:nvSpPr>
-        <p:spPr>
-          <a:xfrm>
-            <a:off x="7269480" y="4553712"/>
-            <a:ext cx="146304" cy="146304"/>
-          </a:xfrm>
-          <a:prstGeom prst="ellipse">
-            <a:avLst/>
-          </a:prstGeom>
-          <a:solidFill>
-            <a:srgbClr val="2DD4BF"/>
-          </a:solidFill>
-          <a:ln>
-            <a:noFill/>
-          </a:ln>
-          <a:effectLst/>
-        </p:spPr>
-        <p:style>
-          <a:lnRef idx="1">
-            <a:schemeClr val="accent1"/>
-          </a:lnRef>
-          <a:fillRef idx="3">
-            <a:schemeClr val="accent1"/>
-          </a:fillRef>
-          <a:effectRef idx="2">
-            <a:schemeClr val="accent1"/>
-          </a:effectRef>
-          <a:fontRef idx="minor">
-            <a:schemeClr val="lt1"/>
-          </a:fontRef>
-        </p:style>
-        <p:txBody>
-          <a:bodyPr rtlCol="0" anchor="ctr"/>
-          <a:lstStyle/>
-          <a:p>
-            <a:pPr algn="ctr"/>
-          </a:p>
-        </p:txBody>
-      </p:sp>
-      <p:sp>
-        <p:nvSpPr>
-          <p:cNvPr id="30" name="TextBox 29"/>
-          <p:cNvSpPr txBox="1"/>
-          <p:nvPr/>
-        </p:nvSpPr>
-        <p:spPr>
-          <a:xfrm>
-            <a:off x="7589520" y="4480560"/>
-            <a:ext cx="3749039" cy="640080"/>
-          </a:xfrm>
-          <a:prstGeom prst="rect">
-            <a:avLst/>
-          </a:prstGeom>
-          <a:noFill/>
-        </p:spPr>
-        <p:txBody>
-          <a:bodyPr wrap="square" lIns="0" rIns="0" tIns="0" bIns="0" anchor="t">
-            <a:spAutoFit/>
-          </a:bodyPr>
-          <a:lstStyle/>
-          <a:p>
-            <a:pPr algn="l">
-              <a:lnSpc>
-                <a:spcPct val="115000"/>
-              </a:lnSpc>
-            </a:pPr>
-            <a:r>
-              <a:rPr sz="1400" b="0">
-                <a:solidFill>
-                  <a:srgbClr val="F8FAFC"/>
-                </a:solidFill>
-                <a:latin typeface="Helvetica Neue"/>
-              </a:rPr>
-              <a:t>CMDB sync · Problems from recurring incidents · on-call aware escalation</a:t>
-            </a:r>
-          </a:p>
-        </p:txBody>
-      </p:sp>
-      <p:sp>
-        <p:nvSpPr>
-          <p:cNvPr id="31" name="Oval 30"/>
-          <p:cNvSpPr/>
-          <p:nvPr/>
-        </p:nvSpPr>
-        <p:spPr>
-          <a:xfrm>
-            <a:off x="7269480" y="5239512"/>
-            <a:ext cx="146304" cy="146304"/>
-          </a:xfrm>
-          <a:prstGeom prst="ellipse">
-            <a:avLst/>
-          </a:prstGeom>
-          <a:solidFill>
-            <a:srgbClr val="2DD4BF"/>
-          </a:solidFill>
-          <a:ln>
-            <a:noFill/>
-          </a:ln>
-          <a:effectLst/>
-        </p:spPr>
-        <p:style>
-          <a:lnRef idx="1">
-            <a:schemeClr val="accent1"/>
-          </a:lnRef>
-          <a:fillRef idx="3">
-            <a:schemeClr val="accent1"/>
-          </a:fillRef>
-          <a:effectRef idx="2">
-            <a:schemeClr val="accent1"/>
-          </a:effectRef>
-          <a:fontRef idx="minor">
-            <a:schemeClr val="lt1"/>
-          </a:fontRef>
-        </p:style>
-        <p:txBody>
-          <a:bodyPr rtlCol="0" anchor="ctr"/>
-          <a:lstStyle/>
-          <a:p>
-            <a:pPr algn="ctr"/>
-          </a:p>
-        </p:txBody>
-      </p:sp>
-      <p:sp>
-        <p:nvSpPr>
-          <p:cNvPr id="32" name="TextBox 31"/>
-          <p:cNvSpPr txBox="1"/>
-          <p:nvPr/>
-        </p:nvSpPr>
-        <p:spPr>
-          <a:xfrm>
-            <a:off x="7589520" y="5166360"/>
-            <a:ext cx="3749039" cy="640080"/>
-          </a:xfrm>
-          <a:prstGeom prst="rect">
-            <a:avLst/>
-          </a:prstGeom>
-          <a:noFill/>
-        </p:spPr>
-        <p:txBody>
-          <a:bodyPr wrap="square" lIns="0" rIns="0" tIns="0" bIns="0" anchor="t">
-            <a:spAutoFit/>
-          </a:bodyPr>
-          <a:lstStyle/>
-          <a:p>
-            <a:pPr algn="l">
-              <a:lnSpc>
-                <a:spcPct val="115000"/>
-              </a:lnSpc>
-            </a:pPr>
-            <a:r>
-              <a:rPr sz="1400" b="0">
-                <a:solidFill>
-                  <a:srgbClr val="F8FAFC"/>
-                </a:solidFill>
-                <a:latin typeface="Helvetica Neue"/>
-              </a:rPr>
-              <a:t>Graph learns from every resolved ticket</a:t>
+              <a:t>Targets are assumptions; baseline measured on non-diagnosed incidents.</a:t>
             </a:r>
           </a:p>
         </p:txBody>
@@ -7674,7 +8042,7 @@
                 </a:solidFill>
                 <a:latin typeface="Helvetica Neue"/>
               </a:rPr>
-              <a:t>FOR REVIEWER Q&amp;A</a:t>
+              <a:t>WHAT COULD GO WRONG · WHAT'S NEXT</a:t>
             </a:r>
           </a:p>
         </p:txBody>
@@ -7713,7 +8081,7 @@
                 </a:solidFill>
                 <a:latin typeface="Helvetica Neue"/>
               </a:rPr>
-              <a:t>Appendix: what's built vs. planned</a:t>
+              <a:t>Risks &amp; roadmap</a:t>
             </a:r>
           </a:p>
         </p:txBody>
@@ -7753,6 +8121,1320 @@
                 <a:latin typeface="Helvetica Neue"/>
               </a:rPr>
               <a:t>CodeAtlas AI  ·  13</a:t>
+            </a:r>
+          </a:p>
+        </p:txBody>
+      </p:sp>
+      <p:sp>
+        <p:nvSpPr>
+          <p:cNvPr id="5" name="TextBox 4"/>
+          <p:cNvSpPr txBox="1"/>
+          <p:nvPr/>
+        </p:nvSpPr>
+        <p:spPr>
+          <a:xfrm>
+            <a:off x="640080" y="1783080"/>
+            <a:ext cx="5486400" cy="365760"/>
+          </a:xfrm>
+          <a:prstGeom prst="rect">
+            <a:avLst/>
+          </a:prstGeom>
+          <a:noFill/>
+        </p:spPr>
+        <p:txBody>
+          <a:bodyPr wrap="square" lIns="0" rIns="0" tIns="0" bIns="0" anchor="t">
+            <a:spAutoFit/>
+          </a:bodyPr>
+          <a:lstStyle/>
+          <a:p>
+            <a:pPr algn="l">
+              <a:lnSpc>
+                <a:spcPct val="115000"/>
+              </a:lnSpc>
+            </a:pPr>
+            <a:r>
+              <a:rPr sz="1200" b="1">
+                <a:solidFill>
+                  <a:srgbClr val="FB7185"/>
+                </a:solidFill>
+                <a:latin typeface="Helvetica Neue"/>
+              </a:rPr>
+              <a:t>RISKS  →  MITIGATION</a:t>
+            </a:r>
+          </a:p>
+        </p:txBody>
+      </p:sp>
+      <p:sp>
+        <p:nvSpPr>
+          <p:cNvPr id="6" name="Rounded Rectangle 5"/>
+          <p:cNvSpPr/>
+          <p:nvPr/>
+        </p:nvSpPr>
+        <p:spPr>
+          <a:xfrm>
+            <a:off x="640080" y="2194560"/>
+            <a:ext cx="6035040" cy="713232"/>
+          </a:xfrm>
+          <a:prstGeom prst="roundRect">
+            <a:avLst>
+              <a:gd name="adj" fmla="val 6000"/>
+            </a:avLst>
+          </a:prstGeom>
+          <a:solidFill>
+            <a:srgbClr val="151E32"/>
+          </a:solidFill>
+          <a:ln w="12700">
+            <a:solidFill>
+              <a:srgbClr val="2A3650"/>
+            </a:solidFill>
+          </a:ln>
+          <a:effectLst/>
+        </p:spPr>
+        <p:style>
+          <a:lnRef idx="1">
+            <a:schemeClr val="accent1"/>
+          </a:lnRef>
+          <a:fillRef idx="3">
+            <a:schemeClr val="accent1"/>
+          </a:fillRef>
+          <a:effectRef idx="2">
+            <a:schemeClr val="accent1"/>
+          </a:effectRef>
+          <a:fontRef idx="minor">
+            <a:schemeClr val="lt1"/>
+          </a:fontRef>
+        </p:style>
+        <p:txBody>
+          <a:bodyPr rtlCol="0" anchor="ctr"/>
+          <a:lstStyle/>
+          <a:p>
+            <a:pPr algn="ctr"/>
+          </a:p>
+        </p:txBody>
+      </p:sp>
+      <p:sp>
+        <p:nvSpPr>
+          <p:cNvPr id="7" name="TextBox 6"/>
+          <p:cNvSpPr txBox="1"/>
+          <p:nvPr/>
+        </p:nvSpPr>
+        <p:spPr>
+          <a:xfrm>
+            <a:off x="868680" y="2286000"/>
+            <a:ext cx="5669280" cy="320040"/>
+          </a:xfrm>
+          <a:prstGeom prst="rect">
+            <a:avLst/>
+          </a:prstGeom>
+          <a:noFill/>
+        </p:spPr>
+        <p:txBody>
+          <a:bodyPr wrap="square" lIns="0" rIns="0" tIns="0" bIns="0" anchor="t">
+            <a:spAutoFit/>
+          </a:bodyPr>
+          <a:lstStyle/>
+          <a:p>
+            <a:pPr algn="l">
+              <a:lnSpc>
+                <a:spcPct val="115000"/>
+              </a:lnSpc>
+            </a:pPr>
+            <a:r>
+              <a:rPr sz="1400" b="1">
+                <a:solidFill>
+                  <a:srgbClr val="F8FAFC"/>
+                </a:solidFill>
+                <a:latin typeface="Helvetica Neue"/>
+              </a:rPr>
+              <a:t>Graph quality drives diagnosis quality</a:t>
+            </a:r>
+          </a:p>
+        </p:txBody>
+      </p:sp>
+      <p:sp>
+        <p:nvSpPr>
+          <p:cNvPr id="8" name="TextBox 7"/>
+          <p:cNvSpPr txBox="1"/>
+          <p:nvPr/>
+        </p:nvSpPr>
+        <p:spPr>
+          <a:xfrm>
+            <a:off x="868680" y="2587752"/>
+            <a:ext cx="5669280" cy="320040"/>
+          </a:xfrm>
+          <a:prstGeom prst="rect">
+            <a:avLst/>
+          </a:prstGeom>
+          <a:noFill/>
+        </p:spPr>
+        <p:txBody>
+          <a:bodyPr wrap="square" lIns="0" rIns="0" tIns="0" bIns="0" anchor="t">
+            <a:spAutoFit/>
+          </a:bodyPr>
+          <a:lstStyle/>
+          <a:p>
+            <a:pPr algn="l">
+              <a:lnSpc>
+                <a:spcPct val="115000"/>
+              </a:lnSpc>
+            </a:pPr>
+            <a:r>
+              <a:rPr sz="1200" b="0">
+                <a:solidFill>
+                  <a:srgbClr val="94A3B8"/>
+                </a:solidFill>
+                <a:latin typeface="Helvetica Neue"/>
+              </a:rPr>
+              <a:t>Knowledge Gap agent flags missing owners, runbooks and docs</a:t>
+            </a:r>
+          </a:p>
+        </p:txBody>
+      </p:sp>
+      <p:sp>
+        <p:nvSpPr>
+          <p:cNvPr id="9" name="Rounded Rectangle 8"/>
+          <p:cNvSpPr/>
+          <p:nvPr/>
+        </p:nvSpPr>
+        <p:spPr>
+          <a:xfrm>
+            <a:off x="640080" y="2999232"/>
+            <a:ext cx="6035040" cy="713232"/>
+          </a:xfrm>
+          <a:prstGeom prst="roundRect">
+            <a:avLst>
+              <a:gd name="adj" fmla="val 6000"/>
+            </a:avLst>
+          </a:prstGeom>
+          <a:solidFill>
+            <a:srgbClr val="151E32"/>
+          </a:solidFill>
+          <a:ln w="12700">
+            <a:solidFill>
+              <a:srgbClr val="2A3650"/>
+            </a:solidFill>
+          </a:ln>
+          <a:effectLst/>
+        </p:spPr>
+        <p:style>
+          <a:lnRef idx="1">
+            <a:schemeClr val="accent1"/>
+          </a:lnRef>
+          <a:fillRef idx="3">
+            <a:schemeClr val="accent1"/>
+          </a:fillRef>
+          <a:effectRef idx="2">
+            <a:schemeClr val="accent1"/>
+          </a:effectRef>
+          <a:fontRef idx="minor">
+            <a:schemeClr val="lt1"/>
+          </a:fontRef>
+        </p:style>
+        <p:txBody>
+          <a:bodyPr rtlCol="0" anchor="ctr"/>
+          <a:lstStyle/>
+          <a:p>
+            <a:pPr algn="ctr"/>
+          </a:p>
+        </p:txBody>
+      </p:sp>
+      <p:sp>
+        <p:nvSpPr>
+          <p:cNvPr id="10" name="TextBox 9"/>
+          <p:cNvSpPr txBox="1"/>
+          <p:nvPr/>
+        </p:nvSpPr>
+        <p:spPr>
+          <a:xfrm>
+            <a:off x="868680" y="3090672"/>
+            <a:ext cx="5669280" cy="320040"/>
+          </a:xfrm>
+          <a:prstGeom prst="rect">
+            <a:avLst/>
+          </a:prstGeom>
+          <a:noFill/>
+        </p:spPr>
+        <p:txBody>
+          <a:bodyPr wrap="square" lIns="0" rIns="0" tIns="0" bIns="0" anchor="t">
+            <a:spAutoFit/>
+          </a:bodyPr>
+          <a:lstStyle/>
+          <a:p>
+            <a:pPr algn="l">
+              <a:lnSpc>
+                <a:spcPct val="115000"/>
+              </a:lnSpc>
+            </a:pPr>
+            <a:r>
+              <a:rPr sz="1400" b="1">
+                <a:solidFill>
+                  <a:srgbClr val="F8FAFC"/>
+                </a:solidFill>
+                <a:latin typeface="Helvetica Neue"/>
+              </a:rPr>
+              <a:t>Trust &amp; privacy of ticket data</a:t>
+            </a:r>
+          </a:p>
+        </p:txBody>
+      </p:sp>
+      <p:sp>
+        <p:nvSpPr>
+          <p:cNvPr id="11" name="TextBox 10"/>
+          <p:cNvSpPr txBox="1"/>
+          <p:nvPr/>
+        </p:nvSpPr>
+        <p:spPr>
+          <a:xfrm>
+            <a:off x="868680" y="3392424"/>
+            <a:ext cx="5669280" cy="320040"/>
+          </a:xfrm>
+          <a:prstGeom prst="rect">
+            <a:avLst/>
+          </a:prstGeom>
+          <a:noFill/>
+        </p:spPr>
+        <p:txBody>
+          <a:bodyPr wrap="square" lIns="0" rIns="0" tIns="0" bIns="0" anchor="t">
+            <a:spAutoFit/>
+          </a:bodyPr>
+          <a:lstStyle/>
+          <a:p>
+            <a:pPr algn="l">
+              <a:lnSpc>
+                <a:spcPct val="115000"/>
+              </a:lnSpc>
+            </a:pPr>
+            <a:r>
+              <a:rPr sz="1200" b="0">
+                <a:solidFill>
+                  <a:srgbClr val="94A3B8"/>
+                </a:solidFill>
+                <a:latin typeface="Helvetica Neue"/>
+              </a:rPr>
+              <a:t>Private notes only; rule-based mode needs no LLM</a:t>
+            </a:r>
+          </a:p>
+        </p:txBody>
+      </p:sp>
+      <p:sp>
+        <p:nvSpPr>
+          <p:cNvPr id="12" name="Rounded Rectangle 11"/>
+          <p:cNvSpPr/>
+          <p:nvPr/>
+        </p:nvSpPr>
+        <p:spPr>
+          <a:xfrm>
+            <a:off x="640080" y="3803904"/>
+            <a:ext cx="6035040" cy="713232"/>
+          </a:xfrm>
+          <a:prstGeom prst="roundRect">
+            <a:avLst>
+              <a:gd name="adj" fmla="val 6000"/>
+            </a:avLst>
+          </a:prstGeom>
+          <a:solidFill>
+            <a:srgbClr val="151E32"/>
+          </a:solidFill>
+          <a:ln w="12700">
+            <a:solidFill>
+              <a:srgbClr val="2A3650"/>
+            </a:solidFill>
+          </a:ln>
+          <a:effectLst/>
+        </p:spPr>
+        <p:style>
+          <a:lnRef idx="1">
+            <a:schemeClr val="accent1"/>
+          </a:lnRef>
+          <a:fillRef idx="3">
+            <a:schemeClr val="accent1"/>
+          </a:fillRef>
+          <a:effectRef idx="2">
+            <a:schemeClr val="accent1"/>
+          </a:effectRef>
+          <a:fontRef idx="minor">
+            <a:schemeClr val="lt1"/>
+          </a:fontRef>
+        </p:style>
+        <p:txBody>
+          <a:bodyPr rtlCol="0" anchor="ctr"/>
+          <a:lstStyle/>
+          <a:p>
+            <a:pPr algn="ctr"/>
+          </a:p>
+        </p:txBody>
+      </p:sp>
+      <p:sp>
+        <p:nvSpPr>
+          <p:cNvPr id="13" name="TextBox 12"/>
+          <p:cNvSpPr txBox="1"/>
+          <p:nvPr/>
+        </p:nvSpPr>
+        <p:spPr>
+          <a:xfrm>
+            <a:off x="868680" y="3895344"/>
+            <a:ext cx="5669280" cy="320040"/>
+          </a:xfrm>
+          <a:prstGeom prst="rect">
+            <a:avLst/>
+          </a:prstGeom>
+          <a:noFill/>
+        </p:spPr>
+        <p:txBody>
+          <a:bodyPr wrap="square" lIns="0" rIns="0" tIns="0" bIns="0" anchor="t">
+            <a:spAutoFit/>
+          </a:bodyPr>
+          <a:lstStyle/>
+          <a:p>
+            <a:pPr algn="l">
+              <a:lnSpc>
+                <a:spcPct val="115000"/>
+              </a:lnSpc>
+            </a:pPr>
+            <a:r>
+              <a:rPr sz="1400" b="1">
+                <a:solidFill>
+                  <a:srgbClr val="F8FAFC"/>
+                </a:solidFill>
+                <a:latin typeface="Helvetica Neue"/>
+              </a:rPr>
+              <a:t>Willingness to pay beyond built-in AI</a:t>
+            </a:r>
+          </a:p>
+        </p:txBody>
+      </p:sp>
+      <p:sp>
+        <p:nvSpPr>
+          <p:cNvPr id="14" name="TextBox 13"/>
+          <p:cNvSpPr txBox="1"/>
+          <p:nvPr/>
+        </p:nvSpPr>
+        <p:spPr>
+          <a:xfrm>
+            <a:off x="868680" y="4197096"/>
+            <a:ext cx="5669280" cy="320040"/>
+          </a:xfrm>
+          <a:prstGeom prst="rect">
+            <a:avLst/>
+          </a:prstGeom>
+          <a:noFill/>
+        </p:spPr>
+        <p:txBody>
+          <a:bodyPr wrap="square" lIns="0" rIns="0" tIns="0" bIns="0" anchor="t">
+            <a:spAutoFit/>
+          </a:bodyPr>
+          <a:lstStyle/>
+          <a:p>
+            <a:pPr algn="l">
+              <a:lnSpc>
+                <a:spcPct val="115000"/>
+              </a:lnSpc>
+            </a:pPr>
+            <a:r>
+              <a:rPr sz="1200" b="0">
+                <a:solidFill>
+                  <a:srgbClr val="94A3B8"/>
+                </a:solidFill>
+                <a:latin typeface="Helvetica Neue"/>
+              </a:rPr>
+              <a:t>Validate with design partners before pricing is final</a:t>
+            </a:r>
+          </a:p>
+        </p:txBody>
+      </p:sp>
+      <p:sp>
+        <p:nvSpPr>
+          <p:cNvPr id="15" name="Rounded Rectangle 14"/>
+          <p:cNvSpPr/>
+          <p:nvPr/>
+        </p:nvSpPr>
+        <p:spPr>
+          <a:xfrm>
+            <a:off x="640080" y="4608576"/>
+            <a:ext cx="6035040" cy="713232"/>
+          </a:xfrm>
+          <a:prstGeom prst="roundRect">
+            <a:avLst>
+              <a:gd name="adj" fmla="val 6000"/>
+            </a:avLst>
+          </a:prstGeom>
+          <a:solidFill>
+            <a:srgbClr val="151E32"/>
+          </a:solidFill>
+          <a:ln w="12700">
+            <a:solidFill>
+              <a:srgbClr val="2A3650"/>
+            </a:solidFill>
+          </a:ln>
+          <a:effectLst/>
+        </p:spPr>
+        <p:style>
+          <a:lnRef idx="1">
+            <a:schemeClr val="accent1"/>
+          </a:lnRef>
+          <a:fillRef idx="3">
+            <a:schemeClr val="accent1"/>
+          </a:fillRef>
+          <a:effectRef idx="2">
+            <a:schemeClr val="accent1"/>
+          </a:effectRef>
+          <a:fontRef idx="minor">
+            <a:schemeClr val="lt1"/>
+          </a:fontRef>
+        </p:style>
+        <p:txBody>
+          <a:bodyPr rtlCol="0" anchor="ctr"/>
+          <a:lstStyle/>
+          <a:p>
+            <a:pPr algn="ctr"/>
+          </a:p>
+        </p:txBody>
+      </p:sp>
+      <p:sp>
+        <p:nvSpPr>
+          <p:cNvPr id="16" name="TextBox 15"/>
+          <p:cNvSpPr txBox="1"/>
+          <p:nvPr/>
+        </p:nvSpPr>
+        <p:spPr>
+          <a:xfrm>
+            <a:off x="868680" y="4700016"/>
+            <a:ext cx="5669280" cy="320040"/>
+          </a:xfrm>
+          <a:prstGeom prst="rect">
+            <a:avLst/>
+          </a:prstGeom>
+          <a:noFill/>
+        </p:spPr>
+        <p:txBody>
+          <a:bodyPr wrap="square" lIns="0" rIns="0" tIns="0" bIns="0" anchor="t">
+            <a:spAutoFit/>
+          </a:bodyPr>
+          <a:lstStyle/>
+          <a:p>
+            <a:pPr algn="l">
+              <a:lnSpc>
+                <a:spcPct val="115000"/>
+              </a:lnSpc>
+            </a:pPr>
+            <a:r>
+              <a:rPr sz="1400" b="1">
+                <a:solidFill>
+                  <a:srgbClr val="F8FAFC"/>
+                </a:solidFill>
+                <a:latin typeface="Helvetica Neue"/>
+              </a:rPr>
+              <a:t>Auto-routing sends a ticket to the wrong queue</a:t>
+            </a:r>
+          </a:p>
+        </p:txBody>
+      </p:sp>
+      <p:sp>
+        <p:nvSpPr>
+          <p:cNvPr id="17" name="TextBox 16"/>
+          <p:cNvSpPr txBox="1"/>
+          <p:nvPr/>
+        </p:nvSpPr>
+        <p:spPr>
+          <a:xfrm>
+            <a:off x="868680" y="5001768"/>
+            <a:ext cx="5669280" cy="320040"/>
+          </a:xfrm>
+          <a:prstGeom prst="rect">
+            <a:avLst/>
+          </a:prstGeom>
+          <a:noFill/>
+        </p:spPr>
+        <p:txBody>
+          <a:bodyPr wrap="square" lIns="0" rIns="0" tIns="0" bIns="0" anchor="t">
+            <a:spAutoFit/>
+          </a:bodyPr>
+          <a:lstStyle/>
+          <a:p>
+            <a:pPr algn="l">
+              <a:lnSpc>
+                <a:spcPct val="115000"/>
+              </a:lnSpc>
+            </a:pPr>
+            <a:r>
+              <a:rPr sz="1200" b="0">
+                <a:solidFill>
+                  <a:srgbClr val="94A3B8"/>
+                </a:solidFill>
+                <a:latin typeface="Helvetica Neue"/>
+              </a:rPr>
+              <a:t>Only assigns unassigned tickets; reason is written in the note</a:t>
+            </a:r>
+          </a:p>
+        </p:txBody>
+      </p:sp>
+      <p:sp>
+        <p:nvSpPr>
+          <p:cNvPr id="18" name="Rounded Rectangle 17"/>
+          <p:cNvSpPr/>
+          <p:nvPr/>
+        </p:nvSpPr>
+        <p:spPr>
+          <a:xfrm>
+            <a:off x="640080" y="5413248"/>
+            <a:ext cx="6035040" cy="713232"/>
+          </a:xfrm>
+          <a:prstGeom prst="roundRect">
+            <a:avLst>
+              <a:gd name="adj" fmla="val 6000"/>
+            </a:avLst>
+          </a:prstGeom>
+          <a:solidFill>
+            <a:srgbClr val="151E32"/>
+          </a:solidFill>
+          <a:ln w="12700">
+            <a:solidFill>
+              <a:srgbClr val="2A3650"/>
+            </a:solidFill>
+          </a:ln>
+          <a:effectLst/>
+        </p:spPr>
+        <p:style>
+          <a:lnRef idx="1">
+            <a:schemeClr val="accent1"/>
+          </a:lnRef>
+          <a:fillRef idx="3">
+            <a:schemeClr val="accent1"/>
+          </a:fillRef>
+          <a:effectRef idx="2">
+            <a:schemeClr val="accent1"/>
+          </a:effectRef>
+          <a:fontRef idx="minor">
+            <a:schemeClr val="lt1"/>
+          </a:fontRef>
+        </p:style>
+        <p:txBody>
+          <a:bodyPr rtlCol="0" anchor="ctr"/>
+          <a:lstStyle/>
+          <a:p>
+            <a:pPr algn="ctr"/>
+          </a:p>
+        </p:txBody>
+      </p:sp>
+      <p:sp>
+        <p:nvSpPr>
+          <p:cNvPr id="19" name="TextBox 18"/>
+          <p:cNvSpPr txBox="1"/>
+          <p:nvPr/>
+        </p:nvSpPr>
+        <p:spPr>
+          <a:xfrm>
+            <a:off x="868680" y="5504688"/>
+            <a:ext cx="5669280" cy="320040"/>
+          </a:xfrm>
+          <a:prstGeom prst="rect">
+            <a:avLst/>
+          </a:prstGeom>
+          <a:noFill/>
+        </p:spPr>
+        <p:txBody>
+          <a:bodyPr wrap="square" lIns="0" rIns="0" tIns="0" bIns="0" anchor="t">
+            <a:spAutoFit/>
+          </a:bodyPr>
+          <a:lstStyle/>
+          <a:p>
+            <a:pPr algn="l">
+              <a:lnSpc>
+                <a:spcPct val="115000"/>
+              </a:lnSpc>
+            </a:pPr>
+            <a:r>
+              <a:rPr sz="1400" b="1">
+                <a:solidFill>
+                  <a:srgbClr val="F8FAFC"/>
+                </a:solidFill>
+                <a:latin typeface="Helvetica Neue"/>
+              </a:rPr>
+              <a:t>API rate limits &amp; plan restrictions</a:t>
+            </a:r>
+          </a:p>
+        </p:txBody>
+      </p:sp>
+      <p:sp>
+        <p:nvSpPr>
+          <p:cNvPr id="20" name="TextBox 19"/>
+          <p:cNvSpPr txBox="1"/>
+          <p:nvPr/>
+        </p:nvSpPr>
+        <p:spPr>
+          <a:xfrm>
+            <a:off x="868680" y="5806440"/>
+            <a:ext cx="5669280" cy="320040"/>
+          </a:xfrm>
+          <a:prstGeom prst="rect">
+            <a:avLst/>
+          </a:prstGeom>
+          <a:noFill/>
+        </p:spPr>
+        <p:txBody>
+          <a:bodyPr wrap="square" lIns="0" rIns="0" tIns="0" bIns="0" anchor="t">
+            <a:spAutoFit/>
+          </a:bodyPr>
+          <a:lstStyle/>
+          <a:p>
+            <a:pPr algn="l">
+              <a:lnSpc>
+                <a:spcPct val="115000"/>
+              </a:lnSpc>
+            </a:pPr>
+            <a:r>
+              <a:rPr sz="1200" b="0">
+                <a:solidFill>
+                  <a:srgbClr val="94A3B8"/>
+                </a:solidFill>
+                <a:latin typeface="Helvetica Neue"/>
+              </a:rPr>
+              <a:t>Graceful degradation (e.g. CMDB needs higher plans)</a:t>
+            </a:r>
+          </a:p>
+        </p:txBody>
+      </p:sp>
+      <p:sp>
+        <p:nvSpPr>
+          <p:cNvPr id="21" name="TextBox 20"/>
+          <p:cNvSpPr txBox="1"/>
+          <p:nvPr/>
+        </p:nvSpPr>
+        <p:spPr>
+          <a:xfrm>
+            <a:off x="7040880" y="1783080"/>
+            <a:ext cx="4572000" cy="365760"/>
+          </a:xfrm>
+          <a:prstGeom prst="rect">
+            <a:avLst/>
+          </a:prstGeom>
+          <a:noFill/>
+        </p:spPr>
+        <p:txBody>
+          <a:bodyPr wrap="square" lIns="0" rIns="0" tIns="0" bIns="0" anchor="t">
+            <a:spAutoFit/>
+          </a:bodyPr>
+          <a:lstStyle/>
+          <a:p>
+            <a:pPr algn="l">
+              <a:lnSpc>
+                <a:spcPct val="115000"/>
+              </a:lnSpc>
+            </a:pPr>
+            <a:r>
+              <a:rPr sz="1200" b="1">
+                <a:solidFill>
+                  <a:srgbClr val="2DD4BF"/>
+                </a:solidFill>
+                <a:latin typeface="Helvetica Neue"/>
+              </a:rPr>
+              <a:t>PHASE 2 ROADMAP</a:t>
+            </a:r>
+          </a:p>
+        </p:txBody>
+      </p:sp>
+      <p:sp>
+        <p:nvSpPr>
+          <p:cNvPr id="22" name="Rounded Rectangle 21"/>
+          <p:cNvSpPr/>
+          <p:nvPr/>
+        </p:nvSpPr>
+        <p:spPr>
+          <a:xfrm>
+            <a:off x="7040880" y="2194560"/>
+            <a:ext cx="4480560" cy="3703320"/>
+          </a:xfrm>
+          <a:prstGeom prst="roundRect">
+            <a:avLst>
+              <a:gd name="adj" fmla="val 6000"/>
+            </a:avLst>
+          </a:prstGeom>
+          <a:solidFill>
+            <a:srgbClr val="151E32"/>
+          </a:solidFill>
+          <a:ln w="12700">
+            <a:solidFill>
+              <a:srgbClr val="2A3650"/>
+            </a:solidFill>
+          </a:ln>
+          <a:effectLst/>
+        </p:spPr>
+        <p:style>
+          <a:lnRef idx="1">
+            <a:schemeClr val="accent1"/>
+          </a:lnRef>
+          <a:fillRef idx="3">
+            <a:schemeClr val="accent1"/>
+          </a:fillRef>
+          <a:effectRef idx="2">
+            <a:schemeClr val="accent1"/>
+          </a:effectRef>
+          <a:fontRef idx="minor">
+            <a:schemeClr val="lt1"/>
+          </a:fontRef>
+        </p:style>
+        <p:txBody>
+          <a:bodyPr rtlCol="0" anchor="ctr"/>
+          <a:lstStyle/>
+          <a:p>
+            <a:pPr algn="ctr"/>
+          </a:p>
+        </p:txBody>
+      </p:sp>
+      <p:sp>
+        <p:nvSpPr>
+          <p:cNvPr id="23" name="Oval 22"/>
+          <p:cNvSpPr/>
+          <p:nvPr/>
+        </p:nvSpPr>
+        <p:spPr>
+          <a:xfrm>
+            <a:off x="7269480" y="2496312"/>
+            <a:ext cx="146304" cy="146304"/>
+          </a:xfrm>
+          <a:prstGeom prst="ellipse">
+            <a:avLst/>
+          </a:prstGeom>
+          <a:solidFill>
+            <a:srgbClr val="2DD4BF"/>
+          </a:solidFill>
+          <a:ln>
+            <a:noFill/>
+          </a:ln>
+          <a:effectLst/>
+        </p:spPr>
+        <p:style>
+          <a:lnRef idx="1">
+            <a:schemeClr val="accent1"/>
+          </a:lnRef>
+          <a:fillRef idx="3">
+            <a:schemeClr val="accent1"/>
+          </a:fillRef>
+          <a:effectRef idx="2">
+            <a:schemeClr val="accent1"/>
+          </a:effectRef>
+          <a:fontRef idx="minor">
+            <a:schemeClr val="lt1"/>
+          </a:fontRef>
+        </p:style>
+        <p:txBody>
+          <a:bodyPr rtlCol="0" anchor="ctr"/>
+          <a:lstStyle/>
+          <a:p>
+            <a:pPr algn="ctr"/>
+          </a:p>
+        </p:txBody>
+      </p:sp>
+      <p:sp>
+        <p:nvSpPr>
+          <p:cNvPr id="24" name="TextBox 23"/>
+          <p:cNvSpPr txBox="1"/>
+          <p:nvPr/>
+        </p:nvSpPr>
+        <p:spPr>
+          <a:xfrm>
+            <a:off x="7589520" y="2423160"/>
+            <a:ext cx="3749039" cy="640080"/>
+          </a:xfrm>
+          <a:prstGeom prst="rect">
+            <a:avLst/>
+          </a:prstGeom>
+          <a:noFill/>
+        </p:spPr>
+        <p:txBody>
+          <a:bodyPr wrap="square" lIns="0" rIns="0" tIns="0" bIns="0" anchor="t">
+            <a:spAutoFit/>
+          </a:bodyPr>
+          <a:lstStyle/>
+          <a:p>
+            <a:pPr algn="l">
+              <a:lnSpc>
+                <a:spcPct val="115000"/>
+              </a:lnSpc>
+            </a:pPr>
+            <a:r>
+              <a:rPr sz="1400" b="0">
+                <a:solidFill>
+                  <a:srgbClr val="F8FAFC"/>
+                </a:solidFill>
+                <a:latin typeface="Helvetica Neue"/>
+              </a:rPr>
+              <a:t>Live Jira · Confluence · Slack connectors</a:t>
+            </a:r>
+          </a:p>
+        </p:txBody>
+      </p:sp>
+      <p:sp>
+        <p:nvSpPr>
+          <p:cNvPr id="25" name="Oval 24"/>
+          <p:cNvSpPr/>
+          <p:nvPr/>
+        </p:nvSpPr>
+        <p:spPr>
+          <a:xfrm>
+            <a:off x="7269480" y="3182112"/>
+            <a:ext cx="146304" cy="146304"/>
+          </a:xfrm>
+          <a:prstGeom prst="ellipse">
+            <a:avLst/>
+          </a:prstGeom>
+          <a:solidFill>
+            <a:srgbClr val="2DD4BF"/>
+          </a:solidFill>
+          <a:ln>
+            <a:noFill/>
+          </a:ln>
+          <a:effectLst/>
+        </p:spPr>
+        <p:style>
+          <a:lnRef idx="1">
+            <a:schemeClr val="accent1"/>
+          </a:lnRef>
+          <a:fillRef idx="3">
+            <a:schemeClr val="accent1"/>
+          </a:fillRef>
+          <a:effectRef idx="2">
+            <a:schemeClr val="accent1"/>
+          </a:effectRef>
+          <a:fontRef idx="minor">
+            <a:schemeClr val="lt1"/>
+          </a:fontRef>
+        </p:style>
+        <p:txBody>
+          <a:bodyPr rtlCol="0" anchor="ctr"/>
+          <a:lstStyle/>
+          <a:p>
+            <a:pPr algn="ctr"/>
+          </a:p>
+        </p:txBody>
+      </p:sp>
+      <p:sp>
+        <p:nvSpPr>
+          <p:cNvPr id="26" name="TextBox 25"/>
+          <p:cNvSpPr txBox="1"/>
+          <p:nvPr/>
+        </p:nvSpPr>
+        <p:spPr>
+          <a:xfrm>
+            <a:off x="7589520" y="3108960"/>
+            <a:ext cx="3749039" cy="640080"/>
+          </a:xfrm>
+          <a:prstGeom prst="rect">
+            <a:avLst/>
+          </a:prstGeom>
+          <a:noFill/>
+        </p:spPr>
+        <p:txBody>
+          <a:bodyPr wrap="square" lIns="0" rIns="0" tIns="0" bIns="0" anchor="t">
+            <a:spAutoFit/>
+          </a:bodyPr>
+          <a:lstStyle/>
+          <a:p>
+            <a:pPr algn="l">
+              <a:lnSpc>
+                <a:spcPct val="115000"/>
+              </a:lnSpc>
+            </a:pPr>
+            <a:r>
+              <a:rPr sz="1400" b="0">
+                <a:solidFill>
+                  <a:srgbClr val="F8FAFC"/>
+                </a:solidFill>
+                <a:latin typeface="Helvetica Neue"/>
+              </a:rPr>
+              <a:t>Freshdesk: link customer tickets to engineering incidents</a:t>
+            </a:r>
+          </a:p>
+        </p:txBody>
+      </p:sp>
+      <p:sp>
+        <p:nvSpPr>
+          <p:cNvPr id="27" name="Oval 26"/>
+          <p:cNvSpPr/>
+          <p:nvPr/>
+        </p:nvSpPr>
+        <p:spPr>
+          <a:xfrm>
+            <a:off x="7269480" y="3867912"/>
+            <a:ext cx="146304" cy="146304"/>
+          </a:xfrm>
+          <a:prstGeom prst="ellipse">
+            <a:avLst/>
+          </a:prstGeom>
+          <a:solidFill>
+            <a:srgbClr val="2DD4BF"/>
+          </a:solidFill>
+          <a:ln>
+            <a:noFill/>
+          </a:ln>
+          <a:effectLst/>
+        </p:spPr>
+        <p:style>
+          <a:lnRef idx="1">
+            <a:schemeClr val="accent1"/>
+          </a:lnRef>
+          <a:fillRef idx="3">
+            <a:schemeClr val="accent1"/>
+          </a:fillRef>
+          <a:effectRef idx="2">
+            <a:schemeClr val="accent1"/>
+          </a:effectRef>
+          <a:fontRef idx="minor">
+            <a:schemeClr val="lt1"/>
+          </a:fontRef>
+        </p:style>
+        <p:txBody>
+          <a:bodyPr rtlCol="0" anchor="ctr"/>
+          <a:lstStyle/>
+          <a:p>
+            <a:pPr algn="ctr"/>
+          </a:p>
+        </p:txBody>
+      </p:sp>
+      <p:sp>
+        <p:nvSpPr>
+          <p:cNvPr id="28" name="TextBox 27"/>
+          <p:cNvSpPr txBox="1"/>
+          <p:nvPr/>
+        </p:nvSpPr>
+        <p:spPr>
+          <a:xfrm>
+            <a:off x="7589520" y="3794760"/>
+            <a:ext cx="3749039" cy="640080"/>
+          </a:xfrm>
+          <a:prstGeom prst="rect">
+            <a:avLst/>
+          </a:prstGeom>
+          <a:noFill/>
+        </p:spPr>
+        <p:txBody>
+          <a:bodyPr wrap="square" lIns="0" rIns="0" tIns="0" bIns="0" anchor="t">
+            <a:spAutoFit/>
+          </a:bodyPr>
+          <a:lstStyle/>
+          <a:p>
+            <a:pPr algn="l">
+              <a:lnSpc>
+                <a:spcPct val="115000"/>
+              </a:lnSpc>
+            </a:pPr>
+            <a:r>
+              <a:rPr sz="1400" b="0">
+                <a:solidFill>
+                  <a:srgbClr val="F8FAFC"/>
+                </a:solidFill>
+                <a:latin typeface="Helvetica Neue"/>
+              </a:rPr>
+              <a:t>Native FDK sidebar app on tickets &amp; changes</a:t>
+            </a:r>
+          </a:p>
+        </p:txBody>
+      </p:sp>
+      <p:sp>
+        <p:nvSpPr>
+          <p:cNvPr id="29" name="Oval 28"/>
+          <p:cNvSpPr/>
+          <p:nvPr/>
+        </p:nvSpPr>
+        <p:spPr>
+          <a:xfrm>
+            <a:off x="7269480" y="4553712"/>
+            <a:ext cx="146304" cy="146304"/>
+          </a:xfrm>
+          <a:prstGeom prst="ellipse">
+            <a:avLst/>
+          </a:prstGeom>
+          <a:solidFill>
+            <a:srgbClr val="2DD4BF"/>
+          </a:solidFill>
+          <a:ln>
+            <a:noFill/>
+          </a:ln>
+          <a:effectLst/>
+        </p:spPr>
+        <p:style>
+          <a:lnRef idx="1">
+            <a:schemeClr val="accent1"/>
+          </a:lnRef>
+          <a:fillRef idx="3">
+            <a:schemeClr val="accent1"/>
+          </a:fillRef>
+          <a:effectRef idx="2">
+            <a:schemeClr val="accent1"/>
+          </a:effectRef>
+          <a:fontRef idx="minor">
+            <a:schemeClr val="lt1"/>
+          </a:fontRef>
+        </p:style>
+        <p:txBody>
+          <a:bodyPr rtlCol="0" anchor="ctr"/>
+          <a:lstStyle/>
+          <a:p>
+            <a:pPr algn="ctr"/>
+          </a:p>
+        </p:txBody>
+      </p:sp>
+      <p:sp>
+        <p:nvSpPr>
+          <p:cNvPr id="30" name="TextBox 29"/>
+          <p:cNvSpPr txBox="1"/>
+          <p:nvPr/>
+        </p:nvSpPr>
+        <p:spPr>
+          <a:xfrm>
+            <a:off x="7589520" y="4480560"/>
+            <a:ext cx="3749039" cy="640080"/>
+          </a:xfrm>
+          <a:prstGeom prst="rect">
+            <a:avLst/>
+          </a:prstGeom>
+          <a:noFill/>
+        </p:spPr>
+        <p:txBody>
+          <a:bodyPr wrap="square" lIns="0" rIns="0" tIns="0" bIns="0" anchor="t">
+            <a:spAutoFit/>
+          </a:bodyPr>
+          <a:lstStyle/>
+          <a:p>
+            <a:pPr algn="l">
+              <a:lnSpc>
+                <a:spcPct val="115000"/>
+              </a:lnSpc>
+            </a:pPr>
+            <a:r>
+              <a:rPr sz="1400" b="0">
+                <a:solidFill>
+                  <a:srgbClr val="F8FAFC"/>
+                </a:solidFill>
+                <a:latin typeface="Helvetica Neue"/>
+              </a:rPr>
+              <a:t>CMDB sync · Problems from recurring incidents · on-call aware escalation</a:t>
+            </a:r>
+          </a:p>
+        </p:txBody>
+      </p:sp>
+      <p:sp>
+        <p:nvSpPr>
+          <p:cNvPr id="31" name="Oval 30"/>
+          <p:cNvSpPr/>
+          <p:nvPr/>
+        </p:nvSpPr>
+        <p:spPr>
+          <a:xfrm>
+            <a:off x="7269480" y="5239512"/>
+            <a:ext cx="146304" cy="146304"/>
+          </a:xfrm>
+          <a:prstGeom prst="ellipse">
+            <a:avLst/>
+          </a:prstGeom>
+          <a:solidFill>
+            <a:srgbClr val="2DD4BF"/>
+          </a:solidFill>
+          <a:ln>
+            <a:noFill/>
+          </a:ln>
+          <a:effectLst/>
+        </p:spPr>
+        <p:style>
+          <a:lnRef idx="1">
+            <a:schemeClr val="accent1"/>
+          </a:lnRef>
+          <a:fillRef idx="3">
+            <a:schemeClr val="accent1"/>
+          </a:fillRef>
+          <a:effectRef idx="2">
+            <a:schemeClr val="accent1"/>
+          </a:effectRef>
+          <a:fontRef idx="minor">
+            <a:schemeClr val="lt1"/>
+          </a:fontRef>
+        </p:style>
+        <p:txBody>
+          <a:bodyPr rtlCol="0" anchor="ctr"/>
+          <a:lstStyle/>
+          <a:p>
+            <a:pPr algn="ctr"/>
+          </a:p>
+        </p:txBody>
+      </p:sp>
+      <p:sp>
+        <p:nvSpPr>
+          <p:cNvPr id="32" name="TextBox 31"/>
+          <p:cNvSpPr txBox="1"/>
+          <p:nvPr/>
+        </p:nvSpPr>
+        <p:spPr>
+          <a:xfrm>
+            <a:off x="7589520" y="5166360"/>
+            <a:ext cx="3749039" cy="640080"/>
+          </a:xfrm>
+          <a:prstGeom prst="rect">
+            <a:avLst/>
+          </a:prstGeom>
+          <a:noFill/>
+        </p:spPr>
+        <p:txBody>
+          <a:bodyPr wrap="square" lIns="0" rIns="0" tIns="0" bIns="0" anchor="t">
+            <a:spAutoFit/>
+          </a:bodyPr>
+          <a:lstStyle/>
+          <a:p>
+            <a:pPr algn="l">
+              <a:lnSpc>
+                <a:spcPct val="115000"/>
+              </a:lnSpc>
+            </a:pPr>
+            <a:r>
+              <a:rPr sz="1400" b="0">
+                <a:solidFill>
+                  <a:srgbClr val="F8FAFC"/>
+                </a:solidFill>
+                <a:latin typeface="Helvetica Neue"/>
+              </a:rPr>
+              <a:t>Graph learns from every resolved ticket</a:t>
+            </a:r>
+          </a:p>
+        </p:txBody>
+      </p:sp>
+    </p:spTree>
+  </p:cSld>
+  <p:clrMapOvr>
+    <a:masterClrMapping/>
+  </p:clrMapOvr>
+</p:sld>
+</file>
+
+<file path=ppt/slides/slide14.xml><?xml version="1.0" encoding="utf-8"?>
+<p:sld xmlns:a="http://schemas.openxmlformats.org/drawingml/2006/main" xmlns:p="http://schemas.openxmlformats.org/presentationml/2006/main" xmlns:r="http://schemas.openxmlformats.org/officeDocument/2006/relationships">
+  <p:cSld>
+    <p:bg>
+      <p:bgPr>
+        <a:solidFill>
+          <a:srgbClr val="0B1120"/>
+        </a:solidFill>
+        <a:effectLst/>
+      </p:bgPr>
+    </p:bg>
+    <p:spTree>
+      <p:nvGrpSpPr>
+        <p:cNvPr id="1" name=""/>
+        <p:cNvGrpSpPr/>
+        <p:nvPr/>
+      </p:nvGrpSpPr>
+      <p:grpSpPr/>
+      <p:sp>
+        <p:nvSpPr>
+          <p:cNvPr id="2" name="TextBox 1"/>
+          <p:cNvSpPr txBox="1"/>
+          <p:nvPr/>
+        </p:nvSpPr>
+        <p:spPr>
+          <a:xfrm>
+            <a:off x="640080" y="457200"/>
+            <a:ext cx="9144000" cy="320040"/>
+          </a:xfrm>
+          <a:prstGeom prst="rect">
+            <a:avLst/>
+          </a:prstGeom>
+          <a:noFill/>
+        </p:spPr>
+        <p:txBody>
+          <a:bodyPr wrap="square" lIns="0" rIns="0" tIns="0" bIns="0" anchor="t">
+            <a:spAutoFit/>
+          </a:bodyPr>
+          <a:lstStyle/>
+          <a:p>
+            <a:pPr algn="l">
+              <a:lnSpc>
+                <a:spcPct val="115000"/>
+              </a:lnSpc>
+            </a:pPr>
+            <a:r>
+              <a:rPr sz="1200" b="1">
+                <a:solidFill>
+                  <a:srgbClr val="2DD4BF"/>
+                </a:solidFill>
+                <a:latin typeface="Helvetica Neue"/>
+              </a:rPr>
+              <a:t>FOR REVIEWER Q&amp;A</a:t>
+            </a:r>
+          </a:p>
+        </p:txBody>
+      </p:sp>
+      <p:sp>
+        <p:nvSpPr>
+          <p:cNvPr id="3" name="TextBox 2"/>
+          <p:cNvSpPr txBox="1"/>
+          <p:nvPr/>
+        </p:nvSpPr>
+        <p:spPr>
+          <a:xfrm>
+            <a:off x="640080" y="777240"/>
+            <a:ext cx="10972800" cy="822960"/>
+          </a:xfrm>
+          <a:prstGeom prst="rect">
+            <a:avLst/>
+          </a:prstGeom>
+          <a:noFill/>
+        </p:spPr>
+        <p:txBody>
+          <a:bodyPr wrap="square" lIns="0" rIns="0" tIns="0" bIns="0" anchor="t">
+            <a:spAutoFit/>
+          </a:bodyPr>
+          <a:lstStyle/>
+          <a:p>
+            <a:pPr algn="l">
+              <a:lnSpc>
+                <a:spcPct val="115000"/>
+              </a:lnSpc>
+            </a:pPr>
+            <a:r>
+              <a:rPr sz="3200" b="1">
+                <a:solidFill>
+                  <a:srgbClr val="F8FAFC"/>
+                </a:solidFill>
+                <a:latin typeface="Helvetica Neue"/>
+              </a:rPr>
+              <a:t>Appendix: what's built vs. planned</a:t>
+            </a:r>
+          </a:p>
+        </p:txBody>
+      </p:sp>
+      <p:sp>
+        <p:nvSpPr>
+          <p:cNvPr id="4" name="TextBox 3"/>
+          <p:cNvSpPr txBox="1"/>
+          <p:nvPr/>
+        </p:nvSpPr>
+        <p:spPr>
+          <a:xfrm>
+            <a:off x="9235440" y="6400800"/>
+            <a:ext cx="2377440" cy="274320"/>
+          </a:xfrm>
+          <a:prstGeom prst="rect">
+            <a:avLst/>
+          </a:prstGeom>
+          <a:noFill/>
+        </p:spPr>
+        <p:txBody>
+          <a:bodyPr wrap="square" lIns="0" rIns="0" tIns="0" bIns="0" anchor="t">
+            <a:spAutoFit/>
+          </a:bodyPr>
+          <a:lstStyle/>
+          <a:p>
+            <a:pPr algn="r">
+              <a:lnSpc>
+                <a:spcPct val="115000"/>
+              </a:lnSpc>
+            </a:pPr>
+            <a:r>
+              <a:rPr sz="1000" b="0">
+                <a:solidFill>
+                  <a:srgbClr val="94A3B8"/>
+                </a:solidFill>
+                <a:latin typeface="Helvetica Neue"/>
+              </a:rPr>
+              <a:t>CodeAtlas AI  ·  14</a:t>
             </a:r>
           </a:p>
         </p:txBody>
@@ -16785,7 +18467,7 @@
                 </a:solidFill>
                 <a:latin typeface="Helvetica Neue"/>
               </a:rPr>
-              <a:t>TARGET CUSTOMERS &amp; VALUE</a:t>
+              <a:t>TARGET CUSTOMERS &amp; USERS</a:t>
             </a:r>
           </a:p>
         </p:txBody>
@@ -16824,7 +18506,7 @@
                 </a:solidFill>
                 <a:latin typeface="Helvetica Neue"/>
               </a:rPr>
-              <a:t>Who it's for, and why they'll want it</a:t>
+              <a:t>Who it's for</a:t>
             </a:r>
           </a:p>
         </p:txBody>
@@ -16876,8 +18558,8 @@
         </p:nvSpPr>
         <p:spPr>
           <a:xfrm>
-            <a:off x="640080" y="1828800"/>
-            <a:ext cx="5303520" cy="2103120"/>
+            <a:off x="640080" y="1737360"/>
+            <a:ext cx="5303520" cy="1600200"/>
           </a:xfrm>
           <a:prstGeom prst="roundRect">
             <a:avLst>
@@ -16924,7 +18606,7 @@
         </p:nvSpPr>
         <p:spPr>
           <a:xfrm>
-            <a:off x="640080" y="2057400"/>
+            <a:off x="640080" y="1965960"/>
             <a:ext cx="54864" cy="457200"/>
           </a:xfrm>
           <a:prstGeom prst="rect">
@@ -16968,7 +18650,7 @@
         </p:nvSpPr>
         <p:spPr>
           <a:xfrm>
-            <a:off x="914400" y="2029968"/>
+            <a:off x="914400" y="1938528"/>
             <a:ext cx="4800600" cy="548640"/>
           </a:xfrm>
           <a:prstGeom prst="rect">
@@ -17007,8 +18689,8 @@
         </p:nvSpPr>
         <p:spPr>
           <a:xfrm>
-            <a:off x="914400" y="2560320"/>
-            <a:ext cx="4800600" cy="1234440"/>
+            <a:off x="914400" y="2468880"/>
+            <a:ext cx="4800600" cy="731520"/>
           </a:xfrm>
           <a:prstGeom prst="rect">
             <a:avLst/>
@@ -17027,7 +18709,7 @@
               </a:lnSpc>
             </a:pPr>
             <a:r>
-              <a:rPr sz="1500" b="0">
+              <a:rPr sz="1400" b="0">
                 <a:solidFill>
                   <a:srgbClr val="94A3B8"/>
                 </a:solidFill>
@@ -17046,8 +18728,8 @@
         </p:nvSpPr>
         <p:spPr>
           <a:xfrm>
-            <a:off x="6217920" y="1828800"/>
-            <a:ext cx="5303520" cy="2103120"/>
+            <a:off x="6217920" y="1737360"/>
+            <a:ext cx="5303520" cy="1600200"/>
           </a:xfrm>
           <a:prstGeom prst="roundRect">
             <a:avLst>
@@ -17094,7 +18776,7 @@
         </p:nvSpPr>
         <p:spPr>
           <a:xfrm>
-            <a:off x="6217920" y="2057400"/>
+            <a:off x="6217920" y="1965960"/>
             <a:ext cx="54864" cy="457200"/>
           </a:xfrm>
           <a:prstGeom prst="rect">
@@ -17138,7 +18820,7 @@
         </p:nvSpPr>
         <p:spPr>
           <a:xfrm>
-            <a:off x="6492240" y="2029968"/>
+            <a:off x="6492240" y="1938528"/>
             <a:ext cx="4800600" cy="548640"/>
           </a:xfrm>
           <a:prstGeom prst="rect">
@@ -17177,8 +18859,8 @@
         </p:nvSpPr>
         <p:spPr>
           <a:xfrm>
-            <a:off x="6492240" y="2560320"/>
-            <a:ext cx="4800600" cy="1234440"/>
+            <a:off x="6492240" y="2468880"/>
+            <a:ext cx="4800600" cy="731520"/>
           </a:xfrm>
           <a:prstGeom prst="rect">
             <a:avLst/>
@@ -17197,7 +18879,7 @@
               </a:lnSpc>
             </a:pPr>
             <a:r>
-              <a:rPr sz="1500" b="0">
+              <a:rPr sz="1400" b="0">
                 <a:solidFill>
                   <a:srgbClr val="94A3B8"/>
                 </a:solidFill>
@@ -17216,8 +18898,8 @@
         </p:nvSpPr>
         <p:spPr>
           <a:xfrm>
-            <a:off x="640080" y="4160520"/>
-            <a:ext cx="10881360" cy="320040"/>
+            <a:off x="640080" y="3566160"/>
+            <a:ext cx="10881360" cy="274320"/>
           </a:xfrm>
           <a:prstGeom prst="rect">
             <a:avLst/>
@@ -17236,13 +18918,13 @@
               </a:lnSpc>
             </a:pPr>
             <a:r>
-              <a:rPr sz="1200" b="1">
-                <a:solidFill>
-                  <a:srgbClr val="94A3B8"/>
-                </a:solidFill>
-                <a:latin typeface="Helvetica Neue"/>
-              </a:rPr>
-              <a:t>USERS:  service-desk agents  ·  on-call / SRE  ·  tech leads &amp; architects  ·  new engineers</a:t>
+              <a:rPr sz="1100" b="1">
+                <a:solidFill>
+                  <a:srgbClr val="2DD4BF"/>
+                </a:solidFill>
+                <a:latin typeface="Helvetica Neue"/>
+              </a:rPr>
+              <a:t>WHO USES IT, AND WHAT THEY GET</a:t>
             </a:r>
           </a:p>
         </p:txBody>
@@ -17255,8 +18937,844 @@
         </p:nvSpPr>
         <p:spPr>
           <a:xfrm>
-            <a:off x="640080" y="4663440"/>
-            <a:ext cx="10881360" cy="1463040"/>
+            <a:off x="640080" y="3840480"/>
+            <a:ext cx="2560320" cy="1600200"/>
+          </a:xfrm>
+          <a:prstGeom prst="roundRect">
+            <a:avLst>
+              <a:gd name="adj" fmla="val 6000"/>
+            </a:avLst>
+          </a:prstGeom>
+          <a:solidFill>
+            <a:srgbClr val="151E32"/>
+          </a:solidFill>
+          <a:ln w="12700">
+            <a:solidFill>
+              <a:srgbClr val="2A3650"/>
+            </a:solidFill>
+          </a:ln>
+          <a:effectLst/>
+        </p:spPr>
+        <p:style>
+          <a:lnRef idx="1">
+            <a:schemeClr val="accent1"/>
+          </a:lnRef>
+          <a:fillRef idx="3">
+            <a:schemeClr val="accent1"/>
+          </a:fillRef>
+          <a:effectRef idx="2">
+            <a:schemeClr val="accent1"/>
+          </a:effectRef>
+          <a:fontRef idx="minor">
+            <a:schemeClr val="lt1"/>
+          </a:fontRef>
+        </p:style>
+        <p:txBody>
+          <a:bodyPr rtlCol="0" anchor="ctr"/>
+          <a:lstStyle/>
+          <a:p>
+            <a:pPr algn="ctr"/>
+          </a:p>
+        </p:txBody>
+      </p:sp>
+      <p:sp>
+        <p:nvSpPr>
+          <p:cNvPr id="15" name="Rectangle 14"/>
+          <p:cNvSpPr/>
+          <p:nvPr/>
+        </p:nvSpPr>
+        <p:spPr>
+          <a:xfrm>
+            <a:off x="640080" y="3840480"/>
+            <a:ext cx="2560320" cy="54864"/>
+          </a:xfrm>
+          <a:prstGeom prst="rect">
+            <a:avLst/>
+          </a:prstGeom>
+          <a:solidFill>
+            <a:srgbClr val="2DD4BF"/>
+          </a:solidFill>
+          <a:ln>
+            <a:noFill/>
+          </a:ln>
+          <a:effectLst/>
+        </p:spPr>
+        <p:style>
+          <a:lnRef idx="1">
+            <a:schemeClr val="accent1"/>
+          </a:lnRef>
+          <a:fillRef idx="3">
+            <a:schemeClr val="accent1"/>
+          </a:fillRef>
+          <a:effectRef idx="2">
+            <a:schemeClr val="accent1"/>
+          </a:effectRef>
+          <a:fontRef idx="minor">
+            <a:schemeClr val="lt1"/>
+          </a:fontRef>
+        </p:style>
+        <p:txBody>
+          <a:bodyPr rtlCol="0" anchor="ctr"/>
+          <a:lstStyle/>
+          <a:p>
+            <a:pPr algn="ctr"/>
+          </a:p>
+        </p:txBody>
+      </p:sp>
+      <p:sp>
+        <p:nvSpPr>
+          <p:cNvPr id="16" name="TextBox 15"/>
+          <p:cNvSpPr txBox="1"/>
+          <p:nvPr/>
+        </p:nvSpPr>
+        <p:spPr>
+          <a:xfrm>
+            <a:off x="822960" y="4023360"/>
+            <a:ext cx="2194560" cy="274320"/>
+          </a:xfrm>
+          <a:prstGeom prst="rect">
+            <a:avLst/>
+          </a:prstGeom>
+          <a:noFill/>
+        </p:spPr>
+        <p:txBody>
+          <a:bodyPr wrap="square" lIns="0" rIns="0" tIns="0" bIns="0" anchor="t">
+            <a:spAutoFit/>
+          </a:bodyPr>
+          <a:lstStyle/>
+          <a:p>
+            <a:pPr algn="l">
+              <a:lnSpc>
+                <a:spcPct val="115000"/>
+              </a:lnSpc>
+            </a:pPr>
+            <a:r>
+              <a:rPr sz="1400" b="1">
+                <a:solidFill>
+                  <a:srgbClr val="F8FAFC"/>
+                </a:solidFill>
+                <a:latin typeface="Helvetica Neue"/>
+              </a:rPr>
+              <a:t>Service-desk agents</a:t>
+            </a:r>
+          </a:p>
+        </p:txBody>
+      </p:sp>
+      <p:sp>
+        <p:nvSpPr>
+          <p:cNvPr id="17" name="TextBox 16"/>
+          <p:cNvSpPr txBox="1"/>
+          <p:nvPr/>
+        </p:nvSpPr>
+        <p:spPr>
+          <a:xfrm>
+            <a:off x="822960" y="4343400"/>
+            <a:ext cx="2194560" cy="777240"/>
+          </a:xfrm>
+          <a:prstGeom prst="rect">
+            <a:avLst/>
+          </a:prstGeom>
+          <a:noFill/>
+        </p:spPr>
+        <p:txBody>
+          <a:bodyPr wrap="square" lIns="0" rIns="0" tIns="0" bIns="0" anchor="t">
+            <a:spAutoFit/>
+          </a:bodyPr>
+          <a:lstStyle/>
+          <a:p>
+            <a:pPr algn="l">
+              <a:lnSpc>
+                <a:spcPct val="110000"/>
+              </a:lnSpc>
+            </a:pPr>
+            <a:r>
+              <a:rPr sz="1100" b="0">
+                <a:solidFill>
+                  <a:srgbClr val="94A3B8"/>
+                </a:solidFill>
+                <a:latin typeface="Helvetica Neue"/>
+              </a:rPr>
+              <a:t>Tickets arrive diagnosed and already in the right group, with no guessing which team owns it.</a:t>
+            </a:r>
+          </a:p>
+        </p:txBody>
+      </p:sp>
+      <p:sp>
+        <p:nvSpPr>
+          <p:cNvPr id="18" name="TextBox 17"/>
+          <p:cNvSpPr txBox="1"/>
+          <p:nvPr/>
+        </p:nvSpPr>
+        <p:spPr>
+          <a:xfrm>
+            <a:off x="822960" y="5120640"/>
+            <a:ext cx="2194560" cy="228600"/>
+          </a:xfrm>
+          <a:prstGeom prst="rect">
+            <a:avLst/>
+          </a:prstGeom>
+          <a:noFill/>
+        </p:spPr>
+        <p:txBody>
+          <a:bodyPr wrap="square" lIns="0" rIns="0" tIns="0" bIns="0" anchor="t">
+            <a:spAutoFit/>
+          </a:bodyPr>
+          <a:lstStyle/>
+          <a:p>
+            <a:pPr algn="l">
+              <a:lnSpc>
+                <a:spcPct val="115000"/>
+              </a:lnSpc>
+            </a:pPr>
+            <a:r>
+              <a:rPr sz="1000" b="1">
+                <a:solidFill>
+                  <a:srgbClr val="2DD4BF"/>
+                </a:solidFill>
+                <a:latin typeface="Helvetica Neue"/>
+              </a:rPr>
+              <a:t>Ticket note + auto-routing</a:t>
+            </a:r>
+          </a:p>
+        </p:txBody>
+      </p:sp>
+      <p:sp>
+        <p:nvSpPr>
+          <p:cNvPr id="19" name="Rounded Rectangle 18"/>
+          <p:cNvSpPr/>
+          <p:nvPr/>
+        </p:nvSpPr>
+        <p:spPr>
+          <a:xfrm>
+            <a:off x="3413455" y="3840480"/>
+            <a:ext cx="2560320" cy="1600200"/>
+          </a:xfrm>
+          <a:prstGeom prst="roundRect">
+            <a:avLst>
+              <a:gd name="adj" fmla="val 6000"/>
+            </a:avLst>
+          </a:prstGeom>
+          <a:solidFill>
+            <a:srgbClr val="151E32"/>
+          </a:solidFill>
+          <a:ln w="12700">
+            <a:solidFill>
+              <a:srgbClr val="2A3650"/>
+            </a:solidFill>
+          </a:ln>
+          <a:effectLst/>
+        </p:spPr>
+        <p:style>
+          <a:lnRef idx="1">
+            <a:schemeClr val="accent1"/>
+          </a:lnRef>
+          <a:fillRef idx="3">
+            <a:schemeClr val="accent1"/>
+          </a:fillRef>
+          <a:effectRef idx="2">
+            <a:schemeClr val="accent1"/>
+          </a:effectRef>
+          <a:fontRef idx="minor">
+            <a:schemeClr val="lt1"/>
+          </a:fontRef>
+        </p:style>
+        <p:txBody>
+          <a:bodyPr rtlCol="0" anchor="ctr"/>
+          <a:lstStyle/>
+          <a:p>
+            <a:pPr algn="ctr"/>
+          </a:p>
+        </p:txBody>
+      </p:sp>
+      <p:sp>
+        <p:nvSpPr>
+          <p:cNvPr id="20" name="Rectangle 19"/>
+          <p:cNvSpPr/>
+          <p:nvPr/>
+        </p:nvSpPr>
+        <p:spPr>
+          <a:xfrm>
+            <a:off x="3413455" y="3840480"/>
+            <a:ext cx="2560320" cy="54864"/>
+          </a:xfrm>
+          <a:prstGeom prst="rect">
+            <a:avLst/>
+          </a:prstGeom>
+          <a:solidFill>
+            <a:srgbClr val="FB7185"/>
+          </a:solidFill>
+          <a:ln>
+            <a:noFill/>
+          </a:ln>
+          <a:effectLst/>
+        </p:spPr>
+        <p:style>
+          <a:lnRef idx="1">
+            <a:schemeClr val="accent1"/>
+          </a:lnRef>
+          <a:fillRef idx="3">
+            <a:schemeClr val="accent1"/>
+          </a:fillRef>
+          <a:effectRef idx="2">
+            <a:schemeClr val="accent1"/>
+          </a:effectRef>
+          <a:fontRef idx="minor">
+            <a:schemeClr val="lt1"/>
+          </a:fontRef>
+        </p:style>
+        <p:txBody>
+          <a:bodyPr rtlCol="0" anchor="ctr"/>
+          <a:lstStyle/>
+          <a:p>
+            <a:pPr algn="ctr"/>
+          </a:p>
+        </p:txBody>
+      </p:sp>
+      <p:sp>
+        <p:nvSpPr>
+          <p:cNvPr id="21" name="TextBox 20"/>
+          <p:cNvSpPr txBox="1"/>
+          <p:nvPr/>
+        </p:nvSpPr>
+        <p:spPr>
+          <a:xfrm>
+            <a:off x="3596335" y="4023360"/>
+            <a:ext cx="2194560" cy="274320"/>
+          </a:xfrm>
+          <a:prstGeom prst="rect">
+            <a:avLst/>
+          </a:prstGeom>
+          <a:noFill/>
+        </p:spPr>
+        <p:txBody>
+          <a:bodyPr wrap="square" lIns="0" rIns="0" tIns="0" bIns="0" anchor="t">
+            <a:spAutoFit/>
+          </a:bodyPr>
+          <a:lstStyle/>
+          <a:p>
+            <a:pPr algn="l">
+              <a:lnSpc>
+                <a:spcPct val="115000"/>
+              </a:lnSpc>
+            </a:pPr>
+            <a:r>
+              <a:rPr sz="1400" b="1">
+                <a:solidFill>
+                  <a:srgbClr val="F8FAFC"/>
+                </a:solidFill>
+                <a:latin typeface="Helvetica Neue"/>
+              </a:rPr>
+              <a:t>On-call / SRE</a:t>
+            </a:r>
+          </a:p>
+        </p:txBody>
+      </p:sp>
+      <p:sp>
+        <p:nvSpPr>
+          <p:cNvPr id="22" name="TextBox 21"/>
+          <p:cNvSpPr txBox="1"/>
+          <p:nvPr/>
+        </p:nvSpPr>
+        <p:spPr>
+          <a:xfrm>
+            <a:off x="3596335" y="4343400"/>
+            <a:ext cx="2194560" cy="777240"/>
+          </a:xfrm>
+          <a:prstGeom prst="rect">
+            <a:avLst/>
+          </a:prstGeom>
+          <a:noFill/>
+        </p:spPr>
+        <p:txBody>
+          <a:bodyPr wrap="square" lIns="0" rIns="0" tIns="0" bIns="0" anchor="t">
+            <a:spAutoFit/>
+          </a:bodyPr>
+          <a:lstStyle/>
+          <a:p>
+            <a:pPr algn="l">
+              <a:lnSpc>
+                <a:spcPct val="110000"/>
+              </a:lnSpc>
+            </a:pPr>
+            <a:r>
+              <a:rPr sz="1100" b="0">
+                <a:solidFill>
+                  <a:srgbClr val="94A3B8"/>
+                </a:solidFill>
+                <a:latin typeface="Helvetica Neue"/>
+              </a:rPr>
+              <a:t>Suspected cause, the recent commit or config change behind it, past incidents, runbook, who to call.</a:t>
+            </a:r>
+          </a:p>
+        </p:txBody>
+      </p:sp>
+      <p:sp>
+        <p:nvSpPr>
+          <p:cNvPr id="23" name="TextBox 22"/>
+          <p:cNvSpPr txBox="1"/>
+          <p:nvPr/>
+        </p:nvSpPr>
+        <p:spPr>
+          <a:xfrm>
+            <a:off x="3596335" y="5120640"/>
+            <a:ext cx="2194560" cy="228600"/>
+          </a:xfrm>
+          <a:prstGeom prst="rect">
+            <a:avLst/>
+          </a:prstGeom>
+          <a:noFill/>
+        </p:spPr>
+        <p:txBody>
+          <a:bodyPr wrap="square" lIns="0" rIns="0" tIns="0" bIns="0" anchor="t">
+            <a:spAutoFit/>
+          </a:bodyPr>
+          <a:lstStyle/>
+          <a:p>
+            <a:pPr algn="l">
+              <a:lnSpc>
+                <a:spcPct val="115000"/>
+              </a:lnSpc>
+            </a:pPr>
+            <a:r>
+              <a:rPr sz="1000" b="1">
+                <a:solidFill>
+                  <a:srgbClr val="FB7185"/>
+                </a:solidFill>
+                <a:latin typeface="Helvetica Neue"/>
+              </a:rPr>
+              <a:t>Ticket note · Incident Room</a:t>
+            </a:r>
+          </a:p>
+        </p:txBody>
+      </p:sp>
+      <p:sp>
+        <p:nvSpPr>
+          <p:cNvPr id="24" name="Rounded Rectangle 23"/>
+          <p:cNvSpPr/>
+          <p:nvPr/>
+        </p:nvSpPr>
+        <p:spPr>
+          <a:xfrm>
+            <a:off x="6186830" y="3840480"/>
+            <a:ext cx="2560320" cy="1600200"/>
+          </a:xfrm>
+          <a:prstGeom prst="roundRect">
+            <a:avLst>
+              <a:gd name="adj" fmla="val 6000"/>
+            </a:avLst>
+          </a:prstGeom>
+          <a:solidFill>
+            <a:srgbClr val="151E32"/>
+          </a:solidFill>
+          <a:ln w="12700">
+            <a:solidFill>
+              <a:srgbClr val="2A3650"/>
+            </a:solidFill>
+          </a:ln>
+          <a:effectLst/>
+        </p:spPr>
+        <p:style>
+          <a:lnRef idx="1">
+            <a:schemeClr val="accent1"/>
+          </a:lnRef>
+          <a:fillRef idx="3">
+            <a:schemeClr val="accent1"/>
+          </a:fillRef>
+          <a:effectRef idx="2">
+            <a:schemeClr val="accent1"/>
+          </a:effectRef>
+          <a:fontRef idx="minor">
+            <a:schemeClr val="lt1"/>
+          </a:fontRef>
+        </p:style>
+        <p:txBody>
+          <a:bodyPr rtlCol="0" anchor="ctr"/>
+          <a:lstStyle/>
+          <a:p>
+            <a:pPr algn="ctr"/>
+          </a:p>
+        </p:txBody>
+      </p:sp>
+      <p:sp>
+        <p:nvSpPr>
+          <p:cNvPr id="25" name="Rectangle 24"/>
+          <p:cNvSpPr/>
+          <p:nvPr/>
+        </p:nvSpPr>
+        <p:spPr>
+          <a:xfrm>
+            <a:off x="6186830" y="3840480"/>
+            <a:ext cx="2560320" cy="54864"/>
+          </a:xfrm>
+          <a:prstGeom prst="rect">
+            <a:avLst/>
+          </a:prstGeom>
+          <a:solidFill>
+            <a:srgbClr val="FBBF24"/>
+          </a:solidFill>
+          <a:ln>
+            <a:noFill/>
+          </a:ln>
+          <a:effectLst/>
+        </p:spPr>
+        <p:style>
+          <a:lnRef idx="1">
+            <a:schemeClr val="accent1"/>
+          </a:lnRef>
+          <a:fillRef idx="3">
+            <a:schemeClr val="accent1"/>
+          </a:fillRef>
+          <a:effectRef idx="2">
+            <a:schemeClr val="accent1"/>
+          </a:effectRef>
+          <a:fontRef idx="minor">
+            <a:schemeClr val="lt1"/>
+          </a:fontRef>
+        </p:style>
+        <p:txBody>
+          <a:bodyPr rtlCol="0" anchor="ctr"/>
+          <a:lstStyle/>
+          <a:p>
+            <a:pPr algn="ctr"/>
+          </a:p>
+        </p:txBody>
+      </p:sp>
+      <p:sp>
+        <p:nvSpPr>
+          <p:cNvPr id="26" name="TextBox 25"/>
+          <p:cNvSpPr txBox="1"/>
+          <p:nvPr/>
+        </p:nvSpPr>
+        <p:spPr>
+          <a:xfrm>
+            <a:off x="6369710" y="4023360"/>
+            <a:ext cx="2194560" cy="274320"/>
+          </a:xfrm>
+          <a:prstGeom prst="rect">
+            <a:avLst/>
+          </a:prstGeom>
+          <a:noFill/>
+        </p:spPr>
+        <p:txBody>
+          <a:bodyPr wrap="square" lIns="0" rIns="0" tIns="0" bIns="0" anchor="t">
+            <a:spAutoFit/>
+          </a:bodyPr>
+          <a:lstStyle/>
+          <a:p>
+            <a:pPr algn="l">
+              <a:lnSpc>
+                <a:spcPct val="115000"/>
+              </a:lnSpc>
+            </a:pPr>
+            <a:r>
+              <a:rPr sz="1400" b="1">
+                <a:solidFill>
+                  <a:srgbClr val="F8FAFC"/>
+                </a:solidFill>
+                <a:latin typeface="Helvetica Neue"/>
+              </a:rPr>
+              <a:t>Change managers / CAB</a:t>
+            </a:r>
+          </a:p>
+        </p:txBody>
+      </p:sp>
+      <p:sp>
+        <p:nvSpPr>
+          <p:cNvPr id="27" name="TextBox 26"/>
+          <p:cNvSpPr txBox="1"/>
+          <p:nvPr/>
+        </p:nvSpPr>
+        <p:spPr>
+          <a:xfrm>
+            <a:off x="6369710" y="4343400"/>
+            <a:ext cx="2194560" cy="777240"/>
+          </a:xfrm>
+          <a:prstGeom prst="rect">
+            <a:avLst/>
+          </a:prstGeom>
+          <a:noFill/>
+        </p:spPr>
+        <p:txBody>
+          <a:bodyPr wrap="square" lIns="0" rIns="0" tIns="0" bIns="0" anchor="t">
+            <a:spAutoFit/>
+          </a:bodyPr>
+          <a:lstStyle/>
+          <a:p>
+            <a:pPr algn="l">
+              <a:lnSpc>
+                <a:spcPct val="110000"/>
+              </a:lnSpc>
+            </a:pPr>
+            <a:r>
+              <a:rPr sz="1100" b="0">
+                <a:solidFill>
+                  <a:srgbClr val="94A3B8"/>
+                </a:solidFill>
+                <a:latin typeface="Helvetica Neue"/>
+              </a:rPr>
+              <a:t>Blast radius, risk and suggested reviewers on every new change, before it is approved.</a:t>
+            </a:r>
+          </a:p>
+        </p:txBody>
+      </p:sp>
+      <p:sp>
+        <p:nvSpPr>
+          <p:cNvPr id="28" name="TextBox 27"/>
+          <p:cNvSpPr txBox="1"/>
+          <p:nvPr/>
+        </p:nvSpPr>
+        <p:spPr>
+          <a:xfrm>
+            <a:off x="6369710" y="5120640"/>
+            <a:ext cx="2194560" cy="228600"/>
+          </a:xfrm>
+          <a:prstGeom prst="rect">
+            <a:avLst/>
+          </a:prstGeom>
+          <a:noFill/>
+        </p:spPr>
+        <p:txBody>
+          <a:bodyPr wrap="square" lIns="0" rIns="0" tIns="0" bIns="0" anchor="t">
+            <a:spAutoFit/>
+          </a:bodyPr>
+          <a:lstStyle/>
+          <a:p>
+            <a:pPr algn="l">
+              <a:lnSpc>
+                <a:spcPct val="115000"/>
+              </a:lnSpc>
+            </a:pPr>
+            <a:r>
+              <a:rPr sz="1000" b="1">
+                <a:solidFill>
+                  <a:srgbClr val="FBBF24"/>
+                </a:solidFill>
+                <a:latin typeface="Helvetica Neue"/>
+              </a:rPr>
+              <a:t>Change note · Knowledge Graph</a:t>
+            </a:r>
+          </a:p>
+        </p:txBody>
+      </p:sp>
+      <p:sp>
+        <p:nvSpPr>
+          <p:cNvPr id="29" name="Rounded Rectangle 28"/>
+          <p:cNvSpPr/>
+          <p:nvPr/>
+        </p:nvSpPr>
+        <p:spPr>
+          <a:xfrm>
+            <a:off x="8960205" y="3840480"/>
+            <a:ext cx="2560320" cy="1600200"/>
+          </a:xfrm>
+          <a:prstGeom prst="roundRect">
+            <a:avLst>
+              <a:gd name="adj" fmla="val 6000"/>
+            </a:avLst>
+          </a:prstGeom>
+          <a:solidFill>
+            <a:srgbClr val="151E32"/>
+          </a:solidFill>
+          <a:ln w="12700">
+            <a:solidFill>
+              <a:srgbClr val="2A3650"/>
+            </a:solidFill>
+          </a:ln>
+          <a:effectLst/>
+        </p:spPr>
+        <p:style>
+          <a:lnRef idx="1">
+            <a:schemeClr val="accent1"/>
+          </a:lnRef>
+          <a:fillRef idx="3">
+            <a:schemeClr val="accent1"/>
+          </a:fillRef>
+          <a:effectRef idx="2">
+            <a:schemeClr val="accent1"/>
+          </a:effectRef>
+          <a:fontRef idx="minor">
+            <a:schemeClr val="lt1"/>
+          </a:fontRef>
+        </p:style>
+        <p:txBody>
+          <a:bodyPr rtlCol="0" anchor="ctr"/>
+          <a:lstStyle/>
+          <a:p>
+            <a:pPr algn="ctr"/>
+          </a:p>
+        </p:txBody>
+      </p:sp>
+      <p:sp>
+        <p:nvSpPr>
+          <p:cNvPr id="30" name="Rectangle 29"/>
+          <p:cNvSpPr/>
+          <p:nvPr/>
+        </p:nvSpPr>
+        <p:spPr>
+          <a:xfrm>
+            <a:off x="8960205" y="3840480"/>
+            <a:ext cx="2560320" cy="54864"/>
+          </a:xfrm>
+          <a:prstGeom prst="rect">
+            <a:avLst/>
+          </a:prstGeom>
+          <a:solidFill>
+            <a:srgbClr val="818CF8"/>
+          </a:solidFill>
+          <a:ln>
+            <a:noFill/>
+          </a:ln>
+          <a:effectLst/>
+        </p:spPr>
+        <p:style>
+          <a:lnRef idx="1">
+            <a:schemeClr val="accent1"/>
+          </a:lnRef>
+          <a:fillRef idx="3">
+            <a:schemeClr val="accent1"/>
+          </a:fillRef>
+          <a:effectRef idx="2">
+            <a:schemeClr val="accent1"/>
+          </a:effectRef>
+          <a:fontRef idx="minor">
+            <a:schemeClr val="lt1"/>
+          </a:fontRef>
+        </p:style>
+        <p:txBody>
+          <a:bodyPr rtlCol="0" anchor="ctr"/>
+          <a:lstStyle/>
+          <a:p>
+            <a:pPr algn="ctr"/>
+          </a:p>
+        </p:txBody>
+      </p:sp>
+      <p:sp>
+        <p:nvSpPr>
+          <p:cNvPr id="31" name="TextBox 30"/>
+          <p:cNvSpPr txBox="1"/>
+          <p:nvPr/>
+        </p:nvSpPr>
+        <p:spPr>
+          <a:xfrm>
+            <a:off x="9143085" y="4023360"/>
+            <a:ext cx="2194560" cy="274320"/>
+          </a:xfrm>
+          <a:prstGeom prst="rect">
+            <a:avLst/>
+          </a:prstGeom>
+          <a:noFill/>
+        </p:spPr>
+        <p:txBody>
+          <a:bodyPr wrap="square" lIns="0" rIns="0" tIns="0" bIns="0" anchor="t">
+            <a:spAutoFit/>
+          </a:bodyPr>
+          <a:lstStyle/>
+          <a:p>
+            <a:pPr algn="l">
+              <a:lnSpc>
+                <a:spcPct val="115000"/>
+              </a:lnSpc>
+            </a:pPr>
+            <a:r>
+              <a:rPr sz="1400" b="1">
+                <a:solidFill>
+                  <a:srgbClr val="F8FAFC"/>
+                </a:solidFill>
+                <a:latin typeface="Helvetica Neue"/>
+              </a:rPr>
+              <a:t>Tech leads &amp; new hires</a:t>
+            </a:r>
+          </a:p>
+        </p:txBody>
+      </p:sp>
+      <p:sp>
+        <p:nvSpPr>
+          <p:cNvPr id="32" name="TextBox 31"/>
+          <p:cNvSpPr txBox="1"/>
+          <p:nvPr/>
+        </p:nvSpPr>
+        <p:spPr>
+          <a:xfrm>
+            <a:off x="9143085" y="4343400"/>
+            <a:ext cx="2194560" cy="777240"/>
+          </a:xfrm>
+          <a:prstGeom prst="rect">
+            <a:avLst/>
+          </a:prstGeom>
+          <a:noFill/>
+        </p:spPr>
+        <p:txBody>
+          <a:bodyPr wrap="square" lIns="0" rIns="0" tIns="0" bIns="0" anchor="t">
+            <a:spAutoFit/>
+          </a:bodyPr>
+          <a:lstStyle/>
+          <a:p>
+            <a:pPr algn="l">
+              <a:lnSpc>
+                <a:spcPct val="110000"/>
+              </a:lnSpc>
+            </a:pPr>
+            <a:r>
+              <a:rPr sz="1100" b="0">
+                <a:solidFill>
+                  <a:srgbClr val="94A3B8"/>
+                </a:solidFill>
+                <a:latin typeface="Helvetica Neue"/>
+              </a:rPr>
+              <a:t>Impact of a new requirement, owners and experts, and a map of how the system fits together.</a:t>
+            </a:r>
+          </a:p>
+        </p:txBody>
+      </p:sp>
+      <p:sp>
+        <p:nvSpPr>
+          <p:cNvPr id="33" name="TextBox 32"/>
+          <p:cNvSpPr txBox="1"/>
+          <p:nvPr/>
+        </p:nvSpPr>
+        <p:spPr>
+          <a:xfrm>
+            <a:off x="9143085" y="5120640"/>
+            <a:ext cx="2194560" cy="228600"/>
+          </a:xfrm>
+          <a:prstGeom prst="rect">
+            <a:avLst/>
+          </a:prstGeom>
+          <a:noFill/>
+        </p:spPr>
+        <p:txBody>
+          <a:bodyPr wrap="square" lIns="0" rIns="0" tIns="0" bIns="0" anchor="t">
+            <a:spAutoFit/>
+          </a:bodyPr>
+          <a:lstStyle/>
+          <a:p>
+            <a:pPr algn="l">
+              <a:lnSpc>
+                <a:spcPct val="115000"/>
+              </a:lnSpc>
+            </a:pPr>
+            <a:r>
+              <a:rPr sz="1000" b="1">
+                <a:solidFill>
+                  <a:srgbClr val="818CF8"/>
+                </a:solidFill>
+                <a:latin typeface="Helvetica Neue"/>
+              </a:rPr>
+              <a:t>Analyzer · Experts · Graph</a:t>
+            </a:r>
+          </a:p>
+        </p:txBody>
+      </p:sp>
+      <p:sp>
+        <p:nvSpPr>
+          <p:cNvPr id="34" name="Rounded Rectangle 33"/>
+          <p:cNvSpPr/>
+          <p:nvPr/>
+        </p:nvSpPr>
+        <p:spPr>
+          <a:xfrm>
+            <a:off x="640080" y="5596128"/>
+            <a:ext cx="10881360" cy="658368"/>
           </a:xfrm>
           <a:prstGeom prst="roundRect">
             <a:avLst>
@@ -17297,14 +19815,14 @@
       </p:sp>
       <p:sp>
         <p:nvSpPr>
-          <p:cNvPr id="15" name="TextBox 14"/>
-          <p:cNvSpPr txBox="1"/>
-          <p:nvPr/>
-        </p:nvSpPr>
-        <p:spPr>
-          <a:xfrm>
-            <a:off x="914400" y="4800600"/>
-            <a:ext cx="10332720" cy="1188720"/>
+          <p:cNvPr id="35" name="TextBox 34"/>
+          <p:cNvSpPr txBox="1"/>
+          <p:nvPr/>
+        </p:nvSpPr>
+        <p:spPr>
+          <a:xfrm>
+            <a:off x="914400" y="5641848"/>
+            <a:ext cx="10332720" cy="566928"/>
           </a:xfrm>
           <a:prstGeom prst="rect">
             <a:avLst/>
@@ -17323,13 +19841,13 @@
               </a:lnSpc>
             </a:pPr>
             <a:r>
-              <a:rPr sz="1800" b="0">
+              <a:rPr sz="1500" b="0">
                 <a:solidFill>
                   <a:srgbClr val="F8FAFC"/>
                 </a:solidFill>
                 <a:latin typeface="Helvetica Neue"/>
               </a:rPr>
-              <a:t>Every incident arrives already diagnosed: likely service, dependencies, past incidents, runbook and escalation path. Teams resolve faster, escalate to the right owner first time, and know what breaks before a change ships.</a:t>
+              <a:t>Every incident and change arrives with engineering context: faster resolution, the right owner first time, and no surprises when a change ships.</a:t>
             </a:r>
           </a:p>
         </p:txBody>
